--- a/bias_mitigation_plan.pptx
+++ b/bias_mitigation_plan.pptx
@@ -20,6 +20,14 @@
     <p:sldId id="265" r:id="rId11"/>
     <p:sldId id="266" r:id="rId12"/>
     <p:sldId id="267" r:id="rId13"/>
+    <p:sldId id="268" r:id="rId19"/>
+    <p:sldId id="269" r:id="rId20"/>
+    <p:sldId id="270" r:id="rId21"/>
+    <p:sldId id="271" r:id="rId22"/>
+    <p:sldId id="272" r:id="rId23"/>
+    <p:sldId id="273" r:id="rId24"/>
+    <p:sldId id="274" r:id="rId25"/>
+    <p:sldId id="275" r:id="rId26"/>
   </p:sldIdLst>
   <p:sldSz cx="12192000" cy="6858000"/>
   <p:notesSz cx="6858000" cy="12192000"/>
@@ -146,7 +154,7 @@
               <c:strCache>
                 <c:ptCount val="1"/>
                 <c:pt idx="0">
-                  <c:v>Predicted &gt;50K rate</c:v>
+                  <c:v>Actual rate in the data</c:v>
                 </c:pt>
               </c:strCache>
             </c:strRef>
@@ -216,10 +224,103 @@
                 <c:formatCode>General</c:formatCode>
                 <c:ptCount val="2"/>
                 <c:pt idx="0">
-                  <c:v>0.31</c:v>
+                  <c:v>0.3125</c:v>
                 </c:pt>
                 <c:pt idx="1">
-                  <c:v>0.11</c:v>
+                  <c:v>0.1136</c:v>
+                </c:pt>
+              </c:numCache>
+            </c:numRef>
+          </c:val>
+          <c:extLst>
+            <c:ext xmlns:c16="http://schemas.microsoft.com/office/drawing/2014/chart" uri="{C3380CC4-5D6E-409C-BE32-E72D297353CC}">
+              <c16:uniqueId val="{00000000-5D59-450D-AF6F-7F1F205983AF}"/>
+            </c:ext>
+          </c:extLst>
+        </c:ser>
+        <c:ser>
+          <c:idx val="1"/>
+          <c:order val="1"/>
+          <c:tx>
+            <c:strRef>
+              <c:f>Sheet1!$C$1</c:f>
+              <c:strCache>
+                <c:ptCount val="1"/>
+                <c:pt idx="0">
+                  <c:v>Baseline model's predicted rate</c:v>
+                </c:pt>
+              </c:strCache>
+            </c:strRef>
+          </c:tx>
+          <c:spPr>
+            <a:solidFill>
+              <a:srgbClr val="1E2761"/>
+            </a:solidFill>
+            <a:effectLst/>
+          </c:spPr>
+          <c:invertIfNegative val="0"/>
+          <c:dLbls>
+            <c:numFmt formatCode="0%" sourceLinked="0"/>
+            <c:spPr>
+              <a:noFill/>
+              <a:ln>
+                <a:noFill/>
+              </a:ln>
+              <a:effectLst/>
+            </c:spPr>
+            <c:txPr>
+              <a:bodyPr/>
+              <a:lstStyle/>
+              <a:p>
+                <a:pPr>
+                  <a:defRPr sz="1200" b="0" i="0" u="none" strike="noStrike">
+                    <a:solidFill>
+                      <a:srgbClr val="1E2761"/>
+                    </a:solidFill>
+                    <a:latin typeface="Arial"/>
+                  </a:defRPr>
+                </a:pPr>
+                <a:endParaRPr lang="en-US"/>
+              </a:p>
+            </c:txPr>
+            <c:showLegendKey val="0"/>
+            <c:showVal val="1"/>
+            <c:showCatName val="0"/>
+            <c:showSerName val="0"/>
+            <c:showPercent val="0"/>
+            <c:showBubbleSize val="0"/>
+            <c:showLeaderLines val="0"/>
+            <c:extLst>
+              <c:ext xmlns:c15="http://schemas.microsoft.com/office/drawing/2012/chart" uri="{CE6537A1-D6FC-4f65-9D91-7224C49458BB}">
+                <c15:showLeaderLines val="0"/>
+              </c:ext>
+            </c:extLst>
+          </c:dLbls>
+          <c:cat>
+            <c:strRef>
+              <c:f>Sheet1!$A$2:$A$3</c:f>
+              <c:strCache>
+                <c:ptCount val="2"/>
+                <c:pt idx="0">
+                  <c:v>Male</c:v>
+                </c:pt>
+                <c:pt idx="1">
+                  <c:v>Female</c:v>
+                </c:pt>
+              </c:strCache>
+            </c:strRef>
+          </c:cat>
+          <c:val>
+            <c:numRef>
+              <c:f>Sheet1!$C$2:$C$3</c:f>
+              <c:numCache>
+                <c:formatCode>General</c:formatCode>
+                <c:ptCount val="2"/>
+                <c:pt idx="0">
+                  <c:v>0.2668</c:v>
+                </c:pt>
+                <c:pt idx="1">
+                  <c:v>0.0801</c:v>
                 </c:pt>
               </c:numCache>
             </c:numRef>
@@ -342,6 +443,9 @@
         <a:effectLst/>
       </c:spPr>
     </c:plotArea>
+    <c:legend>
+      <c:overlay val="0"/>
+    </c:legend>
     <c:plotVisOnly val="1"/>
     <c:dispBlanksAs val="span"/>
     <c:showDLblsOverMax val="1"/>
@@ -4129,7 +4233,7 @@
                 <a:ea typeface="Cambria" pitchFamily="34" charset="-122"/>
                 <a:cs typeface="Cambria" pitchFamily="34" charset="-120"/>
               </a:rPr>
-              <a:t>AIF360</a:t>
+              <a:t>PyTorch</a:t>
             </a:r>
             <a:endParaRPr lang="en-US" sz="1500" dirty="0"/>
           </a:p>
@@ -4168,7 +4272,7 @@
                 <a:ea typeface="Calibri" pitchFamily="34" charset="-122"/>
                 <a:cs typeface="Calibri" pitchFamily="34" charset="-120"/>
               </a:rPr>
-              <a:t>Prejudice Remover &amp; Adversarial Debiasing implementations</a:t>
+              <a:t>Prejudice Remover and Adversarial Debiasing implemented from their papers — aif360 was rejected (TF1 chain; temp-file subprocess). Verified by degenerate-case tests.</a:t>
             </a:r>
             <a:endParaRPr lang="en-US" sz="1100" dirty="0"/>
           </a:p>
@@ -4326,7 +4430,7 @@
                 <a:ea typeface="Calibri" pitchFamily="34" charset="-122"/>
                 <a:cs typeface="Calibri" pitchFamily="34" charset="-120"/>
               </a:rPr>
-              <a:t>Base Decision Tree, train/test split, encoding</a:t>
+              <a:t>Decision tree and logistic regression, split, encoding</a:t>
             </a:r>
             <a:endParaRPr lang="en-US" sz="1100" dirty="0"/>
           </a:p>
@@ -4484,7 +4588,7 @@
                 <a:ea typeface="Calibri" pitchFamily="34" charset="-122"/>
                 <a:cs typeface="Calibri" pitchFamily="34" charset="-120"/>
               </a:rPr>
-              <a:t>Before/after feature-importance comparison (stretch goal)</a:t>
+              <a:t>Before/after attribution — stretch goal, completed. It refuted our own prediction.</a:t>
             </a:r>
             <a:endParaRPr lang="en-US" sz="1100" dirty="0"/>
           </a:p>
@@ -4556,7 +4660,7 @@
                 <a:ea typeface="Cambria" pitchFamily="34" charset="-122"/>
                 <a:cs typeface="Cambria" pitchFamily="34" charset="-120"/>
               </a:rPr>
-              <a:t>Definition of Done</a:t>
+              <a:t>Definition of Done — all three met</a:t>
             </a:r>
             <a:endParaRPr lang="en-US" sz="3000" dirty="0"/>
           </a:p>
@@ -4595,28 +4699,12 @@
                 <a:ea typeface="Calibri" pitchFamily="34" charset="-122"/>
                 <a:cs typeface="Calibri" pitchFamily="34" charset="-120"/>
               </a:rPr>
-              <a:t>Accuracy vs. fairness violation — conceptual Pareto frontier</a:t>
+              <a:t>Accuracy vs. demographic parity violation — measured</a:t>
             </a:r>
             <a:endParaRPr lang="en-US" sz="1250" dirty="0"/>
           </a:p>
         </p:txBody>
       </p:sp>
-      <p:graphicFrame>
-        <p:nvGraphicFramePr>
-          <p:cNvPr id="4" name="Chart 0"/>
-          <p:cNvGraphicFramePr/>
-          <p:nvPr/>
-        </p:nvGraphicFramePr>
-        <p:xfrm>
-          <a:off x="640080" y="1554480"/>
-          <a:ext cx="5577840" cy="2651760"/>
-        </p:xfrm>
-        <a:graphic>
-          <a:graphicData uri="http://schemas.openxmlformats.org/drawingml/2006/chart">
-            <c:chart xmlns:c="http://schemas.openxmlformats.org/drawingml/2006/chart" xmlns:r="http://schemas.openxmlformats.org/officeDocument/2006/relationships" r:id="rId3"/>
-          </a:graphicData>
-        </a:graphic>
-      </p:graphicFrame>
       <p:sp>
         <p:nvSpPr>
           <p:cNvPr id="5" name="Text 2"/>
@@ -4650,7 +4738,7 @@
                 <a:ea typeface="Calibri" pitchFamily="34" charset="-122"/>
                 <a:cs typeface="Calibri" pitchFamily="34" charset="-120"/>
               </a:rPr>
-              <a:t>Illustrative shape only — populated from the GridSearch sweep.</a:t>
+              <a:t>Real GridSearch sweep, 15 λ values. Open rings mark the non-dominated frontier; dominated points are shown too.</a:t>
             </a:r>
             <a:endParaRPr lang="en-US" sz="1050" dirty="0"/>
           </a:p>
@@ -4879,7 +4967,7 @@
                 <a:ea typeface="Cambria" pitchFamily="34" charset="-122"/>
                 <a:cs typeface="Cambria" pitchFamily="34" charset="-120"/>
               </a:rPr>
-              <a:t>Ablation questions to answer</a:t>
+              <a:t>The three ablation questions — answered</a:t>
             </a:r>
             <a:endParaRPr lang="en-US" sz="1500" dirty="0"/>
           </a:p>
@@ -4945,7 +5033,7 @@
                 <a:ea typeface="Calibri" pitchFamily="34" charset="-122"/>
                 <a:cs typeface="Calibri" pitchFamily="34" charset="-120"/>
               </a:rPr>
-              <a:t>Which method gets closest to zero bias for the smallest accuracy cost?</a:t>
+              <a:t>Closest to zero bias per accuracy point? Prejudice Remover (11.7 pts/pt) — but GridSearch reaches the lowest absolute gap.</a:t>
             </a:r>
             <a:endParaRPr lang="en-US" sz="1300" dirty="0"/>
           </a:p>
@@ -5011,7 +5099,7 @@
                 <a:ea typeface="Calibri" pitchFamily="34" charset="-122"/>
                 <a:cs typeface="Calibri" pitchFamily="34" charset="-120"/>
               </a:rPr>
-              <a:t>Which method is most stable across repeated runs?</a:t>
+              <a:t>Most stable? Adversarial Debiasing — the opposite of what we predicted. GridSearch is the least stable, by 6×.</a:t>
             </a:r>
             <a:endParaRPr lang="en-US" sz="1300" dirty="0"/>
           </a:p>
@@ -5077,9 +5165,6115 @@
                 <a:ea typeface="Calibri" pitchFamily="34" charset="-122"/>
                 <a:cs typeface="Calibri" pitchFamily="34" charset="-120"/>
               </a:rPr>
-              <a:t>Does the ranking change between Demographic Parity and Equalized Odds?</a:t>
+              <a:t>Does the ranking change by metric? It inverts. Four of five methods are worse than no mitigation on equalized odds.</a:t>
             </a:r>
             <a:endParaRPr lang="en-US" sz="1300" dirty="0"/>
+          </a:p>
+        </p:txBody>
+      </p:sp>
+      <p:pic>
+        <p:nvPicPr>
+          <p:cNvPr id="18" name="Picture 17" descr="pareto_demographic_parity.png"/>
+          <p:cNvPicPr>
+            <a:picLocks noChangeAspect="1"/>
+          </p:cNvPicPr>
+          <p:nvPr/>
+        </p:nvPicPr>
+        <p:blipFill>
+          <a:blip r:embed="rId5"/>
+          <a:stretch>
+            <a:fillRect/>
+          </a:stretch>
+        </p:blipFill>
+        <p:spPr>
+          <a:xfrm>
+            <a:off x="640080" y="1554480"/>
+            <a:ext cx="5577840" cy="3794663"/>
+          </a:xfrm>
+          <a:prstGeom prst="rect">
+            <a:avLst/>
+          </a:prstGeom>
+        </p:spPr>
+      </p:pic>
+    </p:spTree>
+  </p:cSld>
+  <p:clrMapOvr>
+    <a:masterClrMapping/>
+  </p:clrMapOvr>
+</p:sld>
+</file>
+
+<file path=ppt/slides/slide13.xml><?xml version="1.0" encoding="utf-8"?>
+<p:sld xmlns:a="http://schemas.openxmlformats.org/drawingml/2006/main" xmlns:p="http://schemas.openxmlformats.org/presentationml/2006/main" xmlns:r="http://schemas.openxmlformats.org/officeDocument/2006/relationships">
+  <p:cSld>
+    <p:spTree>
+      <p:nvGrpSpPr>
+        <p:cNvPr id="1" name=""/>
+        <p:cNvGrpSpPr/>
+        <p:nvPr/>
+      </p:nvGrpSpPr>
+      <p:grpSpPr/>
+      <p:sp>
+        <p:nvSpPr>
+          <p:cNvPr id="2" name="TextBox 1"/>
+          <p:cNvSpPr txBox="1"/>
+          <p:nvPr/>
+        </p:nvSpPr>
+        <p:spPr>
+          <a:xfrm>
+            <a:off x="640080" y="384048"/>
+            <a:ext cx="10881360" cy="640080"/>
+          </a:xfrm>
+          <a:prstGeom prst="rect">
+            <a:avLst/>
+          </a:prstGeom>
+          <a:noFill/>
+        </p:spPr>
+        <p:txBody>
+          <a:bodyPr wrap="square">
+            <a:spAutoFit/>
+          </a:bodyPr>
+          <a:lstStyle/>
+          <a:p>
+            <a:pPr algn="l">
+              <a:lnSpc>
+                <a:spcPct val="100000"/>
+              </a:lnSpc>
+            </a:pPr>
+            <a:r>
+              <a:rPr sz="2600" b="1">
+                <a:solidFill>
+                  <a:srgbClr val="1E2761"/>
+                </a:solidFill>
+                <a:latin typeface="Cambria"/>
+              </a:rPr>
+              <a:t>Result 1 — The Unmitigated Baseline</a:t>
+            </a:r>
+          </a:p>
+        </p:txBody>
+      </p:sp>
+      <p:sp>
+        <p:nvSpPr>
+          <p:cNvPr id="3" name="TextBox 2"/>
+          <p:cNvSpPr txBox="1"/>
+          <p:nvPr/>
+        </p:nvSpPr>
+        <p:spPr>
+          <a:xfrm>
+            <a:off x="640080" y="1033271"/>
+            <a:ext cx="10881360" cy="384048"/>
+          </a:xfrm>
+          <a:prstGeom prst="rect">
+            <a:avLst/>
+          </a:prstGeom>
+          <a:noFill/>
+        </p:spPr>
+        <p:txBody>
+          <a:bodyPr wrap="square">
+            <a:spAutoFit/>
+          </a:bodyPr>
+          <a:lstStyle/>
+          <a:p>
+            <a:pPr algn="l">
+              <a:lnSpc>
+                <a:spcPct val="100000"/>
+              </a:lnSpc>
+            </a:pPr>
+            <a:r>
+              <a:rPr sz="1350" b="0">
+                <a:solidFill>
+                  <a:srgbClr val="5A6270"/>
+                </a:solidFill>
+                <a:latin typeface="Calibri"/>
+              </a:rPr>
+              <a:t>5 random seeds, mean ± std. This is what there is to fix.</a:t>
+            </a:r>
+          </a:p>
+        </p:txBody>
+      </p:sp>
+      <p:graphicFrame>
+        <p:nvGraphicFramePr>
+          <p:cNvPr id="4" name="Table 3"/>
+          <p:cNvGraphicFramePr>
+            <a:graphicFrameLocks noGrp="1"/>
+          </p:cNvGraphicFramePr>
+          <p:nvPr/>
+        </p:nvGraphicFramePr>
+        <p:xfrm>
+          <a:off x="640080" y="1645920"/>
+          <a:ext cx="10881360" cy="1042416"/>
+        </p:xfrm>
+        <a:graphic>
+          <a:graphicData uri="http://schemas.openxmlformats.org/drawingml/2006/table">
+            <a:tbl>
+              <a:tblPr firstRow="1">
+                <a:tableStyleId>{5C22544A-7EE6-4342-B048-85BDC9FD1C3A}</a:tableStyleId>
+              </a:tblPr>
+              <a:tblGrid>
+                <a:gridCol w="2720340"/>
+                <a:gridCol w="1994916"/>
+                <a:gridCol w="1994916"/>
+                <a:gridCol w="1994916"/>
+                <a:gridCol w="2176272"/>
+              </a:tblGrid>
+              <a:tr h="384048">
+                <a:tc>
+                  <a:txBody>
+                    <a:bodyPr wrap="square"/>
+                    <a:lstStyle/>
+                    <a:p>
+                      <a:pPr algn="l"/>
+                      <a:r>
+                        <a:rPr sz="1100" b="1">
+                          <a:solidFill>
+                            <a:srgbClr val="FFFFFF"/>
+                          </a:solidFill>
+                          <a:latin typeface="Calibri"/>
+                        </a:rPr>
+                        <a:t>Base classifier</a:t>
+                      </a:r>
+                    </a:p>
+                  </a:txBody>
+                  <a:tcPr marL="91440" marR="73152" marT="18288" marB="18288">
+                    <a:solidFill>
+                      <a:srgbClr val="1E2761"/>
+                    </a:solidFill>
+                  </a:tcPr>
+                </a:tc>
+                <a:tc>
+                  <a:txBody>
+                    <a:bodyPr wrap="square"/>
+                    <a:lstStyle/>
+                    <a:p>
+                      <a:pPr algn="r"/>
+                      <a:r>
+                        <a:rPr sz="1100" b="1">
+                          <a:solidFill>
+                            <a:srgbClr val="FFFFFF"/>
+                          </a:solidFill>
+                          <a:latin typeface="Calibri"/>
+                        </a:rPr>
+                        <a:t>Accuracy</a:t>
+                      </a:r>
+                    </a:p>
+                  </a:txBody>
+                  <a:tcPr marL="91440" marR="73152" marT="18288" marB="18288">
+                    <a:solidFill>
+                      <a:srgbClr val="1E2761"/>
+                    </a:solidFill>
+                  </a:tcPr>
+                </a:tc>
+                <a:tc>
+                  <a:txBody>
+                    <a:bodyPr wrap="square"/>
+                    <a:lstStyle/>
+                    <a:p>
+                      <a:pPr algn="r"/>
+                      <a:r>
+                        <a:rPr sz="1100" b="1">
+                          <a:solidFill>
+                            <a:srgbClr val="FFFFFF"/>
+                          </a:solidFill>
+                          <a:latin typeface="Calibri"/>
+                        </a:rPr>
+                        <a:t>DP diff</a:t>
+                      </a:r>
+                    </a:p>
+                  </a:txBody>
+                  <a:tcPr marL="91440" marR="73152" marT="18288" marB="18288">
+                    <a:solidFill>
+                      <a:srgbClr val="1E2761"/>
+                    </a:solidFill>
+                  </a:tcPr>
+                </a:tc>
+                <a:tc>
+                  <a:txBody>
+                    <a:bodyPr wrap="square"/>
+                    <a:lstStyle/>
+                    <a:p>
+                      <a:pPr algn="r"/>
+                      <a:r>
+                        <a:rPr sz="1100" b="1">
+                          <a:solidFill>
+                            <a:srgbClr val="FFFFFF"/>
+                          </a:solidFill>
+                          <a:latin typeface="Calibri"/>
+                        </a:rPr>
+                        <a:t>EO diff</a:t>
+                      </a:r>
+                    </a:p>
+                  </a:txBody>
+                  <a:tcPr marL="91440" marR="73152" marT="18288" marB="18288">
+                    <a:solidFill>
+                      <a:srgbClr val="1E2761"/>
+                    </a:solidFill>
+                  </a:tcPr>
+                </a:tc>
+                <a:tc>
+                  <a:txBody>
+                    <a:bodyPr wrap="square"/>
+                    <a:lstStyle/>
+                    <a:p>
+                      <a:pPr algn="r"/>
+                      <a:r>
+                        <a:rPr sz="1100" b="1">
+                          <a:solidFill>
+                            <a:srgbClr val="FFFFFF"/>
+                          </a:solidFill>
+                          <a:latin typeface="Calibri"/>
+                        </a:rPr>
+                        <a:t>Disparate impact</a:t>
+                      </a:r>
+                    </a:p>
+                  </a:txBody>
+                  <a:tcPr marL="91440" marR="73152" marT="18288" marB="18288">
+                    <a:solidFill>
+                      <a:srgbClr val="1E2761"/>
+                    </a:solidFill>
+                  </a:tcPr>
+                </a:tc>
+              </a:tr>
+              <a:tr h="329184">
+                <a:tc>
+                  <a:txBody>
+                    <a:bodyPr wrap="square"/>
+                    <a:lstStyle/>
+                    <a:p>
+                      <a:pPr algn="l"/>
+                      <a:r>
+                        <a:rPr sz="1150" b="0">
+                          <a:solidFill>
+                            <a:srgbClr val="1B1B1F"/>
+                          </a:solidFill>
+                          <a:latin typeface="Calibri"/>
+                        </a:rPr>
+                        <a:t>Decision tree</a:t>
+                      </a:r>
+                    </a:p>
+                  </a:txBody>
+                  <a:tcPr marL="91440" marR="73152" marT="18288" marB="18288">
+                    <a:solidFill>
+                      <a:srgbClr val="FFFFFF"/>
+                    </a:solidFill>
+                  </a:tcPr>
+                </a:tc>
+                <a:tc>
+                  <a:txBody>
+                    <a:bodyPr wrap="square"/>
+                    <a:lstStyle/>
+                    <a:p>
+                      <a:pPr algn="r"/>
+                      <a:r>
+                        <a:rPr sz="1150" b="0">
+                          <a:solidFill>
+                            <a:srgbClr val="1B1B1F"/>
+                          </a:solidFill>
+                          <a:latin typeface="Calibri"/>
+                        </a:rPr>
+                        <a:t>0.8518</a:t>
+                      </a:r>
+                    </a:p>
+                  </a:txBody>
+                  <a:tcPr marL="91440" marR="73152" marT="18288" marB="18288">
+                    <a:solidFill>
+                      <a:srgbClr val="FFFFFF"/>
+                    </a:solidFill>
+                  </a:tcPr>
+                </a:tc>
+                <a:tc>
+                  <a:txBody>
+                    <a:bodyPr wrap="square"/>
+                    <a:lstStyle/>
+                    <a:p>
+                      <a:pPr algn="r"/>
+                      <a:r>
+                        <a:rPr sz="1150" b="0">
+                          <a:solidFill>
+                            <a:srgbClr val="1B1B1F"/>
+                          </a:solidFill>
+                          <a:latin typeface="Calibri"/>
+                        </a:rPr>
+                        <a:t>0.1556</a:t>
+                      </a:r>
+                    </a:p>
+                  </a:txBody>
+                  <a:tcPr marL="91440" marR="73152" marT="18288" marB="18288">
+                    <a:solidFill>
+                      <a:srgbClr val="FFFFFF"/>
+                    </a:solidFill>
+                  </a:tcPr>
+                </a:tc>
+                <a:tc>
+                  <a:txBody>
+                    <a:bodyPr wrap="square"/>
+                    <a:lstStyle/>
+                    <a:p>
+                      <a:pPr algn="r"/>
+                      <a:r>
+                        <a:rPr sz="1150" b="0">
+                          <a:solidFill>
+                            <a:srgbClr val="1B1B1F"/>
+                          </a:solidFill>
+                          <a:latin typeface="Calibri"/>
+                        </a:rPr>
+                        <a:t>0.0799</a:t>
+                      </a:r>
+                    </a:p>
+                  </a:txBody>
+                  <a:tcPr marL="91440" marR="73152" marT="18288" marB="18288">
+                    <a:solidFill>
+                      <a:srgbClr val="FFFFFF"/>
+                    </a:solidFill>
+                  </a:tcPr>
+                </a:tc>
+                <a:tc>
+                  <a:txBody>
+                    <a:bodyPr wrap="square"/>
+                    <a:lstStyle/>
+                    <a:p>
+                      <a:pPr algn="r"/>
+                      <a:r>
+                        <a:rPr sz="1150" b="0">
+                          <a:solidFill>
+                            <a:srgbClr val="1B1B1F"/>
+                          </a:solidFill>
+                          <a:latin typeface="Calibri"/>
+                        </a:rPr>
+                        <a:t>0.3061</a:t>
+                      </a:r>
+                    </a:p>
+                  </a:txBody>
+                  <a:tcPr marL="91440" marR="73152" marT="18288" marB="18288">
+                    <a:solidFill>
+                      <a:srgbClr val="FFFFFF"/>
+                    </a:solidFill>
+                  </a:tcPr>
+                </a:tc>
+              </a:tr>
+              <a:tr h="329184">
+                <a:tc>
+                  <a:txBody>
+                    <a:bodyPr wrap="square"/>
+                    <a:lstStyle/>
+                    <a:p>
+                      <a:pPr algn="l"/>
+                      <a:r>
+                        <a:rPr sz="1150" b="0">
+                          <a:solidFill>
+                            <a:srgbClr val="1B1B1F"/>
+                          </a:solidFill>
+                          <a:latin typeface="Calibri"/>
+                        </a:rPr>
+                        <a:t>Logistic regression</a:t>
+                      </a:r>
+                    </a:p>
+                  </a:txBody>
+                  <a:tcPr marL="91440" marR="73152" marT="18288" marB="18288">
+                    <a:solidFill>
+                      <a:srgbClr val="F4F6FA"/>
+                    </a:solidFill>
+                  </a:tcPr>
+                </a:tc>
+                <a:tc>
+                  <a:txBody>
+                    <a:bodyPr wrap="square"/>
+                    <a:lstStyle/>
+                    <a:p>
+                      <a:pPr algn="r"/>
+                      <a:r>
+                        <a:rPr sz="1150" b="0">
+                          <a:solidFill>
+                            <a:srgbClr val="1B1B1F"/>
+                          </a:solidFill>
+                          <a:latin typeface="Calibri"/>
+                        </a:rPr>
+                        <a:t>0.8465</a:t>
+                      </a:r>
+                    </a:p>
+                  </a:txBody>
+                  <a:tcPr marL="91440" marR="73152" marT="18288" marB="18288">
+                    <a:solidFill>
+                      <a:srgbClr val="F4F6FA"/>
+                    </a:solidFill>
+                  </a:tcPr>
+                </a:tc>
+                <a:tc>
+                  <a:txBody>
+                    <a:bodyPr wrap="square"/>
+                    <a:lstStyle/>
+                    <a:p>
+                      <a:pPr algn="r"/>
+                      <a:r>
+                        <a:rPr sz="1150" b="0">
+                          <a:solidFill>
+                            <a:srgbClr val="1B1B1F"/>
+                          </a:solidFill>
+                          <a:latin typeface="Calibri"/>
+                        </a:rPr>
+                        <a:t>0.1897</a:t>
+                      </a:r>
+                    </a:p>
+                  </a:txBody>
+                  <a:tcPr marL="91440" marR="73152" marT="18288" marB="18288">
+                    <a:solidFill>
+                      <a:srgbClr val="F4F6FA"/>
+                    </a:solidFill>
+                  </a:tcPr>
+                </a:tc>
+                <a:tc>
+                  <a:txBody>
+                    <a:bodyPr wrap="square"/>
+                    <a:lstStyle/>
+                    <a:p>
+                      <a:pPr algn="r"/>
+                      <a:r>
+                        <a:rPr sz="1150" b="0">
+                          <a:solidFill>
+                            <a:srgbClr val="1B1B1F"/>
+                          </a:solidFill>
+                          <a:latin typeface="Calibri"/>
+                        </a:rPr>
+                        <a:t>0.1057</a:t>
+                      </a:r>
+                    </a:p>
+                  </a:txBody>
+                  <a:tcPr marL="91440" marR="73152" marT="18288" marB="18288">
+                    <a:solidFill>
+                      <a:srgbClr val="F4F6FA"/>
+                    </a:solidFill>
+                  </a:tcPr>
+                </a:tc>
+                <a:tc>
+                  <a:txBody>
+                    <a:bodyPr wrap="square"/>
+                    <a:lstStyle/>
+                    <a:p>
+                      <a:pPr algn="r"/>
+                      <a:r>
+                        <a:rPr sz="1150" b="0">
+                          <a:solidFill>
+                            <a:srgbClr val="1B1B1F"/>
+                          </a:solidFill>
+                          <a:latin typeface="Calibri"/>
+                        </a:rPr>
+                        <a:t>0.2896</a:t>
+                      </a:r>
+                    </a:p>
+                  </a:txBody>
+                  <a:tcPr marL="91440" marR="73152" marT="18288" marB="18288">
+                    <a:solidFill>
+                      <a:srgbClr val="F4F6FA"/>
+                    </a:solidFill>
+                  </a:tcPr>
+                </a:tc>
+              </a:tr>
+            </a:tbl>
+          </a:graphicData>
+        </a:graphic>
+      </p:graphicFrame>
+      <p:sp>
+        <p:nvSpPr>
+          <p:cNvPr id="5" name="Rounded Rectangle 4"/>
+          <p:cNvSpPr/>
+          <p:nvPr/>
+        </p:nvSpPr>
+        <p:spPr>
+          <a:xfrm>
+            <a:off x="640080" y="3291840"/>
+            <a:ext cx="10881360" cy="1234440"/>
+          </a:xfrm>
+          <a:prstGeom prst="roundRect">
+            <a:avLst>
+              <a:gd name="adj" fmla="val 4000"/>
+            </a:avLst>
+          </a:prstGeom>
+          <a:solidFill>
+            <a:srgbClr val="F4F6FA"/>
+          </a:solidFill>
+          <a:ln w="9525">
+            <a:solidFill>
+              <a:srgbClr val="D8DDE8"/>
+            </a:solidFill>
+          </a:ln>
+          <a:effectLst/>
+        </p:spPr>
+        <p:style>
+          <a:lnRef idx="1">
+            <a:schemeClr val="accent1"/>
+          </a:lnRef>
+          <a:fillRef idx="3">
+            <a:schemeClr val="accent1"/>
+          </a:fillRef>
+          <a:effectRef idx="2">
+            <a:schemeClr val="accent1"/>
+          </a:effectRef>
+          <a:fontRef idx="minor">
+            <a:schemeClr val="lt1"/>
+          </a:fontRef>
+        </p:style>
+        <p:txBody>
+          <a:bodyPr rtlCol="0" anchor="ctr"/>
+          <a:lstStyle/>
+          <a:p/>
+        </p:txBody>
+      </p:sp>
+      <p:sp>
+        <p:nvSpPr>
+          <p:cNvPr id="6" name="TextBox 5"/>
+          <p:cNvSpPr txBox="1"/>
+          <p:nvPr/>
+        </p:nvSpPr>
+        <p:spPr>
+          <a:xfrm>
+            <a:off x="914400" y="3429000"/>
+            <a:ext cx="10332720" cy="960120"/>
+          </a:xfrm>
+          <a:prstGeom prst="rect">
+            <a:avLst/>
+          </a:prstGeom>
+          <a:noFill/>
+        </p:spPr>
+        <p:txBody>
+          <a:bodyPr wrap="square">
+            <a:spAutoFit/>
+          </a:bodyPr>
+          <a:lstStyle/>
+          <a:p>
+            <a:pPr algn="l">
+              <a:lnSpc>
+                <a:spcPct val="100000"/>
+              </a:lnSpc>
+            </a:pPr>
+            <a:r>
+              <a:rPr sz="1400" b="0">
+                <a:solidFill>
+                  <a:srgbClr val="1B1B1F"/>
+                </a:solidFill>
+                <a:latin typeface="Calibri"/>
+              </a:rPr>
+              <a:t>Disparate impact of 0.29–0.31 means women are selected at under a third of the male rate. The EEOC four-fifths rule flags anything below 0.80 — this is off by nearly a factor of three.</a:t>
+            </a:r>
+          </a:p>
+        </p:txBody>
+      </p:sp>
+      <p:sp>
+        <p:nvSpPr>
+          <p:cNvPr id="7" name="TextBox 6"/>
+          <p:cNvSpPr txBox="1"/>
+          <p:nvPr/>
+        </p:nvSpPr>
+        <p:spPr>
+          <a:xfrm>
+            <a:off x="640080" y="4800600"/>
+            <a:ext cx="3291840" cy="566928"/>
+          </a:xfrm>
+          <a:prstGeom prst="rect">
+            <a:avLst/>
+          </a:prstGeom>
+          <a:noFill/>
+        </p:spPr>
+        <p:txBody>
+          <a:bodyPr wrap="square">
+            <a:spAutoFit/>
+          </a:bodyPr>
+          <a:lstStyle/>
+          <a:p>
+            <a:pPr algn="ctr">
+              <a:lnSpc>
+                <a:spcPct val="100000"/>
+              </a:lnSpc>
+            </a:pPr>
+            <a:r>
+              <a:rPr sz="3000" b="1">
+                <a:solidFill>
+                  <a:srgbClr val="EB6834"/>
+                </a:solidFill>
+                <a:latin typeface="Cambria"/>
+              </a:rPr>
+              <a:t>0.30</a:t>
+            </a:r>
+          </a:p>
+        </p:txBody>
+      </p:sp>
+      <p:sp>
+        <p:nvSpPr>
+          <p:cNvPr id="8" name="TextBox 7"/>
+          <p:cNvSpPr txBox="1"/>
+          <p:nvPr/>
+        </p:nvSpPr>
+        <p:spPr>
+          <a:xfrm>
+            <a:off x="640080" y="5367528"/>
+            <a:ext cx="3291840" cy="685800"/>
+          </a:xfrm>
+          <a:prstGeom prst="rect">
+            <a:avLst/>
+          </a:prstGeom>
+          <a:noFill/>
+        </p:spPr>
+        <p:txBody>
+          <a:bodyPr wrap="square">
+            <a:spAutoFit/>
+          </a:bodyPr>
+          <a:lstStyle/>
+          <a:p>
+            <a:pPr algn="ctr">
+              <a:lnSpc>
+                <a:spcPct val="95000"/>
+              </a:lnSpc>
+            </a:pPr>
+            <a:r>
+              <a:rPr sz="1100" b="0">
+                <a:solidFill>
+                  <a:srgbClr val="5A6270"/>
+                </a:solidFill>
+                <a:latin typeface="Calibri"/>
+              </a:rPr>
+              <a:t>disparate impact</a:t>
+            </a:r>
+          </a:p>
+          <a:p>
+            <a:pPr algn="ctr">
+              <a:lnSpc>
+                <a:spcPct val="95000"/>
+              </a:lnSpc>
+            </a:pPr>
+            <a:r>
+              <a:rPr sz="1100" b="0">
+                <a:solidFill>
+                  <a:srgbClr val="5A6270"/>
+                </a:solidFill>
+                <a:latin typeface="Calibri"/>
+              </a:rPr>
+              <a:t>(0.80 is the legal threshold)</a:t>
+            </a:r>
+          </a:p>
+        </p:txBody>
+      </p:sp>
+      <p:sp>
+        <p:nvSpPr>
+          <p:cNvPr id="9" name="TextBox 8"/>
+          <p:cNvSpPr txBox="1"/>
+          <p:nvPr/>
+        </p:nvSpPr>
+        <p:spPr>
+          <a:xfrm>
+            <a:off x="4434840" y="4800600"/>
+            <a:ext cx="3291840" cy="566928"/>
+          </a:xfrm>
+          <a:prstGeom prst="rect">
+            <a:avLst/>
+          </a:prstGeom>
+          <a:noFill/>
+        </p:spPr>
+        <p:txBody>
+          <a:bodyPr wrap="square">
+            <a:spAutoFit/>
+          </a:bodyPr>
+          <a:lstStyle/>
+          <a:p>
+            <a:pPr algn="ctr">
+              <a:lnSpc>
+                <a:spcPct val="100000"/>
+              </a:lnSpc>
+            </a:pPr>
+            <a:r>
+              <a:rPr sz="3000" b="1">
+                <a:solidFill>
+                  <a:srgbClr val="1E2761"/>
+                </a:solidFill>
+                <a:latin typeface="Cambria"/>
+              </a:rPr>
+              <a:t>85%</a:t>
+            </a:r>
+          </a:p>
+        </p:txBody>
+      </p:sp>
+      <p:sp>
+        <p:nvSpPr>
+          <p:cNvPr id="10" name="TextBox 9"/>
+          <p:cNvSpPr txBox="1"/>
+          <p:nvPr/>
+        </p:nvSpPr>
+        <p:spPr>
+          <a:xfrm>
+            <a:off x="4434840" y="5367528"/>
+            <a:ext cx="3291840" cy="685800"/>
+          </a:xfrm>
+          <a:prstGeom prst="rect">
+            <a:avLst/>
+          </a:prstGeom>
+          <a:noFill/>
+        </p:spPr>
+        <p:txBody>
+          <a:bodyPr wrap="square">
+            <a:spAutoFit/>
+          </a:bodyPr>
+          <a:lstStyle/>
+          <a:p>
+            <a:pPr algn="ctr">
+              <a:lnSpc>
+                <a:spcPct val="95000"/>
+              </a:lnSpc>
+            </a:pPr>
+            <a:r>
+              <a:rPr sz="1100" b="0">
+                <a:solidFill>
+                  <a:srgbClr val="5A6270"/>
+                </a:solidFill>
+                <a:latin typeface="Calibri"/>
+              </a:rPr>
+              <a:t>accuracy — the metric a team</a:t>
+            </a:r>
+          </a:p>
+          <a:p>
+            <a:pPr algn="ctr">
+              <a:lnSpc>
+                <a:spcPct val="95000"/>
+              </a:lnSpc>
+            </a:pPr>
+            <a:r>
+              <a:rPr sz="1100" b="0">
+                <a:solidFill>
+                  <a:srgbClr val="5A6270"/>
+                </a:solidFill>
+                <a:latin typeface="Calibri"/>
+              </a:rPr>
+              <a:t>would actually be watching</a:t>
+            </a:r>
+          </a:p>
+        </p:txBody>
+      </p:sp>
+      <p:sp>
+        <p:nvSpPr>
+          <p:cNvPr id="11" name="TextBox 10"/>
+          <p:cNvSpPr txBox="1"/>
+          <p:nvPr/>
+        </p:nvSpPr>
+        <p:spPr>
+          <a:xfrm>
+            <a:off x="8229600" y="4800600"/>
+            <a:ext cx="3291840" cy="566928"/>
+          </a:xfrm>
+          <a:prstGeom prst="rect">
+            <a:avLst/>
+          </a:prstGeom>
+          <a:noFill/>
+        </p:spPr>
+        <p:txBody>
+          <a:bodyPr wrap="square">
+            <a:spAutoFit/>
+          </a:bodyPr>
+          <a:lstStyle/>
+          <a:p>
+            <a:pPr algn="ctr">
+              <a:lnSpc>
+                <a:spcPct val="100000"/>
+              </a:lnSpc>
+            </a:pPr>
+            <a:r>
+              <a:rPr sz="3000" b="1">
+                <a:solidFill>
+                  <a:srgbClr val="1E2761"/>
+                </a:solidFill>
+                <a:latin typeface="Cambria"/>
+              </a:rPr>
+              <a:t>0</a:t>
+            </a:r>
+          </a:p>
+        </p:txBody>
+      </p:sp>
+      <p:sp>
+        <p:nvSpPr>
+          <p:cNvPr id="12" name="TextBox 11"/>
+          <p:cNvSpPr txBox="1"/>
+          <p:nvPr/>
+        </p:nvSpPr>
+        <p:spPr>
+          <a:xfrm>
+            <a:off x="8229600" y="5367528"/>
+            <a:ext cx="3291840" cy="685800"/>
+          </a:xfrm>
+          <a:prstGeom prst="rect">
+            <a:avLst/>
+          </a:prstGeom>
+          <a:noFill/>
+        </p:spPr>
+        <p:txBody>
+          <a:bodyPr wrap="square">
+            <a:spAutoFit/>
+          </a:bodyPr>
+          <a:lstStyle/>
+          <a:p>
+            <a:pPr algn="ctr">
+              <a:lnSpc>
+                <a:spcPct val="95000"/>
+              </a:lnSpc>
+            </a:pPr>
+            <a:r>
+              <a:rPr sz="1100" b="0">
+                <a:solidFill>
+                  <a:srgbClr val="5A6270"/>
+                </a:solidFill>
+                <a:latin typeface="Calibri"/>
+              </a:rPr>
+              <a:t>features naming Sex.</a:t>
+            </a:r>
+          </a:p>
+          <a:p>
+            <a:pPr algn="ctr">
+              <a:lnSpc>
+                <a:spcPct val="95000"/>
+              </a:lnSpc>
+            </a:pPr>
+            <a:r>
+              <a:rPr sz="1100" b="0">
+                <a:solidFill>
+                  <a:srgbClr val="5A6270"/>
+                </a:solidFill>
+                <a:latin typeface="Calibri"/>
+              </a:rPr>
+              <a:t>The model found it anyway.</a:t>
+            </a:r>
+          </a:p>
+        </p:txBody>
+      </p:sp>
+    </p:spTree>
+  </p:cSld>
+  <p:clrMapOvr>
+    <a:masterClrMapping/>
+  </p:clrMapOvr>
+</p:sld>
+</file>
+
+<file path=ppt/slides/slide14.xml><?xml version="1.0" encoding="utf-8"?>
+<p:sld xmlns:a="http://schemas.openxmlformats.org/drawingml/2006/main" xmlns:p="http://schemas.openxmlformats.org/presentationml/2006/main" xmlns:r="http://schemas.openxmlformats.org/officeDocument/2006/relationships">
+  <p:cSld>
+    <p:spTree>
+      <p:nvGrpSpPr>
+        <p:cNvPr id="1" name=""/>
+        <p:cNvGrpSpPr/>
+        <p:nvPr/>
+      </p:nvGrpSpPr>
+      <p:grpSpPr/>
+      <p:sp>
+        <p:nvSpPr>
+          <p:cNvPr id="2" name="TextBox 1"/>
+          <p:cNvSpPr txBox="1"/>
+          <p:nvPr/>
+        </p:nvSpPr>
+        <p:spPr>
+          <a:xfrm>
+            <a:off x="640080" y="384048"/>
+            <a:ext cx="10881360" cy="640080"/>
+          </a:xfrm>
+          <a:prstGeom prst="rect">
+            <a:avLst/>
+          </a:prstGeom>
+          <a:noFill/>
+        </p:spPr>
+        <p:txBody>
+          <a:bodyPr wrap="square">
+            <a:spAutoFit/>
+          </a:bodyPr>
+          <a:lstStyle/>
+          <a:p>
+            <a:pPr algn="l">
+              <a:lnSpc>
+                <a:spcPct val="100000"/>
+              </a:lnSpc>
+            </a:pPr>
+            <a:r>
+              <a:rPr sz="2600" b="1">
+                <a:solidFill>
+                  <a:srgbClr val="1E2761"/>
+                </a:solidFill>
+                <a:latin typeface="Cambria"/>
+              </a:rPr>
+              <a:t>Result 2 — The Base Paper Works</a:t>
+            </a:r>
+          </a:p>
+        </p:txBody>
+      </p:sp>
+      <p:sp>
+        <p:nvSpPr>
+          <p:cNvPr id="3" name="TextBox 2"/>
+          <p:cNvSpPr txBox="1"/>
+          <p:nvPr/>
+        </p:nvSpPr>
+        <p:spPr>
+          <a:xfrm>
+            <a:off x="640080" y="1033271"/>
+            <a:ext cx="10881360" cy="384048"/>
+          </a:xfrm>
+          <a:prstGeom prst="rect">
+            <a:avLst/>
+          </a:prstGeom>
+          <a:noFill/>
+        </p:spPr>
+        <p:txBody>
+          <a:bodyPr wrap="square">
+            <a:spAutoFit/>
+          </a:bodyPr>
+          <a:lstStyle/>
+          <a:p>
+            <a:pPr algn="l">
+              <a:lnSpc>
+                <a:spcPct val="100000"/>
+              </a:lnSpc>
+            </a:pPr>
+            <a:r>
+              <a:rPr sz="1350" b="0">
+                <a:solidFill>
+                  <a:srgbClr val="5A6270"/>
+                </a:solidFill>
+                <a:latin typeface="Calibri"/>
+              </a:rPr>
+              <a:t>Agarwal et al. (2018), decision tree, ε = 0.01, 5 seeds. Every claim the paper makes held up.</a:t>
+            </a:r>
+          </a:p>
+        </p:txBody>
+      </p:sp>
+      <p:graphicFrame>
+        <p:nvGraphicFramePr>
+          <p:cNvPr id="4" name="Table 3"/>
+          <p:cNvGraphicFramePr>
+            <a:graphicFrameLocks noGrp="1"/>
+          </p:cNvGraphicFramePr>
+          <p:nvPr/>
+        </p:nvGraphicFramePr>
+        <p:xfrm>
+          <a:off x="640080" y="1691640"/>
+          <a:ext cx="10881359" cy="1371600"/>
+        </p:xfrm>
+        <a:graphic>
+          <a:graphicData uri="http://schemas.openxmlformats.org/drawingml/2006/table">
+            <a:tbl>
+              <a:tblPr firstRow="1">
+                <a:tableStyleId>{5C22544A-7EE6-4342-B048-85BDC9FD1C3A}</a:tableStyleId>
+              </a:tblPr>
+              <a:tblGrid>
+                <a:gridCol w="3291840"/>
+                <a:gridCol w="1828800"/>
+                <a:gridCol w="1828800"/>
+                <a:gridCol w="1828800"/>
+                <a:gridCol w="2103119"/>
+              </a:tblGrid>
+              <a:tr h="384048">
+                <a:tc>
+                  <a:txBody>
+                    <a:bodyPr wrap="square"/>
+                    <a:lstStyle/>
+                    <a:p>
+                      <a:pPr algn="l"/>
+                      <a:r>
+                        <a:rPr sz="1100" b="1">
+                          <a:solidFill>
+                            <a:srgbClr val="FFFFFF"/>
+                          </a:solidFill>
+                          <a:latin typeface="Calibri"/>
+                        </a:rPr>
+                        <a:t>Method</a:t>
+                      </a:r>
+                    </a:p>
+                  </a:txBody>
+                  <a:tcPr marL="91440" marR="73152" marT="18288" marB="18288">
+                    <a:solidFill>
+                      <a:srgbClr val="1E2761"/>
+                    </a:solidFill>
+                  </a:tcPr>
+                </a:tc>
+                <a:tc>
+                  <a:txBody>
+                    <a:bodyPr wrap="square"/>
+                    <a:lstStyle/>
+                    <a:p>
+                      <a:pPr algn="r"/>
+                      <a:r>
+                        <a:rPr sz="1100" b="1">
+                          <a:solidFill>
+                            <a:srgbClr val="FFFFFF"/>
+                          </a:solidFill>
+                          <a:latin typeface="Calibri"/>
+                        </a:rPr>
+                        <a:t>Accuracy</a:t>
+                      </a:r>
+                    </a:p>
+                  </a:txBody>
+                  <a:tcPr marL="91440" marR="73152" marT="18288" marB="18288">
+                    <a:solidFill>
+                      <a:srgbClr val="1E2761"/>
+                    </a:solidFill>
+                  </a:tcPr>
+                </a:tc>
+                <a:tc>
+                  <a:txBody>
+                    <a:bodyPr wrap="square"/>
+                    <a:lstStyle/>
+                    <a:p>
+                      <a:pPr algn="r"/>
+                      <a:r>
+                        <a:rPr sz="1100" b="1">
+                          <a:solidFill>
+                            <a:srgbClr val="FFFFFF"/>
+                          </a:solidFill>
+                          <a:latin typeface="Calibri"/>
+                        </a:rPr>
+                        <a:t>DP diff</a:t>
+                      </a:r>
+                    </a:p>
+                  </a:txBody>
+                  <a:tcPr marL="91440" marR="73152" marT="18288" marB="18288">
+                    <a:solidFill>
+                      <a:srgbClr val="1E2761"/>
+                    </a:solidFill>
+                  </a:tcPr>
+                </a:tc>
+                <a:tc>
+                  <a:txBody>
+                    <a:bodyPr wrap="square"/>
+                    <a:lstStyle/>
+                    <a:p>
+                      <a:pPr algn="r"/>
+                      <a:r>
+                        <a:rPr sz="1100" b="1">
+                          <a:solidFill>
+                            <a:srgbClr val="FFFFFF"/>
+                          </a:solidFill>
+                          <a:latin typeface="Calibri"/>
+                        </a:rPr>
+                        <a:t>EO diff</a:t>
+                      </a:r>
+                    </a:p>
+                  </a:txBody>
+                  <a:tcPr marL="91440" marR="73152" marT="18288" marB="18288">
+                    <a:solidFill>
+                      <a:srgbClr val="1E2761"/>
+                    </a:solidFill>
+                  </a:tcPr>
+                </a:tc>
+                <a:tc>
+                  <a:txBody>
+                    <a:bodyPr wrap="square"/>
+                    <a:lstStyle/>
+                    <a:p>
+                      <a:pPr algn="r"/>
+                      <a:r>
+                        <a:rPr sz="1100" b="1">
+                          <a:solidFill>
+                            <a:srgbClr val="FFFFFF"/>
+                          </a:solidFill>
+                          <a:latin typeface="Calibri"/>
+                        </a:rPr>
+                        <a:t>Disparate impact</a:t>
+                      </a:r>
+                    </a:p>
+                  </a:txBody>
+                  <a:tcPr marL="91440" marR="73152" marT="18288" marB="18288">
+                    <a:solidFill>
+                      <a:srgbClr val="1E2761"/>
+                    </a:solidFill>
+                  </a:tcPr>
+                </a:tc>
+              </a:tr>
+              <a:tr h="329184">
+                <a:tc>
+                  <a:txBody>
+                    <a:bodyPr wrap="square"/>
+                    <a:lstStyle/>
+                    <a:p>
+                      <a:pPr algn="l"/>
+                      <a:r>
+                        <a:rPr sz="1150" b="0">
+                          <a:solidFill>
+                            <a:srgbClr val="1B1B1F"/>
+                          </a:solidFill>
+                          <a:latin typeface="Calibri"/>
+                        </a:rPr>
+                        <a:t>Baseline tree</a:t>
+                      </a:r>
+                    </a:p>
+                  </a:txBody>
+                  <a:tcPr marL="91440" marR="73152" marT="18288" marB="18288">
+                    <a:solidFill>
+                      <a:srgbClr val="FFFFFF"/>
+                    </a:solidFill>
+                  </a:tcPr>
+                </a:tc>
+                <a:tc>
+                  <a:txBody>
+                    <a:bodyPr wrap="square"/>
+                    <a:lstStyle/>
+                    <a:p>
+                      <a:pPr algn="r"/>
+                      <a:r>
+                        <a:rPr sz="1150" b="0">
+                          <a:solidFill>
+                            <a:srgbClr val="1B1B1F"/>
+                          </a:solidFill>
+                          <a:latin typeface="Calibri"/>
+                        </a:rPr>
+                        <a:t>0.8517</a:t>
+                      </a:r>
+                    </a:p>
+                  </a:txBody>
+                  <a:tcPr marL="91440" marR="73152" marT="18288" marB="18288">
+                    <a:solidFill>
+                      <a:srgbClr val="FFFFFF"/>
+                    </a:solidFill>
+                  </a:tcPr>
+                </a:tc>
+                <a:tc>
+                  <a:txBody>
+                    <a:bodyPr wrap="square"/>
+                    <a:lstStyle/>
+                    <a:p>
+                      <a:pPr algn="r"/>
+                      <a:r>
+                        <a:rPr sz="1150" b="0">
+                          <a:solidFill>
+                            <a:srgbClr val="1B1B1F"/>
+                          </a:solidFill>
+                          <a:latin typeface="Calibri"/>
+                        </a:rPr>
+                        <a:t>0.1613</a:t>
+                      </a:r>
+                    </a:p>
+                  </a:txBody>
+                  <a:tcPr marL="91440" marR="73152" marT="18288" marB="18288">
+                    <a:solidFill>
+                      <a:srgbClr val="FFFFFF"/>
+                    </a:solidFill>
+                  </a:tcPr>
+                </a:tc>
+                <a:tc>
+                  <a:txBody>
+                    <a:bodyPr wrap="square"/>
+                    <a:lstStyle/>
+                    <a:p>
+                      <a:pPr algn="r"/>
+                      <a:r>
+                        <a:rPr sz="1150" b="0">
+                          <a:solidFill>
+                            <a:srgbClr val="1B1B1F"/>
+                          </a:solidFill>
+                          <a:latin typeface="Calibri"/>
+                        </a:rPr>
+                        <a:t>0.0831</a:t>
+                      </a:r>
+                    </a:p>
+                  </a:txBody>
+                  <a:tcPr marL="91440" marR="73152" marT="18288" marB="18288">
+                    <a:solidFill>
+                      <a:srgbClr val="FFFFFF"/>
+                    </a:solidFill>
+                  </a:tcPr>
+                </a:tc>
+                <a:tc>
+                  <a:txBody>
+                    <a:bodyPr wrap="square"/>
+                    <a:lstStyle/>
+                    <a:p>
+                      <a:pPr algn="r"/>
+                      <a:r>
+                        <a:rPr sz="1150" b="0">
+                          <a:solidFill>
+                            <a:srgbClr val="1B1B1F"/>
+                          </a:solidFill>
+                          <a:latin typeface="Calibri"/>
+                        </a:rPr>
+                        <a:t>0.3086</a:t>
+                      </a:r>
+                    </a:p>
+                  </a:txBody>
+                  <a:tcPr marL="91440" marR="73152" marT="18288" marB="18288">
+                    <a:solidFill>
+                      <a:srgbClr val="FFFFFF"/>
+                    </a:solidFill>
+                  </a:tcPr>
+                </a:tc>
+              </a:tr>
+              <a:tr h="329184">
+                <a:tc>
+                  <a:txBody>
+                    <a:bodyPr wrap="square"/>
+                    <a:lstStyle/>
+                    <a:p>
+                      <a:pPr algn="l"/>
+                      <a:r>
+                        <a:rPr sz="1150" b="1">
+                          <a:solidFill>
+                            <a:srgbClr val="1B1B1F"/>
+                          </a:solidFill>
+                          <a:latin typeface="Calibri"/>
+                        </a:rPr>
+                        <a:t>ExpGrad — Demographic Parity</a:t>
+                      </a:r>
+                    </a:p>
+                  </a:txBody>
+                  <a:tcPr marL="91440" marR="73152" marT="18288" marB="18288">
+                    <a:solidFill>
+                      <a:srgbClr val="FDF3E2"/>
+                    </a:solidFill>
+                  </a:tcPr>
+                </a:tc>
+                <a:tc>
+                  <a:txBody>
+                    <a:bodyPr wrap="square"/>
+                    <a:lstStyle/>
+                    <a:p>
+                      <a:pPr algn="r"/>
+                      <a:r>
+                        <a:rPr sz="1150" b="1">
+                          <a:solidFill>
+                            <a:srgbClr val="1B1B1F"/>
+                          </a:solidFill>
+                          <a:latin typeface="Calibri"/>
+                        </a:rPr>
+                        <a:t>0.8364</a:t>
+                      </a:r>
+                    </a:p>
+                  </a:txBody>
+                  <a:tcPr marL="91440" marR="73152" marT="18288" marB="18288">
+                    <a:solidFill>
+                      <a:srgbClr val="FDF3E2"/>
+                    </a:solidFill>
+                  </a:tcPr>
+                </a:tc>
+                <a:tc>
+                  <a:txBody>
+                    <a:bodyPr wrap="square"/>
+                    <a:lstStyle/>
+                    <a:p>
+                      <a:pPr algn="r"/>
+                      <a:r>
+                        <a:rPr sz="1150" b="1">
+                          <a:solidFill>
+                            <a:srgbClr val="1B1B1F"/>
+                          </a:solidFill>
+                          <a:latin typeface="Calibri"/>
+                        </a:rPr>
+                        <a:t>0.0187</a:t>
+                      </a:r>
+                    </a:p>
+                  </a:txBody>
+                  <a:tcPr marL="91440" marR="73152" marT="18288" marB="18288">
+                    <a:solidFill>
+                      <a:srgbClr val="FDF3E2"/>
+                    </a:solidFill>
+                  </a:tcPr>
+                </a:tc>
+                <a:tc>
+                  <a:txBody>
+                    <a:bodyPr wrap="square"/>
+                    <a:lstStyle/>
+                    <a:p>
+                      <a:pPr algn="r"/>
+                      <a:r>
+                        <a:rPr sz="1150" b="1">
+                          <a:solidFill>
+                            <a:srgbClr val="1B1B1F"/>
+                          </a:solidFill>
+                          <a:latin typeface="Calibri"/>
+                        </a:rPr>
+                        <a:t>0.2773</a:t>
+                      </a:r>
+                    </a:p>
+                  </a:txBody>
+                  <a:tcPr marL="91440" marR="73152" marT="18288" marB="18288">
+                    <a:solidFill>
+                      <a:srgbClr val="FDF3E2"/>
+                    </a:solidFill>
+                  </a:tcPr>
+                </a:tc>
+                <a:tc>
+                  <a:txBody>
+                    <a:bodyPr wrap="square"/>
+                    <a:lstStyle/>
+                    <a:p>
+                      <a:pPr algn="r"/>
+                      <a:r>
+                        <a:rPr sz="1150" b="1">
+                          <a:solidFill>
+                            <a:srgbClr val="1B1B1F"/>
+                          </a:solidFill>
+                          <a:latin typeface="Calibri"/>
+                        </a:rPr>
+                        <a:t>0.8834</a:t>
+                      </a:r>
+                    </a:p>
+                  </a:txBody>
+                  <a:tcPr marL="91440" marR="73152" marT="18288" marB="18288">
+                    <a:solidFill>
+                      <a:srgbClr val="FDF3E2"/>
+                    </a:solidFill>
+                  </a:tcPr>
+                </a:tc>
+              </a:tr>
+              <a:tr h="329184">
+                <a:tc>
+                  <a:txBody>
+                    <a:bodyPr wrap="square"/>
+                    <a:lstStyle/>
+                    <a:p>
+                      <a:pPr algn="l"/>
+                      <a:r>
+                        <a:rPr sz="1150" b="0">
+                          <a:solidFill>
+                            <a:srgbClr val="1B1B1F"/>
+                          </a:solidFill>
+                          <a:latin typeface="Calibri"/>
+                        </a:rPr>
+                        <a:t>ExpGrad — Equalized Odds</a:t>
+                      </a:r>
+                    </a:p>
+                  </a:txBody>
+                  <a:tcPr marL="91440" marR="73152" marT="18288" marB="18288">
+                    <a:solidFill>
+                      <a:srgbClr val="FFFFFF"/>
+                    </a:solidFill>
+                  </a:tcPr>
+                </a:tc>
+                <a:tc>
+                  <a:txBody>
+                    <a:bodyPr wrap="square"/>
+                    <a:lstStyle/>
+                    <a:p>
+                      <a:pPr algn="r"/>
+                      <a:r>
+                        <a:rPr sz="1150" b="0">
+                          <a:solidFill>
+                            <a:srgbClr val="1B1B1F"/>
+                          </a:solidFill>
+                          <a:latin typeface="Calibri"/>
+                        </a:rPr>
+                        <a:t>0.8471</a:t>
+                      </a:r>
+                    </a:p>
+                  </a:txBody>
+                  <a:tcPr marL="91440" marR="73152" marT="18288" marB="18288">
+                    <a:solidFill>
+                      <a:srgbClr val="FFFFFF"/>
+                    </a:solidFill>
+                  </a:tcPr>
+                </a:tc>
+                <a:tc>
+                  <a:txBody>
+                    <a:bodyPr wrap="square"/>
+                    <a:lstStyle/>
+                    <a:p>
+                      <a:pPr algn="r"/>
+                      <a:r>
+                        <a:rPr sz="1150" b="0">
+                          <a:solidFill>
+                            <a:srgbClr val="1B1B1F"/>
+                          </a:solidFill>
+                          <a:latin typeface="Calibri"/>
+                        </a:rPr>
+                        <a:t>0.1125</a:t>
+                      </a:r>
+                    </a:p>
+                  </a:txBody>
+                  <a:tcPr marL="91440" marR="73152" marT="18288" marB="18288">
+                    <a:solidFill>
+                      <a:srgbClr val="FFFFFF"/>
+                    </a:solidFill>
+                  </a:tcPr>
+                </a:tc>
+                <a:tc>
+                  <a:txBody>
+                    <a:bodyPr wrap="square"/>
+                    <a:lstStyle/>
+                    <a:p>
+                      <a:pPr algn="r"/>
+                      <a:r>
+                        <a:rPr sz="1150" b="0">
+                          <a:solidFill>
+                            <a:srgbClr val="1B1B1F"/>
+                          </a:solidFill>
+                          <a:latin typeface="Calibri"/>
+                        </a:rPr>
+                        <a:t>0.0355</a:t>
+                      </a:r>
+                    </a:p>
+                  </a:txBody>
+                  <a:tcPr marL="91440" marR="73152" marT="18288" marB="18288">
+                    <a:solidFill>
+                      <a:srgbClr val="FFFFFF"/>
+                    </a:solidFill>
+                  </a:tcPr>
+                </a:tc>
+                <a:tc>
+                  <a:txBody>
+                    <a:bodyPr wrap="square"/>
+                    <a:lstStyle/>
+                    <a:p>
+                      <a:pPr algn="r"/>
+                      <a:r>
+                        <a:rPr sz="1150" b="0">
+                          <a:solidFill>
+                            <a:srgbClr val="1B1B1F"/>
+                          </a:solidFill>
+                          <a:latin typeface="Calibri"/>
+                        </a:rPr>
+                        <a:t>0.4573</a:t>
+                      </a:r>
+                    </a:p>
+                  </a:txBody>
+                  <a:tcPr marL="91440" marR="73152" marT="18288" marB="18288">
+                    <a:solidFill>
+                      <a:srgbClr val="FFFFFF"/>
+                    </a:solidFill>
+                  </a:tcPr>
+                </a:tc>
+              </a:tr>
+            </a:tbl>
+          </a:graphicData>
+        </a:graphic>
+      </p:graphicFrame>
+      <p:sp>
+        <p:nvSpPr>
+          <p:cNvPr id="5" name="TextBox 4"/>
+          <p:cNvSpPr txBox="1"/>
+          <p:nvPr/>
+        </p:nvSpPr>
+        <p:spPr>
+          <a:xfrm>
+            <a:off x="640080" y="3383280"/>
+            <a:ext cx="3291840" cy="566928"/>
+          </a:xfrm>
+          <a:prstGeom prst="rect">
+            <a:avLst/>
+          </a:prstGeom>
+          <a:noFill/>
+        </p:spPr>
+        <p:txBody>
+          <a:bodyPr wrap="square">
+            <a:spAutoFit/>
+          </a:bodyPr>
+          <a:lstStyle/>
+          <a:p>
+            <a:pPr algn="ctr">
+              <a:lnSpc>
+                <a:spcPct val="100000"/>
+              </a:lnSpc>
+            </a:pPr>
+            <a:r>
+              <a:rPr sz="3000" b="1">
+                <a:solidFill>
+                  <a:srgbClr val="1BAF7A"/>
+                </a:solidFill>
+                <a:latin typeface="Cambria"/>
+              </a:rPr>
+              <a:t>−88%</a:t>
+            </a:r>
+          </a:p>
+        </p:txBody>
+      </p:sp>
+      <p:sp>
+        <p:nvSpPr>
+          <p:cNvPr id="6" name="TextBox 5"/>
+          <p:cNvSpPr txBox="1"/>
+          <p:nvPr/>
+        </p:nvSpPr>
+        <p:spPr>
+          <a:xfrm>
+            <a:off x="640080" y="3950208"/>
+            <a:ext cx="3291840" cy="685800"/>
+          </a:xfrm>
+          <a:prstGeom prst="rect">
+            <a:avLst/>
+          </a:prstGeom>
+          <a:noFill/>
+        </p:spPr>
+        <p:txBody>
+          <a:bodyPr wrap="square">
+            <a:spAutoFit/>
+          </a:bodyPr>
+          <a:lstStyle/>
+          <a:p>
+            <a:pPr algn="ctr">
+              <a:lnSpc>
+                <a:spcPct val="95000"/>
+              </a:lnSpc>
+            </a:pPr>
+            <a:r>
+              <a:rPr sz="1100" b="0">
+                <a:solidFill>
+                  <a:srgbClr val="5A6270"/>
+                </a:solidFill>
+                <a:latin typeface="Calibri"/>
+              </a:rPr>
+              <a:t>demographic parity violation</a:t>
+            </a:r>
+          </a:p>
+          <a:p>
+            <a:pPr algn="ctr">
+              <a:lnSpc>
+                <a:spcPct val="95000"/>
+              </a:lnSpc>
+            </a:pPr>
+            <a:r>
+              <a:rPr sz="1100" b="0">
+                <a:solidFill>
+                  <a:srgbClr val="5A6270"/>
+                </a:solidFill>
+                <a:latin typeface="Calibri"/>
+              </a:rPr>
+              <a:t>0.161 → 0.019</a:t>
+            </a:r>
+          </a:p>
+        </p:txBody>
+      </p:sp>
+      <p:sp>
+        <p:nvSpPr>
+          <p:cNvPr id="7" name="TextBox 6"/>
+          <p:cNvSpPr txBox="1"/>
+          <p:nvPr/>
+        </p:nvSpPr>
+        <p:spPr>
+          <a:xfrm>
+            <a:off x="4434840" y="3383280"/>
+            <a:ext cx="3291840" cy="566928"/>
+          </a:xfrm>
+          <a:prstGeom prst="rect">
+            <a:avLst/>
+          </a:prstGeom>
+          <a:noFill/>
+        </p:spPr>
+        <p:txBody>
+          <a:bodyPr wrap="square">
+            <a:spAutoFit/>
+          </a:bodyPr>
+          <a:lstStyle/>
+          <a:p>
+            <a:pPr algn="ctr">
+              <a:lnSpc>
+                <a:spcPct val="100000"/>
+              </a:lnSpc>
+            </a:pPr>
+            <a:r>
+              <a:rPr sz="3000" b="1">
+                <a:solidFill>
+                  <a:srgbClr val="1E2761"/>
+                </a:solidFill>
+                <a:latin typeface="Cambria"/>
+              </a:rPr>
+              <a:t>1.5 pts</a:t>
+            </a:r>
+          </a:p>
+        </p:txBody>
+      </p:sp>
+      <p:sp>
+        <p:nvSpPr>
+          <p:cNvPr id="8" name="TextBox 7"/>
+          <p:cNvSpPr txBox="1"/>
+          <p:nvPr/>
+        </p:nvSpPr>
+        <p:spPr>
+          <a:xfrm>
+            <a:off x="4434840" y="3950208"/>
+            <a:ext cx="3291840" cy="685800"/>
+          </a:xfrm>
+          <a:prstGeom prst="rect">
+            <a:avLst/>
+          </a:prstGeom>
+          <a:noFill/>
+        </p:spPr>
+        <p:txBody>
+          <a:bodyPr wrap="square">
+            <a:spAutoFit/>
+          </a:bodyPr>
+          <a:lstStyle/>
+          <a:p>
+            <a:pPr algn="ctr">
+              <a:lnSpc>
+                <a:spcPct val="95000"/>
+              </a:lnSpc>
+            </a:pPr>
+            <a:r>
+              <a:rPr sz="1100" b="0">
+                <a:solidFill>
+                  <a:srgbClr val="5A6270"/>
+                </a:solidFill>
+                <a:latin typeface="Calibri"/>
+              </a:rPr>
+              <a:t>accuracy paid for it</a:t>
+            </a:r>
+          </a:p>
+          <a:p>
+            <a:pPr algn="ctr">
+              <a:lnSpc>
+                <a:spcPct val="95000"/>
+              </a:lnSpc>
+            </a:pPr>
+            <a:r>
+              <a:rPr sz="1100" b="0">
+                <a:solidFill>
+                  <a:srgbClr val="5A6270"/>
+                </a:solidFill>
+                <a:latin typeface="Calibri"/>
+              </a:rPr>
+              <a:t>0.8517 → 0.8364</a:t>
+            </a:r>
+          </a:p>
+        </p:txBody>
+      </p:sp>
+      <p:sp>
+        <p:nvSpPr>
+          <p:cNvPr id="9" name="TextBox 8"/>
+          <p:cNvSpPr txBox="1"/>
+          <p:nvPr/>
+        </p:nvSpPr>
+        <p:spPr>
+          <a:xfrm>
+            <a:off x="8229600" y="3383280"/>
+            <a:ext cx="3291840" cy="566928"/>
+          </a:xfrm>
+          <a:prstGeom prst="rect">
+            <a:avLst/>
+          </a:prstGeom>
+          <a:noFill/>
+        </p:spPr>
+        <p:txBody>
+          <a:bodyPr wrap="square">
+            <a:spAutoFit/>
+          </a:bodyPr>
+          <a:lstStyle/>
+          <a:p>
+            <a:pPr algn="ctr">
+              <a:lnSpc>
+                <a:spcPct val="100000"/>
+              </a:lnSpc>
+            </a:pPr>
+            <a:r>
+              <a:rPr sz="2600" b="1">
+                <a:solidFill>
+                  <a:srgbClr val="1BAF7A"/>
+                </a:solidFill>
+                <a:latin typeface="Cambria"/>
+              </a:rPr>
+              <a:t>0.31 → 0.88</a:t>
+            </a:r>
+          </a:p>
+        </p:txBody>
+      </p:sp>
+      <p:sp>
+        <p:nvSpPr>
+          <p:cNvPr id="10" name="TextBox 9"/>
+          <p:cNvSpPr txBox="1"/>
+          <p:nvPr/>
+        </p:nvSpPr>
+        <p:spPr>
+          <a:xfrm>
+            <a:off x="8229600" y="3950208"/>
+            <a:ext cx="3291840" cy="685800"/>
+          </a:xfrm>
+          <a:prstGeom prst="rect">
+            <a:avLst/>
+          </a:prstGeom>
+          <a:noFill/>
+        </p:spPr>
+        <p:txBody>
+          <a:bodyPr wrap="square">
+            <a:spAutoFit/>
+          </a:bodyPr>
+          <a:lstStyle/>
+          <a:p>
+            <a:pPr algn="ctr">
+              <a:lnSpc>
+                <a:spcPct val="95000"/>
+              </a:lnSpc>
+            </a:pPr>
+            <a:r>
+              <a:rPr sz="1100" b="0">
+                <a:solidFill>
+                  <a:srgbClr val="5A6270"/>
+                </a:solidFill>
+                <a:latin typeface="Calibri"/>
+              </a:rPr>
+              <a:t>disparate impact:</a:t>
+            </a:r>
+          </a:p>
+          <a:p>
+            <a:pPr algn="ctr">
+              <a:lnSpc>
+                <a:spcPct val="95000"/>
+              </a:lnSpc>
+            </a:pPr>
+            <a:r>
+              <a:rPr sz="1100" b="0">
+                <a:solidFill>
+                  <a:srgbClr val="5A6270"/>
+                </a:solidFill>
+                <a:latin typeface="Calibri"/>
+              </a:rPr>
+              <a:t>fails, then passes</a:t>
+            </a:r>
+          </a:p>
+        </p:txBody>
+      </p:sp>
+      <p:sp>
+        <p:nvSpPr>
+          <p:cNvPr id="11" name="Rounded Rectangle 10"/>
+          <p:cNvSpPr/>
+          <p:nvPr/>
+        </p:nvSpPr>
+        <p:spPr>
+          <a:xfrm>
+            <a:off x="640080" y="4846320"/>
+            <a:ext cx="10881360" cy="1417320"/>
+          </a:xfrm>
+          <a:prstGeom prst="roundRect">
+            <a:avLst>
+              <a:gd name="adj" fmla="val 4000"/>
+            </a:avLst>
+          </a:prstGeom>
+          <a:solidFill>
+            <a:srgbClr val="F4F6FA"/>
+          </a:solidFill>
+          <a:ln w="9525">
+            <a:solidFill>
+              <a:srgbClr val="D8DDE8"/>
+            </a:solidFill>
+          </a:ln>
+          <a:effectLst/>
+        </p:spPr>
+        <p:style>
+          <a:lnRef idx="1">
+            <a:schemeClr val="accent1"/>
+          </a:lnRef>
+          <a:fillRef idx="3">
+            <a:schemeClr val="accent1"/>
+          </a:fillRef>
+          <a:effectRef idx="2">
+            <a:schemeClr val="accent1"/>
+          </a:effectRef>
+          <a:fontRef idx="minor">
+            <a:schemeClr val="lt1"/>
+          </a:fontRef>
+        </p:style>
+        <p:txBody>
+          <a:bodyPr rtlCol="0" anchor="ctr"/>
+          <a:lstStyle/>
+          <a:p/>
+        </p:txBody>
+      </p:sp>
+      <p:sp>
+        <p:nvSpPr>
+          <p:cNvPr id="12" name="TextBox 11"/>
+          <p:cNvSpPr txBox="1"/>
+          <p:nvPr/>
+        </p:nvSpPr>
+        <p:spPr>
+          <a:xfrm>
+            <a:off x="914400" y="4983480"/>
+            <a:ext cx="10332720" cy="1143000"/>
+          </a:xfrm>
+          <a:prstGeom prst="rect">
+            <a:avLst/>
+          </a:prstGeom>
+          <a:noFill/>
+        </p:spPr>
+        <p:txBody>
+          <a:bodyPr wrap="square">
+            <a:spAutoFit/>
+          </a:bodyPr>
+          <a:lstStyle/>
+          <a:p>
+            <a:pPr algn="l">
+              <a:lnSpc>
+                <a:spcPct val="100000"/>
+              </a:lnSpc>
+            </a:pPr>
+            <a:r>
+              <a:rPr sz="1400" b="0">
+                <a:solidFill>
+                  <a:srgbClr val="1B1B1F"/>
+                </a:solidFill>
+                <a:latin typeface="Calibri"/>
+              </a:rPr>
+              <a:t>Each constraint fixes only the metric it was given: ExpGrad-DP leaves equalized odds worse than the baseline. That is correct behaviour — the algorithm does what it is asked and nothing more — and it is the seed of Result 4.</a:t>
+            </a:r>
+          </a:p>
+        </p:txBody>
+      </p:sp>
+    </p:spTree>
+  </p:cSld>
+  <p:clrMapOvr>
+    <a:masterClrMapping/>
+  </p:clrMapOvr>
+</p:sld>
+</file>
+
+<file path=ppt/slides/slide15.xml><?xml version="1.0" encoding="utf-8"?>
+<p:sld xmlns:a="http://schemas.openxmlformats.org/drawingml/2006/main" xmlns:p="http://schemas.openxmlformats.org/presentationml/2006/main" xmlns:r="http://schemas.openxmlformats.org/officeDocument/2006/relationships">
+  <p:cSld>
+    <p:spTree>
+      <p:nvGrpSpPr>
+        <p:cNvPr id="1" name=""/>
+        <p:cNvGrpSpPr/>
+        <p:nvPr/>
+      </p:nvGrpSpPr>
+      <p:grpSpPr/>
+      <p:sp>
+        <p:nvSpPr>
+          <p:cNvPr id="2" name="TextBox 1"/>
+          <p:cNvSpPr txBox="1"/>
+          <p:nvPr/>
+        </p:nvSpPr>
+        <p:spPr>
+          <a:xfrm>
+            <a:off x="640080" y="384048"/>
+            <a:ext cx="10881360" cy="640080"/>
+          </a:xfrm>
+          <a:prstGeom prst="rect">
+            <a:avLst/>
+          </a:prstGeom>
+          <a:noFill/>
+        </p:spPr>
+        <p:txBody>
+          <a:bodyPr wrap="square">
+            <a:spAutoFit/>
+          </a:bodyPr>
+          <a:lstStyle/>
+          <a:p>
+            <a:pPr algn="l">
+              <a:lnSpc>
+                <a:spcPct val="100000"/>
+              </a:lnSpc>
+            </a:pPr>
+            <a:r>
+              <a:rPr sz="2600" b="1">
+                <a:solidFill>
+                  <a:srgbClr val="1E2761"/>
+                </a:solidFill>
+                <a:latin typeface="Cambria"/>
+              </a:rPr>
+              <a:t>Result 3 — Six Mitigations, One Table</a:t>
+            </a:r>
+          </a:p>
+        </p:txBody>
+      </p:sp>
+      <p:sp>
+        <p:nvSpPr>
+          <p:cNvPr id="3" name="TextBox 2"/>
+          <p:cNvSpPr txBox="1"/>
+          <p:nvPr/>
+        </p:nvSpPr>
+        <p:spPr>
+          <a:xfrm>
+            <a:off x="640080" y="1033271"/>
+            <a:ext cx="10881360" cy="384048"/>
+          </a:xfrm>
+          <a:prstGeom prst="rect">
+            <a:avLst/>
+          </a:prstGeom>
+          <a:noFill/>
+        </p:spPr>
+        <p:txBody>
+          <a:bodyPr wrap="square">
+            <a:spAutoFit/>
+          </a:bodyPr>
+          <a:lstStyle/>
+          <a:p>
+            <a:pPr algn="l">
+              <a:lnSpc>
+                <a:spcPct val="100000"/>
+              </a:lnSpc>
+            </a:pPr>
+            <a:r>
+              <a:rPr sz="1350" b="0">
+                <a:solidFill>
+                  <a:srgbClr val="5A6270"/>
+                </a:solidFill>
+                <a:latin typeface="Calibri"/>
+              </a:rPr>
+              <a:t>Same data, same base classifier (logistic regression), same metrics. Only the mitigation changes. 5 seeds.</a:t>
+            </a:r>
+          </a:p>
+        </p:txBody>
+      </p:sp>
+      <p:graphicFrame>
+        <p:nvGraphicFramePr>
+          <p:cNvPr id="4" name="Table 3"/>
+          <p:cNvGraphicFramePr>
+            <a:graphicFrameLocks noGrp="1"/>
+          </p:cNvGraphicFramePr>
+          <p:nvPr/>
+        </p:nvGraphicFramePr>
+        <p:xfrm>
+          <a:off x="640080" y="1737360"/>
+          <a:ext cx="10881360" cy="2359152"/>
+        </p:xfrm>
+        <a:graphic>
+          <a:graphicData uri="http://schemas.openxmlformats.org/drawingml/2006/table">
+            <a:tbl>
+              <a:tblPr firstRow="1">
+                <a:tableStyleId>{5C22544A-7EE6-4342-B048-85BDC9FD1C3A}</a:tableStyleId>
+              </a:tblPr>
+              <a:tblGrid>
+                <a:gridCol w="3474720"/>
+                <a:gridCol w="1828800"/>
+                <a:gridCol w="1828800"/>
+                <a:gridCol w="1828800"/>
+                <a:gridCol w="1920240"/>
+              </a:tblGrid>
+              <a:tr h="384048">
+                <a:tc>
+                  <a:txBody>
+                    <a:bodyPr wrap="square"/>
+                    <a:lstStyle/>
+                    <a:p>
+                      <a:pPr algn="l"/>
+                      <a:r>
+                        <a:rPr sz="1100" b="1">
+                          <a:solidFill>
+                            <a:srgbClr val="FFFFFF"/>
+                          </a:solidFill>
+                          <a:latin typeface="Calibri"/>
+                        </a:rPr>
+                        <a:t>Method</a:t>
+                      </a:r>
+                    </a:p>
+                  </a:txBody>
+                  <a:tcPr marL="91440" marR="73152" marT="18288" marB="18288">
+                    <a:solidFill>
+                      <a:srgbClr val="1E2761"/>
+                    </a:solidFill>
+                  </a:tcPr>
+                </a:tc>
+                <a:tc>
+                  <a:txBody>
+                    <a:bodyPr wrap="square"/>
+                    <a:lstStyle/>
+                    <a:p>
+                      <a:pPr algn="r"/>
+                      <a:r>
+                        <a:rPr sz="1100" b="1">
+                          <a:solidFill>
+                            <a:srgbClr val="FFFFFF"/>
+                          </a:solidFill>
+                          <a:latin typeface="Calibri"/>
+                        </a:rPr>
+                        <a:t>Accuracy</a:t>
+                      </a:r>
+                    </a:p>
+                  </a:txBody>
+                  <a:tcPr marL="91440" marR="73152" marT="18288" marB="18288">
+                    <a:solidFill>
+                      <a:srgbClr val="1E2761"/>
+                    </a:solidFill>
+                  </a:tcPr>
+                </a:tc>
+                <a:tc>
+                  <a:txBody>
+                    <a:bodyPr wrap="square"/>
+                    <a:lstStyle/>
+                    <a:p>
+                      <a:pPr algn="r"/>
+                      <a:r>
+                        <a:rPr sz="1100" b="1">
+                          <a:solidFill>
+                            <a:srgbClr val="FFFFFF"/>
+                          </a:solidFill>
+                          <a:latin typeface="Calibri"/>
+                        </a:rPr>
+                        <a:t>DP diff</a:t>
+                      </a:r>
+                    </a:p>
+                  </a:txBody>
+                  <a:tcPr marL="91440" marR="73152" marT="18288" marB="18288">
+                    <a:solidFill>
+                      <a:srgbClr val="1E2761"/>
+                    </a:solidFill>
+                  </a:tcPr>
+                </a:tc>
+                <a:tc>
+                  <a:txBody>
+                    <a:bodyPr wrap="square"/>
+                    <a:lstStyle/>
+                    <a:p>
+                      <a:pPr algn="r"/>
+                      <a:r>
+                        <a:rPr sz="1100" b="1">
+                          <a:solidFill>
+                            <a:srgbClr val="FFFFFF"/>
+                          </a:solidFill>
+                          <a:latin typeface="Calibri"/>
+                        </a:rPr>
+                        <a:t>EO diff</a:t>
+                      </a:r>
+                    </a:p>
+                  </a:txBody>
+                  <a:tcPr marL="91440" marR="73152" marT="18288" marB="18288">
+                    <a:solidFill>
+                      <a:srgbClr val="1E2761"/>
+                    </a:solidFill>
+                  </a:tcPr>
+                </a:tc>
+                <a:tc>
+                  <a:txBody>
+                    <a:bodyPr wrap="square"/>
+                    <a:lstStyle/>
+                    <a:p>
+                      <a:pPr algn="r"/>
+                      <a:r>
+                        <a:rPr sz="1100" b="1">
+                          <a:solidFill>
+                            <a:srgbClr val="FFFFFF"/>
+                          </a:solidFill>
+                          <a:latin typeface="Calibri"/>
+                        </a:rPr>
+                        <a:t>Disp. impact</a:t>
+                      </a:r>
+                    </a:p>
+                  </a:txBody>
+                  <a:tcPr marL="91440" marR="73152" marT="18288" marB="18288">
+                    <a:solidFill>
+                      <a:srgbClr val="1E2761"/>
+                    </a:solidFill>
+                  </a:tcPr>
+                </a:tc>
+              </a:tr>
+              <a:tr h="329184">
+                <a:tc>
+                  <a:txBody>
+                    <a:bodyPr wrap="square"/>
+                    <a:lstStyle/>
+                    <a:p>
+                      <a:pPr algn="l"/>
+                      <a:r>
+                        <a:rPr sz="1150" b="0">
+                          <a:solidFill>
+                            <a:srgbClr val="1B1B1F"/>
+                          </a:solidFill>
+                          <a:latin typeface="Calibri"/>
+                        </a:rPr>
+                        <a:t>Baseline (no mitigation)</a:t>
+                      </a:r>
+                    </a:p>
+                  </a:txBody>
+                  <a:tcPr marL="91440" marR="73152" marT="18288" marB="18288">
+                    <a:solidFill>
+                      <a:srgbClr val="FFFFFF"/>
+                    </a:solidFill>
+                  </a:tcPr>
+                </a:tc>
+                <a:tc>
+                  <a:txBody>
+                    <a:bodyPr wrap="square"/>
+                    <a:lstStyle/>
+                    <a:p>
+                      <a:pPr algn="r"/>
+                      <a:r>
+                        <a:rPr sz="1150" b="0">
+                          <a:solidFill>
+                            <a:srgbClr val="1B1B1F"/>
+                          </a:solidFill>
+                          <a:latin typeface="Calibri"/>
+                        </a:rPr>
+                        <a:t>0.8469</a:t>
+                      </a:r>
+                    </a:p>
+                  </a:txBody>
+                  <a:tcPr marL="91440" marR="73152" marT="18288" marB="18288">
+                    <a:solidFill>
+                      <a:srgbClr val="FFFFFF"/>
+                    </a:solidFill>
+                  </a:tcPr>
+                </a:tc>
+                <a:tc>
+                  <a:txBody>
+                    <a:bodyPr wrap="square"/>
+                    <a:lstStyle/>
+                    <a:p>
+                      <a:pPr algn="r"/>
+                      <a:r>
+                        <a:rPr sz="1150" b="0">
+                          <a:solidFill>
+                            <a:srgbClr val="1B1B1F"/>
+                          </a:solidFill>
+                          <a:latin typeface="Calibri"/>
+                        </a:rPr>
+                        <a:t>0.1861</a:t>
+                      </a:r>
+                    </a:p>
+                  </a:txBody>
+                  <a:tcPr marL="91440" marR="73152" marT="18288" marB="18288">
+                    <a:solidFill>
+                      <a:srgbClr val="FFFFFF"/>
+                    </a:solidFill>
+                  </a:tcPr>
+                </a:tc>
+                <a:tc>
+                  <a:txBody>
+                    <a:bodyPr wrap="square"/>
+                    <a:lstStyle/>
+                    <a:p>
+                      <a:pPr algn="r"/>
+                      <a:r>
+                        <a:rPr sz="1150" b="0">
+                          <a:solidFill>
+                            <a:srgbClr val="1B1B1F"/>
+                          </a:solidFill>
+                          <a:latin typeface="Calibri"/>
+                        </a:rPr>
+                        <a:t>0.0949</a:t>
+                      </a:r>
+                    </a:p>
+                  </a:txBody>
+                  <a:tcPr marL="91440" marR="73152" marT="18288" marB="18288">
+                    <a:solidFill>
+                      <a:srgbClr val="FFFFFF"/>
+                    </a:solidFill>
+                  </a:tcPr>
+                </a:tc>
+                <a:tc>
+                  <a:txBody>
+                    <a:bodyPr wrap="square"/>
+                    <a:lstStyle/>
+                    <a:p>
+                      <a:pPr algn="r"/>
+                      <a:r>
+                        <a:rPr sz="1150" b="0">
+                          <a:solidFill>
+                            <a:srgbClr val="1B1B1F"/>
+                          </a:solidFill>
+                          <a:latin typeface="Calibri"/>
+                        </a:rPr>
+                        <a:t>0.2996</a:t>
+                      </a:r>
+                    </a:p>
+                  </a:txBody>
+                  <a:tcPr marL="91440" marR="73152" marT="18288" marB="18288">
+                    <a:solidFill>
+                      <a:srgbClr val="FFFFFF"/>
+                    </a:solidFill>
+                  </a:tcPr>
+                </a:tc>
+              </a:tr>
+              <a:tr h="329184">
+                <a:tc>
+                  <a:txBody>
+                    <a:bodyPr wrap="square"/>
+                    <a:lstStyle/>
+                    <a:p>
+                      <a:pPr algn="l"/>
+                      <a:r>
+                        <a:rPr sz="1150" b="1">
+                          <a:solidFill>
+                            <a:srgbClr val="1B1B1F"/>
+                          </a:solidFill>
+                          <a:latin typeface="Calibri"/>
+                        </a:rPr>
+                        <a:t>Exponentiated Gradient (DP)</a:t>
+                      </a:r>
+                    </a:p>
+                  </a:txBody>
+                  <a:tcPr marL="91440" marR="73152" marT="18288" marB="18288">
+                    <a:solidFill>
+                      <a:srgbClr val="FDF3E2"/>
+                    </a:solidFill>
+                  </a:tcPr>
+                </a:tc>
+                <a:tc>
+                  <a:txBody>
+                    <a:bodyPr wrap="square"/>
+                    <a:lstStyle/>
+                    <a:p>
+                      <a:pPr algn="r"/>
+                      <a:r>
+                        <a:rPr sz="1150" b="1">
+                          <a:solidFill>
+                            <a:srgbClr val="1B1B1F"/>
+                          </a:solidFill>
+                          <a:latin typeface="Calibri"/>
+                        </a:rPr>
+                        <a:t>0.8282</a:t>
+                      </a:r>
+                    </a:p>
+                  </a:txBody>
+                  <a:tcPr marL="91440" marR="73152" marT="18288" marB="18288">
+                    <a:solidFill>
+                      <a:srgbClr val="FDF3E2"/>
+                    </a:solidFill>
+                  </a:tcPr>
+                </a:tc>
+                <a:tc>
+                  <a:txBody>
+                    <a:bodyPr wrap="square"/>
+                    <a:lstStyle/>
+                    <a:p>
+                      <a:pPr algn="r"/>
+                      <a:r>
+                        <a:rPr sz="1150" b="1">
+                          <a:solidFill>
+                            <a:srgbClr val="1B1B1F"/>
+                          </a:solidFill>
+                          <a:latin typeface="Calibri"/>
+                        </a:rPr>
+                        <a:t>0.0178</a:t>
+                      </a:r>
+                    </a:p>
+                  </a:txBody>
+                  <a:tcPr marL="91440" marR="73152" marT="18288" marB="18288">
+                    <a:solidFill>
+                      <a:srgbClr val="FDF3E2"/>
+                    </a:solidFill>
+                  </a:tcPr>
+                </a:tc>
+                <a:tc>
+                  <a:txBody>
+                    <a:bodyPr wrap="square"/>
+                    <a:lstStyle/>
+                    <a:p>
+                      <a:pPr algn="r"/>
+                      <a:r>
+                        <a:rPr sz="1150" b="1">
+                          <a:solidFill>
+                            <a:srgbClr val="1B1B1F"/>
+                          </a:solidFill>
+                          <a:latin typeface="Calibri"/>
+                        </a:rPr>
+                        <a:t>0.2802</a:t>
+                      </a:r>
+                    </a:p>
+                  </a:txBody>
+                  <a:tcPr marL="91440" marR="73152" marT="18288" marB="18288">
+                    <a:solidFill>
+                      <a:srgbClr val="FDF3E2"/>
+                    </a:solidFill>
+                  </a:tcPr>
+                </a:tc>
+                <a:tc>
+                  <a:txBody>
+                    <a:bodyPr wrap="square"/>
+                    <a:lstStyle/>
+                    <a:p>
+                      <a:pPr algn="r"/>
+                      <a:r>
+                        <a:rPr sz="1150" b="1">
+                          <a:solidFill>
+                            <a:srgbClr val="1B1B1F"/>
+                          </a:solidFill>
+                          <a:latin typeface="Calibri"/>
+                        </a:rPr>
+                        <a:t>0.8951</a:t>
+                      </a:r>
+                    </a:p>
+                  </a:txBody>
+                  <a:tcPr marL="91440" marR="73152" marT="18288" marB="18288">
+                    <a:solidFill>
+                      <a:srgbClr val="FDF3E2"/>
+                    </a:solidFill>
+                  </a:tcPr>
+                </a:tc>
+              </a:tr>
+              <a:tr h="329184">
+                <a:tc>
+                  <a:txBody>
+                    <a:bodyPr wrap="square"/>
+                    <a:lstStyle/>
+                    <a:p>
+                      <a:pPr algn="l"/>
+                      <a:r>
+                        <a:rPr sz="1150" b="0">
+                          <a:solidFill>
+                            <a:srgbClr val="1B1B1F"/>
+                          </a:solidFill>
+                          <a:latin typeface="Calibri"/>
+                        </a:rPr>
+                        <a:t>Exponentiated Gradient (EO)</a:t>
+                      </a:r>
+                    </a:p>
+                  </a:txBody>
+                  <a:tcPr marL="91440" marR="73152" marT="18288" marB="18288">
+                    <a:solidFill>
+                      <a:srgbClr val="FFFFFF"/>
+                    </a:solidFill>
+                  </a:tcPr>
+                </a:tc>
+                <a:tc>
+                  <a:txBody>
+                    <a:bodyPr wrap="square"/>
+                    <a:lstStyle/>
+                    <a:p>
+                      <a:pPr algn="r"/>
+                      <a:r>
+                        <a:rPr sz="1150" b="0">
+                          <a:solidFill>
+                            <a:srgbClr val="1B1B1F"/>
+                          </a:solidFill>
+                          <a:latin typeface="Calibri"/>
+                        </a:rPr>
+                        <a:t>0.8361</a:t>
+                      </a:r>
+                    </a:p>
+                  </a:txBody>
+                  <a:tcPr marL="91440" marR="73152" marT="18288" marB="18288">
+                    <a:solidFill>
+                      <a:srgbClr val="FFFFFF"/>
+                    </a:solidFill>
+                  </a:tcPr>
+                </a:tc>
+                <a:tc>
+                  <a:txBody>
+                    <a:bodyPr wrap="square"/>
+                    <a:lstStyle/>
+                    <a:p>
+                      <a:pPr algn="r"/>
+                      <a:r>
+                        <a:rPr sz="1150" b="0">
+                          <a:solidFill>
+                            <a:srgbClr val="1B1B1F"/>
+                          </a:solidFill>
+                          <a:latin typeface="Calibri"/>
+                        </a:rPr>
+                        <a:t>0.1072</a:t>
+                      </a:r>
+                    </a:p>
+                  </a:txBody>
+                  <a:tcPr marL="91440" marR="73152" marT="18288" marB="18288">
+                    <a:solidFill>
+                      <a:srgbClr val="FFFFFF"/>
+                    </a:solidFill>
+                  </a:tcPr>
+                </a:tc>
+                <a:tc>
+                  <a:txBody>
+                    <a:bodyPr wrap="square"/>
+                    <a:lstStyle/>
+                    <a:p>
+                      <a:pPr algn="r"/>
+                      <a:r>
+                        <a:rPr sz="1150" b="0">
+                          <a:solidFill>
+                            <a:srgbClr val="1B1B1F"/>
+                          </a:solidFill>
+                          <a:latin typeface="Calibri"/>
+                        </a:rPr>
+                        <a:t>0.0320</a:t>
+                      </a:r>
+                    </a:p>
+                  </a:txBody>
+                  <a:tcPr marL="91440" marR="73152" marT="18288" marB="18288">
+                    <a:solidFill>
+                      <a:srgbClr val="FFFFFF"/>
+                    </a:solidFill>
+                  </a:tcPr>
+                </a:tc>
+                <a:tc>
+                  <a:txBody>
+                    <a:bodyPr wrap="square"/>
+                    <a:lstStyle/>
+                    <a:p>
+                      <a:pPr algn="r"/>
+                      <a:r>
+                        <a:rPr sz="1150" b="0">
+                          <a:solidFill>
+                            <a:srgbClr val="1B1B1F"/>
+                          </a:solidFill>
+                          <a:latin typeface="Calibri"/>
+                        </a:rPr>
+                        <a:t>0.5214</a:t>
+                      </a:r>
+                    </a:p>
+                  </a:txBody>
+                  <a:tcPr marL="91440" marR="73152" marT="18288" marB="18288">
+                    <a:solidFill>
+                      <a:srgbClr val="FFFFFF"/>
+                    </a:solidFill>
+                  </a:tcPr>
+                </a:tc>
+              </a:tr>
+              <a:tr h="329184">
+                <a:tc>
+                  <a:txBody>
+                    <a:bodyPr wrap="square"/>
+                    <a:lstStyle/>
+                    <a:p>
+                      <a:pPr algn="l"/>
+                      <a:r>
+                        <a:rPr sz="1150" b="0">
+                          <a:solidFill>
+                            <a:srgbClr val="1B1B1F"/>
+                          </a:solidFill>
+                          <a:latin typeface="Calibri"/>
+                        </a:rPr>
+                        <a:t>GridSearch (DP)</a:t>
+                      </a:r>
+                    </a:p>
+                  </a:txBody>
+                  <a:tcPr marL="91440" marR="73152" marT="18288" marB="18288">
+                    <a:solidFill>
+                      <a:srgbClr val="F4F6FA"/>
+                    </a:solidFill>
+                  </a:tcPr>
+                </a:tc>
+                <a:tc>
+                  <a:txBody>
+                    <a:bodyPr wrap="square"/>
+                    <a:lstStyle/>
+                    <a:p>
+                      <a:pPr algn="r"/>
+                      <a:r>
+                        <a:rPr sz="1150" b="0">
+                          <a:solidFill>
+                            <a:srgbClr val="1B1B1F"/>
+                          </a:solidFill>
+                          <a:latin typeface="Calibri"/>
+                        </a:rPr>
+                        <a:t>0.8265</a:t>
+                      </a:r>
+                    </a:p>
+                  </a:txBody>
+                  <a:tcPr marL="91440" marR="73152" marT="18288" marB="18288">
+                    <a:solidFill>
+                      <a:srgbClr val="F4F6FA"/>
+                    </a:solidFill>
+                  </a:tcPr>
+                </a:tc>
+                <a:tc>
+                  <a:txBody>
+                    <a:bodyPr wrap="square"/>
+                    <a:lstStyle/>
+                    <a:p>
+                      <a:pPr algn="r"/>
+                      <a:r>
+                        <a:rPr sz="1150" b="0">
+                          <a:solidFill>
+                            <a:srgbClr val="1B1B1F"/>
+                          </a:solidFill>
+                          <a:latin typeface="Calibri"/>
+                        </a:rPr>
+                        <a:t>0.0150</a:t>
+                      </a:r>
+                    </a:p>
+                  </a:txBody>
+                  <a:tcPr marL="91440" marR="73152" marT="18288" marB="18288">
+                    <a:solidFill>
+                      <a:srgbClr val="F4F6FA"/>
+                    </a:solidFill>
+                  </a:tcPr>
+                </a:tc>
+                <a:tc>
+                  <a:txBody>
+                    <a:bodyPr wrap="square"/>
+                    <a:lstStyle/>
+                    <a:p>
+                      <a:pPr algn="r"/>
+                      <a:r>
+                        <a:rPr sz="1150" b="0">
+                          <a:solidFill>
+                            <a:srgbClr val="1B1B1F"/>
+                          </a:solidFill>
+                          <a:latin typeface="Calibri"/>
+                        </a:rPr>
+                        <a:t>0.3040</a:t>
+                      </a:r>
+                    </a:p>
+                  </a:txBody>
+                  <a:tcPr marL="91440" marR="73152" marT="18288" marB="18288">
+                    <a:solidFill>
+                      <a:srgbClr val="F4F6FA"/>
+                    </a:solidFill>
+                  </a:tcPr>
+                </a:tc>
+                <a:tc>
+                  <a:txBody>
+                    <a:bodyPr wrap="square"/>
+                    <a:lstStyle/>
+                    <a:p>
+                      <a:pPr algn="r"/>
+                      <a:r>
+                        <a:rPr sz="1150" b="0">
+                          <a:solidFill>
+                            <a:srgbClr val="1B1B1F"/>
+                          </a:solidFill>
+                          <a:latin typeface="Calibri"/>
+                        </a:rPr>
+                        <a:t>0.9859</a:t>
+                      </a:r>
+                    </a:p>
+                  </a:txBody>
+                  <a:tcPr marL="91440" marR="73152" marT="18288" marB="18288">
+                    <a:solidFill>
+                      <a:srgbClr val="F4F6FA"/>
+                    </a:solidFill>
+                  </a:tcPr>
+                </a:tc>
+              </a:tr>
+              <a:tr h="329184">
+                <a:tc>
+                  <a:txBody>
+                    <a:bodyPr wrap="square"/>
+                    <a:lstStyle/>
+                    <a:p>
+                      <a:pPr algn="l"/>
+                      <a:r>
+                        <a:rPr sz="1150" b="0">
+                          <a:solidFill>
+                            <a:srgbClr val="1B1B1F"/>
+                          </a:solidFill>
+                          <a:latin typeface="Calibri"/>
+                        </a:rPr>
+                        <a:t>Prejudice Remover</a:t>
+                      </a:r>
+                    </a:p>
+                  </a:txBody>
+                  <a:tcPr marL="91440" marR="73152" marT="18288" marB="18288">
+                    <a:solidFill>
+                      <a:srgbClr val="FFFFFF"/>
+                    </a:solidFill>
+                  </a:tcPr>
+                </a:tc>
+                <a:tc>
+                  <a:txBody>
+                    <a:bodyPr wrap="square"/>
+                    <a:lstStyle/>
+                    <a:p>
+                      <a:pPr algn="r"/>
+                      <a:r>
+                        <a:rPr sz="1150" b="0">
+                          <a:solidFill>
+                            <a:srgbClr val="1B1B1F"/>
+                          </a:solidFill>
+                          <a:latin typeface="Calibri"/>
+                        </a:rPr>
+                        <a:t>0.8365</a:t>
+                      </a:r>
+                    </a:p>
+                  </a:txBody>
+                  <a:tcPr marL="91440" marR="73152" marT="18288" marB="18288">
+                    <a:solidFill>
+                      <a:srgbClr val="FFFFFF"/>
+                    </a:solidFill>
+                  </a:tcPr>
+                </a:tc>
+                <a:tc>
+                  <a:txBody>
+                    <a:bodyPr wrap="square"/>
+                    <a:lstStyle/>
+                    <a:p>
+                      <a:pPr algn="r"/>
+                      <a:r>
+                        <a:rPr sz="1150" b="0">
+                          <a:solidFill>
+                            <a:srgbClr val="1B1B1F"/>
+                          </a:solidFill>
+                          <a:latin typeface="Calibri"/>
+                        </a:rPr>
+                        <a:t>0.0645</a:t>
+                      </a:r>
+                    </a:p>
+                  </a:txBody>
+                  <a:tcPr marL="91440" marR="73152" marT="18288" marB="18288">
+                    <a:solidFill>
+                      <a:srgbClr val="FFFFFF"/>
+                    </a:solidFill>
+                  </a:tcPr>
+                </a:tc>
+                <a:tc>
+                  <a:txBody>
+                    <a:bodyPr wrap="square"/>
+                    <a:lstStyle/>
+                    <a:p>
+                      <a:pPr algn="r"/>
+                      <a:r>
+                        <a:rPr sz="1150" b="0">
+                          <a:solidFill>
+                            <a:srgbClr val="1B1B1F"/>
+                          </a:solidFill>
+                          <a:latin typeface="Calibri"/>
+                        </a:rPr>
+                        <a:t>0.1884</a:t>
+                      </a:r>
+                    </a:p>
+                  </a:txBody>
+                  <a:tcPr marL="91440" marR="73152" marT="18288" marB="18288">
+                    <a:solidFill>
+                      <a:srgbClr val="FFFFFF"/>
+                    </a:solidFill>
+                  </a:tcPr>
+                </a:tc>
+                <a:tc>
+                  <a:txBody>
+                    <a:bodyPr wrap="square"/>
+                    <a:lstStyle/>
+                    <a:p>
+                      <a:pPr algn="r"/>
+                      <a:r>
+                        <a:rPr sz="1150" b="0">
+                          <a:solidFill>
+                            <a:srgbClr val="1B1B1F"/>
+                          </a:solidFill>
+                          <a:latin typeface="Calibri"/>
+                        </a:rPr>
+                        <a:t>0.6860</a:t>
+                      </a:r>
+                    </a:p>
+                  </a:txBody>
+                  <a:tcPr marL="91440" marR="73152" marT="18288" marB="18288">
+                    <a:solidFill>
+                      <a:srgbClr val="FFFFFF"/>
+                    </a:solidFill>
+                  </a:tcPr>
+                </a:tc>
+              </a:tr>
+              <a:tr h="329184">
+                <a:tc>
+                  <a:txBody>
+                    <a:bodyPr wrap="square"/>
+                    <a:lstStyle/>
+                    <a:p>
+                      <a:pPr algn="l"/>
+                      <a:r>
+                        <a:rPr sz="1150" b="0">
+                          <a:solidFill>
+                            <a:srgbClr val="1B1B1F"/>
+                          </a:solidFill>
+                          <a:latin typeface="Calibri"/>
+                        </a:rPr>
+                        <a:t>Adversarial Debiasing</a:t>
+                      </a:r>
+                    </a:p>
+                  </a:txBody>
+                  <a:tcPr marL="91440" marR="73152" marT="18288" marB="18288">
+                    <a:solidFill>
+                      <a:srgbClr val="F4F6FA"/>
+                    </a:solidFill>
+                  </a:tcPr>
+                </a:tc>
+                <a:tc>
+                  <a:txBody>
+                    <a:bodyPr wrap="square"/>
+                    <a:lstStyle/>
+                    <a:p>
+                      <a:pPr algn="r"/>
+                      <a:r>
+                        <a:rPr sz="1150" b="0">
+                          <a:solidFill>
+                            <a:srgbClr val="1B1B1F"/>
+                          </a:solidFill>
+                          <a:latin typeface="Calibri"/>
+                        </a:rPr>
+                        <a:t>0.8260</a:t>
+                      </a:r>
+                    </a:p>
+                  </a:txBody>
+                  <a:tcPr marL="91440" marR="73152" marT="18288" marB="18288">
+                    <a:solidFill>
+                      <a:srgbClr val="F4F6FA"/>
+                    </a:solidFill>
+                  </a:tcPr>
+                </a:tc>
+                <a:tc>
+                  <a:txBody>
+                    <a:bodyPr wrap="square"/>
+                    <a:lstStyle/>
+                    <a:p>
+                      <a:pPr algn="r"/>
+                      <a:r>
+                        <a:rPr sz="1150" b="0">
+                          <a:solidFill>
+                            <a:srgbClr val="1B1B1F"/>
+                          </a:solidFill>
+                          <a:latin typeface="Calibri"/>
+                        </a:rPr>
+                        <a:t>0.0202</a:t>
+                      </a:r>
+                    </a:p>
+                  </a:txBody>
+                  <a:tcPr marL="91440" marR="73152" marT="18288" marB="18288">
+                    <a:solidFill>
+                      <a:srgbClr val="F4F6FA"/>
+                    </a:solidFill>
+                  </a:tcPr>
+                </a:tc>
+                <a:tc>
+                  <a:txBody>
+                    <a:bodyPr wrap="square"/>
+                    <a:lstStyle/>
+                    <a:p>
+                      <a:pPr algn="r"/>
+                      <a:r>
+                        <a:rPr sz="1150" b="0">
+                          <a:solidFill>
+                            <a:srgbClr val="1B1B1F"/>
+                          </a:solidFill>
+                          <a:latin typeface="Calibri"/>
+                        </a:rPr>
+                        <a:t>0.2504</a:t>
+                      </a:r>
+                    </a:p>
+                  </a:txBody>
+                  <a:tcPr marL="91440" marR="73152" marT="18288" marB="18288">
+                    <a:solidFill>
+                      <a:srgbClr val="F4F6FA"/>
+                    </a:solidFill>
+                  </a:tcPr>
+                </a:tc>
+                <a:tc>
+                  <a:txBody>
+                    <a:bodyPr wrap="square"/>
+                    <a:lstStyle/>
+                    <a:p>
+                      <a:pPr algn="r"/>
+                      <a:r>
+                        <a:rPr sz="1150" b="0">
+                          <a:solidFill>
+                            <a:srgbClr val="1B1B1F"/>
+                          </a:solidFill>
+                          <a:latin typeface="Calibri"/>
+                        </a:rPr>
+                        <a:t>0.8894</a:t>
+                      </a:r>
+                    </a:p>
+                  </a:txBody>
+                  <a:tcPr marL="91440" marR="73152" marT="18288" marB="18288">
+                    <a:solidFill>
+                      <a:srgbClr val="F4F6FA"/>
+                    </a:solidFill>
+                  </a:tcPr>
+                </a:tc>
+              </a:tr>
+            </a:tbl>
+          </a:graphicData>
+        </a:graphic>
+      </p:graphicFrame>
+      <p:sp>
+        <p:nvSpPr>
+          <p:cNvPr id="5" name="TextBox 4"/>
+          <p:cNvSpPr txBox="1"/>
+          <p:nvPr/>
+        </p:nvSpPr>
+        <p:spPr>
+          <a:xfrm>
+            <a:off x="640080" y="4434840"/>
+            <a:ext cx="10881360" cy="310896"/>
+          </a:xfrm>
+          <a:prstGeom prst="rect">
+            <a:avLst/>
+          </a:prstGeom>
+          <a:noFill/>
+        </p:spPr>
+        <p:txBody>
+          <a:bodyPr wrap="square">
+            <a:spAutoFit/>
+          </a:bodyPr>
+          <a:lstStyle/>
+          <a:p>
+            <a:pPr algn="l">
+              <a:lnSpc>
+                <a:spcPct val="100000"/>
+              </a:lnSpc>
+            </a:pPr>
+            <a:r>
+              <a:rPr sz="1200" b="1">
+                <a:solidFill>
+                  <a:srgbClr val="1E2761"/>
+                </a:solidFill>
+                <a:latin typeface="Calibri"/>
+              </a:rPr>
+              <a:t>Prejudice Remover and Adversarial Debiasing were implemented from their papers in PyTorch, not taken from a library.</a:t>
+            </a:r>
+          </a:p>
+        </p:txBody>
+      </p:sp>
+      <p:sp>
+        <p:nvSpPr>
+          <p:cNvPr id="6" name="Rounded Rectangle 5"/>
+          <p:cNvSpPr/>
+          <p:nvPr/>
+        </p:nvSpPr>
+        <p:spPr>
+          <a:xfrm>
+            <a:off x="640080" y="4800600"/>
+            <a:ext cx="10881360" cy="1417320"/>
+          </a:xfrm>
+          <a:prstGeom prst="roundRect">
+            <a:avLst>
+              <a:gd name="adj" fmla="val 4000"/>
+            </a:avLst>
+          </a:prstGeom>
+          <a:solidFill>
+            <a:srgbClr val="F4F6FA"/>
+          </a:solidFill>
+          <a:ln w="9525">
+            <a:solidFill>
+              <a:srgbClr val="D8DDE8"/>
+            </a:solidFill>
+          </a:ln>
+          <a:effectLst/>
+        </p:spPr>
+        <p:style>
+          <a:lnRef idx="1">
+            <a:schemeClr val="accent1"/>
+          </a:lnRef>
+          <a:fillRef idx="3">
+            <a:schemeClr val="accent1"/>
+          </a:fillRef>
+          <a:effectRef idx="2">
+            <a:schemeClr val="accent1"/>
+          </a:effectRef>
+          <a:fontRef idx="minor">
+            <a:schemeClr val="lt1"/>
+          </a:fontRef>
+        </p:style>
+        <p:txBody>
+          <a:bodyPr rtlCol="0" anchor="ctr"/>
+          <a:lstStyle/>
+          <a:p/>
+        </p:txBody>
+      </p:sp>
+      <p:sp>
+        <p:nvSpPr>
+          <p:cNvPr id="7" name="TextBox 6"/>
+          <p:cNvSpPr txBox="1"/>
+          <p:nvPr/>
+        </p:nvSpPr>
+        <p:spPr>
+          <a:xfrm>
+            <a:off x="914400" y="4937760"/>
+            <a:ext cx="10332720" cy="1143000"/>
+          </a:xfrm>
+          <a:prstGeom prst="rect">
+            <a:avLst/>
+          </a:prstGeom>
+          <a:noFill/>
+        </p:spPr>
+        <p:txBody>
+          <a:bodyPr wrap="square">
+            <a:spAutoFit/>
+          </a:bodyPr>
+          <a:lstStyle/>
+          <a:p>
+            <a:pPr algn="l">
+              <a:lnSpc>
+                <a:spcPct val="100000"/>
+              </a:lnSpc>
+            </a:pPr>
+            <a:r>
+              <a:rPr sz="1350" b="0">
+                <a:solidFill>
+                  <a:srgbClr val="1B1B1F"/>
+                </a:solidFill>
+                <a:latin typeface="Calibri"/>
+              </a:rPr>
+              <a:t>Verified by degenerate cases: with η = 0 the Prejudice Remover penalty vanishes and it must reduce to per-group logistic regression — it reproduces it to 99.88% prediction agreement. Both fairness knobs are checked for monotonicity, which is what would catch a sign error. 4/4 passing.</a:t>
+            </a:r>
+          </a:p>
+        </p:txBody>
+      </p:sp>
+    </p:spTree>
+  </p:cSld>
+  <p:clrMapOvr>
+    <a:masterClrMapping/>
+  </p:clrMapOvr>
+</p:sld>
+</file>
+
+<file path=ppt/slides/slide16.xml><?xml version="1.0" encoding="utf-8"?>
+<p:sld xmlns:a="http://schemas.openxmlformats.org/drawingml/2006/main" xmlns:p="http://schemas.openxmlformats.org/presentationml/2006/main" xmlns:r="http://schemas.openxmlformats.org/officeDocument/2006/relationships">
+  <p:cSld>
+    <p:spTree>
+      <p:nvGrpSpPr>
+        <p:cNvPr id="1" name=""/>
+        <p:cNvGrpSpPr/>
+        <p:nvPr/>
+      </p:nvGrpSpPr>
+      <p:grpSpPr/>
+      <p:sp>
+        <p:nvSpPr>
+          <p:cNvPr id="2" name="TextBox 1"/>
+          <p:cNvSpPr txBox="1"/>
+          <p:nvPr/>
+        </p:nvSpPr>
+        <p:spPr>
+          <a:xfrm>
+            <a:off x="640080" y="384048"/>
+            <a:ext cx="10881360" cy="640080"/>
+          </a:xfrm>
+          <a:prstGeom prst="rect">
+            <a:avLst/>
+          </a:prstGeom>
+          <a:noFill/>
+        </p:spPr>
+        <p:txBody>
+          <a:bodyPr wrap="square">
+            <a:spAutoFit/>
+          </a:bodyPr>
+          <a:lstStyle/>
+          <a:p>
+            <a:pPr algn="l">
+              <a:lnSpc>
+                <a:spcPct val="100000"/>
+              </a:lnSpc>
+            </a:pPr>
+            <a:r>
+              <a:rPr sz="2600" b="1">
+                <a:solidFill>
+                  <a:srgbClr val="1E2761"/>
+                </a:solidFill>
+                <a:latin typeface="Cambria"/>
+              </a:rPr>
+              <a:t>Result 4 — Two of Our Own Predictions Were Wrong</a:t>
+            </a:r>
+          </a:p>
+        </p:txBody>
+      </p:sp>
+      <p:sp>
+        <p:nvSpPr>
+          <p:cNvPr id="3" name="TextBox 2"/>
+          <p:cNvSpPr txBox="1"/>
+          <p:nvPr/>
+        </p:nvSpPr>
+        <p:spPr>
+          <a:xfrm>
+            <a:off x="640080" y="1033271"/>
+            <a:ext cx="10881360" cy="384048"/>
+          </a:xfrm>
+          <a:prstGeom prst="rect">
+            <a:avLst/>
+          </a:prstGeom>
+          <a:noFill/>
+        </p:spPr>
+        <p:txBody>
+          <a:bodyPr wrap="square">
+            <a:spAutoFit/>
+          </a:bodyPr>
+          <a:lstStyle/>
+          <a:p>
+            <a:pPr algn="l">
+              <a:lnSpc>
+                <a:spcPct val="100000"/>
+              </a:lnSpc>
+            </a:pPr>
+            <a:r>
+              <a:rPr sz="1350" b="0">
+                <a:solidFill>
+                  <a:srgbClr val="5A6270"/>
+                </a:solidFill>
+                <a:latin typeface="Calibri"/>
+              </a:rPr>
+              <a:t>The three ablation questions, answered against the data rather than against intuition.</a:t>
+            </a:r>
+          </a:p>
+        </p:txBody>
+      </p:sp>
+      <p:sp>
+        <p:nvSpPr>
+          <p:cNvPr id="4" name="Rounded Rectangle 3"/>
+          <p:cNvSpPr/>
+          <p:nvPr/>
+        </p:nvSpPr>
+        <p:spPr>
+          <a:xfrm>
+            <a:off x="640080" y="1645920"/>
+            <a:ext cx="3429000" cy="2103120"/>
+          </a:xfrm>
+          <a:prstGeom prst="roundRect">
+            <a:avLst>
+              <a:gd name="adj" fmla="val 4000"/>
+            </a:avLst>
+          </a:prstGeom>
+          <a:solidFill>
+            <a:srgbClr val="F4F6FA"/>
+          </a:solidFill>
+          <a:ln w="9525">
+            <a:solidFill>
+              <a:srgbClr val="D8DDE8"/>
+            </a:solidFill>
+          </a:ln>
+          <a:effectLst/>
+        </p:spPr>
+        <p:style>
+          <a:lnRef idx="1">
+            <a:schemeClr val="accent1"/>
+          </a:lnRef>
+          <a:fillRef idx="3">
+            <a:schemeClr val="accent1"/>
+          </a:fillRef>
+          <a:effectRef idx="2">
+            <a:schemeClr val="accent1"/>
+          </a:effectRef>
+          <a:fontRef idx="minor">
+            <a:schemeClr val="lt1"/>
+          </a:fontRef>
+        </p:style>
+        <p:txBody>
+          <a:bodyPr rtlCol="0" anchor="ctr"/>
+          <a:lstStyle/>
+          <a:p/>
+        </p:txBody>
+      </p:sp>
+      <p:sp>
+        <p:nvSpPr>
+          <p:cNvPr id="5" name="TextBox 4"/>
+          <p:cNvSpPr txBox="1"/>
+          <p:nvPr/>
+        </p:nvSpPr>
+        <p:spPr>
+          <a:xfrm>
+            <a:off x="868680" y="1783080"/>
+            <a:ext cx="2971800" cy="365760"/>
+          </a:xfrm>
+          <a:prstGeom prst="rect">
+            <a:avLst/>
+          </a:prstGeom>
+          <a:noFill/>
+        </p:spPr>
+        <p:txBody>
+          <a:bodyPr wrap="square">
+            <a:spAutoFit/>
+          </a:bodyPr>
+          <a:lstStyle/>
+          <a:p>
+            <a:pPr algn="l">
+              <a:lnSpc>
+                <a:spcPct val="100000"/>
+              </a:lnSpc>
+            </a:pPr>
+            <a:r>
+              <a:rPr sz="1500" b="1">
+                <a:solidFill>
+                  <a:srgbClr val="1E2761"/>
+                </a:solidFill>
+                <a:latin typeface="Cambria"/>
+              </a:rPr>
+              <a:t>Q1 · Best value?</a:t>
+            </a:r>
+          </a:p>
+        </p:txBody>
+      </p:sp>
+      <p:sp>
+        <p:nvSpPr>
+          <p:cNvPr id="6" name="TextBox 5"/>
+          <p:cNvSpPr txBox="1"/>
+          <p:nvPr/>
+        </p:nvSpPr>
+        <p:spPr>
+          <a:xfrm>
+            <a:off x="868680" y="2194560"/>
+            <a:ext cx="2971800" cy="1417320"/>
+          </a:xfrm>
+          <a:prstGeom prst="rect">
+            <a:avLst/>
+          </a:prstGeom>
+          <a:noFill/>
+        </p:spPr>
+        <p:txBody>
+          <a:bodyPr wrap="square">
+            <a:spAutoFit/>
+          </a:bodyPr>
+          <a:lstStyle/>
+          <a:p>
+            <a:pPr algn="l">
+              <a:lnSpc>
+                <a:spcPct val="100000"/>
+              </a:lnSpc>
+            </a:pPr>
+            <a:r>
+              <a:rPr sz="1250" b="0">
+                <a:solidFill>
+                  <a:srgbClr val="1B1B1F"/>
+                </a:solidFill>
+                <a:latin typeface="Calibri"/>
+              </a:rPr>
+              <a:t>Prejudice Remover — 11.7 parity points per accuracy point, 30% better than ExpGrad-DP. But it stops at DP 0.065; GridSearch reaches 0.015.</a:t>
+            </a:r>
+          </a:p>
+        </p:txBody>
+      </p:sp>
+      <p:sp>
+        <p:nvSpPr>
+          <p:cNvPr id="7" name="Rounded Rectangle 6"/>
+          <p:cNvSpPr/>
+          <p:nvPr/>
+        </p:nvSpPr>
+        <p:spPr>
+          <a:xfrm>
+            <a:off x="4370832" y="1645920"/>
+            <a:ext cx="3429000" cy="2103120"/>
+          </a:xfrm>
+          <a:prstGeom prst="roundRect">
+            <a:avLst>
+              <a:gd name="adj" fmla="val 4000"/>
+            </a:avLst>
+          </a:prstGeom>
+          <a:solidFill>
+            <a:srgbClr val="FDF3E2"/>
+          </a:solidFill>
+          <a:ln w="9525">
+            <a:solidFill>
+              <a:srgbClr val="E8A33D"/>
+            </a:solidFill>
+          </a:ln>
+          <a:effectLst/>
+        </p:spPr>
+        <p:style>
+          <a:lnRef idx="1">
+            <a:schemeClr val="accent1"/>
+          </a:lnRef>
+          <a:fillRef idx="3">
+            <a:schemeClr val="accent1"/>
+          </a:fillRef>
+          <a:effectRef idx="2">
+            <a:schemeClr val="accent1"/>
+          </a:effectRef>
+          <a:fontRef idx="minor">
+            <a:schemeClr val="lt1"/>
+          </a:fontRef>
+        </p:style>
+        <p:txBody>
+          <a:bodyPr rtlCol="0" anchor="ctr"/>
+          <a:lstStyle/>
+          <a:p/>
+        </p:txBody>
+      </p:sp>
+      <p:sp>
+        <p:nvSpPr>
+          <p:cNvPr id="8" name="TextBox 7"/>
+          <p:cNvSpPr txBox="1"/>
+          <p:nvPr/>
+        </p:nvSpPr>
+        <p:spPr>
+          <a:xfrm>
+            <a:off x="4599432" y="1783080"/>
+            <a:ext cx="2971800" cy="365760"/>
+          </a:xfrm>
+          <a:prstGeom prst="rect">
+            <a:avLst/>
+          </a:prstGeom>
+          <a:noFill/>
+        </p:spPr>
+        <p:txBody>
+          <a:bodyPr wrap="square">
+            <a:spAutoFit/>
+          </a:bodyPr>
+          <a:lstStyle/>
+          <a:p>
+            <a:pPr algn="l">
+              <a:lnSpc>
+                <a:spcPct val="100000"/>
+              </a:lnSpc>
+            </a:pPr>
+            <a:r>
+              <a:rPr sz="1500" b="1">
+                <a:solidFill>
+                  <a:srgbClr val="1E2761"/>
+                </a:solidFill>
+                <a:latin typeface="Cambria"/>
+              </a:rPr>
+              <a:t>Q2 · Most stable?</a:t>
+            </a:r>
+          </a:p>
+        </p:txBody>
+      </p:sp>
+      <p:sp>
+        <p:nvSpPr>
+          <p:cNvPr id="9" name="TextBox 8"/>
+          <p:cNvSpPr txBox="1"/>
+          <p:nvPr/>
+        </p:nvSpPr>
+        <p:spPr>
+          <a:xfrm>
+            <a:off x="4599432" y="2194560"/>
+            <a:ext cx="2971800" cy="1417320"/>
+          </a:xfrm>
+          <a:prstGeom prst="rect">
+            <a:avLst/>
+          </a:prstGeom>
+          <a:noFill/>
+        </p:spPr>
+        <p:txBody>
+          <a:bodyPr wrap="square">
+            <a:spAutoFit/>
+          </a:bodyPr>
+          <a:lstStyle/>
+          <a:p>
+            <a:pPr algn="l">
+              <a:lnSpc>
+                <a:spcPct val="100000"/>
+              </a:lnSpc>
+            </a:pPr>
+            <a:r>
+              <a:rPr sz="1250" b="0">
+                <a:solidFill>
+                  <a:srgbClr val="1B1B1F"/>
+                </a:solidFill>
+                <a:latin typeface="Calibri"/>
+              </a:rPr>
+              <a:t>Adversarial Debiasing — std 0.0011, the most stable in the study. We predicted it would be the least. GridSearch is 6× worse.</a:t>
+            </a:r>
+          </a:p>
+        </p:txBody>
+      </p:sp>
+      <p:sp>
+        <p:nvSpPr>
+          <p:cNvPr id="10" name="Rounded Rectangle 9"/>
+          <p:cNvSpPr/>
+          <p:nvPr/>
+        </p:nvSpPr>
+        <p:spPr>
+          <a:xfrm>
+            <a:off x="8101583" y="1645920"/>
+            <a:ext cx="3419856" cy="2103120"/>
+          </a:xfrm>
+          <a:prstGeom prst="roundRect">
+            <a:avLst>
+              <a:gd name="adj" fmla="val 4000"/>
+            </a:avLst>
+          </a:prstGeom>
+          <a:solidFill>
+            <a:srgbClr val="F4F6FA"/>
+          </a:solidFill>
+          <a:ln w="9525">
+            <a:solidFill>
+              <a:srgbClr val="D8DDE8"/>
+            </a:solidFill>
+          </a:ln>
+          <a:effectLst/>
+        </p:spPr>
+        <p:style>
+          <a:lnRef idx="1">
+            <a:schemeClr val="accent1"/>
+          </a:lnRef>
+          <a:fillRef idx="3">
+            <a:schemeClr val="accent1"/>
+          </a:fillRef>
+          <a:effectRef idx="2">
+            <a:schemeClr val="accent1"/>
+          </a:effectRef>
+          <a:fontRef idx="minor">
+            <a:schemeClr val="lt1"/>
+          </a:fontRef>
+        </p:style>
+        <p:txBody>
+          <a:bodyPr rtlCol="0" anchor="ctr"/>
+          <a:lstStyle/>
+          <a:p/>
+        </p:txBody>
+      </p:sp>
+      <p:sp>
+        <p:nvSpPr>
+          <p:cNvPr id="11" name="TextBox 10"/>
+          <p:cNvSpPr txBox="1"/>
+          <p:nvPr/>
+        </p:nvSpPr>
+        <p:spPr>
+          <a:xfrm>
+            <a:off x="8330183" y="1783080"/>
+            <a:ext cx="2962656" cy="365760"/>
+          </a:xfrm>
+          <a:prstGeom prst="rect">
+            <a:avLst/>
+          </a:prstGeom>
+          <a:noFill/>
+        </p:spPr>
+        <p:txBody>
+          <a:bodyPr wrap="square">
+            <a:spAutoFit/>
+          </a:bodyPr>
+          <a:lstStyle/>
+          <a:p>
+            <a:pPr algn="l">
+              <a:lnSpc>
+                <a:spcPct val="100000"/>
+              </a:lnSpc>
+            </a:pPr>
+            <a:r>
+              <a:rPr sz="1500" b="1">
+                <a:solidFill>
+                  <a:srgbClr val="1E2761"/>
+                </a:solidFill>
+                <a:latin typeface="Cambria"/>
+              </a:rPr>
+              <a:t>Q3 · Ranking stable?</a:t>
+            </a:r>
+          </a:p>
+        </p:txBody>
+      </p:sp>
+      <p:sp>
+        <p:nvSpPr>
+          <p:cNvPr id="12" name="TextBox 11"/>
+          <p:cNvSpPr txBox="1"/>
+          <p:nvPr/>
+        </p:nvSpPr>
+        <p:spPr>
+          <a:xfrm>
+            <a:off x="8330183" y="2194560"/>
+            <a:ext cx="2962656" cy="1417320"/>
+          </a:xfrm>
+          <a:prstGeom prst="rect">
+            <a:avLst/>
+          </a:prstGeom>
+          <a:noFill/>
+        </p:spPr>
+        <p:txBody>
+          <a:bodyPr wrap="square">
+            <a:spAutoFit/>
+          </a:bodyPr>
+          <a:lstStyle/>
+          <a:p>
+            <a:pPr algn="l">
+              <a:lnSpc>
+                <a:spcPct val="100000"/>
+              </a:lnSpc>
+            </a:pPr>
+            <a:r>
+              <a:rPr sz="1250" b="0">
+                <a:solidFill>
+                  <a:srgbClr val="1B1B1F"/>
+                </a:solidFill>
+                <a:latin typeface="Calibri"/>
+              </a:rPr>
+              <a:t>It inverts. The best DP method is the worst EO method. Four of five mitigations are worse than no mitigation on equalized odds.</a:t>
+            </a:r>
+          </a:p>
+        </p:txBody>
+      </p:sp>
+      <p:sp>
+        <p:nvSpPr>
+          <p:cNvPr id="13" name="TextBox 12"/>
+          <p:cNvSpPr txBox="1"/>
+          <p:nvPr/>
+        </p:nvSpPr>
+        <p:spPr>
+          <a:xfrm>
+            <a:off x="640080" y="3931920"/>
+            <a:ext cx="10881360" cy="329184"/>
+          </a:xfrm>
+          <a:prstGeom prst="rect">
+            <a:avLst/>
+          </a:prstGeom>
+          <a:noFill/>
+        </p:spPr>
+        <p:txBody>
+          <a:bodyPr wrap="square">
+            <a:spAutoFit/>
+          </a:bodyPr>
+          <a:lstStyle/>
+          <a:p>
+            <a:pPr algn="l">
+              <a:lnSpc>
+                <a:spcPct val="100000"/>
+              </a:lnSpc>
+            </a:pPr>
+            <a:r>
+              <a:rPr sz="1500" b="1">
+                <a:solidFill>
+                  <a:srgbClr val="1E2761"/>
+                </a:solidFill>
+                <a:latin typeface="Cambria"/>
+              </a:rPr>
+              <a:t>Why the stability intuition failed</a:t>
+            </a:r>
+          </a:p>
+        </p:txBody>
+      </p:sp>
+      <p:sp>
+        <p:nvSpPr>
+          <p:cNvPr id="14" name="TextBox 13"/>
+          <p:cNvSpPr txBox="1"/>
+          <p:nvPr/>
+        </p:nvSpPr>
+        <p:spPr>
+          <a:xfrm>
+            <a:off x="640080" y="4315968"/>
+            <a:ext cx="10881360" cy="868680"/>
+          </a:xfrm>
+          <a:prstGeom prst="rect">
+            <a:avLst/>
+          </a:prstGeom>
+          <a:noFill/>
+        </p:spPr>
+        <p:txBody>
+          <a:bodyPr wrap="square">
+            <a:spAutoFit/>
+          </a:bodyPr>
+          <a:lstStyle/>
+          <a:p>
+            <a:pPr algn="l">
+              <a:lnSpc>
+                <a:spcPct val="100000"/>
+              </a:lnSpc>
+            </a:pPr>
+            <a:r>
+              <a:rPr sz="1350" b="0">
+                <a:solidFill>
+                  <a:srgbClr val="1B1B1F"/>
+                </a:solidFill>
+                <a:latin typeface="Calibri"/>
+              </a:rPr>
+              <a:t>The variance is across seeds, and a seed changes the train/test split. GridSearch takes a discrete argmax over a coarse 15-point λ grid, so a small change in the data flips which grid point wins and the answer moves discontinuously. Adversarial Debiasing has no selection step. The instability came from model selection, not from stochastic training.</a:t>
+            </a:r>
+          </a:p>
+        </p:txBody>
+      </p:sp>
+      <p:sp>
+        <p:nvSpPr>
+          <p:cNvPr id="15" name="Rounded Rectangle 14"/>
+          <p:cNvSpPr/>
+          <p:nvPr/>
+        </p:nvSpPr>
+        <p:spPr>
+          <a:xfrm>
+            <a:off x="640080" y="5349240"/>
+            <a:ext cx="10881360" cy="914400"/>
+          </a:xfrm>
+          <a:prstGeom prst="roundRect">
+            <a:avLst>
+              <a:gd name="adj" fmla="val 4000"/>
+            </a:avLst>
+          </a:prstGeom>
+          <a:solidFill>
+            <a:srgbClr val="FDF3E2"/>
+          </a:solidFill>
+          <a:ln w="9525">
+            <a:solidFill>
+              <a:srgbClr val="E8A33D"/>
+            </a:solidFill>
+          </a:ln>
+          <a:effectLst/>
+        </p:spPr>
+        <p:style>
+          <a:lnRef idx="1">
+            <a:schemeClr val="accent1"/>
+          </a:lnRef>
+          <a:fillRef idx="3">
+            <a:schemeClr val="accent1"/>
+          </a:fillRef>
+          <a:effectRef idx="2">
+            <a:schemeClr val="accent1"/>
+          </a:effectRef>
+          <a:fontRef idx="minor">
+            <a:schemeClr val="lt1"/>
+          </a:fontRef>
+        </p:style>
+        <p:txBody>
+          <a:bodyPr rtlCol="0" anchor="ctr"/>
+          <a:lstStyle/>
+          <a:p/>
+        </p:txBody>
+      </p:sp>
+      <p:sp>
+        <p:nvSpPr>
+          <p:cNvPr id="16" name="TextBox 15"/>
+          <p:cNvSpPr txBox="1"/>
+          <p:nvPr/>
+        </p:nvSpPr>
+        <p:spPr>
+          <a:xfrm>
+            <a:off x="914400" y="5504688"/>
+            <a:ext cx="10332720" cy="640080"/>
+          </a:xfrm>
+          <a:prstGeom prst="rect">
+            <a:avLst/>
+          </a:prstGeom>
+          <a:noFill/>
+        </p:spPr>
+        <p:txBody>
+          <a:bodyPr wrap="square">
+            <a:spAutoFit/>
+          </a:bodyPr>
+          <a:lstStyle/>
+          <a:p>
+            <a:pPr algn="l">
+              <a:lnSpc>
+                <a:spcPct val="100000"/>
+              </a:lnSpc>
+            </a:pPr>
+            <a:r>
+              <a:rPr sz="1350" b="1">
+                <a:solidFill>
+                  <a:srgbClr val="1B1B1F"/>
+                </a:solidFill>
+                <a:latin typeface="Calibri"/>
+              </a:rPr>
+              <a:t>An engineer deploying GridSearch-DP on its parity score would take equalized odds from 0.095 to 0.304 — 3.2× worse than doing nothing — while the dashboard showed green.</a:t>
+            </a:r>
+          </a:p>
+        </p:txBody>
+      </p:sp>
+    </p:spTree>
+  </p:cSld>
+  <p:clrMapOvr>
+    <a:masterClrMapping/>
+  </p:clrMapOvr>
+</p:sld>
+</file>
+
+<file path=ppt/slides/slide17.xml><?xml version="1.0" encoding="utf-8"?>
+<p:sld xmlns:a="http://schemas.openxmlformats.org/drawingml/2006/main" xmlns:p="http://schemas.openxmlformats.org/presentationml/2006/main" xmlns:r="http://schemas.openxmlformats.org/officeDocument/2006/relationships">
+  <p:cSld>
+    <p:spTree>
+      <p:nvGrpSpPr>
+        <p:cNvPr id="1" name=""/>
+        <p:cNvGrpSpPr/>
+        <p:nvPr/>
+      </p:nvGrpSpPr>
+      <p:grpSpPr/>
+      <p:sp>
+        <p:nvSpPr>
+          <p:cNvPr id="2" name="TextBox 1"/>
+          <p:cNvSpPr txBox="1"/>
+          <p:nvPr/>
+        </p:nvSpPr>
+        <p:spPr>
+          <a:xfrm>
+            <a:off x="640080" y="384048"/>
+            <a:ext cx="10881360" cy="640080"/>
+          </a:xfrm>
+          <a:prstGeom prst="rect">
+            <a:avLst/>
+          </a:prstGeom>
+          <a:noFill/>
+        </p:spPr>
+        <p:txBody>
+          <a:bodyPr wrap="square">
+            <a:spAutoFit/>
+          </a:bodyPr>
+          <a:lstStyle/>
+          <a:p>
+            <a:pPr algn="l">
+              <a:lnSpc>
+                <a:spcPct val="100000"/>
+              </a:lnSpc>
+            </a:pPr>
+            <a:r>
+              <a:rPr sz="2600" b="1">
+                <a:solidFill>
+                  <a:srgbClr val="1E2761"/>
+                </a:solidFill>
+                <a:latin typeface="Cambria"/>
+              </a:rPr>
+              <a:t>Contribution 1 — Who Pays for the Fairness Fix?</a:t>
+            </a:r>
+          </a:p>
+        </p:txBody>
+      </p:sp>
+      <p:sp>
+        <p:nvSpPr>
+          <p:cNvPr id="3" name="TextBox 2"/>
+          <p:cNvSpPr txBox="1"/>
+          <p:nvPr/>
+        </p:nvSpPr>
+        <p:spPr>
+          <a:xfrm>
+            <a:off x="640080" y="1033271"/>
+            <a:ext cx="10881360" cy="384048"/>
+          </a:xfrm>
+          <a:prstGeom prst="rect">
+            <a:avLst/>
+          </a:prstGeom>
+          <a:noFill/>
+        </p:spPr>
+        <p:txBody>
+          <a:bodyPr wrap="square">
+            <a:spAutoFit/>
+          </a:bodyPr>
+          <a:lstStyle/>
+          <a:p>
+            <a:pPr algn="l">
+              <a:lnSpc>
+                <a:spcPct val="100000"/>
+              </a:lnSpc>
+            </a:pPr>
+            <a:r>
+              <a:rPr sz="1350" b="0">
+                <a:solidFill>
+                  <a:srgbClr val="5A6270"/>
+                </a:solidFill>
+                <a:latin typeface="Calibri"/>
+              </a:rPr>
+              <a:t>Not in the plan. A gap can close by lifting one group or lowering the other. The metric is identical either way.</a:t>
+            </a:r>
+          </a:p>
+        </p:txBody>
+      </p:sp>
+      <p:pic>
+        <p:nvPicPr>
+          <p:cNvPr id="4" name="Picture 3" descr="who_pays_incidence.png"/>
+          <p:cNvPicPr>
+            <a:picLocks noChangeAspect="1"/>
+          </p:cNvPicPr>
+          <p:nvPr/>
+        </p:nvPicPr>
+        <p:blipFill>
+          <a:blip r:embed="rId2"/>
+          <a:stretch>
+            <a:fillRect/>
+          </a:stretch>
+        </p:blipFill>
+        <p:spPr>
+          <a:xfrm>
+            <a:off x="640080" y="1572768"/>
+            <a:ext cx="6720840" cy="3267999"/>
+          </a:xfrm>
+          <a:prstGeom prst="rect">
+            <a:avLst/>
+          </a:prstGeom>
+        </p:spPr>
+      </p:pic>
+      <p:sp>
+        <p:nvSpPr>
+          <p:cNvPr id="5" name="Rounded Rectangle 4"/>
+          <p:cNvSpPr/>
+          <p:nvPr/>
+        </p:nvSpPr>
+        <p:spPr>
+          <a:xfrm>
+            <a:off x="7635240" y="1572768"/>
+            <a:ext cx="3886200" cy="4160520"/>
+          </a:xfrm>
+          <a:prstGeom prst="roundRect">
+            <a:avLst>
+              <a:gd name="adj" fmla="val 4000"/>
+            </a:avLst>
+          </a:prstGeom>
+          <a:solidFill>
+            <a:srgbClr val="F4F6FA"/>
+          </a:solidFill>
+          <a:ln w="9525">
+            <a:solidFill>
+              <a:srgbClr val="D8DDE8"/>
+            </a:solidFill>
+          </a:ln>
+          <a:effectLst/>
+        </p:spPr>
+        <p:style>
+          <a:lnRef idx="1">
+            <a:schemeClr val="accent1"/>
+          </a:lnRef>
+          <a:fillRef idx="3">
+            <a:schemeClr val="accent1"/>
+          </a:fillRef>
+          <a:effectRef idx="2">
+            <a:schemeClr val="accent1"/>
+          </a:effectRef>
+          <a:fontRef idx="minor">
+            <a:schemeClr val="lt1"/>
+          </a:fontRef>
+        </p:style>
+        <p:txBody>
+          <a:bodyPr rtlCol="0" anchor="ctr"/>
+          <a:lstStyle/>
+          <a:p/>
+        </p:txBody>
+      </p:sp>
+      <p:sp>
+        <p:nvSpPr>
+          <p:cNvPr id="6" name="TextBox 5"/>
+          <p:cNvSpPr txBox="1"/>
+          <p:nvPr/>
+        </p:nvSpPr>
+        <p:spPr>
+          <a:xfrm>
+            <a:off x="7863840" y="1737360"/>
+            <a:ext cx="3429000" cy="365760"/>
+          </a:xfrm>
+          <a:prstGeom prst="rect">
+            <a:avLst/>
+          </a:prstGeom>
+          <a:noFill/>
+        </p:spPr>
+        <p:txBody>
+          <a:bodyPr wrap="square">
+            <a:spAutoFit/>
+          </a:bodyPr>
+          <a:lstStyle/>
+          <a:p>
+            <a:pPr algn="l">
+              <a:lnSpc>
+                <a:spcPct val="100000"/>
+              </a:lnSpc>
+            </a:pPr>
+            <a:r>
+              <a:rPr sz="1500" b="1">
+                <a:solidFill>
+                  <a:srgbClr val="1E2761"/>
+                </a:solidFill>
+                <a:latin typeface="Cambria"/>
+              </a:rPr>
+              <a:t>What the table cannot say</a:t>
+            </a:r>
+          </a:p>
+        </p:txBody>
+      </p:sp>
+      <p:sp>
+        <p:nvSpPr>
+          <p:cNvPr id="7" name="TextBox 6"/>
+          <p:cNvSpPr txBox="1"/>
+          <p:nvPr/>
+        </p:nvSpPr>
+        <p:spPr>
+          <a:xfrm>
+            <a:off x="7863840" y="2176272"/>
+            <a:ext cx="3429000" cy="3383280"/>
+          </a:xfrm>
+          <a:prstGeom prst="rect">
+            <a:avLst/>
+          </a:prstGeom>
+          <a:noFill/>
+        </p:spPr>
+        <p:txBody>
+          <a:bodyPr wrap="square">
+            <a:spAutoFit/>
+          </a:bodyPr>
+          <a:lstStyle/>
+          <a:p>
+            <a:pPr algn="l">
+              <a:lnSpc>
+                <a:spcPct val="105000"/>
+              </a:lnSpc>
+            </a:pPr>
+            <a:r>
+              <a:rPr sz="1300" b="0">
+                <a:solidFill>
+                  <a:srgbClr val="1B1B1F"/>
+                </a:solidFill>
+                <a:latin typeface="Calibri"/>
+              </a:rPr>
+              <a:t>ExpGrad-DP took demographic parity from 0.186 to 0.018.</a:t>
+            </a:r>
+          </a:p>
+          <a:p>
+            <a:pPr algn="l">
+              <a:lnSpc>
+                <a:spcPct val="105000"/>
+              </a:lnSpc>
+            </a:pPr>
+            <a:r>
+              <a:rPr sz="1300" b="0">
+                <a:solidFill>
+                  <a:srgbClr val="1B1B1F"/>
+                </a:solidFill>
+                <a:latin typeface="Calibri"/>
+              </a:rPr>
+              <a:t/>
+            </a:r>
+          </a:p>
+          <a:p>
+            <a:pPr algn="l">
+              <a:lnSpc>
+                <a:spcPct val="105000"/>
+              </a:lnSpc>
+            </a:pPr>
+            <a:r>
+              <a:rPr sz="1300" b="0">
+                <a:solidFill>
+                  <a:srgbClr val="1B1B1F"/>
+                </a:solidFill>
+                <a:latin typeface="Calibri"/>
+              </a:rPr>
+              <a:t>It did that by taking approval from 909 men so 316 women could gain it — 2.7 lost per 1 gained.</a:t>
+            </a:r>
+          </a:p>
+          <a:p>
+            <a:pPr algn="l">
+              <a:lnSpc>
+                <a:spcPct val="105000"/>
+              </a:lnSpc>
+            </a:pPr>
+            <a:r>
+              <a:rPr sz="1300" b="0">
+                <a:solidFill>
+                  <a:srgbClr val="1B1B1F"/>
+                </a:solidFill>
+                <a:latin typeface="Calibri"/>
+              </a:rPr>
+              <a:t/>
+            </a:r>
+          </a:p>
+          <a:p>
+            <a:pPr algn="l">
+              <a:lnSpc>
+                <a:spcPct val="105000"/>
+              </a:lnSpc>
+            </a:pPr>
+            <a:r>
+              <a:rPr sz="1300" b="0">
+                <a:solidFill>
+                  <a:srgbClr val="1B1B1F"/>
+                </a:solidFill>
+                <a:latin typeface="Calibri"/>
+              </a:rPr>
+              <a:t>Measured in rates the split looks even (0.57); measured in people it is 0.74, because the privileged group is 2.1× larger.</a:t>
+            </a:r>
+          </a:p>
+          <a:p>
+            <a:pPr algn="l">
+              <a:lnSpc>
+                <a:spcPct val="105000"/>
+              </a:lnSpc>
+            </a:pPr>
+            <a:r>
+              <a:rPr sz="1300" b="0">
+                <a:solidFill>
+                  <a:srgbClr val="1B1B1F"/>
+                </a:solidFill>
+                <a:latin typeface="Calibri"/>
+              </a:rPr>
+              <a:t/>
+            </a:r>
+          </a:p>
+          <a:p>
+            <a:pPr algn="l">
+              <a:lnSpc>
+                <a:spcPct val="105000"/>
+              </a:lnSpc>
+            </a:pPr>
+            <a:r>
+              <a:rPr sz="1300" b="0">
+                <a:solidFill>
+                  <a:srgbClr val="1B1B1F"/>
+                </a:solidFill>
+                <a:latin typeface="Calibri"/>
+              </a:rPr>
+              <a:t>Every method shrank the total number of favourable decisions. Not one levelled up.</a:t>
+            </a:r>
+          </a:p>
+        </p:txBody>
+      </p:sp>
+      <p:sp>
+        <p:nvSpPr>
+          <p:cNvPr id="8" name="Rounded Rectangle 7"/>
+          <p:cNvSpPr/>
+          <p:nvPr/>
+        </p:nvSpPr>
+        <p:spPr>
+          <a:xfrm>
+            <a:off x="640080" y="5870448"/>
+            <a:ext cx="10881360" cy="749808"/>
+          </a:xfrm>
+          <a:prstGeom prst="roundRect">
+            <a:avLst>
+              <a:gd name="adj" fmla="val 4000"/>
+            </a:avLst>
+          </a:prstGeom>
+          <a:solidFill>
+            <a:srgbClr val="FDF3E2"/>
+          </a:solidFill>
+          <a:ln w="9525">
+            <a:solidFill>
+              <a:srgbClr val="E8A33D"/>
+            </a:solidFill>
+          </a:ln>
+          <a:effectLst/>
+        </p:spPr>
+        <p:style>
+          <a:lnRef idx="1">
+            <a:schemeClr val="accent1"/>
+          </a:lnRef>
+          <a:fillRef idx="3">
+            <a:schemeClr val="accent1"/>
+          </a:fillRef>
+          <a:effectRef idx="2">
+            <a:schemeClr val="accent1"/>
+          </a:effectRef>
+          <a:fontRef idx="minor">
+            <a:schemeClr val="lt1"/>
+          </a:fontRef>
+        </p:style>
+        <p:txBody>
+          <a:bodyPr rtlCol="0" anchor="ctr"/>
+          <a:lstStyle/>
+          <a:p/>
+        </p:txBody>
+      </p:sp>
+      <p:sp>
+        <p:nvSpPr>
+          <p:cNvPr id="9" name="TextBox 8"/>
+          <p:cNvSpPr txBox="1"/>
+          <p:nvPr/>
+        </p:nvSpPr>
+        <p:spPr>
+          <a:xfrm>
+            <a:off x="914400" y="5989320"/>
+            <a:ext cx="10332720" cy="548640"/>
+          </a:xfrm>
+          <a:prstGeom prst="rect">
+            <a:avLst/>
+          </a:prstGeom>
+          <a:noFill/>
+        </p:spPr>
+        <p:txBody>
+          <a:bodyPr wrap="square">
+            <a:spAutoFit/>
+          </a:bodyPr>
+          <a:lstStyle/>
+          <a:p>
+            <a:pPr algn="l">
+              <a:lnSpc>
+                <a:spcPct val="100000"/>
+              </a:lnSpc>
+            </a:pPr>
+            <a:r>
+              <a:rPr sz="1350" b="1">
+                <a:solidFill>
+                  <a:srgbClr val="1B1B1F"/>
+                </a:solidFill>
+                <a:latin typeface="Calibri"/>
+              </a:rPr>
+              <a:t>And 62% of ExpGrad-EO's individual-level effect is not fairness at all — two draws from the same fitted model disagree on 3.2% of people, against a 5.2% total change. The same applicant can apply twice and get two answers.</a:t>
+            </a:r>
+          </a:p>
+        </p:txBody>
+      </p:sp>
+    </p:spTree>
+  </p:cSld>
+  <p:clrMapOvr>
+    <a:masterClrMapping/>
+  </p:clrMapOvr>
+</p:sld>
+</file>
+
+<file path=ppt/slides/slide18.xml><?xml version="1.0" encoding="utf-8"?>
+<p:sld xmlns:a="http://schemas.openxmlformats.org/drawingml/2006/main" xmlns:p="http://schemas.openxmlformats.org/presentationml/2006/main" xmlns:r="http://schemas.openxmlformats.org/officeDocument/2006/relationships">
+  <p:cSld>
+    <p:spTree>
+      <p:nvGrpSpPr>
+        <p:cNvPr id="1" name=""/>
+        <p:cNvGrpSpPr/>
+        <p:nvPr/>
+      </p:nvGrpSpPr>
+      <p:grpSpPr/>
+      <p:sp>
+        <p:nvSpPr>
+          <p:cNvPr id="2" name="TextBox 1"/>
+          <p:cNvSpPr txBox="1"/>
+          <p:nvPr/>
+        </p:nvSpPr>
+        <p:spPr>
+          <a:xfrm>
+            <a:off x="640080" y="384048"/>
+            <a:ext cx="10881360" cy="640080"/>
+          </a:xfrm>
+          <a:prstGeom prst="rect">
+            <a:avLst/>
+          </a:prstGeom>
+          <a:noFill/>
+        </p:spPr>
+        <p:txBody>
+          <a:bodyPr wrap="square">
+            <a:spAutoFit/>
+          </a:bodyPr>
+          <a:lstStyle/>
+          <a:p>
+            <a:pPr algn="l">
+              <a:lnSpc>
+                <a:spcPct val="100000"/>
+              </a:lnSpc>
+            </a:pPr>
+            <a:r>
+              <a:rPr sz="2600" b="1">
+                <a:solidFill>
+                  <a:srgbClr val="1E2761"/>
+                </a:solidFill>
+                <a:latin typeface="Cambria"/>
+              </a:rPr>
+              <a:t>Contribution 2 — The Fairest Models Use Sex Proxies MORE</a:t>
+            </a:r>
+          </a:p>
+        </p:txBody>
+      </p:sp>
+      <p:sp>
+        <p:nvSpPr>
+          <p:cNvPr id="3" name="TextBox 2"/>
+          <p:cNvSpPr txBox="1"/>
+          <p:nvPr/>
+        </p:nvSpPr>
+        <p:spPr>
+          <a:xfrm>
+            <a:off x="640080" y="1033271"/>
+            <a:ext cx="10881360" cy="384048"/>
+          </a:xfrm>
+          <a:prstGeom prst="rect">
+            <a:avLst/>
+          </a:prstGeom>
+          <a:noFill/>
+        </p:spPr>
+        <p:txBody>
+          <a:bodyPr wrap="square">
+            <a:spAutoFit/>
+          </a:bodyPr>
+          <a:lstStyle/>
+          <a:p>
+            <a:pPr algn="l">
+              <a:lnSpc>
+                <a:spcPct val="100000"/>
+              </a:lnSpc>
+            </a:pPr>
+            <a:r>
+              <a:rPr sz="1350" b="0">
+                <a:solidFill>
+                  <a:srgbClr val="5A6270"/>
+                </a:solidFill>
+                <a:latin typeface="Calibri"/>
+              </a:rPr>
+              <a:t>Our plan predicted proxy reliance would shrink after mitigation. It grew.</a:t>
+            </a:r>
+          </a:p>
+        </p:txBody>
+      </p:sp>
+      <p:graphicFrame>
+        <p:nvGraphicFramePr>
+          <p:cNvPr id="4" name="Table 3"/>
+          <p:cNvGraphicFramePr>
+            <a:graphicFrameLocks noGrp="1"/>
+          </p:cNvGraphicFramePr>
+          <p:nvPr/>
+        </p:nvGraphicFramePr>
+        <p:xfrm>
+          <a:off x="640080" y="1691640"/>
+          <a:ext cx="10881360" cy="2359152"/>
+        </p:xfrm>
+        <a:graphic>
+          <a:graphicData uri="http://schemas.openxmlformats.org/drawingml/2006/table">
+            <a:tbl>
+              <a:tblPr firstRow="1">
+                <a:tableStyleId>{5C22544A-7EE6-4342-B048-85BDC9FD1C3A}</a:tableStyleId>
+              </a:tblPr>
+              <a:tblGrid>
+                <a:gridCol w="3840480"/>
+                <a:gridCol w="2651760"/>
+                <a:gridCol w="2011680"/>
+                <a:gridCol w="2377440"/>
+              </a:tblGrid>
+              <a:tr h="384048">
+                <a:tc>
+                  <a:txBody>
+                    <a:bodyPr wrap="square"/>
+                    <a:lstStyle/>
+                    <a:p>
+                      <a:pPr algn="l"/>
+                      <a:r>
+                        <a:rPr sz="1100" b="1">
+                          <a:solidFill>
+                            <a:srgbClr val="FFFFFF"/>
+                          </a:solidFill>
+                          <a:latin typeface="Calibri"/>
+                        </a:rPr>
+                        <a:t>Model</a:t>
+                      </a:r>
+                    </a:p>
+                  </a:txBody>
+                  <a:tcPr marL="91440" marR="73152" marT="18288" marB="18288">
+                    <a:solidFill>
+                      <a:srgbClr val="1E2761"/>
+                    </a:solidFill>
+                  </a:tcPr>
+                </a:tc>
+                <a:tc>
+                  <a:txBody>
+                    <a:bodyPr wrap="square"/>
+                    <a:lstStyle/>
+                    <a:p>
+                      <a:pPr algn="r"/>
+                      <a:r>
+                        <a:rPr sz="1100" b="1">
+                          <a:solidFill>
+                            <a:srgbClr val="FFFFFF"/>
+                          </a:solidFill>
+                          <a:latin typeface="Calibri"/>
+                        </a:rPr>
+                        <a:t>Reliance on sex proxies</a:t>
+                      </a:r>
+                    </a:p>
+                  </a:txBody>
+                  <a:tcPr marL="91440" marR="73152" marT="18288" marB="18288">
+                    <a:solidFill>
+                      <a:srgbClr val="1E2761"/>
+                    </a:solidFill>
+                  </a:tcPr>
+                </a:tc>
+                <a:tc>
+                  <a:txBody>
+                    <a:bodyPr wrap="square"/>
+                    <a:lstStyle/>
+                    <a:p>
+                      <a:pPr algn="r"/>
+                      <a:r>
+                        <a:rPr sz="1100" b="1">
+                          <a:solidFill>
+                            <a:srgbClr val="FFFFFF"/>
+                          </a:solidFill>
+                          <a:latin typeface="Calibri"/>
+                        </a:rPr>
+                        <a:t>vs baseline</a:t>
+                      </a:r>
+                    </a:p>
+                  </a:txBody>
+                  <a:tcPr marL="91440" marR="73152" marT="18288" marB="18288">
+                    <a:solidFill>
+                      <a:srgbClr val="1E2761"/>
+                    </a:solidFill>
+                  </a:tcPr>
+                </a:tc>
+                <a:tc>
+                  <a:txBody>
+                    <a:bodyPr wrap="square"/>
+                    <a:lstStyle/>
+                    <a:p>
+                      <a:pPr algn="r"/>
+                      <a:r>
+                        <a:rPr sz="1100" b="1">
+                          <a:solidFill>
+                            <a:srgbClr val="FFFFFF"/>
+                          </a:solidFill>
+                          <a:latin typeface="Calibri"/>
+                        </a:rPr>
+                        <a:t>'relationship' alone</a:t>
+                      </a:r>
+                    </a:p>
+                  </a:txBody>
+                  <a:tcPr marL="91440" marR="73152" marT="18288" marB="18288">
+                    <a:solidFill>
+                      <a:srgbClr val="1E2761"/>
+                    </a:solidFill>
+                  </a:tcPr>
+                </a:tc>
+              </a:tr>
+              <a:tr h="329184">
+                <a:tc>
+                  <a:txBody>
+                    <a:bodyPr wrap="square"/>
+                    <a:lstStyle/>
+                    <a:p>
+                      <a:pPr algn="l"/>
+                      <a:r>
+                        <a:rPr sz="1150" b="0">
+                          <a:solidFill>
+                            <a:srgbClr val="1B1B1F"/>
+                          </a:solidFill>
+                          <a:latin typeface="Calibri"/>
+                        </a:rPr>
+                        <a:t>Baseline (no mitigation)</a:t>
+                      </a:r>
+                    </a:p>
+                  </a:txBody>
+                  <a:tcPr marL="91440" marR="73152" marT="18288" marB="18288">
+                    <a:solidFill>
+                      <a:srgbClr val="FFFFFF"/>
+                    </a:solidFill>
+                  </a:tcPr>
+                </a:tc>
+                <a:tc>
+                  <a:txBody>
+                    <a:bodyPr wrap="square"/>
+                    <a:lstStyle/>
+                    <a:p>
+                      <a:pPr algn="r"/>
+                      <a:r>
+                        <a:rPr sz="1150" b="0">
+                          <a:solidFill>
+                            <a:srgbClr val="1B1B1F"/>
+                          </a:solidFill>
+                          <a:latin typeface="Calibri"/>
+                        </a:rPr>
+                        <a:t>0.545</a:t>
+                      </a:r>
+                    </a:p>
+                  </a:txBody>
+                  <a:tcPr marL="91440" marR="73152" marT="18288" marB="18288">
+                    <a:solidFill>
+                      <a:srgbClr val="FFFFFF"/>
+                    </a:solidFill>
+                  </a:tcPr>
+                </a:tc>
+                <a:tc>
+                  <a:txBody>
+                    <a:bodyPr wrap="square"/>
+                    <a:lstStyle/>
+                    <a:p>
+                      <a:pPr algn="r"/>
+                      <a:r>
+                        <a:rPr sz="1150" b="0">
+                          <a:solidFill>
+                            <a:srgbClr val="1B1B1F"/>
+                          </a:solidFill>
+                          <a:latin typeface="Calibri"/>
+                        </a:rPr>
+                        <a:t>—</a:t>
+                      </a:r>
+                    </a:p>
+                  </a:txBody>
+                  <a:tcPr marL="91440" marR="73152" marT="18288" marB="18288">
+                    <a:solidFill>
+                      <a:srgbClr val="FFFFFF"/>
+                    </a:solidFill>
+                  </a:tcPr>
+                </a:tc>
+                <a:tc>
+                  <a:txBody>
+                    <a:bodyPr wrap="square"/>
+                    <a:lstStyle/>
+                    <a:p>
+                      <a:pPr algn="r"/>
+                      <a:r>
+                        <a:rPr sz="1150" b="0">
+                          <a:solidFill>
+                            <a:srgbClr val="1B1B1F"/>
+                          </a:solidFill>
+                          <a:latin typeface="Calibri"/>
+                        </a:rPr>
+                        <a:t>0.075</a:t>
+                      </a:r>
+                    </a:p>
+                  </a:txBody>
+                  <a:tcPr marL="91440" marR="73152" marT="18288" marB="18288">
+                    <a:solidFill>
+                      <a:srgbClr val="FFFFFF"/>
+                    </a:solidFill>
+                  </a:tcPr>
+                </a:tc>
+              </a:tr>
+              <a:tr h="329184">
+                <a:tc>
+                  <a:txBody>
+                    <a:bodyPr wrap="square"/>
+                    <a:lstStyle/>
+                    <a:p>
+                      <a:pPr algn="l"/>
+                      <a:r>
+                        <a:rPr sz="1150" b="1">
+                          <a:solidFill>
+                            <a:srgbClr val="1B1B1F"/>
+                          </a:solidFill>
+                          <a:latin typeface="Calibri"/>
+                        </a:rPr>
+                        <a:t>ExpGrad (DP)</a:t>
+                      </a:r>
+                    </a:p>
+                  </a:txBody>
+                  <a:tcPr marL="91440" marR="73152" marT="18288" marB="18288">
+                    <a:solidFill>
+                      <a:srgbClr val="FDF3E2"/>
+                    </a:solidFill>
+                  </a:tcPr>
+                </a:tc>
+                <a:tc>
+                  <a:txBody>
+                    <a:bodyPr wrap="square"/>
+                    <a:lstStyle/>
+                    <a:p>
+                      <a:pPr algn="r"/>
+                      <a:r>
+                        <a:rPr sz="1150" b="1">
+                          <a:solidFill>
+                            <a:srgbClr val="1B1B1F"/>
+                          </a:solidFill>
+                          <a:latin typeface="Calibri"/>
+                        </a:rPr>
+                        <a:t>0.586</a:t>
+                      </a:r>
+                    </a:p>
+                  </a:txBody>
+                  <a:tcPr marL="91440" marR="73152" marT="18288" marB="18288">
+                    <a:solidFill>
+                      <a:srgbClr val="FDF3E2"/>
+                    </a:solidFill>
+                  </a:tcPr>
+                </a:tc>
+                <a:tc>
+                  <a:txBody>
+                    <a:bodyPr wrap="square"/>
+                    <a:lstStyle/>
+                    <a:p>
+                      <a:pPr algn="r"/>
+                      <a:r>
+                        <a:rPr sz="1150" b="1">
+                          <a:solidFill>
+                            <a:srgbClr val="1B1B1F"/>
+                          </a:solidFill>
+                          <a:latin typeface="Calibri"/>
+                        </a:rPr>
+                        <a:t>+7.6%</a:t>
+                      </a:r>
+                    </a:p>
+                  </a:txBody>
+                  <a:tcPr marL="91440" marR="73152" marT="18288" marB="18288">
+                    <a:solidFill>
+                      <a:srgbClr val="FDF3E2"/>
+                    </a:solidFill>
+                  </a:tcPr>
+                </a:tc>
+                <a:tc>
+                  <a:txBody>
+                    <a:bodyPr wrap="square"/>
+                    <a:lstStyle/>
+                    <a:p>
+                      <a:pPr algn="r"/>
+                      <a:r>
+                        <a:rPr sz="1150" b="1">
+                          <a:solidFill>
+                            <a:srgbClr val="1B1B1F"/>
+                          </a:solidFill>
+                          <a:latin typeface="Calibri"/>
+                        </a:rPr>
+                        <a:t>0.189</a:t>
+                      </a:r>
+                    </a:p>
+                  </a:txBody>
+                  <a:tcPr marL="91440" marR="73152" marT="18288" marB="18288">
+                    <a:solidFill>
+                      <a:srgbClr val="FDF3E2"/>
+                    </a:solidFill>
+                  </a:tcPr>
+                </a:tc>
+              </a:tr>
+              <a:tr h="329184">
+                <a:tc>
+                  <a:txBody>
+                    <a:bodyPr wrap="square"/>
+                    <a:lstStyle/>
+                    <a:p>
+                      <a:pPr algn="l"/>
+                      <a:r>
+                        <a:rPr sz="1150" b="0">
+                          <a:solidFill>
+                            <a:srgbClr val="1B1B1F"/>
+                          </a:solidFill>
+                          <a:latin typeface="Calibri"/>
+                        </a:rPr>
+                        <a:t>GridSearch (DP)</a:t>
+                      </a:r>
+                    </a:p>
+                  </a:txBody>
+                  <a:tcPr marL="91440" marR="73152" marT="18288" marB="18288">
+                    <a:solidFill>
+                      <a:srgbClr val="FFFFFF"/>
+                    </a:solidFill>
+                  </a:tcPr>
+                </a:tc>
+                <a:tc>
+                  <a:txBody>
+                    <a:bodyPr wrap="square"/>
+                    <a:lstStyle/>
+                    <a:p>
+                      <a:pPr algn="r"/>
+                      <a:r>
+                        <a:rPr sz="1150" b="0">
+                          <a:solidFill>
+                            <a:srgbClr val="1B1B1F"/>
+                          </a:solidFill>
+                          <a:latin typeface="Calibri"/>
+                        </a:rPr>
+                        <a:t>0.586</a:t>
+                      </a:r>
+                    </a:p>
+                  </a:txBody>
+                  <a:tcPr marL="91440" marR="73152" marT="18288" marB="18288">
+                    <a:solidFill>
+                      <a:srgbClr val="FFFFFF"/>
+                    </a:solidFill>
+                  </a:tcPr>
+                </a:tc>
+                <a:tc>
+                  <a:txBody>
+                    <a:bodyPr wrap="square"/>
+                    <a:lstStyle/>
+                    <a:p>
+                      <a:pPr algn="r"/>
+                      <a:r>
+                        <a:rPr sz="1150" b="0">
+                          <a:solidFill>
+                            <a:srgbClr val="1B1B1F"/>
+                          </a:solidFill>
+                          <a:latin typeface="Calibri"/>
+                        </a:rPr>
+                        <a:t>+7.5%</a:t>
+                      </a:r>
+                    </a:p>
+                  </a:txBody>
+                  <a:tcPr marL="91440" marR="73152" marT="18288" marB="18288">
+                    <a:solidFill>
+                      <a:srgbClr val="FFFFFF"/>
+                    </a:solidFill>
+                  </a:tcPr>
+                </a:tc>
+                <a:tc>
+                  <a:txBody>
+                    <a:bodyPr wrap="square"/>
+                    <a:lstStyle/>
+                    <a:p>
+                      <a:pPr algn="r"/>
+                      <a:r>
+                        <a:rPr sz="1150" b="0">
+                          <a:solidFill>
+                            <a:srgbClr val="1B1B1F"/>
+                          </a:solidFill>
+                          <a:latin typeface="Calibri"/>
+                        </a:rPr>
+                        <a:t>0.158</a:t>
+                      </a:r>
+                    </a:p>
+                  </a:txBody>
+                  <a:tcPr marL="91440" marR="73152" marT="18288" marB="18288">
+                    <a:solidFill>
+                      <a:srgbClr val="FFFFFF"/>
+                    </a:solidFill>
+                  </a:tcPr>
+                </a:tc>
+              </a:tr>
+              <a:tr h="329184">
+                <a:tc>
+                  <a:txBody>
+                    <a:bodyPr wrap="square"/>
+                    <a:lstStyle/>
+                    <a:p>
+                      <a:pPr algn="l"/>
+                      <a:r>
+                        <a:rPr sz="1150" b="0">
+                          <a:solidFill>
+                            <a:srgbClr val="1B1B1F"/>
+                          </a:solidFill>
+                          <a:latin typeface="Calibri"/>
+                        </a:rPr>
+                        <a:t>Prejudice Remover</a:t>
+                      </a:r>
+                    </a:p>
+                  </a:txBody>
+                  <a:tcPr marL="91440" marR="73152" marT="18288" marB="18288">
+                    <a:solidFill>
+                      <a:srgbClr val="F4F6FA"/>
+                    </a:solidFill>
+                  </a:tcPr>
+                </a:tc>
+                <a:tc>
+                  <a:txBody>
+                    <a:bodyPr wrap="square"/>
+                    <a:lstStyle/>
+                    <a:p>
+                      <a:pPr algn="r"/>
+                      <a:r>
+                        <a:rPr sz="1150" b="0">
+                          <a:solidFill>
+                            <a:srgbClr val="1B1B1F"/>
+                          </a:solidFill>
+                          <a:latin typeface="Calibri"/>
+                        </a:rPr>
+                        <a:t>0.505</a:t>
+                      </a:r>
+                    </a:p>
+                  </a:txBody>
+                  <a:tcPr marL="91440" marR="73152" marT="18288" marB="18288">
+                    <a:solidFill>
+                      <a:srgbClr val="F4F6FA"/>
+                    </a:solidFill>
+                  </a:tcPr>
+                </a:tc>
+                <a:tc>
+                  <a:txBody>
+                    <a:bodyPr wrap="square"/>
+                    <a:lstStyle/>
+                    <a:p>
+                      <a:pPr algn="r"/>
+                      <a:r>
+                        <a:rPr sz="1150" b="0">
+                          <a:solidFill>
+                            <a:srgbClr val="1B1B1F"/>
+                          </a:solidFill>
+                          <a:latin typeface="Calibri"/>
+                        </a:rPr>
+                        <a:t>-7.3%</a:t>
+                      </a:r>
+                    </a:p>
+                  </a:txBody>
+                  <a:tcPr marL="91440" marR="73152" marT="18288" marB="18288">
+                    <a:solidFill>
+                      <a:srgbClr val="F4F6FA"/>
+                    </a:solidFill>
+                  </a:tcPr>
+                </a:tc>
+                <a:tc>
+                  <a:txBody>
+                    <a:bodyPr wrap="square"/>
+                    <a:lstStyle/>
+                    <a:p>
+                      <a:pPr algn="r"/>
+                      <a:r>
+                        <a:rPr sz="1150" b="0">
+                          <a:solidFill>
+                            <a:srgbClr val="1B1B1F"/>
+                          </a:solidFill>
+                          <a:latin typeface="Calibri"/>
+                        </a:rPr>
+                        <a:t>0.071</a:t>
+                      </a:r>
+                    </a:p>
+                  </a:txBody>
+                  <a:tcPr marL="91440" marR="73152" marT="18288" marB="18288">
+                    <a:solidFill>
+                      <a:srgbClr val="F4F6FA"/>
+                    </a:solidFill>
+                  </a:tcPr>
+                </a:tc>
+              </a:tr>
+              <a:tr h="329184">
+                <a:tc>
+                  <a:txBody>
+                    <a:bodyPr wrap="square"/>
+                    <a:lstStyle/>
+                    <a:p>
+                      <a:pPr algn="l"/>
+                      <a:r>
+                        <a:rPr sz="1150" b="0">
+                          <a:solidFill>
+                            <a:srgbClr val="1B1B1F"/>
+                          </a:solidFill>
+                          <a:latin typeface="Calibri"/>
+                        </a:rPr>
+                        <a:t>ExpGrad (EO)</a:t>
+                      </a:r>
+                    </a:p>
+                  </a:txBody>
+                  <a:tcPr marL="91440" marR="73152" marT="18288" marB="18288">
+                    <a:solidFill>
+                      <a:srgbClr val="FFFFFF"/>
+                    </a:solidFill>
+                  </a:tcPr>
+                </a:tc>
+                <a:tc>
+                  <a:txBody>
+                    <a:bodyPr wrap="square"/>
+                    <a:lstStyle/>
+                    <a:p>
+                      <a:pPr algn="r"/>
+                      <a:r>
+                        <a:rPr sz="1150" b="0">
+                          <a:solidFill>
+                            <a:srgbClr val="1B1B1F"/>
+                          </a:solidFill>
+                          <a:latin typeface="Calibri"/>
+                        </a:rPr>
+                        <a:t>0.475</a:t>
+                      </a:r>
+                    </a:p>
+                  </a:txBody>
+                  <a:tcPr marL="91440" marR="73152" marT="18288" marB="18288">
+                    <a:solidFill>
+                      <a:srgbClr val="FFFFFF"/>
+                    </a:solidFill>
+                  </a:tcPr>
+                </a:tc>
+                <a:tc>
+                  <a:txBody>
+                    <a:bodyPr wrap="square"/>
+                    <a:lstStyle/>
+                    <a:p>
+                      <a:pPr algn="r"/>
+                      <a:r>
+                        <a:rPr sz="1150" b="0">
+                          <a:solidFill>
+                            <a:srgbClr val="1B1B1F"/>
+                          </a:solidFill>
+                          <a:latin typeface="Calibri"/>
+                        </a:rPr>
+                        <a:t>-12.8%</a:t>
+                      </a:r>
+                    </a:p>
+                  </a:txBody>
+                  <a:tcPr marL="91440" marR="73152" marT="18288" marB="18288">
+                    <a:solidFill>
+                      <a:srgbClr val="FFFFFF"/>
+                    </a:solidFill>
+                  </a:tcPr>
+                </a:tc>
+                <a:tc>
+                  <a:txBody>
+                    <a:bodyPr wrap="square"/>
+                    <a:lstStyle/>
+                    <a:p>
+                      <a:pPr algn="r"/>
+                      <a:r>
+                        <a:rPr sz="1150" b="0">
+                          <a:solidFill>
+                            <a:srgbClr val="1B1B1F"/>
+                          </a:solidFill>
+                          <a:latin typeface="Calibri"/>
+                        </a:rPr>
+                        <a:t>0.082</a:t>
+                      </a:r>
+                    </a:p>
+                  </a:txBody>
+                  <a:tcPr marL="91440" marR="73152" marT="18288" marB="18288">
+                    <a:solidFill>
+                      <a:srgbClr val="FFFFFF"/>
+                    </a:solidFill>
+                  </a:tcPr>
+                </a:tc>
+              </a:tr>
+              <a:tr h="329184">
+                <a:tc>
+                  <a:txBody>
+                    <a:bodyPr wrap="square"/>
+                    <a:lstStyle/>
+                    <a:p>
+                      <a:pPr algn="l"/>
+                      <a:r>
+                        <a:rPr sz="1150" b="0">
+                          <a:solidFill>
+                            <a:srgbClr val="1B1B1F"/>
+                          </a:solidFill>
+                          <a:latin typeface="Calibri"/>
+                        </a:rPr>
+                        <a:t>Adversarial Debiasing</a:t>
+                      </a:r>
+                    </a:p>
+                  </a:txBody>
+                  <a:tcPr marL="91440" marR="73152" marT="18288" marB="18288">
+                    <a:solidFill>
+                      <a:srgbClr val="F4F6FA"/>
+                    </a:solidFill>
+                  </a:tcPr>
+                </a:tc>
+                <a:tc>
+                  <a:txBody>
+                    <a:bodyPr wrap="square"/>
+                    <a:lstStyle/>
+                    <a:p>
+                      <a:pPr algn="r"/>
+                      <a:r>
+                        <a:rPr sz="1150" b="0">
+                          <a:solidFill>
+                            <a:srgbClr val="1B1B1F"/>
+                          </a:solidFill>
+                          <a:latin typeface="Calibri"/>
+                        </a:rPr>
+                        <a:t>0.481</a:t>
+                      </a:r>
+                    </a:p>
+                  </a:txBody>
+                  <a:tcPr marL="91440" marR="73152" marT="18288" marB="18288">
+                    <a:solidFill>
+                      <a:srgbClr val="F4F6FA"/>
+                    </a:solidFill>
+                  </a:tcPr>
+                </a:tc>
+                <a:tc>
+                  <a:txBody>
+                    <a:bodyPr wrap="square"/>
+                    <a:lstStyle/>
+                    <a:p>
+                      <a:pPr algn="r"/>
+                      <a:r>
+                        <a:rPr sz="1150" b="0">
+                          <a:solidFill>
+                            <a:srgbClr val="1B1B1F"/>
+                          </a:solidFill>
+                          <a:latin typeface="Calibri"/>
+                        </a:rPr>
+                        <a:t>-11.7%</a:t>
+                      </a:r>
+                    </a:p>
+                  </a:txBody>
+                  <a:tcPr marL="91440" marR="73152" marT="18288" marB="18288">
+                    <a:solidFill>
+                      <a:srgbClr val="F4F6FA"/>
+                    </a:solidFill>
+                  </a:tcPr>
+                </a:tc>
+                <a:tc>
+                  <a:txBody>
+                    <a:bodyPr wrap="square"/>
+                    <a:lstStyle/>
+                    <a:p>
+                      <a:pPr algn="r"/>
+                      <a:r>
+                        <a:rPr sz="1150" b="0">
+                          <a:solidFill>
+                            <a:srgbClr val="1B1B1F"/>
+                          </a:solidFill>
+                          <a:latin typeface="Calibri"/>
+                        </a:rPr>
+                        <a:t>0.098</a:t>
+                      </a:r>
+                    </a:p>
+                  </a:txBody>
+                  <a:tcPr marL="91440" marR="73152" marT="18288" marB="18288">
+                    <a:solidFill>
+                      <a:srgbClr val="F4F6FA"/>
+                    </a:solidFill>
+                  </a:tcPr>
+                </a:tc>
+              </a:tr>
+            </a:tbl>
+          </a:graphicData>
+        </a:graphic>
+      </p:graphicFrame>
+      <p:sp>
+        <p:nvSpPr>
+          <p:cNvPr id="5" name="TextBox 4"/>
+          <p:cNvSpPr txBox="1"/>
+          <p:nvPr/>
+        </p:nvSpPr>
+        <p:spPr>
+          <a:xfrm>
+            <a:off x="640080" y="3977639"/>
+            <a:ext cx="10881360" cy="329184"/>
+          </a:xfrm>
+          <a:prstGeom prst="rect">
+            <a:avLst/>
+          </a:prstGeom>
+          <a:noFill/>
+        </p:spPr>
+        <p:txBody>
+          <a:bodyPr wrap="square">
+            <a:spAutoFit/>
+          </a:bodyPr>
+          <a:lstStyle/>
+          <a:p>
+            <a:pPr algn="l">
+              <a:lnSpc>
+                <a:spcPct val="100000"/>
+              </a:lnSpc>
+            </a:pPr>
+            <a:r>
+              <a:rPr sz="1500" b="1">
+                <a:solidFill>
+                  <a:srgbClr val="1E2761"/>
+                </a:solidFill>
+                <a:latin typeface="Cambria"/>
+              </a:rPr>
+              <a:t>Sex is not in the feature matrix. At all.</a:t>
+            </a:r>
+          </a:p>
+        </p:txBody>
+      </p:sp>
+      <p:sp>
+        <p:nvSpPr>
+          <p:cNvPr id="6" name="TextBox 5"/>
+          <p:cNvSpPr txBox="1"/>
+          <p:nvPr/>
+        </p:nvSpPr>
+        <p:spPr>
+          <a:xfrm>
+            <a:off x="640080" y="4352544"/>
+            <a:ext cx="10881360" cy="1097280"/>
+          </a:xfrm>
+          <a:prstGeom prst="rect">
+            <a:avLst/>
+          </a:prstGeom>
+          <a:noFill/>
+        </p:spPr>
+        <p:txBody>
+          <a:bodyPr wrap="square">
+            <a:spAutoFit/>
+          </a:bodyPr>
+          <a:lstStyle/>
+          <a:p>
+            <a:pPr algn="l">
+              <a:lnSpc>
+                <a:spcPct val="100000"/>
+              </a:lnSpc>
+            </a:pPr>
+            <a:r>
+              <a:rPr sz="1350" b="0">
+                <a:solidFill>
+                  <a:srgbClr val="1B1B1F"/>
+                </a:solidFill>
+                <a:latin typeface="Calibri"/>
+              </a:rPr>
+              <a:t>Yet the two methods with the best demographic parity scores lean on sex proxies harder than the model with no fairness fix, and both more than doubled their use of 'relationship' — a feature whose values are literally Husband and Wife.</a:t>
+            </a:r>
+          </a:p>
+          <a:p>
+            <a:pPr algn="l">
+              <a:lnSpc>
+                <a:spcPct val="100000"/>
+              </a:lnSpc>
+            </a:pPr>
+            <a:r>
+              <a:rPr sz="1350" b="0">
+                <a:solidFill>
+                  <a:srgbClr val="1B1B1F"/>
+                </a:solidFill>
+                <a:latin typeface="Calibri"/>
+              </a:rPr>
+              <a:t>To equalise selection rates across sex while forbidden to read sex, the model must first work out who is a woman. The constraint gives it a reason to become a better sex-detector.</a:t>
+            </a:r>
+          </a:p>
+        </p:txBody>
+      </p:sp>
+      <p:sp>
+        <p:nvSpPr>
+          <p:cNvPr id="7" name="Rounded Rectangle 6"/>
+          <p:cNvSpPr/>
+          <p:nvPr/>
+        </p:nvSpPr>
+        <p:spPr>
+          <a:xfrm>
+            <a:off x="640080" y="5532120"/>
+            <a:ext cx="5349240" cy="1005840"/>
+          </a:xfrm>
+          <a:prstGeom prst="roundRect">
+            <a:avLst>
+              <a:gd name="adj" fmla="val 4000"/>
+            </a:avLst>
+          </a:prstGeom>
+          <a:solidFill>
+            <a:srgbClr val="F4F6FA"/>
+          </a:solidFill>
+          <a:ln w="9525">
+            <a:solidFill>
+              <a:srgbClr val="D8DDE8"/>
+            </a:solidFill>
+          </a:ln>
+          <a:effectLst/>
+        </p:spPr>
+        <p:style>
+          <a:lnRef idx="1">
+            <a:schemeClr val="accent1"/>
+          </a:lnRef>
+          <a:fillRef idx="3">
+            <a:schemeClr val="accent1"/>
+          </a:fillRef>
+          <a:effectRef idx="2">
+            <a:schemeClr val="accent1"/>
+          </a:effectRef>
+          <a:fontRef idx="minor">
+            <a:schemeClr val="lt1"/>
+          </a:fontRef>
+        </p:style>
+        <p:txBody>
+          <a:bodyPr rtlCol="0" anchor="ctr"/>
+          <a:lstStyle/>
+          <a:p/>
+        </p:txBody>
+      </p:sp>
+      <p:sp>
+        <p:nvSpPr>
+          <p:cNvPr id="8" name="TextBox 7"/>
+          <p:cNvSpPr txBox="1"/>
+          <p:nvPr/>
+        </p:nvSpPr>
+        <p:spPr>
+          <a:xfrm>
+            <a:off x="868680" y="5650992"/>
+            <a:ext cx="4892040" cy="777240"/>
+          </a:xfrm>
+          <a:prstGeom prst="rect">
+            <a:avLst/>
+          </a:prstGeom>
+          <a:noFill/>
+        </p:spPr>
+        <p:txBody>
+          <a:bodyPr wrap="square">
+            <a:spAutoFit/>
+          </a:bodyPr>
+          <a:lstStyle/>
+          <a:p>
+            <a:pPr algn="l">
+              <a:lnSpc>
+                <a:spcPct val="100000"/>
+              </a:lnSpc>
+            </a:pPr>
+            <a:r>
+              <a:rPr sz="1250" b="0">
+                <a:solidFill>
+                  <a:srgbClr val="1B1B1F"/>
+                </a:solidFill>
+                <a:latin typeface="Calibri"/>
+              </a:rPr>
+              <a:t>Not an artifact: ExpGrad's figure is sampled, but GridSearch's is exact linear SHAP and agrees. Two estimators, same conclusion.</a:t>
+            </a:r>
+          </a:p>
+        </p:txBody>
+      </p:sp>
+      <p:sp>
+        <p:nvSpPr>
+          <p:cNvPr id="9" name="Rounded Rectangle 8"/>
+          <p:cNvSpPr/>
+          <p:nvPr/>
+        </p:nvSpPr>
+        <p:spPr>
+          <a:xfrm>
+            <a:off x="6172200" y="5532120"/>
+            <a:ext cx="5349240" cy="1005840"/>
+          </a:xfrm>
+          <a:prstGeom prst="roundRect">
+            <a:avLst>
+              <a:gd name="adj" fmla="val 4000"/>
+            </a:avLst>
+          </a:prstGeom>
+          <a:solidFill>
+            <a:srgbClr val="F4F6FA"/>
+          </a:solidFill>
+          <a:ln w="9525">
+            <a:solidFill>
+              <a:srgbClr val="D8DDE8"/>
+            </a:solidFill>
+          </a:ln>
+          <a:effectLst/>
+        </p:spPr>
+        <p:style>
+          <a:lnRef idx="1">
+            <a:schemeClr val="accent1"/>
+          </a:lnRef>
+          <a:fillRef idx="3">
+            <a:schemeClr val="accent1"/>
+          </a:fillRef>
+          <a:effectRef idx="2">
+            <a:schemeClr val="accent1"/>
+          </a:effectRef>
+          <a:fontRef idx="minor">
+            <a:schemeClr val="lt1"/>
+          </a:fontRef>
+        </p:style>
+        <p:txBody>
+          <a:bodyPr rtlCol="0" anchor="ctr"/>
+          <a:lstStyle/>
+          <a:p/>
+        </p:txBody>
+      </p:sp>
+      <p:sp>
+        <p:nvSpPr>
+          <p:cNvPr id="10" name="TextBox 9"/>
+          <p:cNvSpPr txBox="1"/>
+          <p:nvPr/>
+        </p:nvSpPr>
+        <p:spPr>
+          <a:xfrm>
+            <a:off x="6400800" y="5650992"/>
+            <a:ext cx="4892040" cy="777240"/>
+          </a:xfrm>
+          <a:prstGeom prst="rect">
+            <a:avLst/>
+          </a:prstGeom>
+          <a:noFill/>
+        </p:spPr>
+        <p:txBody>
+          <a:bodyPr wrap="square">
+            <a:spAutoFit/>
+          </a:bodyPr>
+          <a:lstStyle/>
+          <a:p>
+            <a:pPr algn="l">
+              <a:lnSpc>
+                <a:spcPct val="100000"/>
+              </a:lnSpc>
+            </a:pPr>
+            <a:r>
+              <a:rPr sz="1250" b="0">
+                <a:solidFill>
+                  <a:srgbClr val="1B1B1F"/>
+                </a:solidFill>
+                <a:latin typeface="Calibri"/>
+              </a:rPr>
+              <a:t>The one method that does reduce proxy reliance is Adversarial Debiasing — the only one whose objective is to destroy sex information. Theory predicted the ranking.</a:t>
+            </a:r>
+          </a:p>
+        </p:txBody>
+      </p:sp>
+    </p:spTree>
+  </p:cSld>
+  <p:clrMapOvr>
+    <a:masterClrMapping/>
+  </p:clrMapOvr>
+</p:sld>
+</file>
+
+<file path=ppt/slides/slide19.xml><?xml version="1.0" encoding="utf-8"?>
+<p:sld xmlns:a="http://schemas.openxmlformats.org/drawingml/2006/main" xmlns:p="http://schemas.openxmlformats.org/presentationml/2006/main" xmlns:r="http://schemas.openxmlformats.org/officeDocument/2006/relationships">
+  <p:cSld>
+    <p:spTree>
+      <p:nvGrpSpPr>
+        <p:cNvPr id="1" name=""/>
+        <p:cNvGrpSpPr/>
+        <p:nvPr/>
+      </p:nvGrpSpPr>
+      <p:grpSpPr/>
+      <p:sp>
+        <p:nvSpPr>
+          <p:cNvPr id="2" name="TextBox 1"/>
+          <p:cNvSpPr txBox="1"/>
+          <p:nvPr/>
+        </p:nvSpPr>
+        <p:spPr>
+          <a:xfrm>
+            <a:off x="640080" y="384048"/>
+            <a:ext cx="10881360" cy="640080"/>
+          </a:xfrm>
+          <a:prstGeom prst="rect">
+            <a:avLst/>
+          </a:prstGeom>
+          <a:noFill/>
+        </p:spPr>
+        <p:txBody>
+          <a:bodyPr wrap="square">
+            <a:spAutoFit/>
+          </a:bodyPr>
+          <a:lstStyle/>
+          <a:p>
+            <a:pPr algn="l">
+              <a:lnSpc>
+                <a:spcPct val="100000"/>
+              </a:lnSpc>
+            </a:pPr>
+            <a:r>
+              <a:rPr sz="2600" b="1">
+                <a:solidFill>
+                  <a:srgbClr val="1E2761"/>
+                </a:solidFill>
+                <a:latin typeface="Cambria"/>
+              </a:rPr>
+              <a:t>Contribution 3 — Fixing Sex Leaves Sex × Race Behind</a:t>
+            </a:r>
+          </a:p>
+        </p:txBody>
+      </p:sp>
+      <p:sp>
+        <p:nvSpPr>
+          <p:cNvPr id="3" name="TextBox 2"/>
+          <p:cNvSpPr txBox="1"/>
+          <p:nvPr/>
+        </p:nvSpPr>
+        <p:spPr>
+          <a:xfrm>
+            <a:off x="640080" y="1033271"/>
+            <a:ext cx="10881360" cy="384048"/>
+          </a:xfrm>
+          <a:prstGeom prst="rect">
+            <a:avLst/>
+          </a:prstGeom>
+          <a:noFill/>
+        </p:spPr>
+        <p:txBody>
+          <a:bodyPr wrap="square">
+            <a:spAutoFit/>
+          </a:bodyPr>
+          <a:lstStyle/>
+          <a:p>
+            <a:pPr algn="l">
+              <a:lnSpc>
+                <a:spcPct val="100000"/>
+              </a:lnSpc>
+            </a:pPr>
+            <a:r>
+              <a:rPr sz="1350" b="0">
+                <a:solidFill>
+                  <a:srgbClr val="5A6270"/>
+                </a:solidFill>
+                <a:latin typeface="Calibri"/>
+              </a:rPr>
+              <a:t>Every method so far constrains one binary attribute. That is the field's default, and it has a blind spot.</a:t>
+            </a:r>
+          </a:p>
+        </p:txBody>
+      </p:sp>
+      <p:graphicFrame>
+        <p:nvGraphicFramePr>
+          <p:cNvPr id="4" name="Table 3"/>
+          <p:cNvGraphicFramePr>
+            <a:graphicFrameLocks noGrp="1"/>
+          </p:cNvGraphicFramePr>
+          <p:nvPr/>
+        </p:nvGraphicFramePr>
+        <p:xfrm>
+          <a:off x="640080" y="1664208"/>
+          <a:ext cx="10881358" cy="1371600"/>
+        </p:xfrm>
+        <a:graphic>
+          <a:graphicData uri="http://schemas.openxmlformats.org/drawingml/2006/table">
+            <a:tbl>
+              <a:tblPr firstRow="1">
+                <a:tableStyleId>{5C22544A-7EE6-4342-B048-85BDC9FD1C3A}</a:tableStyleId>
+              </a:tblPr>
+              <a:tblGrid>
+                <a:gridCol w="3159104"/>
+                <a:gridCol w="1579552"/>
+                <a:gridCol w="1579552"/>
+                <a:gridCol w="2018316"/>
+                <a:gridCol w="2544834"/>
+              </a:tblGrid>
+              <a:tr h="384048">
+                <a:tc>
+                  <a:txBody>
+                    <a:bodyPr wrap="square"/>
+                    <a:lstStyle/>
+                    <a:p>
+                      <a:pPr algn="l"/>
+                      <a:r>
+                        <a:rPr sz="1100" b="1">
+                          <a:solidFill>
+                            <a:srgbClr val="FFFFFF"/>
+                          </a:solidFill>
+                          <a:latin typeface="Calibri"/>
+                        </a:rPr>
+                        <a:t>Arm</a:t>
+                      </a:r>
+                    </a:p>
+                  </a:txBody>
+                  <a:tcPr marL="91440" marR="73152" marT="18288" marB="18288">
+                    <a:solidFill>
+                      <a:srgbClr val="1E2761"/>
+                    </a:solidFill>
+                  </a:tcPr>
+                </a:tc>
+                <a:tc>
+                  <a:txBody>
+                    <a:bodyPr wrap="square"/>
+                    <a:lstStyle/>
+                    <a:p>
+                      <a:pPr algn="r"/>
+                      <a:r>
+                        <a:rPr sz="1100" b="1">
+                          <a:solidFill>
+                            <a:srgbClr val="FFFFFF"/>
+                          </a:solidFill>
+                          <a:latin typeface="Calibri"/>
+                        </a:rPr>
+                        <a:t>Accuracy</a:t>
+                      </a:r>
+                    </a:p>
+                  </a:txBody>
+                  <a:tcPr marL="91440" marR="73152" marT="18288" marB="18288">
+                    <a:solidFill>
+                      <a:srgbClr val="1E2761"/>
+                    </a:solidFill>
+                  </a:tcPr>
+                </a:tc>
+                <a:tc>
+                  <a:txBody>
+                    <a:bodyPr wrap="square"/>
+                    <a:lstStyle/>
+                    <a:p>
+                      <a:pPr algn="r"/>
+                      <a:r>
+                        <a:rPr sz="1100" b="1">
+                          <a:solidFill>
+                            <a:srgbClr val="FFFFFF"/>
+                          </a:solidFill>
+                          <a:latin typeface="Calibri"/>
+                        </a:rPr>
+                        <a:t>Sex gap</a:t>
+                      </a:r>
+                    </a:p>
+                  </a:txBody>
+                  <a:tcPr marL="91440" marR="73152" marT="18288" marB="18288">
+                    <a:solidFill>
+                      <a:srgbClr val="1E2761"/>
+                    </a:solidFill>
+                  </a:tcPr>
+                </a:tc>
+                <a:tc>
+                  <a:txBody>
+                    <a:bodyPr wrap="square"/>
+                    <a:lstStyle/>
+                    <a:p>
+                      <a:pPr algn="r"/>
+                      <a:r>
+                        <a:rPr sz="1100" b="1">
+                          <a:solidFill>
+                            <a:srgbClr val="FFFFFF"/>
+                          </a:solidFill>
+                          <a:latin typeface="Calibri"/>
+                        </a:rPr>
+                        <a:t>Sex × Race gap</a:t>
+                      </a:r>
+                    </a:p>
+                  </a:txBody>
+                  <a:tcPr marL="91440" marR="73152" marT="18288" marB="18288">
+                    <a:solidFill>
+                      <a:srgbClr val="1E2761"/>
+                    </a:solidFill>
+                  </a:tcPr>
+                </a:tc>
+                <a:tc>
+                  <a:txBody>
+                    <a:bodyPr wrap="square"/>
+                    <a:lstStyle/>
+                    <a:p>
+                      <a:pPr algn="r"/>
+                      <a:r>
+                        <a:rPr sz="1100" b="1">
+                          <a:solidFill>
+                            <a:srgbClr val="FFFFFF"/>
+                          </a:solidFill>
+                          <a:latin typeface="Calibri"/>
+                        </a:rPr>
+                        <a:t>Worst-off subgroup</a:t>
+                      </a:r>
+                    </a:p>
+                  </a:txBody>
+                  <a:tcPr marL="91440" marR="73152" marT="18288" marB="18288">
+                    <a:solidFill>
+                      <a:srgbClr val="1E2761"/>
+                    </a:solidFill>
+                  </a:tcPr>
+                </a:tc>
+              </a:tr>
+              <a:tr h="329184">
+                <a:tc>
+                  <a:txBody>
+                    <a:bodyPr wrap="square"/>
+                    <a:lstStyle/>
+                    <a:p>
+                      <a:pPr algn="l"/>
+                      <a:r>
+                        <a:rPr sz="1150" b="0">
+                          <a:solidFill>
+                            <a:srgbClr val="1B1B1F"/>
+                          </a:solidFill>
+                          <a:latin typeface="Calibri"/>
+                        </a:rPr>
+                        <a:t>No constraint</a:t>
+                      </a:r>
+                    </a:p>
+                  </a:txBody>
+                  <a:tcPr marL="91440" marR="73152" marT="18288" marB="18288">
+                    <a:solidFill>
+                      <a:srgbClr val="FFFFFF"/>
+                    </a:solidFill>
+                  </a:tcPr>
+                </a:tc>
+                <a:tc>
+                  <a:txBody>
+                    <a:bodyPr wrap="square"/>
+                    <a:lstStyle/>
+                    <a:p>
+                      <a:pPr algn="r"/>
+                      <a:r>
+                        <a:rPr sz="1150" b="0">
+                          <a:solidFill>
+                            <a:srgbClr val="1B1B1F"/>
+                          </a:solidFill>
+                          <a:latin typeface="Calibri"/>
+                        </a:rPr>
+                        <a:t>0.8465</a:t>
+                      </a:r>
+                    </a:p>
+                  </a:txBody>
+                  <a:tcPr marL="91440" marR="73152" marT="18288" marB="18288">
+                    <a:solidFill>
+                      <a:srgbClr val="FFFFFF"/>
+                    </a:solidFill>
+                  </a:tcPr>
+                </a:tc>
+                <a:tc>
+                  <a:txBody>
+                    <a:bodyPr wrap="square"/>
+                    <a:lstStyle/>
+                    <a:p>
+                      <a:pPr algn="r"/>
+                      <a:r>
+                        <a:rPr sz="1150" b="0">
+                          <a:solidFill>
+                            <a:srgbClr val="1B1B1F"/>
+                          </a:solidFill>
+                          <a:latin typeface="Calibri"/>
+                        </a:rPr>
+                        <a:t>0.1897</a:t>
+                      </a:r>
+                    </a:p>
+                  </a:txBody>
+                  <a:tcPr marL="91440" marR="73152" marT="18288" marB="18288">
+                    <a:solidFill>
+                      <a:srgbClr val="FFFFFF"/>
+                    </a:solidFill>
+                  </a:tcPr>
+                </a:tc>
+                <a:tc>
+                  <a:txBody>
+                    <a:bodyPr wrap="square"/>
+                    <a:lstStyle/>
+                    <a:p>
+                      <a:pPr algn="r"/>
+                      <a:r>
+                        <a:rPr sz="1150" b="0">
+                          <a:solidFill>
+                            <a:srgbClr val="1B1B1F"/>
+                          </a:solidFill>
+                          <a:latin typeface="Calibri"/>
+                        </a:rPr>
+                        <a:t>0.3145</a:t>
+                      </a:r>
+                    </a:p>
+                  </a:txBody>
+                  <a:tcPr marL="91440" marR="73152" marT="18288" marB="18288">
+                    <a:solidFill>
+                      <a:srgbClr val="FFFFFF"/>
+                    </a:solidFill>
+                  </a:tcPr>
+                </a:tc>
+                <a:tc>
+                  <a:txBody>
+                    <a:bodyPr wrap="square"/>
+                    <a:lstStyle/>
+                    <a:p>
+                      <a:pPr algn="r"/>
+                      <a:r>
+                        <a:rPr sz="1150" b="0">
+                          <a:solidFill>
+                            <a:srgbClr val="1B1B1F"/>
+                          </a:solidFill>
+                          <a:latin typeface="Calibri"/>
+                        </a:rPr>
+                        <a:t>Female x Black</a:t>
+                      </a:r>
+                    </a:p>
+                  </a:txBody>
+                  <a:tcPr marL="91440" marR="73152" marT="18288" marB="18288">
+                    <a:solidFill>
+                      <a:srgbClr val="FFFFFF"/>
+                    </a:solidFill>
+                  </a:tcPr>
+                </a:tc>
+              </a:tr>
+              <a:tr h="329184">
+                <a:tc>
+                  <a:txBody>
+                    <a:bodyPr wrap="square"/>
+                    <a:lstStyle/>
+                    <a:p>
+                      <a:pPr algn="l"/>
+                      <a:r>
+                        <a:rPr sz="1150" b="1">
+                          <a:solidFill>
+                            <a:srgbClr val="1B1B1F"/>
+                          </a:solidFill>
+                          <a:latin typeface="Calibri"/>
+                        </a:rPr>
+                        <a:t>ExpGrad-DP on Sex</a:t>
+                      </a:r>
+                    </a:p>
+                  </a:txBody>
+                  <a:tcPr marL="91440" marR="73152" marT="18288" marB="18288">
+                    <a:solidFill>
+                      <a:srgbClr val="FDF3E2"/>
+                    </a:solidFill>
+                  </a:tcPr>
+                </a:tc>
+                <a:tc>
+                  <a:txBody>
+                    <a:bodyPr wrap="square"/>
+                    <a:lstStyle/>
+                    <a:p>
+                      <a:pPr algn="r"/>
+                      <a:r>
+                        <a:rPr sz="1150" b="1">
+                          <a:solidFill>
+                            <a:srgbClr val="1B1B1F"/>
+                          </a:solidFill>
+                          <a:latin typeface="Calibri"/>
+                        </a:rPr>
+                        <a:t>0.8295</a:t>
+                      </a:r>
+                    </a:p>
+                  </a:txBody>
+                  <a:tcPr marL="91440" marR="73152" marT="18288" marB="18288">
+                    <a:solidFill>
+                      <a:srgbClr val="FDF3E2"/>
+                    </a:solidFill>
+                  </a:tcPr>
+                </a:tc>
+                <a:tc>
+                  <a:txBody>
+                    <a:bodyPr wrap="square"/>
+                    <a:lstStyle/>
+                    <a:p>
+                      <a:pPr algn="r"/>
+                      <a:r>
+                        <a:rPr sz="1150" b="1">
+                          <a:solidFill>
+                            <a:srgbClr val="1B1B1F"/>
+                          </a:solidFill>
+                          <a:latin typeface="Calibri"/>
+                        </a:rPr>
+                        <a:t>0.0197</a:t>
+                      </a:r>
+                    </a:p>
+                  </a:txBody>
+                  <a:tcPr marL="91440" marR="73152" marT="18288" marB="18288">
+                    <a:solidFill>
+                      <a:srgbClr val="FDF3E2"/>
+                    </a:solidFill>
+                  </a:tcPr>
+                </a:tc>
+                <a:tc>
+                  <a:txBody>
+                    <a:bodyPr wrap="square"/>
+                    <a:lstStyle/>
+                    <a:p>
+                      <a:pPr algn="r"/>
+                      <a:r>
+                        <a:rPr sz="1150" b="1">
+                          <a:solidFill>
+                            <a:srgbClr val="1B1B1F"/>
+                          </a:solidFill>
+                          <a:latin typeface="Calibri"/>
+                        </a:rPr>
+                        <a:t>0.1776</a:t>
+                      </a:r>
+                    </a:p>
+                  </a:txBody>
+                  <a:tcPr marL="91440" marR="73152" marT="18288" marB="18288">
+                    <a:solidFill>
+                      <a:srgbClr val="FDF3E2"/>
+                    </a:solidFill>
+                  </a:tcPr>
+                </a:tc>
+                <a:tc>
+                  <a:txBody>
+                    <a:bodyPr wrap="square"/>
+                    <a:lstStyle/>
+                    <a:p>
+                      <a:pPr algn="r"/>
+                      <a:r>
+                        <a:rPr sz="1150" b="1">
+                          <a:solidFill>
+                            <a:srgbClr val="1B1B1F"/>
+                          </a:solidFill>
+                          <a:latin typeface="Calibri"/>
+                        </a:rPr>
+                        <a:t>Male x Black</a:t>
+                      </a:r>
+                    </a:p>
+                  </a:txBody>
+                  <a:tcPr marL="91440" marR="73152" marT="18288" marB="18288">
+                    <a:solidFill>
+                      <a:srgbClr val="FDF3E2"/>
+                    </a:solidFill>
+                  </a:tcPr>
+                </a:tc>
+              </a:tr>
+              <a:tr h="329184">
+                <a:tc>
+                  <a:txBody>
+                    <a:bodyPr wrap="square"/>
+                    <a:lstStyle/>
+                    <a:p>
+                      <a:pPr algn="l"/>
+                      <a:r>
+                        <a:rPr sz="1150" b="0">
+                          <a:solidFill>
+                            <a:srgbClr val="1B1B1F"/>
+                          </a:solidFill>
+                          <a:latin typeface="Calibri"/>
+                        </a:rPr>
+                        <a:t>ExpGrad-DP on Sex × Race</a:t>
+                      </a:r>
+                    </a:p>
+                  </a:txBody>
+                  <a:tcPr marL="91440" marR="73152" marT="18288" marB="18288">
+                    <a:solidFill>
+                      <a:srgbClr val="FFFFFF"/>
+                    </a:solidFill>
+                  </a:tcPr>
+                </a:tc>
+                <a:tc>
+                  <a:txBody>
+                    <a:bodyPr wrap="square"/>
+                    <a:lstStyle/>
+                    <a:p>
+                      <a:pPr algn="r"/>
+                      <a:r>
+                        <a:rPr sz="1150" b="0">
+                          <a:solidFill>
+                            <a:srgbClr val="1B1B1F"/>
+                          </a:solidFill>
+                          <a:latin typeface="Calibri"/>
+                        </a:rPr>
+                        <a:t>0.8129</a:t>
+                      </a:r>
+                    </a:p>
+                  </a:txBody>
+                  <a:tcPr marL="91440" marR="73152" marT="18288" marB="18288">
+                    <a:solidFill>
+                      <a:srgbClr val="FFFFFF"/>
+                    </a:solidFill>
+                  </a:tcPr>
+                </a:tc>
+                <a:tc>
+                  <a:txBody>
+                    <a:bodyPr wrap="square"/>
+                    <a:lstStyle/>
+                    <a:p>
+                      <a:pPr algn="r"/>
+                      <a:r>
+                        <a:rPr sz="1150" b="0">
+                          <a:solidFill>
+                            <a:srgbClr val="1B1B1F"/>
+                          </a:solidFill>
+                          <a:latin typeface="Calibri"/>
+                        </a:rPr>
+                        <a:t>0.0164</a:t>
+                      </a:r>
+                    </a:p>
+                  </a:txBody>
+                  <a:tcPr marL="91440" marR="73152" marT="18288" marB="18288">
+                    <a:solidFill>
+                      <a:srgbClr val="FFFFFF"/>
+                    </a:solidFill>
+                  </a:tcPr>
+                </a:tc>
+                <a:tc>
+                  <a:txBody>
+                    <a:bodyPr wrap="square"/>
+                    <a:lstStyle/>
+                    <a:p>
+                      <a:pPr algn="r"/>
+                      <a:r>
+                        <a:rPr sz="1150" b="0">
+                          <a:solidFill>
+                            <a:srgbClr val="1B1B1F"/>
+                          </a:solidFill>
+                          <a:latin typeface="Calibri"/>
+                        </a:rPr>
+                        <a:t>0.0481</a:t>
+                      </a:r>
+                    </a:p>
+                  </a:txBody>
+                  <a:tcPr marL="91440" marR="73152" marT="18288" marB="18288">
+                    <a:solidFill>
+                      <a:srgbClr val="FFFFFF"/>
+                    </a:solidFill>
+                  </a:tcPr>
+                </a:tc>
+                <a:tc>
+                  <a:txBody>
+                    <a:bodyPr wrap="square"/>
+                    <a:lstStyle/>
+                    <a:p>
+                      <a:pPr algn="r"/>
+                      <a:r>
+                        <a:rPr sz="1150" b="0">
+                          <a:solidFill>
+                            <a:srgbClr val="1B1B1F"/>
+                          </a:solidFill>
+                          <a:latin typeface="Calibri"/>
+                        </a:rPr>
+                        <a:t>Female x White</a:t>
+                      </a:r>
+                    </a:p>
+                  </a:txBody>
+                  <a:tcPr marL="91440" marR="73152" marT="18288" marB="18288">
+                    <a:solidFill>
+                      <a:srgbClr val="FFFFFF"/>
+                    </a:solidFill>
+                  </a:tcPr>
+                </a:tc>
+              </a:tr>
+            </a:tbl>
+          </a:graphicData>
+        </a:graphic>
+      </p:graphicFrame>
+      <p:sp>
+        <p:nvSpPr>
+          <p:cNvPr id="5" name="TextBox 4"/>
+          <p:cNvSpPr txBox="1"/>
+          <p:nvPr/>
+        </p:nvSpPr>
+        <p:spPr>
+          <a:xfrm>
+            <a:off x="640080" y="3246120"/>
+            <a:ext cx="3291840" cy="566928"/>
+          </a:xfrm>
+          <a:prstGeom prst="rect">
+            <a:avLst/>
+          </a:prstGeom>
+          <a:noFill/>
+        </p:spPr>
+        <p:txBody>
+          <a:bodyPr wrap="square">
+            <a:spAutoFit/>
+          </a:bodyPr>
+          <a:lstStyle/>
+          <a:p>
+            <a:pPr algn="ctr">
+              <a:lnSpc>
+                <a:spcPct val="100000"/>
+              </a:lnSpc>
+            </a:pPr>
+            <a:r>
+              <a:rPr sz="3000" b="1">
+                <a:solidFill>
+                  <a:srgbClr val="EB6834"/>
+                </a:solidFill>
+                <a:latin typeface="Cambria"/>
+              </a:rPr>
+              <a:t>9×</a:t>
+            </a:r>
+          </a:p>
+        </p:txBody>
+      </p:sp>
+      <p:sp>
+        <p:nvSpPr>
+          <p:cNvPr id="6" name="TextBox 5"/>
+          <p:cNvSpPr txBox="1"/>
+          <p:nvPr/>
+        </p:nvSpPr>
+        <p:spPr>
+          <a:xfrm>
+            <a:off x="640080" y="3813048"/>
+            <a:ext cx="3291840" cy="685800"/>
+          </a:xfrm>
+          <a:prstGeom prst="rect">
+            <a:avLst/>
+          </a:prstGeom>
+          <a:noFill/>
+        </p:spPr>
+        <p:txBody>
+          <a:bodyPr wrap="square">
+            <a:spAutoFit/>
+          </a:bodyPr>
+          <a:lstStyle/>
+          <a:p>
+            <a:pPr algn="ctr">
+              <a:lnSpc>
+                <a:spcPct val="95000"/>
+              </a:lnSpc>
+            </a:pPr>
+            <a:r>
+              <a:rPr sz="1100" b="0">
+                <a:solidFill>
+                  <a:srgbClr val="5A6270"/>
+                </a:solidFill>
+                <a:latin typeface="Calibri"/>
+              </a:rPr>
+              <a:t>larger gap at Sex × Race than on</a:t>
+            </a:r>
+          </a:p>
+          <a:p>
+            <a:pPr algn="ctr">
+              <a:lnSpc>
+                <a:spcPct val="95000"/>
+              </a:lnSpc>
+            </a:pPr>
+            <a:r>
+              <a:rPr sz="1100" b="0">
+                <a:solidFill>
+                  <a:srgbClr val="5A6270"/>
+                </a:solidFill>
+                <a:latin typeface="Calibri"/>
+              </a:rPr>
+              <a:t>the attribute it was constrained on</a:t>
+            </a:r>
+          </a:p>
+        </p:txBody>
+      </p:sp>
+      <p:sp>
+        <p:nvSpPr>
+          <p:cNvPr id="7" name="TextBox 6"/>
+          <p:cNvSpPr txBox="1"/>
+          <p:nvPr/>
+        </p:nvSpPr>
+        <p:spPr>
+          <a:xfrm>
+            <a:off x="4434840" y="3246120"/>
+            <a:ext cx="3291840" cy="566928"/>
+          </a:xfrm>
+          <a:prstGeom prst="rect">
+            <a:avLst/>
+          </a:prstGeom>
+          <a:noFill/>
+        </p:spPr>
+        <p:txBody>
+          <a:bodyPr wrap="square">
+            <a:spAutoFit/>
+          </a:bodyPr>
+          <a:lstStyle/>
+          <a:p>
+            <a:pPr algn="ctr">
+              <a:lnSpc>
+                <a:spcPct val="100000"/>
+              </a:lnSpc>
+            </a:pPr>
+            <a:r>
+              <a:rPr sz="3000" b="1">
+                <a:solidFill>
+                  <a:srgbClr val="EB6834"/>
+                </a:solidFill>
+                <a:latin typeface="Cambria"/>
+              </a:rPr>
+              <a:t>3.3×</a:t>
+            </a:r>
+          </a:p>
+        </p:txBody>
+      </p:sp>
+      <p:sp>
+        <p:nvSpPr>
+          <p:cNvPr id="8" name="TextBox 7"/>
+          <p:cNvSpPr txBox="1"/>
+          <p:nvPr/>
+        </p:nvSpPr>
+        <p:spPr>
+          <a:xfrm>
+            <a:off x="4434840" y="3813048"/>
+            <a:ext cx="3291840" cy="685800"/>
+          </a:xfrm>
+          <a:prstGeom prst="rect">
+            <a:avLst/>
+          </a:prstGeom>
+          <a:noFill/>
+        </p:spPr>
+        <p:txBody>
+          <a:bodyPr wrap="square">
+            <a:spAutoFit/>
+          </a:bodyPr>
+          <a:lstStyle/>
+          <a:p>
+            <a:pPr algn="ctr">
+              <a:lnSpc>
+                <a:spcPct val="95000"/>
+              </a:lnSpc>
+            </a:pPr>
+            <a:r>
+              <a:rPr sz="1100" b="0">
+                <a:solidFill>
+                  <a:srgbClr val="5A6270"/>
+                </a:solidFill>
+                <a:latin typeface="Calibri"/>
+              </a:rPr>
+              <a:t>Asian men vs Black men selection</a:t>
+            </a:r>
+          </a:p>
+          <a:p>
+            <a:pPr algn="ctr">
+              <a:lnSpc>
+                <a:spcPct val="95000"/>
+              </a:lnSpc>
+            </a:pPr>
+            <a:r>
+              <a:rPr sz="1100" b="0">
+                <a:solidFill>
+                  <a:srgbClr val="5A6270"/>
+                </a:solidFill>
+                <a:latin typeface="Calibri"/>
+              </a:rPr>
+              <a:t>rate — after 'fixing' sex</a:t>
+            </a:r>
+          </a:p>
+        </p:txBody>
+      </p:sp>
+      <p:sp>
+        <p:nvSpPr>
+          <p:cNvPr id="9" name="TextBox 8"/>
+          <p:cNvSpPr txBox="1"/>
+          <p:nvPr/>
+        </p:nvSpPr>
+        <p:spPr>
+          <a:xfrm>
+            <a:off x="8229600" y="3246120"/>
+            <a:ext cx="3291840" cy="566928"/>
+          </a:xfrm>
+          <a:prstGeom prst="rect">
+            <a:avLst/>
+          </a:prstGeom>
+          <a:noFill/>
+        </p:spPr>
+        <p:txBody>
+          <a:bodyPr wrap="square">
+            <a:spAutoFit/>
+          </a:bodyPr>
+          <a:lstStyle/>
+          <a:p>
+            <a:pPr algn="ctr">
+              <a:lnSpc>
+                <a:spcPct val="100000"/>
+              </a:lnSpc>
+            </a:pPr>
+            <a:r>
+              <a:rPr sz="3000" b="1">
+                <a:solidFill>
+                  <a:srgbClr val="1E2761"/>
+                </a:solidFill>
+                <a:latin typeface="Cambria"/>
+              </a:rPr>
+              <a:t>5 of 10</a:t>
+            </a:r>
+          </a:p>
+        </p:txBody>
+      </p:sp>
+      <p:sp>
+        <p:nvSpPr>
+          <p:cNvPr id="10" name="TextBox 9"/>
+          <p:cNvSpPr txBox="1"/>
+          <p:nvPr/>
+        </p:nvSpPr>
+        <p:spPr>
+          <a:xfrm>
+            <a:off x="8229600" y="3813048"/>
+            <a:ext cx="3291840" cy="685800"/>
+          </a:xfrm>
+          <a:prstGeom prst="rect">
+            <a:avLst/>
+          </a:prstGeom>
+          <a:noFill/>
+        </p:spPr>
+        <p:txBody>
+          <a:bodyPr wrap="square">
+            <a:spAutoFit/>
+          </a:bodyPr>
+          <a:lstStyle/>
+          <a:p>
+            <a:pPr algn="ctr">
+              <a:lnSpc>
+                <a:spcPct val="95000"/>
+              </a:lnSpc>
+            </a:pPr>
+            <a:r>
+              <a:rPr sz="1100" b="0">
+                <a:solidFill>
+                  <a:srgbClr val="5A6270"/>
+                </a:solidFill>
+                <a:latin typeface="Calibri"/>
+              </a:rPr>
+              <a:t>subgroups too small to measure.</a:t>
+            </a:r>
+          </a:p>
+          <a:p>
+            <a:pPr algn="ctr">
+              <a:lnSpc>
+                <a:spcPct val="95000"/>
+              </a:lnSpc>
+            </a:pPr>
+            <a:r>
+              <a:rPr sz="1100" b="0">
+                <a:solidFill>
+                  <a:srgbClr val="5A6270"/>
+                </a:solidFill>
+                <a:latin typeface="Calibri"/>
+              </a:rPr>
+              <a:t>One has zero positive labels.</a:t>
+            </a:r>
+          </a:p>
+        </p:txBody>
+      </p:sp>
+      <p:sp>
+        <p:nvSpPr>
+          <p:cNvPr id="11" name="Rounded Rectangle 10"/>
+          <p:cNvSpPr/>
+          <p:nvPr/>
+        </p:nvSpPr>
+        <p:spPr>
+          <a:xfrm>
+            <a:off x="640080" y="4709160"/>
+            <a:ext cx="5349240" cy="1783080"/>
+          </a:xfrm>
+          <a:prstGeom prst="roundRect">
+            <a:avLst>
+              <a:gd name="adj" fmla="val 4000"/>
+            </a:avLst>
+          </a:prstGeom>
+          <a:solidFill>
+            <a:srgbClr val="FDF3E2"/>
+          </a:solidFill>
+          <a:ln w="9525">
+            <a:solidFill>
+              <a:srgbClr val="E8A33D"/>
+            </a:solidFill>
+          </a:ln>
+          <a:effectLst/>
+        </p:spPr>
+        <p:style>
+          <a:lnRef idx="1">
+            <a:schemeClr val="accent1"/>
+          </a:lnRef>
+          <a:fillRef idx="3">
+            <a:schemeClr val="accent1"/>
+          </a:fillRef>
+          <a:effectRef idx="2">
+            <a:schemeClr val="accent1"/>
+          </a:effectRef>
+          <a:fontRef idx="minor">
+            <a:schemeClr val="lt1"/>
+          </a:fontRef>
+        </p:style>
+        <p:txBody>
+          <a:bodyPr rtlCol="0" anchor="ctr"/>
+          <a:lstStyle/>
+          <a:p/>
+        </p:txBody>
+      </p:sp>
+      <p:sp>
+        <p:nvSpPr>
+          <p:cNvPr id="12" name="TextBox 11"/>
+          <p:cNvSpPr txBox="1"/>
+          <p:nvPr/>
+        </p:nvSpPr>
+        <p:spPr>
+          <a:xfrm>
+            <a:off x="868680" y="4864608"/>
+            <a:ext cx="4892040" cy="1508760"/>
+          </a:xfrm>
+          <a:prstGeom prst="rect">
+            <a:avLst/>
+          </a:prstGeom>
+          <a:noFill/>
+        </p:spPr>
+        <p:txBody>
+          <a:bodyPr wrap="square">
+            <a:spAutoFit/>
+          </a:bodyPr>
+          <a:lstStyle/>
+          <a:p>
+            <a:pPr algn="l">
+              <a:lnSpc>
+                <a:spcPct val="105000"/>
+              </a:lnSpc>
+            </a:pPr>
+            <a:r>
+              <a:rPr sz="1300" b="0">
+                <a:solidFill>
+                  <a:srgbClr val="1B1B1F"/>
+                </a:solidFill>
+                <a:latin typeface="Calibri"/>
+              </a:rPr>
+              <a:t>The sex constraint moved the worst-off subgroup from Black women to Black men.</a:t>
+            </a:r>
+          </a:p>
+          <a:p>
+            <a:pPr algn="l">
+              <a:lnSpc>
+                <a:spcPct val="105000"/>
+              </a:lnSpc>
+            </a:pPr>
+            <a:r>
+              <a:rPr sz="1300" b="0">
+                <a:solidFill>
+                  <a:srgbClr val="1B1B1F"/>
+                </a:solidFill>
+                <a:latin typeface="Calibri"/>
+              </a:rPr>
+              <a:t/>
+            </a:r>
+          </a:p>
+          <a:p>
+            <a:pPr algn="l">
+              <a:lnSpc>
+                <a:spcPct val="105000"/>
+              </a:lnSpc>
+            </a:pPr>
+            <a:r>
+              <a:rPr sz="1300" b="0">
+                <a:solidFill>
+                  <a:srgbClr val="1B1B1F"/>
+                </a:solidFill>
+                <a:latin typeface="Calibri"/>
+              </a:rPr>
+              <a:t>Nothing was done to them. The constraint simply had nothing to say about them, and equalising the sex marginal while race went unconstrained left them as the residual.</a:t>
+            </a:r>
+          </a:p>
+        </p:txBody>
+      </p:sp>
+      <p:sp>
+        <p:nvSpPr>
+          <p:cNvPr id="13" name="Rounded Rectangle 12"/>
+          <p:cNvSpPr/>
+          <p:nvPr/>
+        </p:nvSpPr>
+        <p:spPr>
+          <a:xfrm>
+            <a:off x="6172200" y="4709160"/>
+            <a:ext cx="5349240" cy="1783080"/>
+          </a:xfrm>
+          <a:prstGeom prst="roundRect">
+            <a:avLst>
+              <a:gd name="adj" fmla="val 4000"/>
+            </a:avLst>
+          </a:prstGeom>
+          <a:solidFill>
+            <a:srgbClr val="F4F6FA"/>
+          </a:solidFill>
+          <a:ln w="9525">
+            <a:solidFill>
+              <a:srgbClr val="D8DDE8"/>
+            </a:solidFill>
+          </a:ln>
+          <a:effectLst/>
+        </p:spPr>
+        <p:style>
+          <a:lnRef idx="1">
+            <a:schemeClr val="accent1"/>
+          </a:lnRef>
+          <a:fillRef idx="3">
+            <a:schemeClr val="accent1"/>
+          </a:fillRef>
+          <a:effectRef idx="2">
+            <a:schemeClr val="accent1"/>
+          </a:effectRef>
+          <a:fontRef idx="minor">
+            <a:schemeClr val="lt1"/>
+          </a:fontRef>
+        </p:style>
+        <p:txBody>
+          <a:bodyPr rtlCol="0" anchor="ctr"/>
+          <a:lstStyle/>
+          <a:p/>
+        </p:txBody>
+      </p:sp>
+      <p:sp>
+        <p:nvSpPr>
+          <p:cNvPr id="14" name="TextBox 13"/>
+          <p:cNvSpPr txBox="1"/>
+          <p:nvPr/>
+        </p:nvSpPr>
+        <p:spPr>
+          <a:xfrm>
+            <a:off x="6400800" y="4864608"/>
+            <a:ext cx="4892040" cy="1508760"/>
+          </a:xfrm>
+          <a:prstGeom prst="rect">
+            <a:avLst/>
+          </a:prstGeom>
+          <a:noFill/>
+        </p:spPr>
+        <p:txBody>
+          <a:bodyPr wrap="square">
+            <a:spAutoFit/>
+          </a:bodyPr>
+          <a:lstStyle/>
+          <a:p>
+            <a:pPr algn="l">
+              <a:lnSpc>
+                <a:spcPct val="105000"/>
+              </a:lnSpc>
+            </a:pPr>
+            <a:r>
+              <a:rPr sz="1300" b="0">
+                <a:solidFill>
+                  <a:srgbClr val="1B1B1F"/>
+                </a:solidFill>
+                <a:latin typeface="Calibri"/>
+              </a:rPr>
+              <a:t>Half of any Sex × Race heatmap on Adult is noise. Female × Other has 21 people and no positive labels — its TPR is 0÷0.</a:t>
+            </a:r>
+          </a:p>
+          <a:p>
+            <a:pPr algn="l">
+              <a:lnSpc>
+                <a:spcPct val="105000"/>
+              </a:lnSpc>
+            </a:pPr>
+            <a:r>
+              <a:rPr sz="1300" b="0">
+                <a:solidFill>
+                  <a:srgbClr val="1B1B1F"/>
+                </a:solidFill>
+                <a:latin typeface="Calibri"/>
+              </a:rPr>
+              <a:t/>
+            </a:r>
+          </a:p>
+          <a:p>
+            <a:pPr algn="l">
+              <a:lnSpc>
+                <a:spcPct val="105000"/>
+              </a:lnSpc>
+            </a:pPr>
+            <a:r>
+              <a:rPr sz="1300" b="0">
+                <a:solidFill>
+                  <a:srgbClr val="1B1B1F"/>
+                </a:solidFill>
+                <a:latin typeface="Calibri"/>
+              </a:rPr>
+              <a:t>70% of the intersectional arm's apparent gap comes from cells too small to measure. We report Wilson intervals and gate on them.</a:t>
+            </a:r>
           </a:p>
         </p:txBody>
       </p:sp>
@@ -5697,6 +11891,895 @@
 </p:sld>
 </file>
 
+<file path=ppt/slides/slide20.xml><?xml version="1.0" encoding="utf-8"?>
+<p:sld xmlns:a="http://schemas.openxmlformats.org/drawingml/2006/main" xmlns:p="http://schemas.openxmlformats.org/presentationml/2006/main" xmlns:r="http://schemas.openxmlformats.org/officeDocument/2006/relationships">
+  <p:cSld>
+    <p:spTree>
+      <p:nvGrpSpPr>
+        <p:cNvPr id="1" name=""/>
+        <p:cNvGrpSpPr/>
+        <p:nvPr/>
+      </p:nvGrpSpPr>
+      <p:grpSpPr/>
+      <p:sp>
+        <p:nvSpPr>
+          <p:cNvPr id="2" name="TextBox 1"/>
+          <p:cNvSpPr txBox="1"/>
+          <p:nvPr/>
+        </p:nvSpPr>
+        <p:spPr>
+          <a:xfrm>
+            <a:off x="640080" y="384048"/>
+            <a:ext cx="10881360" cy="640080"/>
+          </a:xfrm>
+          <a:prstGeom prst="rect">
+            <a:avLst/>
+          </a:prstGeom>
+          <a:noFill/>
+        </p:spPr>
+        <p:txBody>
+          <a:bodyPr wrap="square">
+            <a:spAutoFit/>
+          </a:bodyPr>
+          <a:lstStyle/>
+          <a:p>
+            <a:pPr algn="l">
+              <a:lnSpc>
+                <a:spcPct val="100000"/>
+              </a:lnSpc>
+            </a:pPr>
+            <a:r>
+              <a:rPr sz="2600" b="1">
+                <a:solidFill>
+                  <a:srgbClr val="1E2761"/>
+                </a:solidFill>
+                <a:latin typeface="Cambria"/>
+              </a:rPr>
+              <a:t>Verdict — What We Confirmed, Extended, and Refuted</a:t>
+            </a:r>
+          </a:p>
+        </p:txBody>
+      </p:sp>
+      <p:sp>
+        <p:nvSpPr>
+          <p:cNvPr id="3" name="TextBox 2"/>
+          <p:cNvSpPr txBox="1"/>
+          <p:nvPr/>
+        </p:nvSpPr>
+        <p:spPr>
+          <a:xfrm>
+            <a:off x="640080" y="1033271"/>
+            <a:ext cx="10881360" cy="384048"/>
+          </a:xfrm>
+          <a:prstGeom prst="rect">
+            <a:avLst/>
+          </a:prstGeom>
+          <a:noFill/>
+        </p:spPr>
+        <p:txBody>
+          <a:bodyPr wrap="square">
+            <a:spAutoFit/>
+          </a:bodyPr>
+          <a:lstStyle/>
+          <a:p>
+            <a:pPr algn="l">
+              <a:lnSpc>
+                <a:spcPct val="100000"/>
+              </a:lnSpc>
+            </a:pPr>
+            <a:r>
+              <a:rPr sz="1350" b="0">
+                <a:solidFill>
+                  <a:srgbClr val="5A6270"/>
+                </a:solidFill>
+                <a:latin typeface="Calibri"/>
+              </a:rPr>
+              <a:t>The distinction matters. It is easy to present an extension as a refutation.</a:t>
+            </a:r>
+          </a:p>
+        </p:txBody>
+      </p:sp>
+      <p:sp>
+        <p:nvSpPr>
+          <p:cNvPr id="4" name="Rounded Rectangle 3"/>
+          <p:cNvSpPr/>
+          <p:nvPr/>
+        </p:nvSpPr>
+        <p:spPr>
+          <a:xfrm>
+            <a:off x="640080" y="1645920"/>
+            <a:ext cx="3429000" cy="3703320"/>
+          </a:xfrm>
+          <a:prstGeom prst="roundRect">
+            <a:avLst>
+              <a:gd name="adj" fmla="val 4000"/>
+            </a:avLst>
+          </a:prstGeom>
+          <a:solidFill>
+            <a:srgbClr val="F4F6FA"/>
+          </a:solidFill>
+          <a:ln w="9525">
+            <a:solidFill>
+              <a:srgbClr val="D8DDE8"/>
+            </a:solidFill>
+          </a:ln>
+          <a:effectLst/>
+        </p:spPr>
+        <p:style>
+          <a:lnRef idx="1">
+            <a:schemeClr val="accent1"/>
+          </a:lnRef>
+          <a:fillRef idx="3">
+            <a:schemeClr val="accent1"/>
+          </a:fillRef>
+          <a:effectRef idx="2">
+            <a:schemeClr val="accent1"/>
+          </a:effectRef>
+          <a:fontRef idx="minor">
+            <a:schemeClr val="lt1"/>
+          </a:fontRef>
+        </p:style>
+        <p:txBody>
+          <a:bodyPr rtlCol="0" anchor="ctr"/>
+          <a:lstStyle/>
+          <a:p/>
+        </p:txBody>
+      </p:sp>
+      <p:sp>
+        <p:nvSpPr>
+          <p:cNvPr id="5" name="TextBox 4"/>
+          <p:cNvSpPr txBox="1"/>
+          <p:nvPr/>
+        </p:nvSpPr>
+        <p:spPr>
+          <a:xfrm>
+            <a:off x="868680" y="1801368"/>
+            <a:ext cx="2971800" cy="384048"/>
+          </a:xfrm>
+          <a:prstGeom prst="rect">
+            <a:avLst/>
+          </a:prstGeom>
+          <a:noFill/>
+        </p:spPr>
+        <p:txBody>
+          <a:bodyPr wrap="square">
+            <a:spAutoFit/>
+          </a:bodyPr>
+          <a:lstStyle/>
+          <a:p>
+            <a:pPr algn="l">
+              <a:lnSpc>
+                <a:spcPct val="100000"/>
+              </a:lnSpc>
+            </a:pPr>
+            <a:r>
+              <a:rPr sz="1700" b="1">
+                <a:solidFill>
+                  <a:srgbClr val="1BAF7A"/>
+                </a:solidFill>
+                <a:latin typeface="Cambria"/>
+              </a:rPr>
+              <a:t>Confirmed</a:t>
+            </a:r>
+          </a:p>
+        </p:txBody>
+      </p:sp>
+      <p:sp>
+        <p:nvSpPr>
+          <p:cNvPr id="6" name="TextBox 5"/>
+          <p:cNvSpPr txBox="1"/>
+          <p:nvPr/>
+        </p:nvSpPr>
+        <p:spPr>
+          <a:xfrm>
+            <a:off x="868680" y="2267712"/>
+            <a:ext cx="2971800" cy="2926080"/>
+          </a:xfrm>
+          <a:prstGeom prst="rect">
+            <a:avLst/>
+          </a:prstGeom>
+          <a:noFill/>
+        </p:spPr>
+        <p:txBody>
+          <a:bodyPr wrap="square">
+            <a:spAutoFit/>
+          </a:bodyPr>
+          <a:lstStyle/>
+          <a:p>
+            <a:pPr algn="l">
+              <a:lnSpc>
+                <a:spcPct val="108000"/>
+              </a:lnSpc>
+            </a:pPr>
+            <a:r>
+              <a:rPr sz="1250" b="0">
+                <a:solidFill>
+                  <a:srgbClr val="1B1B1F"/>
+                </a:solidFill>
+                <a:latin typeface="Calibri"/>
+              </a:rPr>
+              <a:t>Everything the base paper claims.</a:t>
+            </a:r>
+          </a:p>
+          <a:p>
+            <a:pPr algn="l">
+              <a:lnSpc>
+                <a:spcPct val="108000"/>
+              </a:lnSpc>
+            </a:pPr>
+            <a:r>
+              <a:rPr sz="1250" b="0">
+                <a:solidFill>
+                  <a:srgbClr val="1B1B1F"/>
+                </a:solidFill>
+                <a:latin typeface="Calibri"/>
+              </a:rPr>
+              <a:t/>
+            </a:r>
+          </a:p>
+          <a:p>
+            <a:pPr algn="l">
+              <a:lnSpc>
+                <a:spcPct val="108000"/>
+              </a:lnSpc>
+            </a:pPr>
+            <a:r>
+              <a:rPr sz="1250" b="0">
+                <a:solidFill>
+                  <a:srgbClr val="1B1B1F"/>
+                </a:solidFill>
+                <a:latin typeface="Calibri"/>
+              </a:rPr>
+              <a:t>• 88% violation reduction for 1.5 accuracy points</a:t>
+            </a:r>
+          </a:p>
+          <a:p>
+            <a:pPr algn="l">
+              <a:lnSpc>
+                <a:spcPct val="108000"/>
+              </a:lnSpc>
+            </a:pPr>
+            <a:r>
+              <a:rPr sz="1250" b="0">
+                <a:solidFill>
+                  <a:srgbClr val="1B1B1F"/>
+                </a:solidFill>
+                <a:latin typeface="Calibri"/>
+              </a:rPr>
+              <a:t>• Works as a black box on a tree and on logistic regression</a:t>
+            </a:r>
+          </a:p>
+          <a:p>
+            <a:pPr algn="l">
+              <a:lnSpc>
+                <a:spcPct val="108000"/>
+              </a:lnSpc>
+            </a:pPr>
+            <a:r>
+              <a:rPr sz="1250" b="0">
+                <a:solidFill>
+                  <a:srgbClr val="1B1B1F"/>
+                </a:solidFill>
+                <a:latin typeface="Calibri"/>
+              </a:rPr>
+              <a:t>• Training data never modified</a:t>
+            </a:r>
+          </a:p>
+          <a:p>
+            <a:pPr algn="l">
+              <a:lnSpc>
+                <a:spcPct val="108000"/>
+              </a:lnSpc>
+            </a:pPr>
+            <a:r>
+              <a:rPr sz="1250" b="0">
+                <a:solidFill>
+                  <a:srgbClr val="1B1B1F"/>
+                </a:solidFill>
+                <a:latin typeface="Calibri"/>
+              </a:rPr>
+              <a:t>• GridSearch traces a usable frontier</a:t>
+            </a:r>
+          </a:p>
+          <a:p>
+            <a:pPr algn="l">
+              <a:lnSpc>
+                <a:spcPct val="108000"/>
+              </a:lnSpc>
+            </a:pPr>
+            <a:r>
+              <a:rPr sz="1250" b="0">
+                <a:solidFill>
+                  <a:srgbClr val="1B1B1F"/>
+                </a:solidFill>
+                <a:latin typeface="Calibri"/>
+              </a:rPr>
+              <a:t/>
+            </a:r>
+          </a:p>
+          <a:p>
+            <a:pPr algn="l">
+              <a:lnSpc>
+                <a:spcPct val="108000"/>
+              </a:lnSpc>
+            </a:pPr>
+            <a:r>
+              <a:rPr sz="1250" b="0">
+                <a:solidFill>
+                  <a:srgbClr val="1B1B1F"/>
+                </a:solidFill>
+                <a:latin typeface="Calibri"/>
+              </a:rPr>
+              <a:t>The method works.</a:t>
+            </a:r>
+          </a:p>
+        </p:txBody>
+      </p:sp>
+      <p:sp>
+        <p:nvSpPr>
+          <p:cNvPr id="7" name="Rounded Rectangle 6"/>
+          <p:cNvSpPr/>
+          <p:nvPr/>
+        </p:nvSpPr>
+        <p:spPr>
+          <a:xfrm>
+            <a:off x="4370832" y="1645920"/>
+            <a:ext cx="3429000" cy="3703320"/>
+          </a:xfrm>
+          <a:prstGeom prst="roundRect">
+            <a:avLst>
+              <a:gd name="adj" fmla="val 4000"/>
+            </a:avLst>
+          </a:prstGeom>
+          <a:solidFill>
+            <a:srgbClr val="F4F6FA"/>
+          </a:solidFill>
+          <a:ln w="9525">
+            <a:solidFill>
+              <a:srgbClr val="D8DDE8"/>
+            </a:solidFill>
+          </a:ln>
+          <a:effectLst/>
+        </p:spPr>
+        <p:style>
+          <a:lnRef idx="1">
+            <a:schemeClr val="accent1"/>
+          </a:lnRef>
+          <a:fillRef idx="3">
+            <a:schemeClr val="accent1"/>
+          </a:fillRef>
+          <a:effectRef idx="2">
+            <a:schemeClr val="accent1"/>
+          </a:effectRef>
+          <a:fontRef idx="minor">
+            <a:schemeClr val="lt1"/>
+          </a:fontRef>
+        </p:style>
+        <p:txBody>
+          <a:bodyPr rtlCol="0" anchor="ctr"/>
+          <a:lstStyle/>
+          <a:p/>
+        </p:txBody>
+      </p:sp>
+      <p:sp>
+        <p:nvSpPr>
+          <p:cNvPr id="8" name="TextBox 7"/>
+          <p:cNvSpPr txBox="1"/>
+          <p:nvPr/>
+        </p:nvSpPr>
+        <p:spPr>
+          <a:xfrm>
+            <a:off x="4599432" y="1801368"/>
+            <a:ext cx="2971800" cy="384048"/>
+          </a:xfrm>
+          <a:prstGeom prst="rect">
+            <a:avLst/>
+          </a:prstGeom>
+          <a:noFill/>
+        </p:spPr>
+        <p:txBody>
+          <a:bodyPr wrap="square">
+            <a:spAutoFit/>
+          </a:bodyPr>
+          <a:lstStyle/>
+          <a:p>
+            <a:pPr algn="l">
+              <a:lnSpc>
+                <a:spcPct val="100000"/>
+              </a:lnSpc>
+            </a:pPr>
+            <a:r>
+              <a:rPr sz="1700" b="1">
+                <a:solidFill>
+                  <a:srgbClr val="1E2761"/>
+                </a:solidFill>
+                <a:latin typeface="Cambria"/>
+              </a:rPr>
+              <a:t>Extended</a:t>
+            </a:r>
+          </a:p>
+        </p:txBody>
+      </p:sp>
+      <p:sp>
+        <p:nvSpPr>
+          <p:cNvPr id="9" name="TextBox 8"/>
+          <p:cNvSpPr txBox="1"/>
+          <p:nvPr/>
+        </p:nvSpPr>
+        <p:spPr>
+          <a:xfrm>
+            <a:off x="4599432" y="2267712"/>
+            <a:ext cx="2971800" cy="2926080"/>
+          </a:xfrm>
+          <a:prstGeom prst="rect">
+            <a:avLst/>
+          </a:prstGeom>
+          <a:noFill/>
+        </p:spPr>
+        <p:txBody>
+          <a:bodyPr wrap="square">
+            <a:spAutoFit/>
+          </a:bodyPr>
+          <a:lstStyle/>
+          <a:p>
+            <a:pPr algn="l">
+              <a:lnSpc>
+                <a:spcPct val="108000"/>
+              </a:lnSpc>
+            </a:pPr>
+            <a:r>
+              <a:rPr sz="1250" b="0">
+                <a:solidFill>
+                  <a:srgbClr val="1B1B1F"/>
+                </a:solidFill>
+                <a:latin typeface="Calibri"/>
+              </a:rPr>
+              <a:t>Four questions the paper's frame does not ask.</a:t>
+            </a:r>
+          </a:p>
+          <a:p>
+            <a:pPr algn="l">
+              <a:lnSpc>
+                <a:spcPct val="108000"/>
+              </a:lnSpc>
+            </a:pPr>
+            <a:r>
+              <a:rPr sz="1250" b="0">
+                <a:solidFill>
+                  <a:srgbClr val="1B1B1F"/>
+                </a:solidFill>
+                <a:latin typeface="Calibri"/>
+              </a:rPr>
+              <a:t/>
+            </a:r>
+          </a:p>
+          <a:p>
+            <a:pPr algn="l">
+              <a:lnSpc>
+                <a:spcPct val="108000"/>
+              </a:lnSpc>
+            </a:pPr>
+            <a:r>
+              <a:rPr sz="1250" b="0">
+                <a:solidFill>
+                  <a:srgbClr val="1B1B1F"/>
+                </a:solidFill>
+                <a:latin typeface="Calibri"/>
+              </a:rPr>
+              <a:t>• Who was moved to satisfy the constraint</a:t>
+            </a:r>
+          </a:p>
+          <a:p>
+            <a:pPr algn="l">
+              <a:lnSpc>
+                <a:spcPct val="108000"/>
+              </a:lnSpc>
+            </a:pPr>
+            <a:r>
+              <a:rPr sz="1250" b="0">
+                <a:solidFill>
+                  <a:srgbClr val="1B1B1F"/>
+                </a:solidFill>
+                <a:latin typeface="Calibri"/>
+              </a:rPr>
+              <a:t>• Whether the total number of approvals fell</a:t>
+            </a:r>
+          </a:p>
+          <a:p>
+            <a:pPr algn="l">
+              <a:lnSpc>
+                <a:spcPct val="108000"/>
+              </a:lnSpc>
+            </a:pPr>
+            <a:r>
+              <a:rPr sz="1250" b="0">
+                <a:solidFill>
+                  <a:srgbClr val="1B1B1F"/>
+                </a:solidFill>
+                <a:latin typeface="Calibri"/>
+              </a:rPr>
+              <a:t>• What randomization costs an individual</a:t>
+            </a:r>
+          </a:p>
+          <a:p>
+            <a:pPr algn="l">
+              <a:lnSpc>
+                <a:spcPct val="108000"/>
+              </a:lnSpc>
+            </a:pPr>
+            <a:r>
+              <a:rPr sz="1250" b="0">
+                <a:solidFill>
+                  <a:srgbClr val="1B1B1F"/>
+                </a:solidFill>
+                <a:latin typeface="Calibri"/>
+              </a:rPr>
+              <a:t>• What the constrained model leans on</a:t>
+            </a:r>
+          </a:p>
+          <a:p>
+            <a:pPr algn="l">
+              <a:lnSpc>
+                <a:spcPct val="108000"/>
+              </a:lnSpc>
+            </a:pPr>
+            <a:r>
+              <a:rPr sz="1250" b="0">
+                <a:solidFill>
+                  <a:srgbClr val="1B1B1F"/>
+                </a:solidFill>
+                <a:latin typeface="Calibri"/>
+              </a:rPr>
+              <a:t/>
+            </a:r>
+          </a:p>
+          <a:p>
+            <a:pPr algn="l">
+              <a:lnSpc>
+                <a:spcPct val="108000"/>
+              </a:lnSpc>
+            </a:pPr>
+            <a:r>
+              <a:rPr sz="1250" b="0">
+                <a:solidFill>
+                  <a:srgbClr val="1B1B1F"/>
+                </a:solidFill>
+                <a:latin typeface="Calibri"/>
+              </a:rPr>
+              <a:t>None of these contradict it.</a:t>
+            </a:r>
+          </a:p>
+        </p:txBody>
+      </p:sp>
+      <p:sp>
+        <p:nvSpPr>
+          <p:cNvPr id="10" name="Rounded Rectangle 9"/>
+          <p:cNvSpPr/>
+          <p:nvPr/>
+        </p:nvSpPr>
+        <p:spPr>
+          <a:xfrm>
+            <a:off x="8101583" y="1645920"/>
+            <a:ext cx="3419856" cy="3703320"/>
+          </a:xfrm>
+          <a:prstGeom prst="roundRect">
+            <a:avLst>
+              <a:gd name="adj" fmla="val 4000"/>
+            </a:avLst>
+          </a:prstGeom>
+          <a:solidFill>
+            <a:srgbClr val="FDF3E2"/>
+          </a:solidFill>
+          <a:ln w="9525">
+            <a:solidFill>
+              <a:srgbClr val="E8A33D"/>
+            </a:solidFill>
+          </a:ln>
+          <a:effectLst/>
+        </p:spPr>
+        <p:style>
+          <a:lnRef idx="1">
+            <a:schemeClr val="accent1"/>
+          </a:lnRef>
+          <a:fillRef idx="3">
+            <a:schemeClr val="accent1"/>
+          </a:fillRef>
+          <a:effectRef idx="2">
+            <a:schemeClr val="accent1"/>
+          </a:effectRef>
+          <a:fontRef idx="minor">
+            <a:schemeClr val="lt1"/>
+          </a:fontRef>
+        </p:style>
+        <p:txBody>
+          <a:bodyPr rtlCol="0" anchor="ctr"/>
+          <a:lstStyle/>
+          <a:p/>
+        </p:txBody>
+      </p:sp>
+      <p:sp>
+        <p:nvSpPr>
+          <p:cNvPr id="11" name="TextBox 10"/>
+          <p:cNvSpPr txBox="1"/>
+          <p:nvPr/>
+        </p:nvSpPr>
+        <p:spPr>
+          <a:xfrm>
+            <a:off x="8330183" y="1801368"/>
+            <a:ext cx="2962656" cy="384048"/>
+          </a:xfrm>
+          <a:prstGeom prst="rect">
+            <a:avLst/>
+          </a:prstGeom>
+          <a:noFill/>
+        </p:spPr>
+        <p:txBody>
+          <a:bodyPr wrap="square">
+            <a:spAutoFit/>
+          </a:bodyPr>
+          <a:lstStyle/>
+          <a:p>
+            <a:pPr algn="l">
+              <a:lnSpc>
+                <a:spcPct val="100000"/>
+              </a:lnSpc>
+            </a:pPr>
+            <a:r>
+              <a:rPr sz="1700" b="1">
+                <a:solidFill>
+                  <a:srgbClr val="EB6834"/>
+                </a:solidFill>
+                <a:latin typeface="Cambria"/>
+              </a:rPr>
+              <a:t>Refuted</a:t>
+            </a:r>
+          </a:p>
+        </p:txBody>
+      </p:sp>
+      <p:sp>
+        <p:nvSpPr>
+          <p:cNvPr id="12" name="TextBox 11"/>
+          <p:cNvSpPr txBox="1"/>
+          <p:nvPr/>
+        </p:nvSpPr>
+        <p:spPr>
+          <a:xfrm>
+            <a:off x="8330183" y="2267712"/>
+            <a:ext cx="2962656" cy="2926080"/>
+          </a:xfrm>
+          <a:prstGeom prst="rect">
+            <a:avLst/>
+          </a:prstGeom>
+          <a:noFill/>
+        </p:spPr>
+        <p:txBody>
+          <a:bodyPr wrap="square">
+            <a:spAutoFit/>
+          </a:bodyPr>
+          <a:lstStyle/>
+          <a:p>
+            <a:pPr algn="l">
+              <a:lnSpc>
+                <a:spcPct val="108000"/>
+              </a:lnSpc>
+            </a:pPr>
+            <a:r>
+              <a:rPr sz="1250" b="0">
+                <a:solidFill>
+                  <a:srgbClr val="1B1B1F"/>
+                </a:solidFill>
+                <a:latin typeface="Calibri"/>
+              </a:rPr>
+              <a:t>Nothing in the base paper.</a:t>
+            </a:r>
+          </a:p>
+          <a:p>
+            <a:pPr algn="l">
+              <a:lnSpc>
+                <a:spcPct val="108000"/>
+              </a:lnSpc>
+            </a:pPr>
+            <a:r>
+              <a:rPr sz="1250" b="0">
+                <a:solidFill>
+                  <a:srgbClr val="1B1B1F"/>
+                </a:solidFill>
+                <a:latin typeface="Calibri"/>
+              </a:rPr>
+              <a:t/>
+            </a:r>
+          </a:p>
+          <a:p>
+            <a:pPr algn="l">
+              <a:lnSpc>
+                <a:spcPct val="108000"/>
+              </a:lnSpc>
+            </a:pPr>
+            <a:r>
+              <a:rPr sz="1250" b="0">
+                <a:solidFill>
+                  <a:srgbClr val="1B1B1F"/>
+                </a:solidFill>
+                <a:latin typeface="Calibri"/>
+              </a:rPr>
+              <a:t>Two predictions from our own plan deck:</a:t>
+            </a:r>
+          </a:p>
+          <a:p>
+            <a:pPr algn="l">
+              <a:lnSpc>
+                <a:spcPct val="108000"/>
+              </a:lnSpc>
+            </a:pPr>
+            <a:r>
+              <a:rPr sz="1250" b="0">
+                <a:solidFill>
+                  <a:srgbClr val="1B1B1F"/>
+                </a:solidFill>
+                <a:latin typeface="Calibri"/>
+              </a:rPr>
+              <a:t/>
+            </a:r>
+          </a:p>
+          <a:p>
+            <a:pPr algn="l">
+              <a:lnSpc>
+                <a:spcPct val="108000"/>
+              </a:lnSpc>
+            </a:pPr>
+            <a:r>
+              <a:rPr sz="1250" b="0">
+                <a:solidFill>
+                  <a:srgbClr val="1B1B1F"/>
+                </a:solidFill>
+                <a:latin typeface="Calibri"/>
+              </a:rPr>
+              <a:t>• 'Adversarial training is higher-variance' — inverted</a:t>
+            </a:r>
+          </a:p>
+          <a:p>
+            <a:pPr algn="l">
+              <a:lnSpc>
+                <a:spcPct val="108000"/>
+              </a:lnSpc>
+            </a:pPr>
+            <a:r>
+              <a:rPr sz="1250" b="0">
+                <a:solidFill>
+                  <a:srgbClr val="1B1B1F"/>
+                </a:solidFill>
+                <a:latin typeface="Calibri"/>
+              </a:rPr>
+              <a:t>• 'SHAP will show proxy reliance shrinking' — it grew</a:t>
+            </a:r>
+          </a:p>
+          <a:p>
+            <a:pPr algn="l">
+              <a:lnSpc>
+                <a:spcPct val="108000"/>
+              </a:lnSpc>
+            </a:pPr>
+            <a:r>
+              <a:rPr sz="1250" b="0">
+                <a:solidFill>
+                  <a:srgbClr val="1B1B1F"/>
+                </a:solidFill>
+                <a:latin typeface="Calibri"/>
+              </a:rPr>
+              <a:t/>
+            </a:r>
+          </a:p>
+          <a:p>
+            <a:pPr algn="l">
+              <a:lnSpc>
+                <a:spcPct val="108000"/>
+              </a:lnSpc>
+            </a:pPr>
+            <a:r>
+              <a:rPr sz="1250" b="0">
+                <a:solidFill>
+                  <a:srgbClr val="1B1B1F"/>
+                </a:solidFill>
+                <a:latin typeface="Calibri"/>
+              </a:rPr>
+              <a:t>We published our own wrong guesses.</a:t>
+            </a:r>
+          </a:p>
+        </p:txBody>
+      </p:sp>
+      <p:sp>
+        <p:nvSpPr>
+          <p:cNvPr id="13" name="Rounded Rectangle 12"/>
+          <p:cNvSpPr/>
+          <p:nvPr/>
+        </p:nvSpPr>
+        <p:spPr>
+          <a:xfrm>
+            <a:off x="640080" y="5532120"/>
+            <a:ext cx="10881360" cy="1005840"/>
+          </a:xfrm>
+          <a:prstGeom prst="roundRect">
+            <a:avLst>
+              <a:gd name="adj" fmla="val 4000"/>
+            </a:avLst>
+          </a:prstGeom>
+          <a:solidFill>
+            <a:srgbClr val="1E2761"/>
+          </a:solidFill>
+          <a:ln w="9525">
+            <a:solidFill>
+              <a:srgbClr val="1E2761"/>
+            </a:solidFill>
+          </a:ln>
+          <a:effectLst/>
+        </p:spPr>
+        <p:style>
+          <a:lnRef idx="1">
+            <a:schemeClr val="accent1"/>
+          </a:lnRef>
+          <a:fillRef idx="3">
+            <a:schemeClr val="accent1"/>
+          </a:fillRef>
+          <a:effectRef idx="2">
+            <a:schemeClr val="accent1"/>
+          </a:effectRef>
+          <a:fontRef idx="minor">
+            <a:schemeClr val="lt1"/>
+          </a:fontRef>
+        </p:style>
+        <p:txBody>
+          <a:bodyPr rtlCol="0" anchor="ctr"/>
+          <a:lstStyle/>
+          <a:p/>
+        </p:txBody>
+      </p:sp>
+      <p:sp>
+        <p:nvSpPr>
+          <p:cNvPr id="14" name="TextBox 13"/>
+          <p:cNvSpPr txBox="1"/>
+          <p:nvPr/>
+        </p:nvSpPr>
+        <p:spPr>
+          <a:xfrm>
+            <a:off x="914400" y="5669280"/>
+            <a:ext cx="10332720" cy="777240"/>
+          </a:xfrm>
+          <a:prstGeom prst="rect">
+            <a:avLst/>
+          </a:prstGeom>
+          <a:noFill/>
+        </p:spPr>
+        <p:txBody>
+          <a:bodyPr wrap="square">
+            <a:spAutoFit/>
+          </a:bodyPr>
+          <a:lstStyle/>
+          <a:p>
+            <a:pPr algn="l">
+              <a:lnSpc>
+                <a:spcPct val="105000"/>
+              </a:lnSpc>
+            </a:pPr>
+            <a:r>
+              <a:rPr sz="1400" b="1">
+                <a:solidFill>
+                  <a:srgbClr val="FFFFFF"/>
+                </a:solidFill>
+                <a:latin typeface="Calibri"/>
+              </a:rPr>
+              <a:t>The base paper's method works as claimed. This project confirms it, then measures what it does not tell you: the gap closes mostly by withdrawing approvals from the advantaged group, and the constrained model relies on proxies for the protected attribute more than the unconstrained one.</a:t>
+            </a:r>
+          </a:p>
+        </p:txBody>
+      </p:sp>
+    </p:spTree>
+  </p:cSld>
+  <p:clrMapOvr>
+    <a:masterClrMapping/>
+  </p:clrMapOvr>
+</p:sld>
+</file>
+
 <file path=ppt/slides/slide3.xml><?xml version="1.0" encoding="utf-8"?>
 <p:sld xmlns:a="http://schemas.openxmlformats.org/drawingml/2006/main" xmlns:r="http://schemas.openxmlformats.org/officeDocument/2006/relationships" xmlns:p="http://schemas.openxmlformats.org/presentationml/2006/main">
   <p:cSld name="Slide 3">
@@ -5916,7 +12999,7 @@
                 <a:ea typeface="Calibri" pitchFamily="34" charset="-122"/>
                 <a:cs typeface="Calibri" pitchFamily="34" charset="-120"/>
               </a:rPr>
-              <a:t>Illustrative: predicted “high-income” rate by group (baseline model)</a:t>
+              <a:t>Who the data says earns &gt;$50K, and who the model says does</a:t>
             </a:r>
             <a:endParaRPr lang="en-US" sz="1250" dirty="0"/>
           </a:p>
@@ -5971,7 +13054,7 @@
                 <a:ea typeface="Calibri" pitchFamily="34" charset="-122"/>
                 <a:cs typeface="Calibri" pitchFamily="34" charset="-120"/>
               </a:rPr>
-              <a:t>Synthetic values for illustration — actual figures come from the baseline run.</a:t>
+              <a:t>Real figures — data base rates vs. the unmitigated logistic regression, seed 0. The model widens the gap it learned from: a 0.36 ratio in the data becomes 0.30 in its predictions.</a:t>
             </a:r>
             <a:endParaRPr lang="en-US" sz="1050" dirty="0"/>
           </a:p>
@@ -7448,63 +14531,8 @@
                 <a:ea typeface="Calibri" pitchFamily="34" charset="-122"/>
                 <a:cs typeface="Calibri" pitchFamily="34" charset="-120"/>
               </a:rPr>
-              <a:t>D = { (xᵢ, aᵢ, yᵢ) }</a:t>
-            </a:r>
-            <a:r>
-              <a:rPr lang="en-US" sz="1500" dirty="0">
-                <a:solidFill>
-                  <a:srgbClr val="CADCFC"/>
-                </a:solidFill>
-                <a:latin typeface="Calibri" pitchFamily="34" charset="0"/>
-                <a:ea typeface="Calibri" pitchFamily="34" charset="-122"/>
-                <a:cs typeface="Calibri" pitchFamily="34" charset="-120"/>
-              </a:rPr>
-              <a:t>  — x = features, a ∈ {0,1} = protected attribute (Sex), y ∈ {0,1} = income label
-This objective never references </a:t>
-            </a:r>
-            <a:r>
-              <a:rPr lang="en-US" sz="1500" b="1" i="1" dirty="0">
-                <a:solidFill>
-                  <a:srgbClr val="FFFFFF"/>
-                </a:solidFill>
-                <a:latin typeface="Calibri" pitchFamily="34" charset="0"/>
-                <a:ea typeface="Calibri" pitchFamily="34" charset="-122"/>
-                <a:cs typeface="Calibri" pitchFamily="34" charset="-120"/>
-              </a:rPr>
-              <a:t>a</a:t>
-            </a:r>
-            <a:r>
-              <a:rPr lang="en-US" sz="1500" dirty="0">
-                <a:solidFill>
-                  <a:srgbClr val="CADCFC"/>
-                </a:solidFill>
-                <a:latin typeface="Calibri" pitchFamily="34" charset="0"/>
-                <a:ea typeface="Calibri" pitchFamily="34" charset="-122"/>
-                <a:cs typeface="Calibri" pitchFamily="34" charset="-120"/>
-              </a:rPr>
-              <a:t>. But because P(y=1 | a=Male) ≫ P(y=1 | a=Female) historically in this data, the model is free to pick up </a:t>
-            </a:r>
-            <a:r>
-              <a:rPr lang="en-US" sz="1500" b="1" i="1" dirty="0">
-                <a:solidFill>
-                  <a:srgbClr val="FFFFFF"/>
-                </a:solidFill>
-                <a:latin typeface="Calibri" pitchFamily="34" charset="0"/>
-                <a:ea typeface="Calibri" pitchFamily="34" charset="-122"/>
-                <a:cs typeface="Calibri" pitchFamily="34" charset="-120"/>
-              </a:rPr>
-              <a:t>a</a:t>
-            </a:r>
-            <a:r>
-              <a:rPr lang="en-US" sz="1500" dirty="0">
-                <a:solidFill>
-                  <a:srgbClr val="CADCFC"/>
-                </a:solidFill>
-                <a:latin typeface="Calibri" pitchFamily="34" charset="0"/>
-                <a:ea typeface="Calibri" pitchFamily="34" charset="-122"/>
-                <a:cs typeface="Calibri" pitchFamily="34" charset="-120"/>
-              </a:rPr>
-              <a:t> (or correlated proxies like relationship / marital-status) as a shortcut to lower error.</a:t>
+              <a:t>D = { (xᵢ, aᵢ, yᵢ) }  — x = features, a ∈ {0,1} = protected attribute (Sex), y ∈ {0,1} = income label
+This objective never references a, and in this project a is removed from the feature matrix entirely — no model here can read Sex. But because P(y=1 | a=Male) ≫ P(y=1 | a=Female) in the data, the model reconstructs the gap from proxies: relationship (whose levels are Husband and Wife), marital-status, occupation. Removing the attribute does not remove the information.</a:t>
             </a:r>
             <a:endParaRPr lang="en-US" sz="1500" dirty="0"/>
           </a:p>

--- a/bias_mitigation_plan.pptx
+++ b/bias_mitigation_plan.pptx
@@ -28,6 +28,8 @@
     <p:sldId id="273" r:id="rId24"/>
     <p:sldId id="274" r:id="rId25"/>
     <p:sldId id="275" r:id="rId26"/>
+    <p:sldId id="276" r:id="rId27"/>
+    <p:sldId id="277" r:id="rId28"/>
   </p:sldIdLst>
   <p:sldSz cx="12192000" cy="6858000"/>
   <p:notesSz cx="6858000" cy="12192000"/>
@@ -11935,7 +11937,7 @@
                 </a:solidFill>
                 <a:latin typeface="Cambria"/>
               </a:rPr>
-              <a:t>Verdict — What We Confirmed, Extended, and Refuted</a:t>
+              <a:t>Contribution 4 — "Just Delete the Leaky Feature" Backfires</a:t>
             </a:r>
           </a:p>
         </p:txBody>
@@ -11974,21 +11976,969 @@
                 </a:solidFill>
                 <a:latin typeface="Calibri"/>
               </a:rPr>
-              <a:t>The distinction matters. It is easy to present an extension as a refutation.</a:t>
-            </a:r>
-          </a:p>
-        </p:txBody>
-      </p:sp>
-      <p:sp>
-        <p:nvSpPr>
-          <p:cNvPr id="4" name="Rounded Rectangle 3"/>
+              <a:t>The obvious response to the previous slide, tested. Each round removes one more feature and re-measures.</a:t>
+            </a:r>
+          </a:p>
+        </p:txBody>
+      </p:sp>
+      <p:graphicFrame>
+        <p:nvGraphicFramePr>
+          <p:cNvPr id="4" name="Table 3"/>
+          <p:cNvGraphicFramePr>
+            <a:graphicFrameLocks noGrp="1"/>
+          </p:cNvGraphicFramePr>
+          <p:nvPr/>
+        </p:nvGraphicFramePr>
+        <p:xfrm>
+          <a:off x="640080" y="1691640"/>
+          <a:ext cx="10881356" cy="2029968"/>
+        </p:xfrm>
+        <a:graphic>
+          <a:graphicData uri="http://schemas.openxmlformats.org/drawingml/2006/table">
+            <a:tbl>
+              <a:tblPr firstRow="1">
+                <a:tableStyleId>{5C22544A-7EE6-4342-B048-85BDC9FD1C3A}</a:tableStyleId>
+              </a:tblPr>
+              <a:tblGrid>
+                <a:gridCol w="3520440"/>
+                <a:gridCol w="1760220"/>
+                <a:gridCol w="1520189"/>
+                <a:gridCol w="1280159"/>
+                <a:gridCol w="1520189"/>
+                <a:gridCol w="1280159"/>
+              </a:tblGrid>
+              <a:tr h="384048">
+                <a:tc>
+                  <a:txBody>
+                    <a:bodyPr wrap="square"/>
+                    <a:lstStyle/>
+                    <a:p>
+                      <a:pPr algn="l"/>
+                      <a:r>
+                        <a:rPr sz="1100" b="1">
+                          <a:solidFill>
+                            <a:srgbClr val="FFFFFF"/>
+                          </a:solidFill>
+                          <a:latin typeface="Calibri"/>
+                        </a:rPr>
+                        <a:t>Features removed</a:t>
+                      </a:r>
+                    </a:p>
+                  </a:txBody>
+                  <a:tcPr marL="91440" marR="73152" marT="18288" marB="18288">
+                    <a:solidFill>
+                      <a:srgbClr val="1E2761"/>
+                    </a:solidFill>
+                  </a:tcPr>
+                </a:tc>
+                <a:tc>
+                  <a:txBody>
+                    <a:bodyPr wrap="square"/>
+                    <a:lstStyle/>
+                    <a:p>
+                      <a:pPr algn="r"/>
+                      <a:r>
+                        <a:rPr sz="1100" b="1">
+                          <a:solidFill>
+                            <a:srgbClr val="FFFFFF"/>
+                          </a:solidFill>
+                          <a:latin typeface="Calibri"/>
+                        </a:rPr>
+                        <a:t>Sex recoverable (AUC)</a:t>
+                      </a:r>
+                    </a:p>
+                  </a:txBody>
+                  <a:tcPr marL="91440" marR="73152" marT="18288" marB="18288">
+                    <a:solidFill>
+                      <a:srgbClr val="1E2761"/>
+                    </a:solidFill>
+                  </a:tcPr>
+                </a:tc>
+                <a:tc>
+                  <a:txBody>
+                    <a:bodyPr wrap="square"/>
+                    <a:lstStyle/>
+                    <a:p>
+                      <a:pPr algn="r"/>
+                      <a:r>
+                        <a:rPr sz="1100" b="1">
+                          <a:solidFill>
+                            <a:srgbClr val="FFFFFF"/>
+                          </a:solidFill>
+                          <a:latin typeface="Calibri"/>
+                        </a:rPr>
+                        <a:t>Baseline accuracy</a:t>
+                      </a:r>
+                    </a:p>
+                  </a:txBody>
+                  <a:tcPr marL="91440" marR="73152" marT="18288" marB="18288">
+                    <a:solidFill>
+                      <a:srgbClr val="1E2761"/>
+                    </a:solidFill>
+                  </a:tcPr>
+                </a:tc>
+                <a:tc>
+                  <a:txBody>
+                    <a:bodyPr wrap="square"/>
+                    <a:lstStyle/>
+                    <a:p>
+                      <a:pPr algn="r"/>
+                      <a:r>
+                        <a:rPr sz="1100" b="1">
+                          <a:solidFill>
+                            <a:srgbClr val="FFFFFF"/>
+                          </a:solidFill>
+                          <a:latin typeface="Calibri"/>
+                        </a:rPr>
+                        <a:t>Baseline DP</a:t>
+                      </a:r>
+                    </a:p>
+                  </a:txBody>
+                  <a:tcPr marL="91440" marR="73152" marT="18288" marB="18288">
+                    <a:solidFill>
+                      <a:srgbClr val="1E2761"/>
+                    </a:solidFill>
+                  </a:tcPr>
+                </a:tc>
+                <a:tc>
+                  <a:txBody>
+                    <a:bodyPr wrap="square"/>
+                    <a:lstStyle/>
+                    <a:p>
+                      <a:pPr algn="r"/>
+                      <a:r>
+                        <a:rPr sz="1100" b="1">
+                          <a:solidFill>
+                            <a:srgbClr val="FFFFFF"/>
+                          </a:solidFill>
+                          <a:latin typeface="Calibri"/>
+                        </a:rPr>
+                        <a:t>ExpGrad accuracy</a:t>
+                      </a:r>
+                    </a:p>
+                  </a:txBody>
+                  <a:tcPr marL="91440" marR="73152" marT="18288" marB="18288">
+                    <a:solidFill>
+                      <a:srgbClr val="1E2761"/>
+                    </a:solidFill>
+                  </a:tcPr>
+                </a:tc>
+                <a:tc>
+                  <a:txBody>
+                    <a:bodyPr wrap="square"/>
+                    <a:lstStyle/>
+                    <a:p>
+                      <a:pPr algn="r"/>
+                      <a:r>
+                        <a:rPr sz="1100" b="1">
+                          <a:solidFill>
+                            <a:srgbClr val="FFFFFF"/>
+                          </a:solidFill>
+                          <a:latin typeface="Calibri"/>
+                        </a:rPr>
+                        <a:t>ExpGrad DP</a:t>
+                      </a:r>
+                    </a:p>
+                  </a:txBody>
+                  <a:tcPr marL="91440" marR="73152" marT="18288" marB="18288">
+                    <a:solidFill>
+                      <a:srgbClr val="1E2761"/>
+                    </a:solidFill>
+                  </a:tcPr>
+                </a:tc>
+              </a:tr>
+              <a:tr h="329184">
+                <a:tc>
+                  <a:txBody>
+                    <a:bodyPr wrap="square"/>
+                    <a:lstStyle/>
+                    <a:p>
+                      <a:pPr algn="l"/>
+                      <a:r>
+                        <a:rPr sz="1150" b="0">
+                          <a:solidFill>
+                            <a:srgbClr val="1B1B1F"/>
+                          </a:solidFill>
+                          <a:latin typeface="Calibri"/>
+                        </a:rPr>
+                        <a:t>none removed</a:t>
+                      </a:r>
+                    </a:p>
+                  </a:txBody>
+                  <a:tcPr marL="91440" marR="73152" marT="18288" marB="18288">
+                    <a:solidFill>
+                      <a:srgbClr val="FFFFFF"/>
+                    </a:solidFill>
+                  </a:tcPr>
+                </a:tc>
+                <a:tc>
+                  <a:txBody>
+                    <a:bodyPr wrap="square"/>
+                    <a:lstStyle/>
+                    <a:p>
+                      <a:pPr algn="r"/>
+                      <a:r>
+                        <a:rPr sz="1150" b="0">
+                          <a:solidFill>
+                            <a:srgbClr val="1B1B1F"/>
+                          </a:solidFill>
+                          <a:latin typeface="Calibri"/>
+                        </a:rPr>
+                        <a:t>0.934</a:t>
+                      </a:r>
+                    </a:p>
+                  </a:txBody>
+                  <a:tcPr marL="91440" marR="73152" marT="18288" marB="18288">
+                    <a:solidFill>
+                      <a:srgbClr val="FFFFFF"/>
+                    </a:solidFill>
+                  </a:tcPr>
+                </a:tc>
+                <a:tc>
+                  <a:txBody>
+                    <a:bodyPr wrap="square"/>
+                    <a:lstStyle/>
+                    <a:p>
+                      <a:pPr algn="r"/>
+                      <a:r>
+                        <a:rPr sz="1150" b="0">
+                          <a:solidFill>
+                            <a:srgbClr val="1B1B1F"/>
+                          </a:solidFill>
+                          <a:latin typeface="Calibri"/>
+                        </a:rPr>
+                        <a:t>0.8465</a:t>
+                      </a:r>
+                    </a:p>
+                  </a:txBody>
+                  <a:tcPr marL="91440" marR="73152" marT="18288" marB="18288">
+                    <a:solidFill>
+                      <a:srgbClr val="FFFFFF"/>
+                    </a:solidFill>
+                  </a:tcPr>
+                </a:tc>
+                <a:tc>
+                  <a:txBody>
+                    <a:bodyPr wrap="square"/>
+                    <a:lstStyle/>
+                    <a:p>
+                      <a:pPr algn="r"/>
+                      <a:r>
+                        <a:rPr sz="1150" b="0">
+                          <a:solidFill>
+                            <a:srgbClr val="1B1B1F"/>
+                          </a:solidFill>
+                          <a:latin typeface="Calibri"/>
+                        </a:rPr>
+                        <a:t>0.1897</a:t>
+                      </a:r>
+                    </a:p>
+                  </a:txBody>
+                  <a:tcPr marL="91440" marR="73152" marT="18288" marB="18288">
+                    <a:solidFill>
+                      <a:srgbClr val="FFFFFF"/>
+                    </a:solidFill>
+                  </a:tcPr>
+                </a:tc>
+                <a:tc>
+                  <a:txBody>
+                    <a:bodyPr wrap="square"/>
+                    <a:lstStyle/>
+                    <a:p>
+                      <a:pPr algn="r"/>
+                      <a:r>
+                        <a:rPr sz="1150" b="0">
+                          <a:solidFill>
+                            <a:srgbClr val="1B1B1F"/>
+                          </a:solidFill>
+                          <a:latin typeface="Calibri"/>
+                        </a:rPr>
+                        <a:t>0.8295</a:t>
+                      </a:r>
+                    </a:p>
+                  </a:txBody>
+                  <a:tcPr marL="91440" marR="73152" marT="18288" marB="18288">
+                    <a:solidFill>
+                      <a:srgbClr val="FFFFFF"/>
+                    </a:solidFill>
+                  </a:tcPr>
+                </a:tc>
+                <a:tc>
+                  <a:txBody>
+                    <a:bodyPr wrap="square"/>
+                    <a:lstStyle/>
+                    <a:p>
+                      <a:pPr algn="r"/>
+                      <a:r>
+                        <a:rPr sz="1150" b="0">
+                          <a:solidFill>
+                            <a:srgbClr val="1B1B1F"/>
+                          </a:solidFill>
+                          <a:latin typeface="Calibri"/>
+                        </a:rPr>
+                        <a:t>0.0197</a:t>
+                      </a:r>
+                    </a:p>
+                  </a:txBody>
+                  <a:tcPr marL="91440" marR="73152" marT="18288" marB="18288">
+                    <a:solidFill>
+                      <a:srgbClr val="FFFFFF"/>
+                    </a:solidFill>
+                  </a:tcPr>
+                </a:tc>
+              </a:tr>
+              <a:tr h="329184">
+                <a:tc>
+                  <a:txBody>
+                    <a:bodyPr wrap="square"/>
+                    <a:lstStyle/>
+                    <a:p>
+                      <a:pPr algn="l"/>
+                      <a:r>
+                        <a:rPr sz="1150" b="1">
+                          <a:solidFill>
+                            <a:srgbClr val="1B1B1F"/>
+                          </a:solidFill>
+                          <a:latin typeface="Calibri"/>
+                        </a:rPr>
+                        <a:t>−relationship</a:t>
+                      </a:r>
+                    </a:p>
+                  </a:txBody>
+                  <a:tcPr marL="91440" marR="73152" marT="18288" marB="18288">
+                    <a:solidFill>
+                      <a:srgbClr val="FDF3E2"/>
+                    </a:solidFill>
+                  </a:tcPr>
+                </a:tc>
+                <a:tc>
+                  <a:txBody>
+                    <a:bodyPr wrap="square"/>
+                    <a:lstStyle/>
+                    <a:p>
+                      <a:pPr algn="r"/>
+                      <a:r>
+                        <a:rPr sz="1150" b="1">
+                          <a:solidFill>
+                            <a:srgbClr val="1B1B1F"/>
+                          </a:solidFill>
+                          <a:latin typeface="Calibri"/>
+                        </a:rPr>
+                        <a:t>0.868</a:t>
+                      </a:r>
+                    </a:p>
+                  </a:txBody>
+                  <a:tcPr marL="91440" marR="73152" marT="18288" marB="18288">
+                    <a:solidFill>
+                      <a:srgbClr val="FDF3E2"/>
+                    </a:solidFill>
+                  </a:tcPr>
+                </a:tc>
+                <a:tc>
+                  <a:txBody>
+                    <a:bodyPr wrap="square"/>
+                    <a:lstStyle/>
+                    <a:p>
+                      <a:pPr algn="r"/>
+                      <a:r>
+                        <a:rPr sz="1150" b="1">
+                          <a:solidFill>
+                            <a:srgbClr val="1B1B1F"/>
+                          </a:solidFill>
+                          <a:latin typeface="Calibri"/>
+                        </a:rPr>
+                        <a:t>0.8463</a:t>
+                      </a:r>
+                    </a:p>
+                  </a:txBody>
+                  <a:tcPr marL="91440" marR="73152" marT="18288" marB="18288">
+                    <a:solidFill>
+                      <a:srgbClr val="FDF3E2"/>
+                    </a:solidFill>
+                  </a:tcPr>
+                </a:tc>
+                <a:tc>
+                  <a:txBody>
+                    <a:bodyPr wrap="square"/>
+                    <a:lstStyle/>
+                    <a:p>
+                      <a:pPr algn="r"/>
+                      <a:r>
+                        <a:rPr sz="1150" b="1">
+                          <a:solidFill>
+                            <a:srgbClr val="1B1B1F"/>
+                          </a:solidFill>
+                          <a:latin typeface="Calibri"/>
+                        </a:rPr>
+                        <a:t>0.2054</a:t>
+                      </a:r>
+                    </a:p>
+                  </a:txBody>
+                  <a:tcPr marL="91440" marR="73152" marT="18288" marB="18288">
+                    <a:solidFill>
+                      <a:srgbClr val="FDF3E2"/>
+                    </a:solidFill>
+                  </a:tcPr>
+                </a:tc>
+                <a:tc>
+                  <a:txBody>
+                    <a:bodyPr wrap="square"/>
+                    <a:lstStyle/>
+                    <a:p>
+                      <a:pPr algn="r"/>
+                      <a:r>
+                        <a:rPr sz="1150" b="1">
+                          <a:solidFill>
+                            <a:srgbClr val="1B1B1F"/>
+                          </a:solidFill>
+                          <a:latin typeface="Calibri"/>
+                        </a:rPr>
+                        <a:t>0.8026</a:t>
+                      </a:r>
+                    </a:p>
+                  </a:txBody>
+                  <a:tcPr marL="91440" marR="73152" marT="18288" marB="18288">
+                    <a:solidFill>
+                      <a:srgbClr val="FDF3E2"/>
+                    </a:solidFill>
+                  </a:tcPr>
+                </a:tc>
+                <a:tc>
+                  <a:txBody>
+                    <a:bodyPr wrap="square"/>
+                    <a:lstStyle/>
+                    <a:p>
+                      <a:pPr algn="r"/>
+                      <a:r>
+                        <a:rPr sz="1150" b="1">
+                          <a:solidFill>
+                            <a:srgbClr val="1B1B1F"/>
+                          </a:solidFill>
+                          <a:latin typeface="Calibri"/>
+                        </a:rPr>
+                        <a:t>0.0172</a:t>
+                      </a:r>
+                    </a:p>
+                  </a:txBody>
+                  <a:tcPr marL="91440" marR="73152" marT="18288" marB="18288">
+                    <a:solidFill>
+                      <a:srgbClr val="FDF3E2"/>
+                    </a:solidFill>
+                  </a:tcPr>
+                </a:tc>
+              </a:tr>
+              <a:tr h="329184">
+                <a:tc>
+                  <a:txBody>
+                    <a:bodyPr wrap="square"/>
+                    <a:lstStyle/>
+                    <a:p>
+                      <a:pPr algn="l"/>
+                      <a:r>
+                        <a:rPr sz="1150" b="0">
+                          <a:solidFill>
+                            <a:srgbClr val="1B1B1F"/>
+                          </a:solidFill>
+                          <a:latin typeface="Calibri"/>
+                        </a:rPr>
+                        <a:t>−relationship, marital-status</a:t>
+                      </a:r>
+                    </a:p>
+                  </a:txBody>
+                  <a:tcPr marL="91440" marR="73152" marT="18288" marB="18288">
+                    <a:solidFill>
+                      <a:srgbClr val="FFFFFF"/>
+                    </a:solidFill>
+                  </a:tcPr>
+                </a:tc>
+                <a:tc>
+                  <a:txBody>
+                    <a:bodyPr wrap="square"/>
+                    <a:lstStyle/>
+                    <a:p>
+                      <a:pPr algn="r"/>
+                      <a:r>
+                        <a:rPr sz="1150" b="0">
+                          <a:solidFill>
+                            <a:srgbClr val="1B1B1F"/>
+                          </a:solidFill>
+                          <a:latin typeface="Calibri"/>
+                        </a:rPr>
+                        <a:t>0.803</a:t>
+                      </a:r>
+                    </a:p>
+                  </a:txBody>
+                  <a:tcPr marL="91440" marR="73152" marT="18288" marB="18288">
+                    <a:solidFill>
+                      <a:srgbClr val="FFFFFF"/>
+                    </a:solidFill>
+                  </a:tcPr>
+                </a:tc>
+                <a:tc>
+                  <a:txBody>
+                    <a:bodyPr wrap="square"/>
+                    <a:lstStyle/>
+                    <a:p>
+                      <a:pPr algn="r"/>
+                      <a:r>
+                        <a:rPr sz="1150" b="0">
+                          <a:solidFill>
+                            <a:srgbClr val="1B1B1F"/>
+                          </a:solidFill>
+                          <a:latin typeface="Calibri"/>
+                        </a:rPr>
+                        <a:t>0.8171</a:t>
+                      </a:r>
+                    </a:p>
+                  </a:txBody>
+                  <a:tcPr marL="91440" marR="73152" marT="18288" marB="18288">
+                    <a:solidFill>
+                      <a:srgbClr val="FFFFFF"/>
+                    </a:solidFill>
+                  </a:tcPr>
+                </a:tc>
+                <a:tc>
+                  <a:txBody>
+                    <a:bodyPr wrap="square"/>
+                    <a:lstStyle/>
+                    <a:p>
+                      <a:pPr algn="r"/>
+                      <a:r>
+                        <a:rPr sz="1150" b="0">
+                          <a:solidFill>
+                            <a:srgbClr val="1B1B1F"/>
+                          </a:solidFill>
+                          <a:latin typeface="Calibri"/>
+                        </a:rPr>
+                        <a:t>0.1014</a:t>
+                      </a:r>
+                    </a:p>
+                  </a:txBody>
+                  <a:tcPr marL="91440" marR="73152" marT="18288" marB="18288">
+                    <a:solidFill>
+                      <a:srgbClr val="FFFFFF"/>
+                    </a:solidFill>
+                  </a:tcPr>
+                </a:tc>
+                <a:tc>
+                  <a:txBody>
+                    <a:bodyPr wrap="square"/>
+                    <a:lstStyle/>
+                    <a:p>
+                      <a:pPr algn="r"/>
+                      <a:r>
+                        <a:rPr sz="1150" b="0">
+                          <a:solidFill>
+                            <a:srgbClr val="1B1B1F"/>
+                          </a:solidFill>
+                          <a:latin typeface="Calibri"/>
+                        </a:rPr>
+                        <a:t>0.7946</a:t>
+                      </a:r>
+                    </a:p>
+                  </a:txBody>
+                  <a:tcPr marL="91440" marR="73152" marT="18288" marB="18288">
+                    <a:solidFill>
+                      <a:srgbClr val="FFFFFF"/>
+                    </a:solidFill>
+                  </a:tcPr>
+                </a:tc>
+                <a:tc>
+                  <a:txBody>
+                    <a:bodyPr wrap="square"/>
+                    <a:lstStyle/>
+                    <a:p>
+                      <a:pPr algn="r"/>
+                      <a:r>
+                        <a:rPr sz="1150" b="0">
+                          <a:solidFill>
+                            <a:srgbClr val="1B1B1F"/>
+                          </a:solidFill>
+                          <a:latin typeface="Calibri"/>
+                        </a:rPr>
+                        <a:t>0.0164</a:t>
+                      </a:r>
+                    </a:p>
+                  </a:txBody>
+                  <a:tcPr marL="91440" marR="73152" marT="18288" marB="18288">
+                    <a:solidFill>
+                      <a:srgbClr val="FFFFFF"/>
+                    </a:solidFill>
+                  </a:tcPr>
+                </a:tc>
+              </a:tr>
+              <a:tr h="329184">
+                <a:tc>
+                  <a:txBody>
+                    <a:bodyPr wrap="square"/>
+                    <a:lstStyle/>
+                    <a:p>
+                      <a:pPr algn="l"/>
+                      <a:r>
+                        <a:rPr sz="1150" b="0">
+                          <a:solidFill>
+                            <a:srgbClr val="1B1B1F"/>
+                          </a:solidFill>
+                          <a:latin typeface="Calibri"/>
+                        </a:rPr>
+                        <a:t>−relationship, marital-status, occupation</a:t>
+                      </a:r>
+                    </a:p>
+                  </a:txBody>
+                  <a:tcPr marL="91440" marR="73152" marT="18288" marB="18288">
+                    <a:solidFill>
+                      <a:srgbClr val="F4F6FA"/>
+                    </a:solidFill>
+                  </a:tcPr>
+                </a:tc>
+                <a:tc>
+                  <a:txBody>
+                    <a:bodyPr wrap="square"/>
+                    <a:lstStyle/>
+                    <a:p>
+                      <a:pPr algn="r"/>
+                      <a:r>
+                        <a:rPr sz="1150" b="0">
+                          <a:solidFill>
+                            <a:srgbClr val="1B1B1F"/>
+                          </a:solidFill>
+                          <a:latin typeface="Calibri"/>
+                        </a:rPr>
+                        <a:t>0.691</a:t>
+                      </a:r>
+                    </a:p>
+                  </a:txBody>
+                  <a:tcPr marL="91440" marR="73152" marT="18288" marB="18288">
+                    <a:solidFill>
+                      <a:srgbClr val="F4F6FA"/>
+                    </a:solidFill>
+                  </a:tcPr>
+                </a:tc>
+                <a:tc>
+                  <a:txBody>
+                    <a:bodyPr wrap="square"/>
+                    <a:lstStyle/>
+                    <a:p>
+                      <a:pPr algn="r"/>
+                      <a:r>
+                        <a:rPr sz="1150" b="0">
+                          <a:solidFill>
+                            <a:srgbClr val="1B1B1F"/>
+                          </a:solidFill>
+                          <a:latin typeface="Calibri"/>
+                        </a:rPr>
+                        <a:t>0.8133</a:t>
+                      </a:r>
+                    </a:p>
+                  </a:txBody>
+                  <a:tcPr marL="91440" marR="73152" marT="18288" marB="18288">
+                    <a:solidFill>
+                      <a:srgbClr val="F4F6FA"/>
+                    </a:solidFill>
+                  </a:tcPr>
+                </a:tc>
+                <a:tc>
+                  <a:txBody>
+                    <a:bodyPr wrap="square"/>
+                    <a:lstStyle/>
+                    <a:p>
+                      <a:pPr algn="r"/>
+                      <a:r>
+                        <a:rPr sz="1150" b="0">
+                          <a:solidFill>
+                            <a:srgbClr val="1B1B1F"/>
+                          </a:solidFill>
+                          <a:latin typeface="Calibri"/>
+                        </a:rPr>
+                        <a:t>0.0932</a:t>
+                      </a:r>
+                    </a:p>
+                  </a:txBody>
+                  <a:tcPr marL="91440" marR="73152" marT="18288" marB="18288">
+                    <a:solidFill>
+                      <a:srgbClr val="F4F6FA"/>
+                    </a:solidFill>
+                  </a:tcPr>
+                </a:tc>
+                <a:tc>
+                  <a:txBody>
+                    <a:bodyPr wrap="square"/>
+                    <a:lstStyle/>
+                    <a:p>
+                      <a:pPr algn="r"/>
+                      <a:r>
+                        <a:rPr sz="1150" b="0">
+                          <a:solidFill>
+                            <a:srgbClr val="1B1B1F"/>
+                          </a:solidFill>
+                          <a:latin typeface="Calibri"/>
+                        </a:rPr>
+                        <a:t>0.7852</a:t>
+                      </a:r>
+                    </a:p>
+                  </a:txBody>
+                  <a:tcPr marL="91440" marR="73152" marT="18288" marB="18288">
+                    <a:solidFill>
+                      <a:srgbClr val="F4F6FA"/>
+                    </a:solidFill>
+                  </a:tcPr>
+                </a:tc>
+                <a:tc>
+                  <a:txBody>
+                    <a:bodyPr wrap="square"/>
+                    <a:lstStyle/>
+                    <a:p>
+                      <a:pPr algn="r"/>
+                      <a:r>
+                        <a:rPr sz="1150" b="0">
+                          <a:solidFill>
+                            <a:srgbClr val="1B1B1F"/>
+                          </a:solidFill>
+                          <a:latin typeface="Calibri"/>
+                        </a:rPr>
+                        <a:t>0.0182</a:t>
+                      </a:r>
+                    </a:p>
+                  </a:txBody>
+                  <a:tcPr marL="91440" marR="73152" marT="18288" marB="18288">
+                    <a:solidFill>
+                      <a:srgbClr val="F4F6FA"/>
+                    </a:solidFill>
+                  </a:tcPr>
+                </a:tc>
+              </a:tr>
+              <a:tr h="329184">
+                <a:tc>
+                  <a:txBody>
+                    <a:bodyPr wrap="square"/>
+                    <a:lstStyle/>
+                    <a:p>
+                      <a:pPr algn="l"/>
+                      <a:r>
+                        <a:rPr sz="1150" b="0">
+                          <a:solidFill>
+                            <a:srgbClr val="1B1B1F"/>
+                          </a:solidFill>
+                          <a:latin typeface="Calibri"/>
+                        </a:rPr>
+                        <a:t>−relationship, marital-status, occupation, hours-per-week</a:t>
+                      </a:r>
+                    </a:p>
+                  </a:txBody>
+                  <a:tcPr marL="91440" marR="73152" marT="18288" marB="18288">
+                    <a:solidFill>
+                      <a:srgbClr val="FFFFFF"/>
+                    </a:solidFill>
+                  </a:tcPr>
+                </a:tc>
+                <a:tc>
+                  <a:txBody>
+                    <a:bodyPr wrap="square"/>
+                    <a:lstStyle/>
+                    <a:p>
+                      <a:pPr algn="r"/>
+                      <a:r>
+                        <a:rPr sz="1150" b="0">
+                          <a:solidFill>
+                            <a:srgbClr val="1B1B1F"/>
+                          </a:solidFill>
+                          <a:latin typeface="Calibri"/>
+                        </a:rPr>
+                        <a:t>0.625</a:t>
+                      </a:r>
+                    </a:p>
+                  </a:txBody>
+                  <a:tcPr marL="91440" marR="73152" marT="18288" marB="18288">
+                    <a:solidFill>
+                      <a:srgbClr val="FFFFFF"/>
+                    </a:solidFill>
+                  </a:tcPr>
+                </a:tc>
+                <a:tc>
+                  <a:txBody>
+                    <a:bodyPr wrap="square"/>
+                    <a:lstStyle/>
+                    <a:p>
+                      <a:pPr algn="r"/>
+                      <a:r>
+                        <a:rPr sz="1150" b="0">
+                          <a:solidFill>
+                            <a:srgbClr val="1B1B1F"/>
+                          </a:solidFill>
+                          <a:latin typeface="Calibri"/>
+                        </a:rPr>
+                        <a:t>0.8080</a:t>
+                      </a:r>
+                    </a:p>
+                  </a:txBody>
+                  <a:tcPr marL="91440" marR="73152" marT="18288" marB="18288">
+                    <a:solidFill>
+                      <a:srgbClr val="FFFFFF"/>
+                    </a:solidFill>
+                  </a:tcPr>
+                </a:tc>
+                <a:tc>
+                  <a:txBody>
+                    <a:bodyPr wrap="square"/>
+                    <a:lstStyle/>
+                    <a:p>
+                      <a:pPr algn="r"/>
+                      <a:r>
+                        <a:rPr sz="1150" b="0">
+                          <a:solidFill>
+                            <a:srgbClr val="1B1B1F"/>
+                          </a:solidFill>
+                          <a:latin typeface="Calibri"/>
+                        </a:rPr>
+                        <a:t>0.0761</a:t>
+                      </a:r>
+                    </a:p>
+                  </a:txBody>
+                  <a:tcPr marL="91440" marR="73152" marT="18288" marB="18288">
+                    <a:solidFill>
+                      <a:srgbClr val="FFFFFF"/>
+                    </a:solidFill>
+                  </a:tcPr>
+                </a:tc>
+                <a:tc>
+                  <a:txBody>
+                    <a:bodyPr wrap="square"/>
+                    <a:lstStyle/>
+                    <a:p>
+                      <a:pPr algn="r"/>
+                      <a:r>
+                        <a:rPr sz="1150" b="0">
+                          <a:solidFill>
+                            <a:srgbClr val="1B1B1F"/>
+                          </a:solidFill>
+                          <a:latin typeface="Calibri"/>
+                        </a:rPr>
+                        <a:t>0.7863</a:t>
+                      </a:r>
+                    </a:p>
+                  </a:txBody>
+                  <a:tcPr marL="91440" marR="73152" marT="18288" marB="18288">
+                    <a:solidFill>
+                      <a:srgbClr val="FFFFFF"/>
+                    </a:solidFill>
+                  </a:tcPr>
+                </a:tc>
+                <a:tc>
+                  <a:txBody>
+                    <a:bodyPr wrap="square"/>
+                    <a:lstStyle/>
+                    <a:p>
+                      <a:pPr algn="r"/>
+                      <a:r>
+                        <a:rPr sz="1150" b="0">
+                          <a:solidFill>
+                            <a:srgbClr val="1B1B1F"/>
+                          </a:solidFill>
+                          <a:latin typeface="Calibri"/>
+                        </a:rPr>
+                        <a:t>0.0186</a:t>
+                      </a:r>
+                    </a:p>
+                  </a:txBody>
+                  <a:tcPr marL="91440" marR="73152" marT="18288" marB="18288">
+                    <a:solidFill>
+                      <a:srgbClr val="FFFFFF"/>
+                    </a:solidFill>
+                  </a:tcPr>
+                </a:tc>
+              </a:tr>
+            </a:tbl>
+          </a:graphicData>
+        </a:graphic>
+      </p:graphicFrame>
+      <p:sp>
+        <p:nvSpPr>
+          <p:cNvPr id="5" name="TextBox 4"/>
+          <p:cNvSpPr txBox="1"/>
+          <p:nvPr/>
+        </p:nvSpPr>
+        <p:spPr>
+          <a:xfrm>
+            <a:off x="640080" y="3977639"/>
+            <a:ext cx="10881360" cy="329184"/>
+          </a:xfrm>
+          <a:prstGeom prst="rect">
+            <a:avLst/>
+          </a:prstGeom>
+          <a:noFill/>
+        </p:spPr>
+        <p:txBody>
+          <a:bodyPr wrap="square">
+            <a:spAutoFit/>
+          </a:bodyPr>
+          <a:lstStyle/>
+          <a:p>
+            <a:pPr algn="l">
+              <a:lnSpc>
+                <a:spcPct val="100000"/>
+              </a:lnSpc>
+            </a:pPr>
+            <a:r>
+              <a:rPr sz="1500" b="1">
+                <a:solidFill>
+                  <a:srgbClr val="1E2761"/>
+                </a:solidFill>
+                <a:latin typeface="Cambria"/>
+              </a:rPr>
+              <a:t>Deleting the feature does not delete the information.</a:t>
+            </a:r>
+          </a:p>
+        </p:txBody>
+      </p:sp>
+      <p:sp>
+        <p:nvSpPr>
+          <p:cNvPr id="6" name="TextBox 5"/>
+          <p:cNvSpPr txBox="1"/>
+          <p:nvPr/>
+        </p:nvSpPr>
+        <p:spPr>
+          <a:xfrm>
+            <a:off x="640080" y="4352544"/>
+            <a:ext cx="10881360" cy="868680"/>
+          </a:xfrm>
+          <a:prstGeom prst="rect">
+            <a:avLst/>
+          </a:prstGeom>
+          <a:noFill/>
+        </p:spPr>
+        <p:txBody>
+          <a:bodyPr wrap="square">
+            <a:spAutoFit/>
+          </a:bodyPr>
+          <a:lstStyle/>
+          <a:p>
+            <a:pPr algn="l">
+              <a:lnSpc>
+                <a:spcPct val="100000"/>
+              </a:lnSpc>
+            </a:pPr>
+            <a:r>
+              <a:rPr sz="1350" b="0">
+                <a:solidFill>
+                  <a:srgbClr val="1B1B1F"/>
+                </a:solidFill>
+                <a:latin typeface="Calibri"/>
+              </a:rPr>
+              <a:t>`relationship` determines sex outright for 45.9% of people. Removing it drops sex-recoverability only from 0.934 to 0.868 — the information is spread across the other features — and it makes the unmitigated model MORE unfair, 0.190 → 0.205. You must delete 4 of 11 features to suppress the leak, at which point the probe is no better than guessing the majority class.</a:t>
+            </a:r>
+          </a:p>
+        </p:txBody>
+      </p:sp>
+      <p:sp>
+        <p:nvSpPr>
+          <p:cNvPr id="7" name="Rounded Rectangle 6"/>
           <p:cNvSpPr/>
           <p:nvPr/>
         </p:nvSpPr>
         <p:spPr>
           <a:xfrm>
-            <a:off x="640080" y="1645920"/>
-            <a:ext cx="3429000" cy="3703320"/>
+            <a:off x="640080" y="5349240"/>
+            <a:ext cx="10881360" cy="1051560"/>
           </a:xfrm>
           <a:prstGeom prst="roundRect">
             <a:avLst>
@@ -11996,11 +12946,11 @@
             </a:avLst>
           </a:prstGeom>
           <a:solidFill>
-            <a:srgbClr val="F4F6FA"/>
+            <a:srgbClr val="FDF3E2"/>
           </a:solidFill>
           <a:ln w="9525">
             <a:solidFill>
-              <a:srgbClr val="D8DDE8"/>
+              <a:srgbClr val="E8A33D"/>
             </a:solidFill>
           </a:ln>
           <a:effectLst/>
@@ -12027,14 +12977,14 @@
       </p:sp>
       <p:sp>
         <p:nvSpPr>
-          <p:cNvPr id="5" name="TextBox 4"/>
+          <p:cNvPr id="8" name="TextBox 7"/>
           <p:cNvSpPr txBox="1"/>
           <p:nvPr/>
         </p:nvSpPr>
         <p:spPr>
           <a:xfrm>
-            <a:off x="868680" y="1801368"/>
-            <a:ext cx="2971800" cy="384048"/>
+            <a:off x="914400" y="5504688"/>
+            <a:ext cx="10332720" cy="777240"/>
           </a:xfrm>
           <a:prstGeom prst="rect">
             <a:avLst/>
@@ -12053,27 +13003,45 @@
               </a:lnSpc>
             </a:pPr>
             <a:r>
-              <a:rPr sz="1700" b="1">
-                <a:solidFill>
-                  <a:srgbClr val="1BAF7A"/>
-                </a:solidFill>
-                <a:latin typeface="Cambria"/>
-              </a:rPr>
-              <a:t>Confirmed</a:t>
-            </a:r>
-          </a:p>
-        </p:txBody>
-      </p:sp>
-      <p:sp>
-        <p:nvSpPr>
-          <p:cNvPr id="6" name="TextBox 5"/>
+              <a:rPr sz="1350" b="1">
+                <a:solidFill>
+                  <a:srgbClr val="1B1B1F"/>
+                </a:solidFill>
+                <a:latin typeface="Calibri"/>
+              </a:rPr>
+              <a:t>Feature deletion is strictly dominated: 4 features removed gives DP 0.076 at 80.8% accuracy, while the constraint on the untouched feature set gives DP 0.020 at 83.0%. Worse fairness AND worse accuracy — and mitigation gets more expensive afterwards.</a:t>
+            </a:r>
+          </a:p>
+        </p:txBody>
+      </p:sp>
+    </p:spTree>
+  </p:cSld>
+  <p:clrMapOvr>
+    <a:masterClrMapping/>
+  </p:clrMapOvr>
+</p:sld>
+</file>
+
+<file path=ppt/slides/slide21.xml><?xml version="1.0" encoding="utf-8"?>
+<p:sld xmlns:a="http://schemas.openxmlformats.org/drawingml/2006/main" xmlns:p="http://schemas.openxmlformats.org/presentationml/2006/main" xmlns:r="http://schemas.openxmlformats.org/officeDocument/2006/relationships">
+  <p:cSld>
+    <p:spTree>
+      <p:nvGrpSpPr>
+        <p:cNvPr id="1" name=""/>
+        <p:cNvGrpSpPr/>
+        <p:nvPr/>
+      </p:nvGrpSpPr>
+      <p:grpSpPr/>
+      <p:sp>
+        <p:nvSpPr>
+          <p:cNvPr id="2" name="TextBox 1"/>
           <p:cNvSpPr txBox="1"/>
           <p:nvPr/>
         </p:nvSpPr>
         <p:spPr>
           <a:xfrm>
-            <a:off x="868680" y="2267712"/>
-            <a:ext cx="2971800" cy="2926080"/>
+            <a:off x="640080" y="384048"/>
+            <a:ext cx="10881360" cy="640080"/>
           </a:xfrm>
           <a:prstGeom prst="rect">
             <a:avLst/>
@@ -12088,129 +13056,1284 @@
           <a:p>
             <a:pPr algn="l">
               <a:lnSpc>
-                <a:spcPct val="108000"/>
+                <a:spcPct val="100000"/>
               </a:lnSpc>
             </a:pPr>
             <a:r>
-              <a:rPr sz="1250" b="0">
-                <a:solidFill>
-                  <a:srgbClr val="1B1B1F"/>
-                </a:solidFill>
-                <a:latin typeface="Calibri"/>
-              </a:rPr>
-              <a:t>Everything the base paper claims.</a:t>
-            </a:r>
-          </a:p>
+              <a:rPr sz="2600" b="1">
+                <a:solidFill>
+                  <a:srgbClr val="1E2761"/>
+                </a:solidFill>
+                <a:latin typeface="Cambria"/>
+              </a:rPr>
+              <a:t>Contribution 5 — Loosening the Constraint Changes the Dose, Not the Mechanism</a:t>
+            </a:r>
+          </a:p>
+        </p:txBody>
+      </p:sp>
+      <p:sp>
+        <p:nvSpPr>
+          <p:cNvPr id="3" name="TextBox 2"/>
+          <p:cNvSpPr txBox="1"/>
+          <p:nvPr/>
+        </p:nvSpPr>
+        <p:spPr>
+          <a:xfrm>
+            <a:off x="640080" y="1033271"/>
+            <a:ext cx="10881360" cy="384048"/>
+          </a:xfrm>
+          <a:prstGeom prst="rect">
+            <a:avLst/>
+          </a:prstGeom>
+          <a:noFill/>
+        </p:spPr>
+        <p:txBody>
+          <a:bodyPr wrap="square">
+            <a:spAutoFit/>
+          </a:bodyPr>
+          <a:lstStyle/>
           <a:p>
             <a:pPr algn="l">
               <a:lnSpc>
-                <a:spcPct val="108000"/>
+                <a:spcPct val="100000"/>
               </a:lnSpc>
             </a:pPr>
             <a:r>
-              <a:rPr sz="1250" b="0">
-                <a:solidFill>
-                  <a:srgbClr val="1B1B1F"/>
+              <a:rPr sz="1350" b="0">
+                <a:solidFill>
+                  <a:srgbClr val="5A6270"/>
                 </a:solidFill>
                 <a:latin typeface="Calibri"/>
               </a:rPr>
-              <a:t/>
-            </a:r>
-          </a:p>
+              <a:t>The strongest objection to Contribution 1: maybe levelling down is just what a very tight constraint forces. Tested by sweeping ε.</a:t>
+            </a:r>
+          </a:p>
+        </p:txBody>
+      </p:sp>
+      <p:graphicFrame>
+        <p:nvGraphicFramePr>
+          <p:cNvPr id="4" name="Table 3"/>
+          <p:cNvGraphicFramePr>
+            <a:graphicFrameLocks noGrp="1"/>
+          </p:cNvGraphicFramePr>
+          <p:nvPr/>
+        </p:nvGraphicFramePr>
+        <p:xfrm>
+          <a:off x="640080" y="1691640"/>
+          <a:ext cx="10881358" cy="2496312"/>
+        </p:xfrm>
+        <a:graphic>
+          <a:graphicData uri="http://schemas.openxmlformats.org/drawingml/2006/table">
+            <a:tbl>
+              <a:tblPr firstRow="1">
+                <a:tableStyleId>{5C22544A-7EE6-4342-B048-85BDC9FD1C3A}</a:tableStyleId>
+              </a:tblPr>
+              <a:tblGrid>
+                <a:gridCol w="1687032"/>
+                <a:gridCol w="1518329"/>
+                <a:gridCol w="1433977"/>
+                <a:gridCol w="2699252"/>
+                <a:gridCol w="1518329"/>
+                <a:gridCol w="2024439"/>
+              </a:tblGrid>
+              <a:tr h="384048">
+                <a:tc>
+                  <a:txBody>
+                    <a:bodyPr wrap="square"/>
+                    <a:lstStyle/>
+                    <a:p>
+                      <a:pPr algn="l"/>
+                      <a:r>
+                        <a:rPr sz="1100" b="1">
+                          <a:solidFill>
+                            <a:srgbClr val="FFFFFF"/>
+                          </a:solidFill>
+                          <a:latin typeface="Calibri"/>
+                        </a:rPr>
+                        <a:t>ε (fairness slack)</a:t>
+                      </a:r>
+                    </a:p>
+                  </a:txBody>
+                  <a:tcPr marL="91440" marR="73152" marT="18288" marB="18288">
+                    <a:solidFill>
+                      <a:srgbClr val="1E2761"/>
+                    </a:solidFill>
+                  </a:tcPr>
+                </a:tc>
+                <a:tc>
+                  <a:txBody>
+                    <a:bodyPr wrap="square"/>
+                    <a:lstStyle/>
+                    <a:p>
+                      <a:pPr algn="r"/>
+                      <a:r>
+                        <a:rPr sz="1100" b="1">
+                          <a:solidFill>
+                            <a:srgbClr val="FFFFFF"/>
+                          </a:solidFill>
+                          <a:latin typeface="Calibri"/>
+                        </a:rPr>
+                        <a:t>Accuracy</a:t>
+                      </a:r>
+                    </a:p>
+                  </a:txBody>
+                  <a:tcPr marL="91440" marR="73152" marT="18288" marB="18288">
+                    <a:solidFill>
+                      <a:srgbClr val="1E2761"/>
+                    </a:solidFill>
+                  </a:tcPr>
+                </a:tc>
+                <a:tc>
+                  <a:txBody>
+                    <a:bodyPr wrap="square"/>
+                    <a:lstStyle/>
+                    <a:p>
+                      <a:pPr algn="r"/>
+                      <a:r>
+                        <a:rPr sz="1100" b="1">
+                          <a:solidFill>
+                            <a:srgbClr val="FFFFFF"/>
+                          </a:solidFill>
+                          <a:latin typeface="Calibri"/>
+                        </a:rPr>
+                        <a:t>DP diff</a:t>
+                      </a:r>
+                    </a:p>
+                  </a:txBody>
+                  <a:tcPr marL="91440" marR="73152" marT="18288" marB="18288">
+                    <a:solidFill>
+                      <a:srgbClr val="1E2761"/>
+                    </a:solidFill>
+                  </a:tcPr>
+                </a:tc>
+                <a:tc>
+                  <a:txBody>
+                    <a:bodyPr wrap="square"/>
+                    <a:lstStyle/>
+                    <a:p>
+                      <a:pPr algn="r"/>
+                      <a:r>
+                        <a:rPr sz="1100" b="1">
+                          <a:solidFill>
+                            <a:srgbClr val="FFFFFF"/>
+                          </a:solidFill>
+                          <a:latin typeface="Calibri"/>
+                        </a:rPr>
+                        <a:t>Share paid by advantaged (people)</a:t>
+                      </a:r>
+                    </a:p>
+                  </a:txBody>
+                  <a:tcPr marL="91440" marR="73152" marT="18288" marB="18288">
+                    <a:solidFill>
+                      <a:srgbClr val="1E2761"/>
+                    </a:solidFill>
+                  </a:tcPr>
+                </a:tc>
+                <a:tc>
+                  <a:txBody>
+                    <a:bodyPr wrap="square"/>
+                    <a:lstStyle/>
+                    <a:p>
+                      <a:pPr algn="r"/>
+                      <a:r>
+                        <a:rPr sz="1100" b="1">
+                          <a:solidFill>
+                            <a:srgbClr val="FFFFFF"/>
+                          </a:solidFill>
+                          <a:latin typeface="Calibri"/>
+                        </a:rPr>
+                        <a:t>Lost per gained</a:t>
+                      </a:r>
+                    </a:p>
+                  </a:txBody>
+                  <a:tcPr marL="91440" marR="73152" marT="18288" marB="18288">
+                    <a:solidFill>
+                      <a:srgbClr val="1E2761"/>
+                    </a:solidFill>
+                  </a:tcPr>
+                </a:tc>
+                <a:tc>
+                  <a:txBody>
+                    <a:bodyPr wrap="square"/>
+                    <a:lstStyle/>
+                    <a:p>
+                      <a:pPr algn="r"/>
+                      <a:r>
+                        <a:rPr sz="1100" b="1">
+                          <a:solidFill>
+                            <a:srgbClr val="FFFFFF"/>
+                          </a:solidFill>
+                          <a:latin typeface="Calibri"/>
+                        </a:rPr>
+                        <a:t>Change in total approvals</a:t>
+                      </a:r>
+                    </a:p>
+                  </a:txBody>
+                  <a:tcPr marL="91440" marR="73152" marT="18288" marB="18288">
+                    <a:solidFill>
+                      <a:srgbClr val="1E2761"/>
+                    </a:solidFill>
+                  </a:tcPr>
+                </a:tc>
+              </a:tr>
+              <a:tr h="301752">
+                <a:tc>
+                  <a:txBody>
+                    <a:bodyPr wrap="square"/>
+                    <a:lstStyle/>
+                    <a:p>
+                      <a:pPr algn="l"/>
+                      <a:r>
+                        <a:rPr sz="1150" b="0">
+                          <a:solidFill>
+                            <a:srgbClr val="1B1B1F"/>
+                          </a:solidFill>
+                          <a:latin typeface="Calibri"/>
+                        </a:rPr>
+                        <a:t>0.005</a:t>
+                      </a:r>
+                    </a:p>
+                  </a:txBody>
+                  <a:tcPr marL="91440" marR="73152" marT="18288" marB="18288">
+                    <a:solidFill>
+                      <a:srgbClr val="FFFFFF"/>
+                    </a:solidFill>
+                  </a:tcPr>
+                </a:tc>
+                <a:tc>
+                  <a:txBody>
+                    <a:bodyPr wrap="square"/>
+                    <a:lstStyle/>
+                    <a:p>
+                      <a:pPr algn="r"/>
+                      <a:r>
+                        <a:rPr sz="1150" b="0">
+                          <a:solidFill>
+                            <a:srgbClr val="1B1B1F"/>
+                          </a:solidFill>
+                          <a:latin typeface="Calibri"/>
+                        </a:rPr>
+                        <a:t>0.8284</a:t>
+                      </a:r>
+                    </a:p>
+                  </a:txBody>
+                  <a:tcPr marL="91440" marR="73152" marT="18288" marB="18288">
+                    <a:solidFill>
+                      <a:srgbClr val="FFFFFF"/>
+                    </a:solidFill>
+                  </a:tcPr>
+                </a:tc>
+                <a:tc>
+                  <a:txBody>
+                    <a:bodyPr wrap="square"/>
+                    <a:lstStyle/>
+                    <a:p>
+                      <a:pPr algn="r"/>
+                      <a:r>
+                        <a:rPr sz="1150" b="0">
+                          <a:solidFill>
+                            <a:srgbClr val="1B1B1F"/>
+                          </a:solidFill>
+                          <a:latin typeface="Calibri"/>
+                        </a:rPr>
+                        <a:t>0.0122</a:t>
+                      </a:r>
+                    </a:p>
+                  </a:txBody>
+                  <a:tcPr marL="91440" marR="73152" marT="18288" marB="18288">
+                    <a:solidFill>
+                      <a:srgbClr val="FFFFFF"/>
+                    </a:solidFill>
+                  </a:tcPr>
+                </a:tc>
+                <a:tc>
+                  <a:txBody>
+                    <a:bodyPr wrap="square"/>
+                    <a:lstStyle/>
+                    <a:p>
+                      <a:pPr algn="r"/>
+                      <a:r>
+                        <a:rPr sz="1150" b="0">
+                          <a:solidFill>
+                            <a:srgbClr val="1B1B1F"/>
+                          </a:solidFill>
+                          <a:latin typeface="Calibri"/>
+                        </a:rPr>
+                        <a:t>0.746</a:t>
+                      </a:r>
+                    </a:p>
+                  </a:txBody>
+                  <a:tcPr marL="91440" marR="73152" marT="18288" marB="18288">
+                    <a:solidFill>
+                      <a:srgbClr val="FFFFFF"/>
+                    </a:solidFill>
+                  </a:tcPr>
+                </a:tc>
+                <a:tc>
+                  <a:txBody>
+                    <a:bodyPr wrap="square"/>
+                    <a:lstStyle/>
+                    <a:p>
+                      <a:pPr algn="r"/>
+                      <a:r>
+                        <a:rPr sz="1150" b="0">
+                          <a:solidFill>
+                            <a:srgbClr val="1B1B1F"/>
+                          </a:solidFill>
+                          <a:latin typeface="Calibri"/>
+                        </a:rPr>
+                        <a:t>2.74</a:t>
+                      </a:r>
+                    </a:p>
+                  </a:txBody>
+                  <a:tcPr marL="91440" marR="73152" marT="18288" marB="18288">
+                    <a:solidFill>
+                      <a:srgbClr val="FFFFFF"/>
+                    </a:solidFill>
+                  </a:tcPr>
+                </a:tc>
+                <a:tc>
+                  <a:txBody>
+                    <a:bodyPr wrap="square"/>
+                    <a:lstStyle/>
+                    <a:p>
+                      <a:pPr algn="r"/>
+                      <a:r>
+                        <a:rPr sz="1150" b="0">
+                          <a:solidFill>
+                            <a:srgbClr val="1B1B1F"/>
+                          </a:solidFill>
+                          <a:latin typeface="Calibri"/>
+                        </a:rPr>
+                        <a:t>-22.0%</a:t>
+                      </a:r>
+                    </a:p>
+                  </a:txBody>
+                  <a:tcPr marL="91440" marR="73152" marT="18288" marB="18288">
+                    <a:solidFill>
+                      <a:srgbClr val="FFFFFF"/>
+                    </a:solidFill>
+                  </a:tcPr>
+                </a:tc>
+              </a:tr>
+              <a:tr h="301752">
+                <a:tc>
+                  <a:txBody>
+                    <a:bodyPr wrap="square"/>
+                    <a:lstStyle/>
+                    <a:p>
+                      <a:pPr algn="l"/>
+                      <a:r>
+                        <a:rPr sz="1150" b="1">
+                          <a:solidFill>
+                            <a:srgbClr val="1B1B1F"/>
+                          </a:solidFill>
+                          <a:latin typeface="Calibri"/>
+                        </a:rPr>
+                        <a:t>0.01</a:t>
+                      </a:r>
+                    </a:p>
+                  </a:txBody>
+                  <a:tcPr marL="91440" marR="73152" marT="18288" marB="18288">
+                    <a:solidFill>
+                      <a:srgbClr val="FDF3E2"/>
+                    </a:solidFill>
+                  </a:tcPr>
+                </a:tc>
+                <a:tc>
+                  <a:txBody>
+                    <a:bodyPr wrap="square"/>
+                    <a:lstStyle/>
+                    <a:p>
+                      <a:pPr algn="r"/>
+                      <a:r>
+                        <a:rPr sz="1150" b="1">
+                          <a:solidFill>
+                            <a:srgbClr val="1B1B1F"/>
+                          </a:solidFill>
+                          <a:latin typeface="Calibri"/>
+                        </a:rPr>
+                        <a:t>0.8295</a:t>
+                      </a:r>
+                    </a:p>
+                  </a:txBody>
+                  <a:tcPr marL="91440" marR="73152" marT="18288" marB="18288">
+                    <a:solidFill>
+                      <a:srgbClr val="FDF3E2"/>
+                    </a:solidFill>
+                  </a:tcPr>
+                </a:tc>
+                <a:tc>
+                  <a:txBody>
+                    <a:bodyPr wrap="square"/>
+                    <a:lstStyle/>
+                    <a:p>
+                      <a:pPr algn="r"/>
+                      <a:r>
+                        <a:rPr sz="1150" b="1">
+                          <a:solidFill>
+                            <a:srgbClr val="1B1B1F"/>
+                          </a:solidFill>
+                          <a:latin typeface="Calibri"/>
+                        </a:rPr>
+                        <a:t>0.0197</a:t>
+                      </a:r>
+                    </a:p>
+                  </a:txBody>
+                  <a:tcPr marL="91440" marR="73152" marT="18288" marB="18288">
+                    <a:solidFill>
+                      <a:srgbClr val="FDF3E2"/>
+                    </a:solidFill>
+                  </a:tcPr>
+                </a:tc>
+                <a:tc>
+                  <a:txBody>
+                    <a:bodyPr wrap="square"/>
+                    <a:lstStyle/>
+                    <a:p>
+                      <a:pPr algn="r"/>
+                      <a:r>
+                        <a:rPr sz="1150" b="1">
+                          <a:solidFill>
+                            <a:srgbClr val="1B1B1F"/>
+                          </a:solidFill>
+                          <a:latin typeface="Calibri"/>
+                        </a:rPr>
+                        <a:t>0.746</a:t>
+                      </a:r>
+                    </a:p>
+                  </a:txBody>
+                  <a:tcPr marL="91440" marR="73152" marT="18288" marB="18288">
+                    <a:solidFill>
+                      <a:srgbClr val="FDF3E2"/>
+                    </a:solidFill>
+                  </a:tcPr>
+                </a:tc>
+                <a:tc>
+                  <a:txBody>
+                    <a:bodyPr wrap="square"/>
+                    <a:lstStyle/>
+                    <a:p>
+                      <a:pPr algn="r"/>
+                      <a:r>
+                        <a:rPr sz="1150" b="1">
+                          <a:solidFill>
+                            <a:srgbClr val="1B1B1F"/>
+                          </a:solidFill>
+                          <a:latin typeface="Calibri"/>
+                        </a:rPr>
+                        <a:t>2.74</a:t>
+                      </a:r>
+                    </a:p>
+                  </a:txBody>
+                  <a:tcPr marL="91440" marR="73152" marT="18288" marB="18288">
+                    <a:solidFill>
+                      <a:srgbClr val="FDF3E2"/>
+                    </a:solidFill>
+                  </a:tcPr>
+                </a:tc>
+                <a:tc>
+                  <a:txBody>
+                    <a:bodyPr wrap="square"/>
+                    <a:lstStyle/>
+                    <a:p>
+                      <a:pPr algn="r"/>
+                      <a:r>
+                        <a:rPr sz="1150" b="1">
+                          <a:solidFill>
+                            <a:srgbClr val="1B1B1F"/>
+                          </a:solidFill>
+                          <a:latin typeface="Calibri"/>
+                        </a:rPr>
+                        <a:t>-21.1%</a:t>
+                      </a:r>
+                    </a:p>
+                  </a:txBody>
+                  <a:tcPr marL="91440" marR="73152" marT="18288" marB="18288">
+                    <a:solidFill>
+                      <a:srgbClr val="FDF3E2"/>
+                    </a:solidFill>
+                  </a:tcPr>
+                </a:tc>
+              </a:tr>
+              <a:tr h="301752">
+                <a:tc>
+                  <a:txBody>
+                    <a:bodyPr wrap="square"/>
+                    <a:lstStyle/>
+                    <a:p>
+                      <a:pPr algn="l"/>
+                      <a:r>
+                        <a:rPr sz="1150" b="0">
+                          <a:solidFill>
+                            <a:srgbClr val="1B1B1F"/>
+                          </a:solidFill>
+                          <a:latin typeface="Calibri"/>
+                        </a:rPr>
+                        <a:t>0.02</a:t>
+                      </a:r>
+                    </a:p>
+                  </a:txBody>
+                  <a:tcPr marL="91440" marR="73152" marT="18288" marB="18288">
+                    <a:solidFill>
+                      <a:srgbClr val="FFFFFF"/>
+                    </a:solidFill>
+                  </a:tcPr>
+                </a:tc>
+                <a:tc>
+                  <a:txBody>
+                    <a:bodyPr wrap="square"/>
+                    <a:lstStyle/>
+                    <a:p>
+                      <a:pPr algn="r"/>
+                      <a:r>
+                        <a:rPr sz="1150" b="0">
+                          <a:solidFill>
+                            <a:srgbClr val="1B1B1F"/>
+                          </a:solidFill>
+                          <a:latin typeface="Calibri"/>
+                        </a:rPr>
+                        <a:t>0.8324</a:t>
+                      </a:r>
+                    </a:p>
+                  </a:txBody>
+                  <a:tcPr marL="91440" marR="73152" marT="18288" marB="18288">
+                    <a:solidFill>
+                      <a:srgbClr val="FFFFFF"/>
+                    </a:solidFill>
+                  </a:tcPr>
+                </a:tc>
+                <a:tc>
+                  <a:txBody>
+                    <a:bodyPr wrap="square"/>
+                    <a:lstStyle/>
+                    <a:p>
+                      <a:pPr algn="r"/>
+                      <a:r>
+                        <a:rPr sz="1150" b="0">
+                          <a:solidFill>
+                            <a:srgbClr val="1B1B1F"/>
+                          </a:solidFill>
+                          <a:latin typeface="Calibri"/>
+                        </a:rPr>
+                        <a:t>0.0342</a:t>
+                      </a:r>
+                    </a:p>
+                  </a:txBody>
+                  <a:tcPr marL="91440" marR="73152" marT="18288" marB="18288">
+                    <a:solidFill>
+                      <a:srgbClr val="FFFFFF"/>
+                    </a:solidFill>
+                  </a:tcPr>
+                </a:tc>
+                <a:tc>
+                  <a:txBody>
+                    <a:bodyPr wrap="square"/>
+                    <a:lstStyle/>
+                    <a:p>
+                      <a:pPr algn="r"/>
+                      <a:r>
+                        <a:rPr sz="1150" b="0">
+                          <a:solidFill>
+                            <a:srgbClr val="1B1B1F"/>
+                          </a:solidFill>
+                          <a:latin typeface="Calibri"/>
+                        </a:rPr>
+                        <a:t>0.744</a:t>
+                      </a:r>
+                    </a:p>
+                  </a:txBody>
+                  <a:tcPr marL="91440" marR="73152" marT="18288" marB="18288">
+                    <a:solidFill>
+                      <a:srgbClr val="FFFFFF"/>
+                    </a:solidFill>
+                  </a:tcPr>
+                </a:tc>
+                <a:tc>
+                  <a:txBody>
+                    <a:bodyPr wrap="square"/>
+                    <a:lstStyle/>
+                    <a:p>
+                      <a:pPr algn="r"/>
+                      <a:r>
+                        <a:rPr sz="1150" b="0">
+                          <a:solidFill>
+                            <a:srgbClr val="1B1B1F"/>
+                          </a:solidFill>
+                          <a:latin typeface="Calibri"/>
+                        </a:rPr>
+                        <a:t>2.73</a:t>
+                      </a:r>
+                    </a:p>
+                  </a:txBody>
+                  <a:tcPr marL="91440" marR="73152" marT="18288" marB="18288">
+                    <a:solidFill>
+                      <a:srgbClr val="FFFFFF"/>
+                    </a:solidFill>
+                  </a:tcPr>
+                </a:tc>
+                <a:tc>
+                  <a:txBody>
+                    <a:bodyPr wrap="square"/>
+                    <a:lstStyle/>
+                    <a:p>
+                      <a:pPr algn="r"/>
+                      <a:r>
+                        <a:rPr sz="1150" b="0">
+                          <a:solidFill>
+                            <a:srgbClr val="1B1B1F"/>
+                          </a:solidFill>
+                          <a:latin typeface="Calibri"/>
+                        </a:rPr>
+                        <a:t>-19.1%</a:t>
+                      </a:r>
+                    </a:p>
+                  </a:txBody>
+                  <a:tcPr marL="91440" marR="73152" marT="18288" marB="18288">
+                    <a:solidFill>
+                      <a:srgbClr val="FFFFFF"/>
+                    </a:solidFill>
+                  </a:tcPr>
+                </a:tc>
+              </a:tr>
+              <a:tr h="301752">
+                <a:tc>
+                  <a:txBody>
+                    <a:bodyPr wrap="square"/>
+                    <a:lstStyle/>
+                    <a:p>
+                      <a:pPr algn="l"/>
+                      <a:r>
+                        <a:rPr sz="1150" b="0">
+                          <a:solidFill>
+                            <a:srgbClr val="1B1B1F"/>
+                          </a:solidFill>
+                          <a:latin typeface="Calibri"/>
+                        </a:rPr>
+                        <a:t>0.05</a:t>
+                      </a:r>
+                    </a:p>
+                  </a:txBody>
+                  <a:tcPr marL="91440" marR="73152" marT="18288" marB="18288">
+                    <a:solidFill>
+                      <a:srgbClr val="F4F6FA"/>
+                    </a:solidFill>
+                  </a:tcPr>
+                </a:tc>
+                <a:tc>
+                  <a:txBody>
+                    <a:bodyPr wrap="square"/>
+                    <a:lstStyle/>
+                    <a:p>
+                      <a:pPr algn="r"/>
+                      <a:r>
+                        <a:rPr sz="1150" b="0">
+                          <a:solidFill>
+                            <a:srgbClr val="1B1B1F"/>
+                          </a:solidFill>
+                          <a:latin typeface="Calibri"/>
+                        </a:rPr>
+                        <a:t>0.8388</a:t>
+                      </a:r>
+                    </a:p>
+                  </a:txBody>
+                  <a:tcPr marL="91440" marR="73152" marT="18288" marB="18288">
+                    <a:solidFill>
+                      <a:srgbClr val="F4F6FA"/>
+                    </a:solidFill>
+                  </a:tcPr>
+                </a:tc>
+                <a:tc>
+                  <a:txBody>
+                    <a:bodyPr wrap="square"/>
+                    <a:lstStyle/>
+                    <a:p>
+                      <a:pPr algn="r"/>
+                      <a:r>
+                        <a:rPr sz="1150" b="0">
+                          <a:solidFill>
+                            <a:srgbClr val="1B1B1F"/>
+                          </a:solidFill>
+                          <a:latin typeface="Calibri"/>
+                        </a:rPr>
+                        <a:t>0.0762</a:t>
+                      </a:r>
+                    </a:p>
+                  </a:txBody>
+                  <a:tcPr marL="91440" marR="73152" marT="18288" marB="18288">
+                    <a:solidFill>
+                      <a:srgbClr val="F4F6FA"/>
+                    </a:solidFill>
+                  </a:tcPr>
+                </a:tc>
+                <a:tc>
+                  <a:txBody>
+                    <a:bodyPr wrap="square"/>
+                    <a:lstStyle/>
+                    <a:p>
+                      <a:pPr algn="r"/>
+                      <a:r>
+                        <a:rPr sz="1150" b="0">
+                          <a:solidFill>
+                            <a:srgbClr val="1B1B1F"/>
+                          </a:solidFill>
+                          <a:latin typeface="Calibri"/>
+                        </a:rPr>
+                        <a:t>0.739</a:t>
+                      </a:r>
+                    </a:p>
+                  </a:txBody>
+                  <a:tcPr marL="91440" marR="73152" marT="18288" marB="18288">
+                    <a:solidFill>
+                      <a:srgbClr val="F4F6FA"/>
+                    </a:solidFill>
+                  </a:tcPr>
+                </a:tc>
+                <a:tc>
+                  <a:txBody>
+                    <a:bodyPr wrap="square"/>
+                    <a:lstStyle/>
+                    <a:p>
+                      <a:pPr algn="r"/>
+                      <a:r>
+                        <a:rPr sz="1150" b="0">
+                          <a:solidFill>
+                            <a:srgbClr val="1B1B1F"/>
+                          </a:solidFill>
+                          <a:latin typeface="Calibri"/>
+                        </a:rPr>
+                        <a:t>2.69</a:t>
+                      </a:r>
+                    </a:p>
+                  </a:txBody>
+                  <a:tcPr marL="91440" marR="73152" marT="18288" marB="18288">
+                    <a:solidFill>
+                      <a:srgbClr val="F4F6FA"/>
+                    </a:solidFill>
+                  </a:tcPr>
+                </a:tc>
+                <a:tc>
+                  <a:txBody>
+                    <a:bodyPr wrap="square"/>
+                    <a:lstStyle/>
+                    <a:p>
+                      <a:pPr algn="r"/>
+                      <a:r>
+                        <a:rPr sz="1150" b="0">
+                          <a:solidFill>
+                            <a:srgbClr val="1B1B1F"/>
+                          </a:solidFill>
+                          <a:latin typeface="Calibri"/>
+                        </a:rPr>
+                        <a:t>-13.6%</a:t>
+                      </a:r>
+                    </a:p>
+                  </a:txBody>
+                  <a:tcPr marL="91440" marR="73152" marT="18288" marB="18288">
+                    <a:solidFill>
+                      <a:srgbClr val="F4F6FA"/>
+                    </a:solidFill>
+                  </a:tcPr>
+                </a:tc>
+              </a:tr>
+              <a:tr h="301752">
+                <a:tc>
+                  <a:txBody>
+                    <a:bodyPr wrap="square"/>
+                    <a:lstStyle/>
+                    <a:p>
+                      <a:pPr algn="l"/>
+                      <a:r>
+                        <a:rPr sz="1150" b="0">
+                          <a:solidFill>
+                            <a:srgbClr val="1B1B1F"/>
+                          </a:solidFill>
+                          <a:latin typeface="Calibri"/>
+                        </a:rPr>
+                        <a:t>0.1</a:t>
+                      </a:r>
+                    </a:p>
+                  </a:txBody>
+                  <a:tcPr marL="91440" marR="73152" marT="18288" marB="18288">
+                    <a:solidFill>
+                      <a:srgbClr val="FFFFFF"/>
+                    </a:solidFill>
+                  </a:tcPr>
+                </a:tc>
+                <a:tc>
+                  <a:txBody>
+                    <a:bodyPr wrap="square"/>
+                    <a:lstStyle/>
+                    <a:p>
+                      <a:pPr algn="r"/>
+                      <a:r>
+                        <a:rPr sz="1150" b="0">
+                          <a:solidFill>
+                            <a:srgbClr val="1B1B1F"/>
+                          </a:solidFill>
+                          <a:latin typeface="Calibri"/>
+                        </a:rPr>
+                        <a:t>0.8457</a:t>
+                      </a:r>
+                    </a:p>
+                  </a:txBody>
+                  <a:tcPr marL="91440" marR="73152" marT="18288" marB="18288">
+                    <a:solidFill>
+                      <a:srgbClr val="FFFFFF"/>
+                    </a:solidFill>
+                  </a:tcPr>
+                </a:tc>
+                <a:tc>
+                  <a:txBody>
+                    <a:bodyPr wrap="square"/>
+                    <a:lstStyle/>
+                    <a:p>
+                      <a:pPr algn="r"/>
+                      <a:r>
+                        <a:rPr sz="1150" b="0">
+                          <a:solidFill>
+                            <a:srgbClr val="1B1B1F"/>
+                          </a:solidFill>
+                          <a:latin typeface="Calibri"/>
+                        </a:rPr>
+                        <a:t>0.1557</a:t>
+                      </a:r>
+                    </a:p>
+                  </a:txBody>
+                  <a:tcPr marL="91440" marR="73152" marT="18288" marB="18288">
+                    <a:solidFill>
+                      <a:srgbClr val="FFFFFF"/>
+                    </a:solidFill>
+                  </a:tcPr>
+                </a:tc>
+                <a:tc>
+                  <a:txBody>
+                    <a:bodyPr wrap="square"/>
+                    <a:lstStyle/>
+                    <a:p>
+                      <a:pPr algn="r"/>
+                      <a:r>
+                        <a:rPr sz="1150" b="0">
+                          <a:solidFill>
+                            <a:srgbClr val="1B1B1F"/>
+                          </a:solidFill>
+                          <a:latin typeface="Calibri"/>
+                        </a:rPr>
+                        <a:t>0.777</a:t>
+                      </a:r>
+                    </a:p>
+                  </a:txBody>
+                  <a:tcPr marL="91440" marR="73152" marT="18288" marB="18288">
+                    <a:solidFill>
+                      <a:srgbClr val="FFFFFF"/>
+                    </a:solidFill>
+                  </a:tcPr>
+                </a:tc>
+                <a:tc>
+                  <a:txBody>
+                    <a:bodyPr wrap="square"/>
+                    <a:lstStyle/>
+                    <a:p>
+                      <a:pPr algn="r"/>
+                      <a:r>
+                        <a:rPr sz="1150" b="0">
+                          <a:solidFill>
+                            <a:srgbClr val="1B1B1F"/>
+                          </a:solidFill>
+                          <a:latin typeface="Calibri"/>
+                        </a:rPr>
+                        <a:t>3.41</a:t>
+                      </a:r>
+                    </a:p>
+                  </a:txBody>
+                  <a:tcPr marL="91440" marR="73152" marT="18288" marB="18288">
+                    <a:solidFill>
+                      <a:srgbClr val="FFFFFF"/>
+                    </a:solidFill>
+                  </a:tcPr>
+                </a:tc>
+                <a:tc>
+                  <a:txBody>
+                    <a:bodyPr wrap="square"/>
+                    <a:lstStyle/>
+                    <a:p>
+                      <a:pPr algn="r"/>
+                      <a:r>
+                        <a:rPr sz="1150" b="0">
+                          <a:solidFill>
+                            <a:srgbClr val="1B1B1F"/>
+                          </a:solidFill>
+                          <a:latin typeface="Calibri"/>
+                        </a:rPr>
+                        <a:t>-5.0%</a:t>
+                      </a:r>
+                    </a:p>
+                  </a:txBody>
+                  <a:tcPr marL="91440" marR="73152" marT="18288" marB="18288">
+                    <a:solidFill>
+                      <a:srgbClr val="FFFFFF"/>
+                    </a:solidFill>
+                  </a:tcPr>
+                </a:tc>
+              </a:tr>
+              <a:tr h="301752">
+                <a:tc>
+                  <a:txBody>
+                    <a:bodyPr wrap="square"/>
+                    <a:lstStyle/>
+                    <a:p>
+                      <a:pPr algn="l"/>
+                      <a:r>
+                        <a:rPr sz="1150" b="0">
+                          <a:solidFill>
+                            <a:srgbClr val="1B1B1F"/>
+                          </a:solidFill>
+                          <a:latin typeface="Calibri"/>
+                        </a:rPr>
+                        <a:t>0.15</a:t>
+                      </a:r>
+                    </a:p>
+                  </a:txBody>
+                  <a:tcPr marL="91440" marR="73152" marT="18288" marB="18288">
+                    <a:solidFill>
+                      <a:srgbClr val="F4F6FA"/>
+                    </a:solidFill>
+                  </a:tcPr>
+                </a:tc>
+                <a:tc>
+                  <a:txBody>
+                    <a:bodyPr wrap="square"/>
+                    <a:lstStyle/>
+                    <a:p>
+                      <a:pPr algn="r"/>
+                      <a:r>
+                        <a:rPr sz="1150" b="0">
+                          <a:solidFill>
+                            <a:srgbClr val="1B1B1F"/>
+                          </a:solidFill>
+                          <a:latin typeface="Calibri"/>
+                        </a:rPr>
+                        <a:t>0.8465</a:t>
+                      </a:r>
+                    </a:p>
+                  </a:txBody>
+                  <a:tcPr marL="91440" marR="73152" marT="18288" marB="18288">
+                    <a:solidFill>
+                      <a:srgbClr val="F4F6FA"/>
+                    </a:solidFill>
+                  </a:tcPr>
+                </a:tc>
+                <a:tc>
+                  <a:txBody>
+                    <a:bodyPr wrap="square"/>
+                    <a:lstStyle/>
+                    <a:p>
+                      <a:pPr algn="r"/>
+                      <a:r>
+                        <a:rPr sz="1150" b="0">
+                          <a:solidFill>
+                            <a:srgbClr val="1B1B1F"/>
+                          </a:solidFill>
+                          <a:latin typeface="Calibri"/>
+                        </a:rPr>
+                        <a:t>0.1897</a:t>
+                      </a:r>
+                    </a:p>
+                  </a:txBody>
+                  <a:tcPr marL="91440" marR="73152" marT="18288" marB="18288">
+                    <a:solidFill>
+                      <a:srgbClr val="F4F6FA"/>
+                    </a:solidFill>
+                  </a:tcPr>
+                </a:tc>
+                <a:tc>
+                  <a:txBody>
+                    <a:bodyPr wrap="square"/>
+                    <a:lstStyle/>
+                    <a:p>
+                      <a:pPr algn="r"/>
+                      <a:r>
+                        <a:rPr sz="1150" b="0">
+                          <a:solidFill>
+                            <a:srgbClr val="1B1B1F"/>
+                          </a:solidFill>
+                          <a:latin typeface="Calibri"/>
+                        </a:rPr>
+                        <a:t>not binding</a:t>
+                      </a:r>
+                    </a:p>
+                  </a:txBody>
+                  <a:tcPr marL="91440" marR="73152" marT="18288" marB="18288">
+                    <a:solidFill>
+                      <a:srgbClr val="F4F6FA"/>
+                    </a:solidFill>
+                  </a:tcPr>
+                </a:tc>
+                <a:tc>
+                  <a:txBody>
+                    <a:bodyPr wrap="square"/>
+                    <a:lstStyle/>
+                    <a:p>
+                      <a:pPr algn="r"/>
+                      <a:r>
+                        <a:rPr sz="1150" b="0">
+                          <a:solidFill>
+                            <a:srgbClr val="1B1B1F"/>
+                          </a:solidFill>
+                          <a:latin typeface="Calibri"/>
+                        </a:rPr>
+                        <a:t>—</a:t>
+                      </a:r>
+                    </a:p>
+                  </a:txBody>
+                  <a:tcPr marL="91440" marR="73152" marT="18288" marB="18288">
+                    <a:solidFill>
+                      <a:srgbClr val="F4F6FA"/>
+                    </a:solidFill>
+                  </a:tcPr>
+                </a:tc>
+                <a:tc>
+                  <a:txBody>
+                    <a:bodyPr wrap="square"/>
+                    <a:lstStyle/>
+                    <a:p>
+                      <a:pPr algn="r"/>
+                      <a:r>
+                        <a:rPr sz="1150" b="0">
+                          <a:solidFill>
+                            <a:srgbClr val="1B1B1F"/>
+                          </a:solidFill>
+                          <a:latin typeface="Calibri"/>
+                        </a:rPr>
+                        <a:t>+0.0%</a:t>
+                      </a:r>
+                    </a:p>
+                  </a:txBody>
+                  <a:tcPr marL="91440" marR="73152" marT="18288" marB="18288">
+                    <a:solidFill>
+                      <a:srgbClr val="F4F6FA"/>
+                    </a:solidFill>
+                  </a:tcPr>
+                </a:tc>
+              </a:tr>
+              <a:tr h="301752">
+                <a:tc>
+                  <a:txBody>
+                    <a:bodyPr wrap="square"/>
+                    <a:lstStyle/>
+                    <a:p>
+                      <a:pPr algn="l"/>
+                      <a:r>
+                        <a:rPr sz="1150" b="0">
+                          <a:solidFill>
+                            <a:srgbClr val="1B1B1F"/>
+                          </a:solidFill>
+                          <a:latin typeface="Calibri"/>
+                        </a:rPr>
+                        <a:t>0.2</a:t>
+                      </a:r>
+                    </a:p>
+                  </a:txBody>
+                  <a:tcPr marL="91440" marR="73152" marT="18288" marB="18288">
+                    <a:solidFill>
+                      <a:srgbClr val="FFFFFF"/>
+                    </a:solidFill>
+                  </a:tcPr>
+                </a:tc>
+                <a:tc>
+                  <a:txBody>
+                    <a:bodyPr wrap="square"/>
+                    <a:lstStyle/>
+                    <a:p>
+                      <a:pPr algn="r"/>
+                      <a:r>
+                        <a:rPr sz="1150" b="0">
+                          <a:solidFill>
+                            <a:srgbClr val="1B1B1F"/>
+                          </a:solidFill>
+                          <a:latin typeface="Calibri"/>
+                        </a:rPr>
+                        <a:t>0.8465</a:t>
+                      </a:r>
+                    </a:p>
+                  </a:txBody>
+                  <a:tcPr marL="91440" marR="73152" marT="18288" marB="18288">
+                    <a:solidFill>
+                      <a:srgbClr val="FFFFFF"/>
+                    </a:solidFill>
+                  </a:tcPr>
+                </a:tc>
+                <a:tc>
+                  <a:txBody>
+                    <a:bodyPr wrap="square"/>
+                    <a:lstStyle/>
+                    <a:p>
+                      <a:pPr algn="r"/>
+                      <a:r>
+                        <a:rPr sz="1150" b="0">
+                          <a:solidFill>
+                            <a:srgbClr val="1B1B1F"/>
+                          </a:solidFill>
+                          <a:latin typeface="Calibri"/>
+                        </a:rPr>
+                        <a:t>0.1897</a:t>
+                      </a:r>
+                    </a:p>
+                  </a:txBody>
+                  <a:tcPr marL="91440" marR="73152" marT="18288" marB="18288">
+                    <a:solidFill>
+                      <a:srgbClr val="FFFFFF"/>
+                    </a:solidFill>
+                  </a:tcPr>
+                </a:tc>
+                <a:tc>
+                  <a:txBody>
+                    <a:bodyPr wrap="square"/>
+                    <a:lstStyle/>
+                    <a:p>
+                      <a:pPr algn="r"/>
+                      <a:r>
+                        <a:rPr sz="1150" b="0">
+                          <a:solidFill>
+                            <a:srgbClr val="1B1B1F"/>
+                          </a:solidFill>
+                          <a:latin typeface="Calibri"/>
+                        </a:rPr>
+                        <a:t>not binding</a:t>
+                      </a:r>
+                    </a:p>
+                  </a:txBody>
+                  <a:tcPr marL="91440" marR="73152" marT="18288" marB="18288">
+                    <a:solidFill>
+                      <a:srgbClr val="FFFFFF"/>
+                    </a:solidFill>
+                  </a:tcPr>
+                </a:tc>
+                <a:tc>
+                  <a:txBody>
+                    <a:bodyPr wrap="square"/>
+                    <a:lstStyle/>
+                    <a:p>
+                      <a:pPr algn="r"/>
+                      <a:r>
+                        <a:rPr sz="1150" b="0">
+                          <a:solidFill>
+                            <a:srgbClr val="1B1B1F"/>
+                          </a:solidFill>
+                          <a:latin typeface="Calibri"/>
+                        </a:rPr>
+                        <a:t>—</a:t>
+                      </a:r>
+                    </a:p>
+                  </a:txBody>
+                  <a:tcPr marL="91440" marR="73152" marT="18288" marB="18288">
+                    <a:solidFill>
+                      <a:srgbClr val="FFFFFF"/>
+                    </a:solidFill>
+                  </a:tcPr>
+                </a:tc>
+                <a:tc>
+                  <a:txBody>
+                    <a:bodyPr wrap="square"/>
+                    <a:lstStyle/>
+                    <a:p>
+                      <a:pPr algn="r"/>
+                      <a:r>
+                        <a:rPr sz="1150" b="0">
+                          <a:solidFill>
+                            <a:srgbClr val="1B1B1F"/>
+                          </a:solidFill>
+                          <a:latin typeface="Calibri"/>
+                        </a:rPr>
+                        <a:t>+0.0%</a:t>
+                      </a:r>
+                    </a:p>
+                  </a:txBody>
+                  <a:tcPr marL="91440" marR="73152" marT="18288" marB="18288">
+                    <a:solidFill>
+                      <a:srgbClr val="FFFFFF"/>
+                    </a:solidFill>
+                  </a:tcPr>
+                </a:tc>
+              </a:tr>
+            </a:tbl>
+          </a:graphicData>
+        </a:graphic>
+      </p:graphicFrame>
+      <p:sp>
+        <p:nvSpPr>
+          <p:cNvPr id="5" name="TextBox 4"/>
+          <p:cNvSpPr txBox="1"/>
+          <p:nvPr/>
+        </p:nvSpPr>
+        <p:spPr>
+          <a:xfrm>
+            <a:off x="640080" y="4343400"/>
+            <a:ext cx="10881360" cy="329184"/>
+          </a:xfrm>
+          <a:prstGeom prst="rect">
+            <a:avLst/>
+          </a:prstGeom>
+          <a:noFill/>
+        </p:spPr>
+        <p:txBody>
+          <a:bodyPr wrap="square">
+            <a:spAutoFit/>
+          </a:bodyPr>
+          <a:lstStyle/>
           <a:p>
             <a:pPr algn="l">
               <a:lnSpc>
-                <a:spcPct val="108000"/>
+                <a:spcPct val="100000"/>
               </a:lnSpc>
             </a:pPr>
             <a:r>
-              <a:rPr sz="1250" b="0">
-                <a:solidFill>
-                  <a:srgbClr val="1B1B1F"/>
-                </a:solidFill>
-                <a:latin typeface="Calibri"/>
-              </a:rPr>
-              <a:t>• 88% violation reduction for 1.5 accuracy points</a:t>
-            </a:r>
-          </a:p>
+              <a:rPr sz="1500" b="1">
+                <a:solidFill>
+                  <a:srgbClr val="1E2761"/>
+                </a:solidFill>
+                <a:latin typeface="Cambria"/>
+              </a:rPr>
+              <a:t>The share does not move. Only the amount of work does.</a:t>
+            </a:r>
+          </a:p>
+        </p:txBody>
+      </p:sp>
+      <p:sp>
+        <p:nvSpPr>
+          <p:cNvPr id="6" name="TextBox 5"/>
+          <p:cNvSpPr txBox="1"/>
+          <p:nvPr/>
+        </p:nvSpPr>
+        <p:spPr>
+          <a:xfrm>
+            <a:off x="640080" y="4718304"/>
+            <a:ext cx="10881360" cy="868680"/>
+          </a:xfrm>
+          <a:prstGeom prst="rect">
+            <a:avLst/>
+          </a:prstGeom>
+          <a:noFill/>
+        </p:spPr>
+        <p:txBody>
+          <a:bodyPr wrap="square">
+            <a:spAutoFit/>
+          </a:bodyPr>
+          <a:lstStyle/>
           <a:p>
             <a:pPr algn="l">
               <a:lnSpc>
-                <a:spcPct val="108000"/>
+                <a:spcPct val="100000"/>
               </a:lnSpc>
             </a:pPr>
             <a:r>
-              <a:rPr sz="1250" b="0">
+              <a:rPr sz="1350" b="0">
                 <a:solidFill>
                   <a:srgbClr val="1B1B1F"/>
                 </a:solidFill>
                 <a:latin typeface="Calibri"/>
               </a:rPr>
-              <a:t>• Works as a black box on a tree and on logistic regression</a:t>
-            </a:r>
-          </a:p>
-          <a:p>
-            <a:pPr algn="l">
-              <a:lnSpc>
-                <a:spcPct val="108000"/>
-              </a:lnSpc>
-            </a:pPr>
-            <a:r>
-              <a:rPr sz="1250" b="0">
-                <a:solidFill>
-                  <a:srgbClr val="1B1B1F"/>
-                </a:solidFill>
-                <a:latin typeface="Calibri"/>
-              </a:rPr>
-              <a:t>• Training data never modified</a:t>
-            </a:r>
-          </a:p>
-          <a:p>
-            <a:pPr algn="l">
-              <a:lnSpc>
-                <a:spcPct val="108000"/>
-              </a:lnSpc>
-            </a:pPr>
-            <a:r>
-              <a:rPr sz="1250" b="0">
-                <a:solidFill>
-                  <a:srgbClr val="1B1B1F"/>
-                </a:solidFill>
-                <a:latin typeface="Calibri"/>
-              </a:rPr>
-              <a:t>• GridSearch traces a usable frontier</a:t>
-            </a:r>
-          </a:p>
-          <a:p>
-            <a:pPr algn="l">
-              <a:lnSpc>
-                <a:spcPct val="108000"/>
-              </a:lnSpc>
-            </a:pPr>
-            <a:r>
-              <a:rPr sz="1250" b="0">
-                <a:solidFill>
-                  <a:srgbClr val="1B1B1F"/>
-                </a:solidFill>
-                <a:latin typeface="Calibri"/>
-              </a:rPr>
-              <a:t/>
-            </a:r>
-          </a:p>
-          <a:p>
-            <a:pPr algn="l">
-              <a:lnSpc>
-                <a:spcPct val="108000"/>
-              </a:lnSpc>
-            </a:pPr>
-            <a:r>
-              <a:rPr sz="1250" b="0">
-                <a:solidFill>
-                  <a:srgbClr val="1B1B1F"/>
-                </a:solidFill>
-                <a:latin typeface="Calibri"/>
-              </a:rPr>
-              <a:t>The method works.</a:t>
+              <a:t>Across the whole binding range the advantaged group pays 0.74–0.78 of the closure in people, and closing a fixed amount of gap costs a near-constant number of approvals (≈120–146 per unit) at every ε. The two non-binding rows return the baseline exactly, which is the check that ε now does what it claims.</a:t>
             </a:r>
           </a:p>
         </p:txBody>
@@ -12223,8 +14346,8 @@
         </p:nvSpPr>
         <p:spPr>
           <a:xfrm>
-            <a:off x="4370832" y="1645920"/>
-            <a:ext cx="3429000" cy="3703320"/>
+            <a:off x="640080" y="5669280"/>
+            <a:ext cx="10881360" cy="868680"/>
           </a:xfrm>
           <a:prstGeom prst="roundRect">
             <a:avLst>
@@ -12232,11 +14355,11 @@
             </a:avLst>
           </a:prstGeom>
           <a:solidFill>
-            <a:srgbClr val="F4F6FA"/>
+            <a:srgbClr val="FDF3E2"/>
           </a:solidFill>
           <a:ln w="9525">
             <a:solidFill>
-              <a:srgbClr val="D8DDE8"/>
+              <a:srgbClr val="E8A33D"/>
             </a:solidFill>
           </a:ln>
           <a:effectLst/>
@@ -12269,8 +14392,8 @@
         </p:nvSpPr>
         <p:spPr>
           <a:xfrm>
-            <a:off x="4599432" y="1801368"/>
-            <a:ext cx="2971800" cy="384048"/>
+            <a:off x="914400" y="5797296"/>
+            <a:ext cx="10332720" cy="640080"/>
           </a:xfrm>
           <a:prstGeom prst="rect">
             <a:avLst/>
@@ -12289,27 +14412,45 @@
               </a:lnSpc>
             </a:pPr>
             <a:r>
-              <a:rPr sz="1700" b="1">
-                <a:solidFill>
-                  <a:srgbClr val="1E2761"/>
-                </a:solidFill>
-                <a:latin typeface="Cambria"/>
-              </a:rPr>
-              <a:t>Extended</a:t>
-            </a:r>
-          </a:p>
-        </p:txBody>
-      </p:sp>
-      <p:sp>
-        <p:nvSpPr>
-          <p:cNvPr id="9" name="TextBox 8"/>
+              <a:rPr sz="1350" b="1">
+                <a:solidFill>
+                  <a:srgbClr val="1B1B1F"/>
+                </a:solidFill>
+                <a:latin typeface="Calibri"/>
+              </a:rPr>
+              <a:t>At the loosest binding setting the split is the MOST lopsided per unit of work — 3.41 favourable decisions destroyed per one created. A gentle constraint is gentler in degree, and not even that per unit of gap closed.</a:t>
+            </a:r>
+          </a:p>
+        </p:txBody>
+      </p:sp>
+    </p:spTree>
+  </p:cSld>
+  <p:clrMapOvr>
+    <a:masterClrMapping/>
+  </p:clrMapOvr>
+</p:sld>
+</file>
+
+<file path=ppt/slides/slide22.xml><?xml version="1.0" encoding="utf-8"?>
+<p:sld xmlns:a="http://schemas.openxmlformats.org/drawingml/2006/main" xmlns:p="http://schemas.openxmlformats.org/presentationml/2006/main" xmlns:r="http://schemas.openxmlformats.org/officeDocument/2006/relationships">
+  <p:cSld>
+    <p:spTree>
+      <p:nvGrpSpPr>
+        <p:cNvPr id="1" name=""/>
+        <p:cNvGrpSpPr/>
+        <p:nvPr/>
+      </p:nvGrpSpPr>
+      <p:grpSpPr/>
+      <p:sp>
+        <p:nvSpPr>
+          <p:cNvPr id="2" name="TextBox 1"/>
           <p:cNvSpPr txBox="1"/>
           <p:nvPr/>
         </p:nvSpPr>
         <p:spPr>
           <a:xfrm>
-            <a:off x="4599432" y="2267712"/>
-            <a:ext cx="2971800" cy="2926080"/>
+            <a:off x="640080" y="384048"/>
+            <a:ext cx="10881360" cy="640080"/>
           </a:xfrm>
           <a:prstGeom prst="rect">
             <a:avLst/>
@@ -12324,143 +14465,70 @@
           <a:p>
             <a:pPr algn="l">
               <a:lnSpc>
-                <a:spcPct val="108000"/>
+                <a:spcPct val="100000"/>
               </a:lnSpc>
             </a:pPr>
             <a:r>
-              <a:rPr sz="1250" b="0">
-                <a:solidFill>
-                  <a:srgbClr val="1B1B1F"/>
-                </a:solidFill>
-                <a:latin typeface="Calibri"/>
-              </a:rPr>
-              <a:t>Four questions the paper's frame does not ask.</a:t>
-            </a:r>
-          </a:p>
+              <a:rPr sz="2600" b="1">
+                <a:solidFill>
+                  <a:srgbClr val="1E2761"/>
+                </a:solidFill>
+                <a:latin typeface="Cambria"/>
+              </a:rPr>
+              <a:t>Verdict — What We Confirmed, Extended, and Refuted</a:t>
+            </a:r>
+          </a:p>
+        </p:txBody>
+      </p:sp>
+      <p:sp>
+        <p:nvSpPr>
+          <p:cNvPr id="3" name="TextBox 2"/>
+          <p:cNvSpPr txBox="1"/>
+          <p:nvPr/>
+        </p:nvSpPr>
+        <p:spPr>
+          <a:xfrm>
+            <a:off x="640080" y="1033271"/>
+            <a:ext cx="10881360" cy="384048"/>
+          </a:xfrm>
+          <a:prstGeom prst="rect">
+            <a:avLst/>
+          </a:prstGeom>
+          <a:noFill/>
+        </p:spPr>
+        <p:txBody>
+          <a:bodyPr wrap="square">
+            <a:spAutoFit/>
+          </a:bodyPr>
+          <a:lstStyle/>
           <a:p>
             <a:pPr algn="l">
               <a:lnSpc>
-                <a:spcPct val="108000"/>
+                <a:spcPct val="100000"/>
               </a:lnSpc>
             </a:pPr>
             <a:r>
-              <a:rPr sz="1250" b="0">
-                <a:solidFill>
-                  <a:srgbClr val="1B1B1F"/>
+              <a:rPr sz="1350" b="0">
+                <a:solidFill>
+                  <a:srgbClr val="5A6270"/>
                 </a:solidFill>
                 <a:latin typeface="Calibri"/>
               </a:rPr>
-              <a:t/>
-            </a:r>
-          </a:p>
-          <a:p>
-            <a:pPr algn="l">
-              <a:lnSpc>
-                <a:spcPct val="108000"/>
-              </a:lnSpc>
-            </a:pPr>
-            <a:r>
-              <a:rPr sz="1250" b="0">
-                <a:solidFill>
-                  <a:srgbClr val="1B1B1F"/>
-                </a:solidFill>
-                <a:latin typeface="Calibri"/>
-              </a:rPr>
-              <a:t>• Who was moved to satisfy the constraint</a:t>
-            </a:r>
-          </a:p>
-          <a:p>
-            <a:pPr algn="l">
-              <a:lnSpc>
-                <a:spcPct val="108000"/>
-              </a:lnSpc>
-            </a:pPr>
-            <a:r>
-              <a:rPr sz="1250" b="0">
-                <a:solidFill>
-                  <a:srgbClr val="1B1B1F"/>
-                </a:solidFill>
-                <a:latin typeface="Calibri"/>
-              </a:rPr>
-              <a:t>• Whether the total number of approvals fell</a:t>
-            </a:r>
-          </a:p>
-          <a:p>
-            <a:pPr algn="l">
-              <a:lnSpc>
-                <a:spcPct val="108000"/>
-              </a:lnSpc>
-            </a:pPr>
-            <a:r>
-              <a:rPr sz="1250" b="0">
-                <a:solidFill>
-                  <a:srgbClr val="1B1B1F"/>
-                </a:solidFill>
-                <a:latin typeface="Calibri"/>
-              </a:rPr>
-              <a:t>• What randomization costs an individual</a:t>
-            </a:r>
-          </a:p>
-          <a:p>
-            <a:pPr algn="l">
-              <a:lnSpc>
-                <a:spcPct val="108000"/>
-              </a:lnSpc>
-            </a:pPr>
-            <a:r>
-              <a:rPr sz="1250" b="0">
-                <a:solidFill>
-                  <a:srgbClr val="1B1B1F"/>
-                </a:solidFill>
-                <a:latin typeface="Calibri"/>
-              </a:rPr>
-              <a:t>• What the constrained model leans on</a:t>
-            </a:r>
-          </a:p>
-          <a:p>
-            <a:pPr algn="l">
-              <a:lnSpc>
-                <a:spcPct val="108000"/>
-              </a:lnSpc>
-            </a:pPr>
-            <a:r>
-              <a:rPr sz="1250" b="0">
-                <a:solidFill>
-                  <a:srgbClr val="1B1B1F"/>
-                </a:solidFill>
-                <a:latin typeface="Calibri"/>
-              </a:rPr>
-              <a:t/>
-            </a:r>
-          </a:p>
-          <a:p>
-            <a:pPr algn="l">
-              <a:lnSpc>
-                <a:spcPct val="108000"/>
-              </a:lnSpc>
-            </a:pPr>
-            <a:r>
-              <a:rPr sz="1250" b="0">
-                <a:solidFill>
-                  <a:srgbClr val="1B1B1F"/>
-                </a:solidFill>
-                <a:latin typeface="Calibri"/>
-              </a:rPr>
-              <a:t>None of these contradict it.</a:t>
-            </a:r>
-          </a:p>
-        </p:txBody>
-      </p:sp>
-      <p:sp>
-        <p:nvSpPr>
-          <p:cNvPr id="10" name="Rounded Rectangle 9"/>
+              <a:t>The distinction matters. It is easy to present an extension as a refutation.</a:t>
+            </a:r>
+          </a:p>
+        </p:txBody>
+      </p:sp>
+      <p:sp>
+        <p:nvSpPr>
+          <p:cNvPr id="4" name="Rounded Rectangle 3"/>
           <p:cNvSpPr/>
           <p:nvPr/>
         </p:nvSpPr>
         <p:spPr>
           <a:xfrm>
-            <a:off x="8101583" y="1645920"/>
-            <a:ext cx="3419856" cy="3703320"/>
+            <a:off x="640080" y="1645920"/>
+            <a:ext cx="3429000" cy="3703320"/>
           </a:xfrm>
           <a:prstGeom prst="roundRect">
             <a:avLst>
@@ -12468,11 +14536,11 @@
             </a:avLst>
           </a:prstGeom>
           <a:solidFill>
-            <a:srgbClr val="FDF3E2"/>
+            <a:srgbClr val="F4F6FA"/>
           </a:solidFill>
           <a:ln w="9525">
             <a:solidFill>
-              <a:srgbClr val="E8A33D"/>
+              <a:srgbClr val="D8DDE8"/>
             </a:solidFill>
           </a:ln>
           <a:effectLst/>
@@ -12499,14 +14567,14 @@
       </p:sp>
       <p:sp>
         <p:nvSpPr>
-          <p:cNvPr id="11" name="TextBox 10"/>
+          <p:cNvPr id="5" name="TextBox 4"/>
           <p:cNvSpPr txBox="1"/>
           <p:nvPr/>
         </p:nvSpPr>
         <p:spPr>
           <a:xfrm>
-            <a:off x="8330183" y="1801368"/>
-            <a:ext cx="2962656" cy="384048"/>
+            <a:off x="868680" y="1801368"/>
+            <a:ext cx="2971800" cy="384048"/>
           </a:xfrm>
           <a:prstGeom prst="rect">
             <a:avLst/>
@@ -12527,25 +14595,25 @@
             <a:r>
               <a:rPr sz="1700" b="1">
                 <a:solidFill>
-                  <a:srgbClr val="EB6834"/>
+                  <a:srgbClr val="1BAF7A"/>
                 </a:solidFill>
                 <a:latin typeface="Cambria"/>
               </a:rPr>
-              <a:t>Refuted</a:t>
-            </a:r>
-          </a:p>
-        </p:txBody>
-      </p:sp>
-      <p:sp>
-        <p:nvSpPr>
-          <p:cNvPr id="12" name="TextBox 11"/>
+              <a:t>Confirmed</a:t>
+            </a:r>
+          </a:p>
+        </p:txBody>
+      </p:sp>
+      <p:sp>
+        <p:nvSpPr>
+          <p:cNvPr id="6" name="TextBox 5"/>
           <p:cNvSpPr txBox="1"/>
           <p:nvPr/>
         </p:nvSpPr>
         <p:spPr>
           <a:xfrm>
-            <a:off x="8330183" y="2267712"/>
-            <a:ext cx="2962656" cy="2926080"/>
+            <a:off x="868680" y="2267712"/>
+            <a:ext cx="2971800" cy="2926080"/>
           </a:xfrm>
           <a:prstGeom prst="rect">
             <a:avLst/>
@@ -12570,7 +14638,7 @@
                 </a:solidFill>
                 <a:latin typeface="Calibri"/>
               </a:rPr>
-              <a:t>Nothing in the base paper.</a:t>
+              <a:t>Everything the base paper claims.</a:t>
             </a:r>
           </a:p>
           <a:p>
@@ -12602,7 +14670,7 @@
                 </a:solidFill>
                 <a:latin typeface="Calibri"/>
               </a:rPr>
-              <a:t>Two predictions from our own plan deck:</a:t>
+              <a:t>• 88% violation reduction for 1.5 accuracy points</a:t>
             </a:r>
           </a:p>
           <a:p>
@@ -12618,7 +14686,7 @@
                 </a:solidFill>
                 <a:latin typeface="Calibri"/>
               </a:rPr>
-              <a:t/>
+              <a:t>• Works as a black box on a tree and on logistic regression</a:t>
             </a:r>
           </a:p>
           <a:p>
@@ -12634,7 +14702,7 @@
                 </a:solidFill>
                 <a:latin typeface="Calibri"/>
               </a:rPr>
-              <a:t>• 'Adversarial training is higher-variance' — inverted</a:t>
+              <a:t>• Training data never modified</a:t>
             </a:r>
           </a:p>
           <a:p>
@@ -12650,7 +14718,7 @@
                 </a:solidFill>
                 <a:latin typeface="Calibri"/>
               </a:rPr>
-              <a:t>• 'SHAP will show proxy reliance shrinking' — it grew</a:t>
+              <a:t>• GridSearch traces a usable frontier</a:t>
             </a:r>
           </a:p>
           <a:p>
@@ -12682,7 +14750,511 @@
                 </a:solidFill>
                 <a:latin typeface="Calibri"/>
               </a:rPr>
-              <a:t>We published our own wrong guesses.</a:t>
+              <a:t>The method works.</a:t>
+            </a:r>
+          </a:p>
+        </p:txBody>
+      </p:sp>
+      <p:sp>
+        <p:nvSpPr>
+          <p:cNvPr id="7" name="Rounded Rectangle 6"/>
+          <p:cNvSpPr/>
+          <p:nvPr/>
+        </p:nvSpPr>
+        <p:spPr>
+          <a:xfrm>
+            <a:off x="4370832" y="1645920"/>
+            <a:ext cx="3429000" cy="3703320"/>
+          </a:xfrm>
+          <a:prstGeom prst="roundRect">
+            <a:avLst>
+              <a:gd name="adj" fmla="val 4000"/>
+            </a:avLst>
+          </a:prstGeom>
+          <a:solidFill>
+            <a:srgbClr val="F4F6FA"/>
+          </a:solidFill>
+          <a:ln w="9525">
+            <a:solidFill>
+              <a:srgbClr val="D8DDE8"/>
+            </a:solidFill>
+          </a:ln>
+          <a:effectLst/>
+        </p:spPr>
+        <p:style>
+          <a:lnRef idx="1">
+            <a:schemeClr val="accent1"/>
+          </a:lnRef>
+          <a:fillRef idx="3">
+            <a:schemeClr val="accent1"/>
+          </a:fillRef>
+          <a:effectRef idx="2">
+            <a:schemeClr val="accent1"/>
+          </a:effectRef>
+          <a:fontRef idx="minor">
+            <a:schemeClr val="lt1"/>
+          </a:fontRef>
+        </p:style>
+        <p:txBody>
+          <a:bodyPr rtlCol="0" anchor="ctr"/>
+          <a:lstStyle/>
+          <a:p/>
+        </p:txBody>
+      </p:sp>
+      <p:sp>
+        <p:nvSpPr>
+          <p:cNvPr id="8" name="TextBox 7"/>
+          <p:cNvSpPr txBox="1"/>
+          <p:nvPr/>
+        </p:nvSpPr>
+        <p:spPr>
+          <a:xfrm>
+            <a:off x="4599432" y="1801368"/>
+            <a:ext cx="2971800" cy="384048"/>
+          </a:xfrm>
+          <a:prstGeom prst="rect">
+            <a:avLst/>
+          </a:prstGeom>
+          <a:noFill/>
+        </p:spPr>
+        <p:txBody>
+          <a:bodyPr wrap="square">
+            <a:spAutoFit/>
+          </a:bodyPr>
+          <a:lstStyle/>
+          <a:p>
+            <a:pPr algn="l">
+              <a:lnSpc>
+                <a:spcPct val="100000"/>
+              </a:lnSpc>
+            </a:pPr>
+            <a:r>
+              <a:rPr sz="1700" b="1">
+                <a:solidFill>
+                  <a:srgbClr val="1E2761"/>
+                </a:solidFill>
+                <a:latin typeface="Cambria"/>
+              </a:rPr>
+              <a:t>Extended</a:t>
+            </a:r>
+          </a:p>
+        </p:txBody>
+      </p:sp>
+      <p:sp>
+        <p:nvSpPr>
+          <p:cNvPr id="9" name="TextBox 8"/>
+          <p:cNvSpPr txBox="1"/>
+          <p:nvPr/>
+        </p:nvSpPr>
+        <p:spPr>
+          <a:xfrm>
+            <a:off x="4599432" y="2267712"/>
+            <a:ext cx="2971800" cy="2926080"/>
+          </a:xfrm>
+          <a:prstGeom prst="rect">
+            <a:avLst/>
+          </a:prstGeom>
+          <a:noFill/>
+        </p:spPr>
+        <p:txBody>
+          <a:bodyPr wrap="square">
+            <a:spAutoFit/>
+          </a:bodyPr>
+          <a:lstStyle/>
+          <a:p>
+            <a:pPr algn="l">
+              <a:lnSpc>
+                <a:spcPct val="105000"/>
+              </a:lnSpc>
+            </a:pPr>
+            <a:r>
+              <a:rPr sz="1150" b="0">
+                <a:solidFill>
+                  <a:srgbClr val="1B1B1F"/>
+                </a:solidFill>
+                <a:latin typeface="Calibri"/>
+              </a:rPr>
+              <a:t>Six questions the paper's frame does not ask.</a:t>
+            </a:r>
+          </a:p>
+          <a:p>
+            <a:pPr algn="l">
+              <a:lnSpc>
+                <a:spcPct val="105000"/>
+              </a:lnSpc>
+            </a:pPr>
+            <a:r>
+              <a:rPr sz="1150" b="0">
+                <a:solidFill>
+                  <a:srgbClr val="1B1B1F"/>
+                </a:solidFill>
+                <a:latin typeface="Calibri"/>
+              </a:rPr>
+              <a:t/>
+            </a:r>
+          </a:p>
+          <a:p>
+            <a:pPr algn="l">
+              <a:lnSpc>
+                <a:spcPct val="105000"/>
+              </a:lnSpc>
+            </a:pPr>
+            <a:r>
+              <a:rPr sz="1150" b="0">
+                <a:solidFill>
+                  <a:srgbClr val="1B1B1F"/>
+                </a:solidFill>
+                <a:latin typeface="Calibri"/>
+              </a:rPr>
+              <a:t>• Who was moved to satisfy the constraint</a:t>
+            </a:r>
+          </a:p>
+          <a:p>
+            <a:pPr algn="l">
+              <a:lnSpc>
+                <a:spcPct val="105000"/>
+              </a:lnSpc>
+            </a:pPr>
+            <a:r>
+              <a:rPr sz="1150" b="0">
+                <a:solidFill>
+                  <a:srgbClr val="1B1B1F"/>
+                </a:solidFill>
+                <a:latin typeface="Calibri"/>
+              </a:rPr>
+              <a:t>• Whether the total number of approvals fell</a:t>
+            </a:r>
+          </a:p>
+          <a:p>
+            <a:pPr algn="l">
+              <a:lnSpc>
+                <a:spcPct val="105000"/>
+              </a:lnSpc>
+            </a:pPr>
+            <a:r>
+              <a:rPr sz="1150" b="0">
+                <a:solidFill>
+                  <a:srgbClr val="1B1B1F"/>
+                </a:solidFill>
+                <a:latin typeface="Calibri"/>
+              </a:rPr>
+              <a:t>• What randomization costs an individual</a:t>
+            </a:r>
+          </a:p>
+          <a:p>
+            <a:pPr algn="l">
+              <a:lnSpc>
+                <a:spcPct val="105000"/>
+              </a:lnSpc>
+            </a:pPr>
+            <a:r>
+              <a:rPr sz="1150" b="0">
+                <a:solidFill>
+                  <a:srgbClr val="1B1B1F"/>
+                </a:solidFill>
+                <a:latin typeface="Calibri"/>
+              </a:rPr>
+              <a:t>• What the constrained model leans on</a:t>
+            </a:r>
+          </a:p>
+          <a:p>
+            <a:pPr algn="l">
+              <a:lnSpc>
+                <a:spcPct val="105000"/>
+              </a:lnSpc>
+            </a:pPr>
+            <a:r>
+              <a:rPr sz="1150" b="0">
+                <a:solidFill>
+                  <a:srgbClr val="1B1B1F"/>
+                </a:solidFill>
+                <a:latin typeface="Calibri"/>
+              </a:rPr>
+              <a:t>• What happens one level below the constrained attribute</a:t>
+            </a:r>
+          </a:p>
+          <a:p>
+            <a:pPr algn="l">
+              <a:lnSpc>
+                <a:spcPct val="105000"/>
+              </a:lnSpc>
+            </a:pPr>
+            <a:r>
+              <a:rPr sz="1150" b="0">
+                <a:solidFill>
+                  <a:srgbClr val="1B1B1F"/>
+                </a:solidFill>
+                <a:latin typeface="Calibri"/>
+              </a:rPr>
+              <a:t>• Whether deleting the proxy, or loosening ε, is a way out (neither is)</a:t>
+            </a:r>
+          </a:p>
+          <a:p>
+            <a:pPr algn="l">
+              <a:lnSpc>
+                <a:spcPct val="105000"/>
+              </a:lnSpc>
+            </a:pPr>
+            <a:r>
+              <a:rPr sz="1150" b="0">
+                <a:solidFill>
+                  <a:srgbClr val="1B1B1F"/>
+                </a:solidFill>
+                <a:latin typeface="Calibri"/>
+              </a:rPr>
+              <a:t/>
+            </a:r>
+          </a:p>
+          <a:p>
+            <a:pPr algn="l">
+              <a:lnSpc>
+                <a:spcPct val="105000"/>
+              </a:lnSpc>
+            </a:pPr>
+            <a:r>
+              <a:rPr sz="1150" b="0">
+                <a:solidFill>
+                  <a:srgbClr val="1B1B1F"/>
+                </a:solidFill>
+                <a:latin typeface="Calibri"/>
+              </a:rPr>
+              <a:t>None of these contradict it.</a:t>
+            </a:r>
+          </a:p>
+        </p:txBody>
+      </p:sp>
+      <p:sp>
+        <p:nvSpPr>
+          <p:cNvPr id="10" name="Rounded Rectangle 9"/>
+          <p:cNvSpPr/>
+          <p:nvPr/>
+        </p:nvSpPr>
+        <p:spPr>
+          <a:xfrm>
+            <a:off x="8101583" y="1645920"/>
+            <a:ext cx="3419856" cy="3703320"/>
+          </a:xfrm>
+          <a:prstGeom prst="roundRect">
+            <a:avLst>
+              <a:gd name="adj" fmla="val 4000"/>
+            </a:avLst>
+          </a:prstGeom>
+          <a:solidFill>
+            <a:srgbClr val="FDF3E2"/>
+          </a:solidFill>
+          <a:ln w="9525">
+            <a:solidFill>
+              <a:srgbClr val="E8A33D"/>
+            </a:solidFill>
+          </a:ln>
+          <a:effectLst/>
+        </p:spPr>
+        <p:style>
+          <a:lnRef idx="1">
+            <a:schemeClr val="accent1"/>
+          </a:lnRef>
+          <a:fillRef idx="3">
+            <a:schemeClr val="accent1"/>
+          </a:fillRef>
+          <a:effectRef idx="2">
+            <a:schemeClr val="accent1"/>
+          </a:effectRef>
+          <a:fontRef idx="minor">
+            <a:schemeClr val="lt1"/>
+          </a:fontRef>
+        </p:style>
+        <p:txBody>
+          <a:bodyPr rtlCol="0" anchor="ctr"/>
+          <a:lstStyle/>
+          <a:p/>
+        </p:txBody>
+      </p:sp>
+      <p:sp>
+        <p:nvSpPr>
+          <p:cNvPr id="11" name="TextBox 10"/>
+          <p:cNvSpPr txBox="1"/>
+          <p:nvPr/>
+        </p:nvSpPr>
+        <p:spPr>
+          <a:xfrm>
+            <a:off x="8330183" y="1801368"/>
+            <a:ext cx="2962656" cy="384048"/>
+          </a:xfrm>
+          <a:prstGeom prst="rect">
+            <a:avLst/>
+          </a:prstGeom>
+          <a:noFill/>
+        </p:spPr>
+        <p:txBody>
+          <a:bodyPr wrap="square">
+            <a:spAutoFit/>
+          </a:bodyPr>
+          <a:lstStyle/>
+          <a:p>
+            <a:pPr algn="l">
+              <a:lnSpc>
+                <a:spcPct val="100000"/>
+              </a:lnSpc>
+            </a:pPr>
+            <a:r>
+              <a:rPr sz="1700" b="1">
+                <a:solidFill>
+                  <a:srgbClr val="EB6834"/>
+                </a:solidFill>
+                <a:latin typeface="Cambria"/>
+              </a:rPr>
+              <a:t>Refuted</a:t>
+            </a:r>
+          </a:p>
+        </p:txBody>
+      </p:sp>
+      <p:sp>
+        <p:nvSpPr>
+          <p:cNvPr id="12" name="TextBox 11"/>
+          <p:cNvSpPr txBox="1"/>
+          <p:nvPr/>
+        </p:nvSpPr>
+        <p:spPr>
+          <a:xfrm>
+            <a:off x="8330183" y="2267712"/>
+            <a:ext cx="2962656" cy="2926080"/>
+          </a:xfrm>
+          <a:prstGeom prst="rect">
+            <a:avLst/>
+          </a:prstGeom>
+          <a:noFill/>
+        </p:spPr>
+        <p:txBody>
+          <a:bodyPr wrap="square">
+            <a:spAutoFit/>
+          </a:bodyPr>
+          <a:lstStyle/>
+          <a:p>
+            <a:pPr algn="l">
+              <a:lnSpc>
+                <a:spcPct val="108000"/>
+              </a:lnSpc>
+            </a:pPr>
+            <a:r>
+              <a:rPr sz="1250" b="0">
+                <a:solidFill>
+                  <a:srgbClr val="1B1B1F"/>
+                </a:solidFill>
+                <a:latin typeface="Calibri"/>
+              </a:rPr>
+              <a:t>Nothing in the base paper.</a:t>
+            </a:r>
+          </a:p>
+          <a:p>
+            <a:pPr algn="l">
+              <a:lnSpc>
+                <a:spcPct val="108000"/>
+              </a:lnSpc>
+            </a:pPr>
+            <a:r>
+              <a:rPr sz="1250" b="0">
+                <a:solidFill>
+                  <a:srgbClr val="1B1B1F"/>
+                </a:solidFill>
+                <a:latin typeface="Calibri"/>
+              </a:rPr>
+              <a:t/>
+            </a:r>
+          </a:p>
+          <a:p>
+            <a:pPr algn="l">
+              <a:lnSpc>
+                <a:spcPct val="108000"/>
+              </a:lnSpc>
+            </a:pPr>
+            <a:r>
+              <a:rPr sz="1250" b="0">
+                <a:solidFill>
+                  <a:srgbClr val="1B1B1F"/>
+                </a:solidFill>
+                <a:latin typeface="Calibri"/>
+              </a:rPr>
+              <a:t>Two predictions from our own plan deck:</a:t>
+            </a:r>
+          </a:p>
+          <a:p>
+            <a:pPr algn="l">
+              <a:lnSpc>
+                <a:spcPct val="108000"/>
+              </a:lnSpc>
+            </a:pPr>
+            <a:r>
+              <a:rPr sz="1250" b="0">
+                <a:solidFill>
+                  <a:srgbClr val="1B1B1F"/>
+                </a:solidFill>
+                <a:latin typeface="Calibri"/>
+              </a:rPr>
+              <a:t/>
+            </a:r>
+          </a:p>
+          <a:p>
+            <a:pPr algn="l">
+              <a:lnSpc>
+                <a:spcPct val="108000"/>
+              </a:lnSpc>
+            </a:pPr>
+            <a:r>
+              <a:rPr sz="1250" b="0">
+                <a:solidFill>
+                  <a:srgbClr val="1B1B1F"/>
+                </a:solidFill>
+                <a:latin typeface="Calibri"/>
+              </a:rPr>
+              <a:t>• 'Adversarial training is higher-variance' — inverted</a:t>
+            </a:r>
+          </a:p>
+          <a:p>
+            <a:pPr algn="l">
+              <a:lnSpc>
+                <a:spcPct val="108000"/>
+              </a:lnSpc>
+            </a:pPr>
+            <a:r>
+              <a:rPr sz="1250" b="0">
+                <a:solidFill>
+                  <a:srgbClr val="1B1B1F"/>
+                </a:solidFill>
+                <a:latin typeface="Calibri"/>
+              </a:rPr>
+              <a:t>• 'SHAP will show proxy reliance shrinking' — it grew</a:t>
+            </a:r>
+          </a:p>
+          <a:p>
+            <a:pPr algn="l">
+              <a:lnSpc>
+                <a:spcPct val="108000"/>
+              </a:lnSpc>
+            </a:pPr>
+            <a:r>
+              <a:rPr sz="1250" b="0">
+                <a:solidFill>
+                  <a:srgbClr val="1B1B1F"/>
+                </a:solidFill>
+                <a:latin typeface="Calibri"/>
+              </a:rPr>
+              <a:t/>
+            </a:r>
+          </a:p>
+          <a:p>
+            <a:pPr algn="l">
+              <a:lnSpc>
+                <a:spcPct val="108000"/>
+              </a:lnSpc>
+            </a:pPr>
+            <a:r>
+              <a:rPr sz="1250" b="0">
+                <a:solidFill>
+                  <a:srgbClr val="1B1B1F"/>
+                </a:solidFill>
+                <a:latin typeface="Calibri"/>
+              </a:rPr>
+              <a:t>Predictions from intuition: 0 for 2. From theory: 3 for 3.</a:t>
             </a:r>
           </a:p>
         </p:txBody>

--- a/bias_mitigation_plan.pptx
+++ b/bias_mitigation_plan.pptx
@@ -7766,7 +7766,7 @@
                           </a:solidFill>
                           <a:latin typeface="Calibri"/>
                         </a:rPr>
-                        <a:t>0.0645</a:t>
+                        <a:t>0.0646</a:t>
                       </a:r>
                     </a:p>
                   </a:txBody>

--- a/bias_mitigation_plan.pptx
+++ b/bias_mitigation_plan.pptx
@@ -9230,7 +9230,7 @@
         </p:nvGraphicFramePr>
         <p:xfrm>
           <a:off x="640080" y="1691640"/>
-          <a:ext cx="10881360" cy="2359152"/>
+          <a:ext cx="10881360" cy="2139696"/>
         </p:xfrm>
         <a:graphic>
           <a:graphicData uri="http://schemas.openxmlformats.org/drawingml/2006/table">
@@ -9338,7 +9338,7 @@
                   </a:tcPr>
                 </a:tc>
               </a:tr>
-              <a:tr h="329184">
+              <a:tr h="292608">
                 <a:tc>
                   <a:txBody>
                     <a:bodyPr wrap="square"/>
@@ -9432,7 +9432,7 @@
                   </a:tcPr>
                 </a:tc>
               </a:tr>
-              <a:tr h="329184">
+              <a:tr h="292608">
                 <a:tc>
                   <a:txBody>
                     <a:bodyPr wrap="square"/>
@@ -9526,7 +9526,7 @@
                   </a:tcPr>
                 </a:tc>
               </a:tr>
-              <a:tr h="329184">
+              <a:tr h="292608">
                 <a:tc>
                   <a:txBody>
                     <a:bodyPr wrap="square"/>
@@ -9620,7 +9620,7 @@
                   </a:tcPr>
                 </a:tc>
               </a:tr>
-              <a:tr h="329184">
+              <a:tr h="292608">
                 <a:tc>
                   <a:txBody>
                     <a:bodyPr wrap="square"/>
@@ -9714,7 +9714,7 @@
                   </a:tcPr>
                 </a:tc>
               </a:tr>
-              <a:tr h="329184">
+              <a:tr h="292608">
                 <a:tc>
                   <a:txBody>
                     <a:bodyPr wrap="square"/>
@@ -9808,7 +9808,7 @@
                   </a:tcPr>
                 </a:tc>
               </a:tr>
-              <a:tr h="329184">
+              <a:tr h="292608">
                 <a:tc>
                   <a:txBody>
                     <a:bodyPr wrap="square"/>

--- a/bias_mitigation_plan.pptx
+++ b/bias_mitigation_plan.pptx
@@ -11976,7 +11976,7 @@
                 </a:solidFill>
                 <a:latin typeface="Calibri"/>
               </a:rPr>
-              <a:t>The obvious response to the previous slide, tested. Each round removes one more feature and re-measures.</a:t>
+              <a:t>A NEGATIVE CONTROL, deliberately outside the in-processing scope: we break the rule once to show what leaving it costs.</a:t>
             </a:r>
           </a:p>
         </p:txBody>

--- a/bias_mitigation_plan.pptx
+++ b/bias_mitigation_plan.pptx
@@ -5,7 +5,7 @@
     <p:sldMasterId id="2147483648" r:id="rId1"/>
   </p:sldMasterIdLst>
   <p:notesMasterIdLst>
-    <p:notesMasterId r:id="rId14"/>
+    <p:notesMasterId r:id="rId24"/>
   </p:notesMasterIdLst>
   <p:sldIdLst>
     <p:sldId id="256" r:id="rId2"/>
@@ -20,16 +20,16 @@
     <p:sldId id="265" r:id="rId11"/>
     <p:sldId id="266" r:id="rId12"/>
     <p:sldId id="267" r:id="rId13"/>
-    <p:sldId id="268" r:id="rId19"/>
-    <p:sldId id="269" r:id="rId20"/>
-    <p:sldId id="270" r:id="rId21"/>
-    <p:sldId id="271" r:id="rId22"/>
-    <p:sldId id="272" r:id="rId23"/>
-    <p:sldId id="273" r:id="rId24"/>
-    <p:sldId id="274" r:id="rId25"/>
-    <p:sldId id="275" r:id="rId26"/>
-    <p:sldId id="276" r:id="rId27"/>
-    <p:sldId id="277" r:id="rId28"/>
+    <p:sldId id="268" r:id="rId14"/>
+    <p:sldId id="269" r:id="rId15"/>
+    <p:sldId id="270" r:id="rId16"/>
+    <p:sldId id="271" r:id="rId17"/>
+    <p:sldId id="272" r:id="rId18"/>
+    <p:sldId id="273" r:id="rId19"/>
+    <p:sldId id="274" r:id="rId20"/>
+    <p:sldId id="275" r:id="rId21"/>
+    <p:sldId id="276" r:id="rId22"/>
+    <p:sldId id="277" r:id="rId23"/>
   </p:sldIdLst>
   <p:sldSz cx="12192000" cy="6858000"/>
   <p:notesSz cx="6858000" cy="12192000"/>
@@ -229,7 +229,7 @@
                   <c:v>0.3125</c:v>
                 </c:pt>
                 <c:pt idx="1">
-                  <c:v>0.1136</c:v>
+                  <c:v>0.11360000000000001</c:v>
                 </c:pt>
               </c:numCache>
             </c:numRef>
@@ -319,10 +319,10 @@
                 <c:formatCode>General</c:formatCode>
                 <c:ptCount val="2"/>
                 <c:pt idx="0">
-                  <c:v>0.2668</c:v>
+                  <c:v>0.26679999999999998</c:v>
                 </c:pt>
                 <c:pt idx="1">
-                  <c:v>0.0801</c:v>
+                  <c:v>8.0100000000000005E-2</c:v>
                 </c:pt>
               </c:numCache>
             </c:numRef>
@@ -446,285 +446,9 @@
       </c:spPr>
     </c:plotArea>
     <c:legend>
+      <c:legendPos val="r"/>
       <c:overlay val="0"/>
     </c:legend>
-    <c:plotVisOnly val="1"/>
-    <c:dispBlanksAs val="span"/>
-    <c:showDLblsOverMax val="1"/>
-  </c:chart>
-  <c:spPr>
-    <a:noFill/>
-    <a:ln>
-      <a:noFill/>
-    </a:ln>
-    <a:effectLst/>
-  </c:spPr>
-  <c:externalData r:id="rId1">
-    <c:autoUpdate val="0"/>
-  </c:externalData>
-</c:chartSpace>
-</file>
-
-<file path=ppt/charts/chart2.xml><?xml version="1.0" encoding="utf-8"?>
-<c:chartSpace xmlns:c="http://schemas.openxmlformats.org/drawingml/2006/chart" xmlns:a="http://schemas.openxmlformats.org/drawingml/2006/main" xmlns:r="http://schemas.openxmlformats.org/officeDocument/2006/relationships" xmlns:c16r2="http://schemas.microsoft.com/office/drawing/2015/06/chart">
-  <c:date1904 val="0"/>
-  <c:lang val="en-US"/>
-  <c:roundedCorners val="1"/>
-  <c:style val="2"/>
-  <c:chart>
-    <c:autoTitleDeleted val="1"/>
-    <c:plotArea>
-      <c:layout/>
-      <c:lineChart>
-        <c:grouping val="standard"/>
-        <c:varyColors val="0"/>
-        <c:ser>
-          <c:idx val="0"/>
-          <c:order val="0"/>
-          <c:tx>
-            <c:strRef>
-              <c:f>Sheet1!$B$1</c:f>
-              <c:strCache>
-                <c:ptCount val="1"/>
-                <c:pt idx="0">
-                  <c:v>Achievable frontier</c:v>
-                </c:pt>
-              </c:strCache>
-            </c:strRef>
-          </c:tx>
-          <c:spPr>
-            <a:ln w="38100" cap="flat">
-              <a:solidFill>
-                <a:srgbClr val="E8A33D"/>
-              </a:solidFill>
-              <a:prstDash val="solid"/>
-              <a:round/>
-            </a:ln>
-            <a:effectLst/>
-          </c:spPr>
-          <c:marker>
-            <c:symbol val="circle"/>
-            <c:size val="7"/>
-            <c:spPr>
-              <a:solidFill>
-                <a:srgbClr val="E8A33D"/>
-              </a:solidFill>
-              <a:ln w="9525" cap="flat">
-                <a:solidFill>
-                  <a:srgbClr val="E8A33D"/>
-                </a:solidFill>
-                <a:prstDash val="solid"/>
-                <a:round/>
-              </a:ln>
-              <a:effectLst/>
-            </c:spPr>
-          </c:marker>
-          <c:dLbls>
-            <c:numFmt formatCode="0%" sourceLinked="0"/>
-            <c:spPr>
-              <a:noFill/>
-              <a:ln>
-                <a:noFill/>
-              </a:ln>
-              <a:effectLst/>
-            </c:spPr>
-            <c:txPr>
-              <a:bodyPr/>
-              <a:lstStyle/>
-              <a:p>
-                <a:pPr>
-                  <a:defRPr sz="1000" b="0" i="0" u="none" strike="noStrike">
-                    <a:solidFill>
-                      <a:srgbClr val="1E2761"/>
-                    </a:solidFill>
-                    <a:latin typeface="Arial"/>
-                  </a:defRPr>
-                </a:pPr>
-                <a:endParaRPr lang="en-US"/>
-              </a:p>
-            </c:txPr>
-            <c:dLblPos val="t"/>
-            <c:showLegendKey val="0"/>
-            <c:showVal val="1"/>
-            <c:showCatName val="0"/>
-            <c:showSerName val="0"/>
-            <c:showPercent val="0"/>
-            <c:showBubbleSize val="0"/>
-            <c:showLeaderLines val="0"/>
-            <c:extLst>
-              <c:ext xmlns:c15="http://schemas.microsoft.com/office/drawing/2012/chart" uri="{CE6537A1-D6FC-4f65-9D91-7224C49458BB}">
-                <c15:showLeaderLines val="0"/>
-              </c:ext>
-            </c:extLst>
-          </c:dLbls>
-          <c:cat>
-            <c:strRef>
-              <c:f>Sheet1!$A$2:$A$6</c:f>
-              <c:strCache>
-                <c:ptCount val="5"/>
-                <c:pt idx="0">
-                  <c:v>ε=0.02</c:v>
-                </c:pt>
-                <c:pt idx="1">
-                  <c:v>ε=0.05</c:v>
-                </c:pt>
-                <c:pt idx="2">
-                  <c:v>ε=0.10</c:v>
-                </c:pt>
-                <c:pt idx="3">
-                  <c:v>ε=0.20</c:v>
-                </c:pt>
-                <c:pt idx="4">
-                  <c:v>Unconstrained</c:v>
-                </c:pt>
-              </c:strCache>
-            </c:strRef>
-          </c:cat>
-          <c:val>
-            <c:numRef>
-              <c:f>Sheet1!$B$2:$B$6</c:f>
-              <c:numCache>
-                <c:formatCode>General</c:formatCode>
-                <c:ptCount val="5"/>
-                <c:pt idx="0">
-                  <c:v>0.79</c:v>
-                </c:pt>
-                <c:pt idx="1">
-                  <c:v>0.81499999999999995</c:v>
-                </c:pt>
-                <c:pt idx="2">
-                  <c:v>0.83499999999999996</c:v>
-                </c:pt>
-                <c:pt idx="3">
-                  <c:v>0.84699999999999998</c:v>
-                </c:pt>
-                <c:pt idx="4">
-                  <c:v>0.85499999999999998</c:v>
-                </c:pt>
-              </c:numCache>
-            </c:numRef>
-          </c:val>
-          <c:smooth val="0"/>
-          <c:extLst>
-            <c:ext xmlns:c16="http://schemas.microsoft.com/office/drawing/2014/chart" uri="{C3380CC4-5D6E-409C-BE32-E72D297353CC}">
-              <c16:uniqueId val="{00000000-BE20-4B7E-ACDD-B182465962EC}"/>
-            </c:ext>
-          </c:extLst>
-        </c:ser>
-        <c:dLbls>
-          <c:dLblPos val="t"/>
-          <c:showLegendKey val="0"/>
-          <c:showVal val="1"/>
-          <c:showCatName val="0"/>
-          <c:showSerName val="0"/>
-          <c:showPercent val="0"/>
-          <c:showBubbleSize val="0"/>
-        </c:dLbls>
-        <c:marker val="1"/>
-        <c:smooth val="0"/>
-        <c:axId val="2094734554"/>
-        <c:axId val="2094734552"/>
-      </c:lineChart>
-      <c:catAx>
-        <c:axId val="2094734554"/>
-        <c:scaling>
-          <c:orientation val="minMax"/>
-        </c:scaling>
-        <c:delete val="0"/>
-        <c:axPos val="b"/>
-        <c:numFmt formatCode="General" sourceLinked="1"/>
-        <c:majorTickMark val="out"/>
-        <c:minorTickMark val="none"/>
-        <c:tickLblPos val="low"/>
-        <c:spPr>
-          <a:ln w="12700" cap="flat">
-            <a:solidFill>
-              <a:srgbClr val="888888"/>
-            </a:solidFill>
-            <a:prstDash val="solid"/>
-            <a:round/>
-          </a:ln>
-        </c:spPr>
-        <c:txPr>
-          <a:bodyPr/>
-          <a:lstStyle/>
-          <a:p>
-            <a:pPr>
-              <a:defRPr sz="1200" b="0" i="0" u="none" strike="noStrike">
-                <a:solidFill>
-                  <a:srgbClr val="5A6270"/>
-                </a:solidFill>
-                <a:latin typeface="Arial"/>
-              </a:defRPr>
-            </a:pPr>
-            <a:endParaRPr lang="en-US"/>
-          </a:p>
-        </c:txPr>
-        <c:crossAx val="2094734552"/>
-        <c:crosses val="autoZero"/>
-        <c:auto val="1"/>
-        <c:lblAlgn val="ctr"/>
-        <c:lblOffset val="100"/>
-        <c:noMultiLvlLbl val="1"/>
-      </c:catAx>
-      <c:valAx>
-        <c:axId val="2094734552"/>
-        <c:scaling>
-          <c:orientation val="minMax"/>
-        </c:scaling>
-        <c:delete val="0"/>
-        <c:axPos val="l"/>
-        <c:majorGridlines>
-          <c:spPr>
-            <a:ln w="12700" cap="flat">
-              <a:solidFill>
-                <a:srgbClr val="E3E6EC"/>
-              </a:solidFill>
-              <a:prstDash val="solid"/>
-              <a:round/>
-            </a:ln>
-          </c:spPr>
-        </c:majorGridlines>
-        <c:numFmt formatCode="0%" sourceLinked="0"/>
-        <c:majorTickMark val="out"/>
-        <c:minorTickMark val="none"/>
-        <c:tickLblPos val="nextTo"/>
-        <c:spPr>
-          <a:ln w="12700" cap="flat">
-            <a:solidFill>
-              <a:srgbClr val="888888"/>
-            </a:solidFill>
-            <a:prstDash val="solid"/>
-            <a:round/>
-          </a:ln>
-        </c:spPr>
-        <c:txPr>
-          <a:bodyPr/>
-          <a:lstStyle/>
-          <a:p>
-            <a:pPr>
-              <a:defRPr sz="1200" b="0" i="0" u="none" strike="noStrike">
-                <a:solidFill>
-                  <a:srgbClr val="5A6270"/>
-                </a:solidFill>
-                <a:latin typeface="Arial"/>
-              </a:defRPr>
-            </a:pPr>
-            <a:endParaRPr lang="en-US"/>
-          </a:p>
-        </c:txPr>
-        <c:crossAx val="2094734554"/>
-        <c:crosses val="autoZero"/>
-        <c:crossBetween val="between"/>
-      </c:valAx>
-      <c:spPr>
-        <a:noFill/>
-        <a:ln>
-          <a:noFill/>
-        </a:ln>
-        <a:effectLst/>
-      </c:spPr>
-    </c:plotArea>
     <c:plotVisOnly val="1"/>
     <c:dispBlanksAs val="span"/>
     <c:showDLblsOverMax val="1"/>
@@ -4811,7 +4535,7 @@
           <p:nvPr/>
         </p:nvPicPr>
         <p:blipFill>
-          <a:blip r:embed="rId4"/>
+          <a:blip r:embed="rId3"/>
           <a:stretch>
             <a:fillRect/>
           </a:stretch>
@@ -5182,7 +4906,7 @@
           <p:nvPr/>
         </p:nvPicPr>
         <p:blipFill>
-          <a:blip r:embed="rId5"/>
+          <a:blip r:embed="rId4"/>
           <a:stretch>
             <a:fillRect/>
           </a:stretch>
@@ -5206,7 +4930,7 @@
 </file>
 
 <file path=ppt/slides/slide13.xml><?xml version="1.0" encoding="utf-8"?>
-<p:sld xmlns:a="http://schemas.openxmlformats.org/drawingml/2006/main" xmlns:p="http://schemas.openxmlformats.org/presentationml/2006/main" xmlns:r="http://schemas.openxmlformats.org/officeDocument/2006/relationships">
+<p:sld xmlns:a="http://schemas.openxmlformats.org/drawingml/2006/main" xmlns:r="http://schemas.openxmlformats.org/officeDocument/2006/relationships" xmlns:p="http://schemas.openxmlformats.org/presentationml/2006/main">
   <p:cSld>
     <p:spTree>
       <p:nvGrpSpPr>
@@ -5214,7 +4938,14 @@
         <p:cNvGrpSpPr/>
         <p:nvPr/>
       </p:nvGrpSpPr>
-      <p:grpSpPr/>
+      <p:grpSpPr>
+        <a:xfrm>
+          <a:off x="0" y="0"/>
+          <a:ext cx="0" cy="0"/>
+          <a:chOff x="0" y="0"/>
+          <a:chExt cx="0" cy="0"/>
+        </a:xfrm>
+      </p:grpSpPr>
       <p:sp>
         <p:nvSpPr>
           <p:cNvPr id="2" name="TextBox 1"/>
@@ -5312,16 +5043,46 @@
                 <a:tableStyleId>{5C22544A-7EE6-4342-B048-85BDC9FD1C3A}</a:tableStyleId>
               </a:tblPr>
               <a:tblGrid>
-                <a:gridCol w="2720340"/>
-                <a:gridCol w="1994916"/>
-                <a:gridCol w="1994916"/>
-                <a:gridCol w="1994916"/>
-                <a:gridCol w="2176272"/>
+                <a:gridCol w="2720340">
+                  <a:extLst>
+                    <a:ext uri="{9D8B030D-6E8A-4147-A177-3AD203B41FA5}">
+                      <a16:colId xmlns:a16="http://schemas.microsoft.com/office/drawing/2014/main" val="20000"/>
+                    </a:ext>
+                  </a:extLst>
+                </a:gridCol>
+                <a:gridCol w="1994916">
+                  <a:extLst>
+                    <a:ext uri="{9D8B030D-6E8A-4147-A177-3AD203B41FA5}">
+                      <a16:colId xmlns:a16="http://schemas.microsoft.com/office/drawing/2014/main" val="20001"/>
+                    </a:ext>
+                  </a:extLst>
+                </a:gridCol>
+                <a:gridCol w="1994916">
+                  <a:extLst>
+                    <a:ext uri="{9D8B030D-6E8A-4147-A177-3AD203B41FA5}">
+                      <a16:colId xmlns:a16="http://schemas.microsoft.com/office/drawing/2014/main" val="20002"/>
+                    </a:ext>
+                  </a:extLst>
+                </a:gridCol>
+                <a:gridCol w="1994916">
+                  <a:extLst>
+                    <a:ext uri="{9D8B030D-6E8A-4147-A177-3AD203B41FA5}">
+                      <a16:colId xmlns:a16="http://schemas.microsoft.com/office/drawing/2014/main" val="20003"/>
+                    </a:ext>
+                  </a:extLst>
+                </a:gridCol>
+                <a:gridCol w="2176272">
+                  <a:extLst>
+                    <a:ext uri="{9D8B030D-6E8A-4147-A177-3AD203B41FA5}">
+                      <a16:colId xmlns:a16="http://schemas.microsoft.com/office/drawing/2014/main" val="20004"/>
+                    </a:ext>
+                  </a:extLst>
+                </a:gridCol>
               </a:tblGrid>
               <a:tr h="384048">
                 <a:tc>
                   <a:txBody>
-                    <a:bodyPr wrap="square"/>
+                    <a:bodyPr/>
                     <a:lstStyle/>
                     <a:p>
                       <a:pPr algn="l"/>
@@ -5336,7 +5097,7 @@
                       </a:r>
                     </a:p>
                   </a:txBody>
-                  <a:tcPr marL="91440" marR="73152" marT="18288" marB="18288">
+                  <a:tcPr marR="73152" marT="18288" marB="18288">
                     <a:solidFill>
                       <a:srgbClr val="1E2761"/>
                     </a:solidFill>
@@ -5344,7 +5105,7 @@
                 </a:tc>
                 <a:tc>
                   <a:txBody>
-                    <a:bodyPr wrap="square"/>
+                    <a:bodyPr/>
                     <a:lstStyle/>
                     <a:p>
                       <a:pPr algn="r"/>
@@ -5359,7 +5120,7 @@
                       </a:r>
                     </a:p>
                   </a:txBody>
-                  <a:tcPr marL="91440" marR="73152" marT="18288" marB="18288">
+                  <a:tcPr marR="73152" marT="18288" marB="18288">
                     <a:solidFill>
                       <a:srgbClr val="1E2761"/>
                     </a:solidFill>
@@ -5367,7 +5128,7 @@
                 </a:tc>
                 <a:tc>
                   <a:txBody>
-                    <a:bodyPr wrap="square"/>
+                    <a:bodyPr/>
                     <a:lstStyle/>
                     <a:p>
                       <a:pPr algn="r"/>
@@ -5382,7 +5143,7 @@
                       </a:r>
                     </a:p>
                   </a:txBody>
-                  <a:tcPr marL="91440" marR="73152" marT="18288" marB="18288">
+                  <a:tcPr marR="73152" marT="18288" marB="18288">
                     <a:solidFill>
                       <a:srgbClr val="1E2761"/>
                     </a:solidFill>
@@ -5390,7 +5151,7 @@
                 </a:tc>
                 <a:tc>
                   <a:txBody>
-                    <a:bodyPr wrap="square"/>
+                    <a:bodyPr/>
                     <a:lstStyle/>
                     <a:p>
                       <a:pPr algn="r"/>
@@ -5405,7 +5166,7 @@
                       </a:r>
                     </a:p>
                   </a:txBody>
-                  <a:tcPr marL="91440" marR="73152" marT="18288" marB="18288">
+                  <a:tcPr marR="73152" marT="18288" marB="18288">
                     <a:solidFill>
                       <a:srgbClr val="1E2761"/>
                     </a:solidFill>
@@ -5413,7 +5174,7 @@
                 </a:tc>
                 <a:tc>
                   <a:txBody>
-                    <a:bodyPr wrap="square"/>
+                    <a:bodyPr/>
                     <a:lstStyle/>
                     <a:p>
                       <a:pPr algn="r"/>
@@ -5428,17 +5189,22 @@
                       </a:r>
                     </a:p>
                   </a:txBody>
-                  <a:tcPr marL="91440" marR="73152" marT="18288" marB="18288">
+                  <a:tcPr marR="73152" marT="18288" marB="18288">
                     <a:solidFill>
                       <a:srgbClr val="1E2761"/>
                     </a:solidFill>
                   </a:tcPr>
                 </a:tc>
+                <a:extLst>
+                  <a:ext uri="{0D108BD9-81ED-4DB2-BD59-A6C34878D82A}">
+                    <a16:rowId xmlns:a16="http://schemas.microsoft.com/office/drawing/2014/main" val="10000"/>
+                  </a:ext>
+                </a:extLst>
               </a:tr>
               <a:tr h="329184">
                 <a:tc>
                   <a:txBody>
-                    <a:bodyPr wrap="square"/>
+                    <a:bodyPr/>
                     <a:lstStyle/>
                     <a:p>
                       <a:pPr algn="l"/>
@@ -5453,7 +5219,7 @@
                       </a:r>
                     </a:p>
                   </a:txBody>
-                  <a:tcPr marL="91440" marR="73152" marT="18288" marB="18288">
+                  <a:tcPr marR="73152" marT="18288" marB="18288">
                     <a:solidFill>
                       <a:srgbClr val="FFFFFF"/>
                     </a:solidFill>
@@ -5461,7 +5227,7 @@
                 </a:tc>
                 <a:tc>
                   <a:txBody>
-                    <a:bodyPr wrap="square"/>
+                    <a:bodyPr/>
                     <a:lstStyle/>
                     <a:p>
                       <a:pPr algn="r"/>
@@ -5476,7 +5242,7 @@
                       </a:r>
                     </a:p>
                   </a:txBody>
-                  <a:tcPr marL="91440" marR="73152" marT="18288" marB="18288">
+                  <a:tcPr marR="73152" marT="18288" marB="18288">
                     <a:solidFill>
                       <a:srgbClr val="FFFFFF"/>
                     </a:solidFill>
@@ -5484,7 +5250,7 @@
                 </a:tc>
                 <a:tc>
                   <a:txBody>
-                    <a:bodyPr wrap="square"/>
+                    <a:bodyPr/>
                     <a:lstStyle/>
                     <a:p>
                       <a:pPr algn="r"/>
@@ -5499,7 +5265,7 @@
                       </a:r>
                     </a:p>
                   </a:txBody>
-                  <a:tcPr marL="91440" marR="73152" marT="18288" marB="18288">
+                  <a:tcPr marR="73152" marT="18288" marB="18288">
                     <a:solidFill>
                       <a:srgbClr val="FFFFFF"/>
                     </a:solidFill>
@@ -5507,7 +5273,7 @@
                 </a:tc>
                 <a:tc>
                   <a:txBody>
-                    <a:bodyPr wrap="square"/>
+                    <a:bodyPr/>
                     <a:lstStyle/>
                     <a:p>
                       <a:pPr algn="r"/>
@@ -5522,7 +5288,7 @@
                       </a:r>
                     </a:p>
                   </a:txBody>
-                  <a:tcPr marL="91440" marR="73152" marT="18288" marB="18288">
+                  <a:tcPr marR="73152" marT="18288" marB="18288">
                     <a:solidFill>
                       <a:srgbClr val="FFFFFF"/>
                     </a:solidFill>
@@ -5530,7 +5296,7 @@
                 </a:tc>
                 <a:tc>
                   <a:txBody>
-                    <a:bodyPr wrap="square"/>
+                    <a:bodyPr/>
                     <a:lstStyle/>
                     <a:p>
                       <a:pPr algn="r"/>
@@ -5545,17 +5311,22 @@
                       </a:r>
                     </a:p>
                   </a:txBody>
-                  <a:tcPr marL="91440" marR="73152" marT="18288" marB="18288">
+                  <a:tcPr marR="73152" marT="18288" marB="18288">
                     <a:solidFill>
                       <a:srgbClr val="FFFFFF"/>
                     </a:solidFill>
                   </a:tcPr>
                 </a:tc>
+                <a:extLst>
+                  <a:ext uri="{0D108BD9-81ED-4DB2-BD59-A6C34878D82A}">
+                    <a16:rowId xmlns:a16="http://schemas.microsoft.com/office/drawing/2014/main" val="10001"/>
+                  </a:ext>
+                </a:extLst>
               </a:tr>
               <a:tr h="329184">
                 <a:tc>
                   <a:txBody>
-                    <a:bodyPr wrap="square"/>
+                    <a:bodyPr/>
                     <a:lstStyle/>
                     <a:p>
                       <a:pPr algn="l"/>
@@ -5570,7 +5341,7 @@
                       </a:r>
                     </a:p>
                   </a:txBody>
-                  <a:tcPr marL="91440" marR="73152" marT="18288" marB="18288">
+                  <a:tcPr marR="73152" marT="18288" marB="18288">
                     <a:solidFill>
                       <a:srgbClr val="F4F6FA"/>
                     </a:solidFill>
@@ -5578,7 +5349,7 @@
                 </a:tc>
                 <a:tc>
                   <a:txBody>
-                    <a:bodyPr wrap="square"/>
+                    <a:bodyPr/>
                     <a:lstStyle/>
                     <a:p>
                       <a:pPr algn="r"/>
@@ -5593,7 +5364,7 @@
                       </a:r>
                     </a:p>
                   </a:txBody>
-                  <a:tcPr marL="91440" marR="73152" marT="18288" marB="18288">
+                  <a:tcPr marR="73152" marT="18288" marB="18288">
                     <a:solidFill>
                       <a:srgbClr val="F4F6FA"/>
                     </a:solidFill>
@@ -5601,7 +5372,7 @@
                 </a:tc>
                 <a:tc>
                   <a:txBody>
-                    <a:bodyPr wrap="square"/>
+                    <a:bodyPr/>
                     <a:lstStyle/>
                     <a:p>
                       <a:pPr algn="r"/>
@@ -5616,7 +5387,7 @@
                       </a:r>
                     </a:p>
                   </a:txBody>
-                  <a:tcPr marL="91440" marR="73152" marT="18288" marB="18288">
+                  <a:tcPr marR="73152" marT="18288" marB="18288">
                     <a:solidFill>
                       <a:srgbClr val="F4F6FA"/>
                     </a:solidFill>
@@ -5624,7 +5395,7 @@
                 </a:tc>
                 <a:tc>
                   <a:txBody>
-                    <a:bodyPr wrap="square"/>
+                    <a:bodyPr/>
                     <a:lstStyle/>
                     <a:p>
                       <a:pPr algn="r"/>
@@ -5639,7 +5410,7 @@
                       </a:r>
                     </a:p>
                   </a:txBody>
-                  <a:tcPr marL="91440" marR="73152" marT="18288" marB="18288">
+                  <a:tcPr marR="73152" marT="18288" marB="18288">
                     <a:solidFill>
                       <a:srgbClr val="F4F6FA"/>
                     </a:solidFill>
@@ -5647,7 +5418,7 @@
                 </a:tc>
                 <a:tc>
                   <a:txBody>
-                    <a:bodyPr wrap="square"/>
+                    <a:bodyPr/>
                     <a:lstStyle/>
                     <a:p>
                       <a:pPr algn="r"/>
@@ -5662,12 +5433,17 @@
                       </a:r>
                     </a:p>
                   </a:txBody>
-                  <a:tcPr marL="91440" marR="73152" marT="18288" marB="18288">
+                  <a:tcPr marR="73152" marT="18288" marB="18288">
                     <a:solidFill>
                       <a:srgbClr val="F4F6FA"/>
                     </a:solidFill>
                   </a:tcPr>
                 </a:tc>
+                <a:extLst>
+                  <a:ext uri="{0D108BD9-81ED-4DB2-BD59-A6C34878D82A}">
+                    <a16:rowId xmlns:a16="http://schemas.microsoft.com/office/drawing/2014/main" val="10002"/>
+                  </a:ext>
+                </a:extLst>
               </a:tr>
             </a:tbl>
           </a:graphicData>
@@ -5716,7 +5492,9 @@
         <p:txBody>
           <a:bodyPr rtlCol="0" anchor="ctr"/>
           <a:lstStyle/>
-          <a:p/>
+          <a:p>
+            <a:endParaRPr/>
+          </a:p>
         </p:txBody>
       </p:sp>
       <p:sp>
@@ -6049,7 +5827,7 @@
 </file>
 
 <file path=ppt/slides/slide14.xml><?xml version="1.0" encoding="utf-8"?>
-<p:sld xmlns:a="http://schemas.openxmlformats.org/drawingml/2006/main" xmlns:p="http://schemas.openxmlformats.org/presentationml/2006/main" xmlns:r="http://schemas.openxmlformats.org/officeDocument/2006/relationships">
+<p:sld xmlns:a="http://schemas.openxmlformats.org/drawingml/2006/main" xmlns:r="http://schemas.openxmlformats.org/officeDocument/2006/relationships" xmlns:p="http://schemas.openxmlformats.org/presentationml/2006/main">
   <p:cSld>
     <p:spTree>
       <p:nvGrpSpPr>
@@ -6057,7 +5835,14 @@
         <p:cNvGrpSpPr/>
         <p:nvPr/>
       </p:nvGrpSpPr>
-      <p:grpSpPr/>
+      <p:grpSpPr>
+        <a:xfrm>
+          <a:off x="0" y="0"/>
+          <a:ext cx="0" cy="0"/>
+          <a:chOff x="0" y="0"/>
+          <a:chExt cx="0" cy="0"/>
+        </a:xfrm>
+      </p:grpSpPr>
       <p:sp>
         <p:nvSpPr>
           <p:cNvPr id="2" name="TextBox 1"/>
@@ -6155,16 +5940,46 @@
                 <a:tableStyleId>{5C22544A-7EE6-4342-B048-85BDC9FD1C3A}</a:tableStyleId>
               </a:tblPr>
               <a:tblGrid>
-                <a:gridCol w="3291840"/>
-                <a:gridCol w="1828800"/>
-                <a:gridCol w="1828800"/>
-                <a:gridCol w="1828800"/>
-                <a:gridCol w="2103119"/>
+                <a:gridCol w="3291840">
+                  <a:extLst>
+                    <a:ext uri="{9D8B030D-6E8A-4147-A177-3AD203B41FA5}">
+                      <a16:colId xmlns:a16="http://schemas.microsoft.com/office/drawing/2014/main" val="20000"/>
+                    </a:ext>
+                  </a:extLst>
+                </a:gridCol>
+                <a:gridCol w="1828800">
+                  <a:extLst>
+                    <a:ext uri="{9D8B030D-6E8A-4147-A177-3AD203B41FA5}">
+                      <a16:colId xmlns:a16="http://schemas.microsoft.com/office/drawing/2014/main" val="20001"/>
+                    </a:ext>
+                  </a:extLst>
+                </a:gridCol>
+                <a:gridCol w="1828800">
+                  <a:extLst>
+                    <a:ext uri="{9D8B030D-6E8A-4147-A177-3AD203B41FA5}">
+                      <a16:colId xmlns:a16="http://schemas.microsoft.com/office/drawing/2014/main" val="20002"/>
+                    </a:ext>
+                  </a:extLst>
+                </a:gridCol>
+                <a:gridCol w="1828800">
+                  <a:extLst>
+                    <a:ext uri="{9D8B030D-6E8A-4147-A177-3AD203B41FA5}">
+                      <a16:colId xmlns:a16="http://schemas.microsoft.com/office/drawing/2014/main" val="20003"/>
+                    </a:ext>
+                  </a:extLst>
+                </a:gridCol>
+                <a:gridCol w="2103119">
+                  <a:extLst>
+                    <a:ext uri="{9D8B030D-6E8A-4147-A177-3AD203B41FA5}">
+                      <a16:colId xmlns:a16="http://schemas.microsoft.com/office/drawing/2014/main" val="20004"/>
+                    </a:ext>
+                  </a:extLst>
+                </a:gridCol>
               </a:tblGrid>
               <a:tr h="384048">
                 <a:tc>
                   <a:txBody>
-                    <a:bodyPr wrap="square"/>
+                    <a:bodyPr/>
                     <a:lstStyle/>
                     <a:p>
                       <a:pPr algn="l"/>
@@ -6179,7 +5994,7 @@
                       </a:r>
                     </a:p>
                   </a:txBody>
-                  <a:tcPr marL="91440" marR="73152" marT="18288" marB="18288">
+                  <a:tcPr marR="73152" marT="18288" marB="18288">
                     <a:solidFill>
                       <a:srgbClr val="1E2761"/>
                     </a:solidFill>
@@ -6187,7 +6002,7 @@
                 </a:tc>
                 <a:tc>
                   <a:txBody>
-                    <a:bodyPr wrap="square"/>
+                    <a:bodyPr/>
                     <a:lstStyle/>
                     <a:p>
                       <a:pPr algn="r"/>
@@ -6202,7 +6017,7 @@
                       </a:r>
                     </a:p>
                   </a:txBody>
-                  <a:tcPr marL="91440" marR="73152" marT="18288" marB="18288">
+                  <a:tcPr marR="73152" marT="18288" marB="18288">
                     <a:solidFill>
                       <a:srgbClr val="1E2761"/>
                     </a:solidFill>
@@ -6210,7 +6025,7 @@
                 </a:tc>
                 <a:tc>
                   <a:txBody>
-                    <a:bodyPr wrap="square"/>
+                    <a:bodyPr/>
                     <a:lstStyle/>
                     <a:p>
                       <a:pPr algn="r"/>
@@ -6225,7 +6040,7 @@
                       </a:r>
                     </a:p>
                   </a:txBody>
-                  <a:tcPr marL="91440" marR="73152" marT="18288" marB="18288">
+                  <a:tcPr marR="73152" marT="18288" marB="18288">
                     <a:solidFill>
                       <a:srgbClr val="1E2761"/>
                     </a:solidFill>
@@ -6233,7 +6048,7 @@
                 </a:tc>
                 <a:tc>
                   <a:txBody>
-                    <a:bodyPr wrap="square"/>
+                    <a:bodyPr/>
                     <a:lstStyle/>
                     <a:p>
                       <a:pPr algn="r"/>
@@ -6248,7 +6063,7 @@
                       </a:r>
                     </a:p>
                   </a:txBody>
-                  <a:tcPr marL="91440" marR="73152" marT="18288" marB="18288">
+                  <a:tcPr marR="73152" marT="18288" marB="18288">
                     <a:solidFill>
                       <a:srgbClr val="1E2761"/>
                     </a:solidFill>
@@ -6256,7 +6071,7 @@
                 </a:tc>
                 <a:tc>
                   <a:txBody>
-                    <a:bodyPr wrap="square"/>
+                    <a:bodyPr/>
                     <a:lstStyle/>
                     <a:p>
                       <a:pPr algn="r"/>
@@ -6271,17 +6086,22 @@
                       </a:r>
                     </a:p>
                   </a:txBody>
-                  <a:tcPr marL="91440" marR="73152" marT="18288" marB="18288">
+                  <a:tcPr marR="73152" marT="18288" marB="18288">
                     <a:solidFill>
                       <a:srgbClr val="1E2761"/>
                     </a:solidFill>
                   </a:tcPr>
                 </a:tc>
+                <a:extLst>
+                  <a:ext uri="{0D108BD9-81ED-4DB2-BD59-A6C34878D82A}">
+                    <a16:rowId xmlns:a16="http://schemas.microsoft.com/office/drawing/2014/main" val="10000"/>
+                  </a:ext>
+                </a:extLst>
               </a:tr>
               <a:tr h="329184">
                 <a:tc>
                   <a:txBody>
-                    <a:bodyPr wrap="square"/>
+                    <a:bodyPr/>
                     <a:lstStyle/>
                     <a:p>
                       <a:pPr algn="l"/>
@@ -6296,7 +6116,7 @@
                       </a:r>
                     </a:p>
                   </a:txBody>
-                  <a:tcPr marL="91440" marR="73152" marT="18288" marB="18288">
+                  <a:tcPr marR="73152" marT="18288" marB="18288">
                     <a:solidFill>
                       <a:srgbClr val="FFFFFF"/>
                     </a:solidFill>
@@ -6304,7 +6124,7 @@
                 </a:tc>
                 <a:tc>
                   <a:txBody>
-                    <a:bodyPr wrap="square"/>
+                    <a:bodyPr/>
                     <a:lstStyle/>
                     <a:p>
                       <a:pPr algn="r"/>
@@ -6319,7 +6139,7 @@
                       </a:r>
                     </a:p>
                   </a:txBody>
-                  <a:tcPr marL="91440" marR="73152" marT="18288" marB="18288">
+                  <a:tcPr marR="73152" marT="18288" marB="18288">
                     <a:solidFill>
                       <a:srgbClr val="FFFFFF"/>
                     </a:solidFill>
@@ -6327,7 +6147,7 @@
                 </a:tc>
                 <a:tc>
                   <a:txBody>
-                    <a:bodyPr wrap="square"/>
+                    <a:bodyPr/>
                     <a:lstStyle/>
                     <a:p>
                       <a:pPr algn="r"/>
@@ -6342,7 +6162,7 @@
                       </a:r>
                     </a:p>
                   </a:txBody>
-                  <a:tcPr marL="91440" marR="73152" marT="18288" marB="18288">
+                  <a:tcPr marR="73152" marT="18288" marB="18288">
                     <a:solidFill>
                       <a:srgbClr val="FFFFFF"/>
                     </a:solidFill>
@@ -6350,7 +6170,7 @@
                 </a:tc>
                 <a:tc>
                   <a:txBody>
-                    <a:bodyPr wrap="square"/>
+                    <a:bodyPr/>
                     <a:lstStyle/>
                     <a:p>
                       <a:pPr algn="r"/>
@@ -6365,7 +6185,7 @@
                       </a:r>
                     </a:p>
                   </a:txBody>
-                  <a:tcPr marL="91440" marR="73152" marT="18288" marB="18288">
+                  <a:tcPr marR="73152" marT="18288" marB="18288">
                     <a:solidFill>
                       <a:srgbClr val="FFFFFF"/>
                     </a:solidFill>
@@ -6373,7 +6193,7 @@
                 </a:tc>
                 <a:tc>
                   <a:txBody>
-                    <a:bodyPr wrap="square"/>
+                    <a:bodyPr/>
                     <a:lstStyle/>
                     <a:p>
                       <a:pPr algn="r"/>
@@ -6388,17 +6208,22 @@
                       </a:r>
                     </a:p>
                   </a:txBody>
-                  <a:tcPr marL="91440" marR="73152" marT="18288" marB="18288">
+                  <a:tcPr marR="73152" marT="18288" marB="18288">
                     <a:solidFill>
                       <a:srgbClr val="FFFFFF"/>
                     </a:solidFill>
                   </a:tcPr>
                 </a:tc>
+                <a:extLst>
+                  <a:ext uri="{0D108BD9-81ED-4DB2-BD59-A6C34878D82A}">
+                    <a16:rowId xmlns:a16="http://schemas.microsoft.com/office/drawing/2014/main" val="10001"/>
+                  </a:ext>
+                </a:extLst>
               </a:tr>
               <a:tr h="329184">
                 <a:tc>
                   <a:txBody>
-                    <a:bodyPr wrap="square"/>
+                    <a:bodyPr/>
                     <a:lstStyle/>
                     <a:p>
                       <a:pPr algn="l"/>
@@ -6413,7 +6238,7 @@
                       </a:r>
                     </a:p>
                   </a:txBody>
-                  <a:tcPr marL="91440" marR="73152" marT="18288" marB="18288">
+                  <a:tcPr marR="73152" marT="18288" marB="18288">
                     <a:solidFill>
                       <a:srgbClr val="FDF3E2"/>
                     </a:solidFill>
@@ -6421,7 +6246,7 @@
                 </a:tc>
                 <a:tc>
                   <a:txBody>
-                    <a:bodyPr wrap="square"/>
+                    <a:bodyPr/>
                     <a:lstStyle/>
                     <a:p>
                       <a:pPr algn="r"/>
@@ -6436,7 +6261,7 @@
                       </a:r>
                     </a:p>
                   </a:txBody>
-                  <a:tcPr marL="91440" marR="73152" marT="18288" marB="18288">
+                  <a:tcPr marR="73152" marT="18288" marB="18288">
                     <a:solidFill>
                       <a:srgbClr val="FDF3E2"/>
                     </a:solidFill>
@@ -6444,7 +6269,7 @@
                 </a:tc>
                 <a:tc>
                   <a:txBody>
-                    <a:bodyPr wrap="square"/>
+                    <a:bodyPr/>
                     <a:lstStyle/>
                     <a:p>
                       <a:pPr algn="r"/>
@@ -6459,7 +6284,7 @@
                       </a:r>
                     </a:p>
                   </a:txBody>
-                  <a:tcPr marL="91440" marR="73152" marT="18288" marB="18288">
+                  <a:tcPr marR="73152" marT="18288" marB="18288">
                     <a:solidFill>
                       <a:srgbClr val="FDF3E2"/>
                     </a:solidFill>
@@ -6467,7 +6292,7 @@
                 </a:tc>
                 <a:tc>
                   <a:txBody>
-                    <a:bodyPr wrap="square"/>
+                    <a:bodyPr/>
                     <a:lstStyle/>
                     <a:p>
                       <a:pPr algn="r"/>
@@ -6482,7 +6307,7 @@
                       </a:r>
                     </a:p>
                   </a:txBody>
-                  <a:tcPr marL="91440" marR="73152" marT="18288" marB="18288">
+                  <a:tcPr marR="73152" marT="18288" marB="18288">
                     <a:solidFill>
                       <a:srgbClr val="FDF3E2"/>
                     </a:solidFill>
@@ -6490,7 +6315,7 @@
                 </a:tc>
                 <a:tc>
                   <a:txBody>
-                    <a:bodyPr wrap="square"/>
+                    <a:bodyPr/>
                     <a:lstStyle/>
                     <a:p>
                       <a:pPr algn="r"/>
@@ -6505,17 +6330,22 @@
                       </a:r>
                     </a:p>
                   </a:txBody>
-                  <a:tcPr marL="91440" marR="73152" marT="18288" marB="18288">
+                  <a:tcPr marR="73152" marT="18288" marB="18288">
                     <a:solidFill>
                       <a:srgbClr val="FDF3E2"/>
                     </a:solidFill>
                   </a:tcPr>
                 </a:tc>
+                <a:extLst>
+                  <a:ext uri="{0D108BD9-81ED-4DB2-BD59-A6C34878D82A}">
+                    <a16:rowId xmlns:a16="http://schemas.microsoft.com/office/drawing/2014/main" val="10002"/>
+                  </a:ext>
+                </a:extLst>
               </a:tr>
               <a:tr h="329184">
                 <a:tc>
                   <a:txBody>
-                    <a:bodyPr wrap="square"/>
+                    <a:bodyPr/>
                     <a:lstStyle/>
                     <a:p>
                       <a:pPr algn="l"/>
@@ -6530,7 +6360,7 @@
                       </a:r>
                     </a:p>
                   </a:txBody>
-                  <a:tcPr marL="91440" marR="73152" marT="18288" marB="18288">
+                  <a:tcPr marR="73152" marT="18288" marB="18288">
                     <a:solidFill>
                       <a:srgbClr val="FFFFFF"/>
                     </a:solidFill>
@@ -6538,7 +6368,7 @@
                 </a:tc>
                 <a:tc>
                   <a:txBody>
-                    <a:bodyPr wrap="square"/>
+                    <a:bodyPr/>
                     <a:lstStyle/>
                     <a:p>
                       <a:pPr algn="r"/>
@@ -6553,7 +6383,7 @@
                       </a:r>
                     </a:p>
                   </a:txBody>
-                  <a:tcPr marL="91440" marR="73152" marT="18288" marB="18288">
+                  <a:tcPr marR="73152" marT="18288" marB="18288">
                     <a:solidFill>
                       <a:srgbClr val="FFFFFF"/>
                     </a:solidFill>
@@ -6561,7 +6391,7 @@
                 </a:tc>
                 <a:tc>
                   <a:txBody>
-                    <a:bodyPr wrap="square"/>
+                    <a:bodyPr/>
                     <a:lstStyle/>
                     <a:p>
                       <a:pPr algn="r"/>
@@ -6576,7 +6406,7 @@
                       </a:r>
                     </a:p>
                   </a:txBody>
-                  <a:tcPr marL="91440" marR="73152" marT="18288" marB="18288">
+                  <a:tcPr marR="73152" marT="18288" marB="18288">
                     <a:solidFill>
                       <a:srgbClr val="FFFFFF"/>
                     </a:solidFill>
@@ -6584,7 +6414,7 @@
                 </a:tc>
                 <a:tc>
                   <a:txBody>
-                    <a:bodyPr wrap="square"/>
+                    <a:bodyPr/>
                     <a:lstStyle/>
                     <a:p>
                       <a:pPr algn="r"/>
@@ -6599,7 +6429,7 @@
                       </a:r>
                     </a:p>
                   </a:txBody>
-                  <a:tcPr marL="91440" marR="73152" marT="18288" marB="18288">
+                  <a:tcPr marR="73152" marT="18288" marB="18288">
                     <a:solidFill>
                       <a:srgbClr val="FFFFFF"/>
                     </a:solidFill>
@@ -6607,7 +6437,7 @@
                 </a:tc>
                 <a:tc>
                   <a:txBody>
-                    <a:bodyPr wrap="square"/>
+                    <a:bodyPr/>
                     <a:lstStyle/>
                     <a:p>
                       <a:pPr algn="r"/>
@@ -6622,12 +6452,17 @@
                       </a:r>
                     </a:p>
                   </a:txBody>
-                  <a:tcPr marL="91440" marR="73152" marT="18288" marB="18288">
+                  <a:tcPr marR="73152" marT="18288" marB="18288">
                     <a:solidFill>
                       <a:srgbClr val="FFFFFF"/>
                     </a:solidFill>
                   </a:tcPr>
                 </a:tc>
+                <a:extLst>
+                  <a:ext uri="{0D108BD9-81ED-4DB2-BD59-A6C34878D82A}">
+                    <a16:rowId xmlns:a16="http://schemas.microsoft.com/office/drawing/2014/main" val="10003"/>
+                  </a:ext>
+                </a:extLst>
               </a:tr>
             </a:tbl>
           </a:graphicData>
@@ -6958,7 +6793,9 @@
         <p:txBody>
           <a:bodyPr rtlCol="0" anchor="ctr"/>
           <a:lstStyle/>
-          <a:p/>
+          <a:p>
+            <a:endParaRPr/>
+          </a:p>
         </p:txBody>
       </p:sp>
       <p:sp>
@@ -7009,7 +6846,7 @@
 </file>
 
 <file path=ppt/slides/slide15.xml><?xml version="1.0" encoding="utf-8"?>
-<p:sld xmlns:a="http://schemas.openxmlformats.org/drawingml/2006/main" xmlns:p="http://schemas.openxmlformats.org/presentationml/2006/main" xmlns:r="http://schemas.openxmlformats.org/officeDocument/2006/relationships">
+<p:sld xmlns:a="http://schemas.openxmlformats.org/drawingml/2006/main" xmlns:r="http://schemas.openxmlformats.org/officeDocument/2006/relationships" xmlns:p="http://schemas.openxmlformats.org/presentationml/2006/main">
   <p:cSld>
     <p:spTree>
       <p:nvGrpSpPr>
@@ -7017,7 +6854,14 @@
         <p:cNvGrpSpPr/>
         <p:nvPr/>
       </p:nvGrpSpPr>
-      <p:grpSpPr/>
+      <p:grpSpPr>
+        <a:xfrm>
+          <a:off x="0" y="0"/>
+          <a:ext cx="0" cy="0"/>
+          <a:chOff x="0" y="0"/>
+          <a:chExt cx="0" cy="0"/>
+        </a:xfrm>
+      </p:grpSpPr>
       <p:sp>
         <p:nvSpPr>
           <p:cNvPr id="2" name="TextBox 1"/>
@@ -7115,16 +6959,46 @@
                 <a:tableStyleId>{5C22544A-7EE6-4342-B048-85BDC9FD1C3A}</a:tableStyleId>
               </a:tblPr>
               <a:tblGrid>
-                <a:gridCol w="3474720"/>
-                <a:gridCol w="1828800"/>
-                <a:gridCol w="1828800"/>
-                <a:gridCol w="1828800"/>
-                <a:gridCol w="1920240"/>
+                <a:gridCol w="3474720">
+                  <a:extLst>
+                    <a:ext uri="{9D8B030D-6E8A-4147-A177-3AD203B41FA5}">
+                      <a16:colId xmlns:a16="http://schemas.microsoft.com/office/drawing/2014/main" val="20000"/>
+                    </a:ext>
+                  </a:extLst>
+                </a:gridCol>
+                <a:gridCol w="1828800">
+                  <a:extLst>
+                    <a:ext uri="{9D8B030D-6E8A-4147-A177-3AD203B41FA5}">
+                      <a16:colId xmlns:a16="http://schemas.microsoft.com/office/drawing/2014/main" val="20001"/>
+                    </a:ext>
+                  </a:extLst>
+                </a:gridCol>
+                <a:gridCol w="1828800">
+                  <a:extLst>
+                    <a:ext uri="{9D8B030D-6E8A-4147-A177-3AD203B41FA5}">
+                      <a16:colId xmlns:a16="http://schemas.microsoft.com/office/drawing/2014/main" val="20002"/>
+                    </a:ext>
+                  </a:extLst>
+                </a:gridCol>
+                <a:gridCol w="1828800">
+                  <a:extLst>
+                    <a:ext uri="{9D8B030D-6E8A-4147-A177-3AD203B41FA5}">
+                      <a16:colId xmlns:a16="http://schemas.microsoft.com/office/drawing/2014/main" val="20003"/>
+                    </a:ext>
+                  </a:extLst>
+                </a:gridCol>
+                <a:gridCol w="1920240">
+                  <a:extLst>
+                    <a:ext uri="{9D8B030D-6E8A-4147-A177-3AD203B41FA5}">
+                      <a16:colId xmlns:a16="http://schemas.microsoft.com/office/drawing/2014/main" val="20004"/>
+                    </a:ext>
+                  </a:extLst>
+                </a:gridCol>
               </a:tblGrid>
               <a:tr h="384048">
                 <a:tc>
                   <a:txBody>
-                    <a:bodyPr wrap="square"/>
+                    <a:bodyPr/>
                     <a:lstStyle/>
                     <a:p>
                       <a:pPr algn="l"/>
@@ -7139,7 +7013,7 @@
                       </a:r>
                     </a:p>
                   </a:txBody>
-                  <a:tcPr marL="91440" marR="73152" marT="18288" marB="18288">
+                  <a:tcPr marR="73152" marT="18288" marB="18288">
                     <a:solidFill>
                       <a:srgbClr val="1E2761"/>
                     </a:solidFill>
@@ -7147,7 +7021,7 @@
                 </a:tc>
                 <a:tc>
                   <a:txBody>
-                    <a:bodyPr wrap="square"/>
+                    <a:bodyPr/>
                     <a:lstStyle/>
                     <a:p>
                       <a:pPr algn="r"/>
@@ -7162,7 +7036,7 @@
                       </a:r>
                     </a:p>
                   </a:txBody>
-                  <a:tcPr marL="91440" marR="73152" marT="18288" marB="18288">
+                  <a:tcPr marR="73152" marT="18288" marB="18288">
                     <a:solidFill>
                       <a:srgbClr val="1E2761"/>
                     </a:solidFill>
@@ -7170,7 +7044,7 @@
                 </a:tc>
                 <a:tc>
                   <a:txBody>
-                    <a:bodyPr wrap="square"/>
+                    <a:bodyPr/>
                     <a:lstStyle/>
                     <a:p>
                       <a:pPr algn="r"/>
@@ -7185,7 +7059,7 @@
                       </a:r>
                     </a:p>
                   </a:txBody>
-                  <a:tcPr marL="91440" marR="73152" marT="18288" marB="18288">
+                  <a:tcPr marR="73152" marT="18288" marB="18288">
                     <a:solidFill>
                       <a:srgbClr val="1E2761"/>
                     </a:solidFill>
@@ -7193,7 +7067,7 @@
                 </a:tc>
                 <a:tc>
                   <a:txBody>
-                    <a:bodyPr wrap="square"/>
+                    <a:bodyPr/>
                     <a:lstStyle/>
                     <a:p>
                       <a:pPr algn="r"/>
@@ -7208,7 +7082,7 @@
                       </a:r>
                     </a:p>
                   </a:txBody>
-                  <a:tcPr marL="91440" marR="73152" marT="18288" marB="18288">
+                  <a:tcPr marR="73152" marT="18288" marB="18288">
                     <a:solidFill>
                       <a:srgbClr val="1E2761"/>
                     </a:solidFill>
@@ -7216,7 +7090,7 @@
                 </a:tc>
                 <a:tc>
                   <a:txBody>
-                    <a:bodyPr wrap="square"/>
+                    <a:bodyPr/>
                     <a:lstStyle/>
                     <a:p>
                       <a:pPr algn="r"/>
@@ -7231,17 +7105,22 @@
                       </a:r>
                     </a:p>
                   </a:txBody>
-                  <a:tcPr marL="91440" marR="73152" marT="18288" marB="18288">
+                  <a:tcPr marR="73152" marT="18288" marB="18288">
                     <a:solidFill>
                       <a:srgbClr val="1E2761"/>
                     </a:solidFill>
                   </a:tcPr>
                 </a:tc>
+                <a:extLst>
+                  <a:ext uri="{0D108BD9-81ED-4DB2-BD59-A6C34878D82A}">
+                    <a16:rowId xmlns:a16="http://schemas.microsoft.com/office/drawing/2014/main" val="10000"/>
+                  </a:ext>
+                </a:extLst>
               </a:tr>
               <a:tr h="329184">
                 <a:tc>
                   <a:txBody>
-                    <a:bodyPr wrap="square"/>
+                    <a:bodyPr/>
                     <a:lstStyle/>
                     <a:p>
                       <a:pPr algn="l"/>
@@ -7256,7 +7135,7 @@
                       </a:r>
                     </a:p>
                   </a:txBody>
-                  <a:tcPr marL="91440" marR="73152" marT="18288" marB="18288">
+                  <a:tcPr marR="73152" marT="18288" marB="18288">
                     <a:solidFill>
                       <a:srgbClr val="FFFFFF"/>
                     </a:solidFill>
@@ -7264,7 +7143,7 @@
                 </a:tc>
                 <a:tc>
                   <a:txBody>
-                    <a:bodyPr wrap="square"/>
+                    <a:bodyPr/>
                     <a:lstStyle/>
                     <a:p>
                       <a:pPr algn="r"/>
@@ -7279,7 +7158,7 @@
                       </a:r>
                     </a:p>
                   </a:txBody>
-                  <a:tcPr marL="91440" marR="73152" marT="18288" marB="18288">
+                  <a:tcPr marR="73152" marT="18288" marB="18288">
                     <a:solidFill>
                       <a:srgbClr val="FFFFFF"/>
                     </a:solidFill>
@@ -7287,7 +7166,7 @@
                 </a:tc>
                 <a:tc>
                   <a:txBody>
-                    <a:bodyPr wrap="square"/>
+                    <a:bodyPr/>
                     <a:lstStyle/>
                     <a:p>
                       <a:pPr algn="r"/>
@@ -7302,7 +7181,7 @@
                       </a:r>
                     </a:p>
                   </a:txBody>
-                  <a:tcPr marL="91440" marR="73152" marT="18288" marB="18288">
+                  <a:tcPr marR="73152" marT="18288" marB="18288">
                     <a:solidFill>
                       <a:srgbClr val="FFFFFF"/>
                     </a:solidFill>
@@ -7310,7 +7189,7 @@
                 </a:tc>
                 <a:tc>
                   <a:txBody>
-                    <a:bodyPr wrap="square"/>
+                    <a:bodyPr/>
                     <a:lstStyle/>
                     <a:p>
                       <a:pPr algn="r"/>
@@ -7325,7 +7204,7 @@
                       </a:r>
                     </a:p>
                   </a:txBody>
-                  <a:tcPr marL="91440" marR="73152" marT="18288" marB="18288">
+                  <a:tcPr marR="73152" marT="18288" marB="18288">
                     <a:solidFill>
                       <a:srgbClr val="FFFFFF"/>
                     </a:solidFill>
@@ -7333,7 +7212,7 @@
                 </a:tc>
                 <a:tc>
                   <a:txBody>
-                    <a:bodyPr wrap="square"/>
+                    <a:bodyPr/>
                     <a:lstStyle/>
                     <a:p>
                       <a:pPr algn="r"/>
@@ -7348,17 +7227,22 @@
                       </a:r>
                     </a:p>
                   </a:txBody>
-                  <a:tcPr marL="91440" marR="73152" marT="18288" marB="18288">
+                  <a:tcPr marR="73152" marT="18288" marB="18288">
                     <a:solidFill>
                       <a:srgbClr val="FFFFFF"/>
                     </a:solidFill>
                   </a:tcPr>
                 </a:tc>
+                <a:extLst>
+                  <a:ext uri="{0D108BD9-81ED-4DB2-BD59-A6C34878D82A}">
+                    <a16:rowId xmlns:a16="http://schemas.microsoft.com/office/drawing/2014/main" val="10001"/>
+                  </a:ext>
+                </a:extLst>
               </a:tr>
               <a:tr h="329184">
                 <a:tc>
                   <a:txBody>
-                    <a:bodyPr wrap="square"/>
+                    <a:bodyPr/>
                     <a:lstStyle/>
                     <a:p>
                       <a:pPr algn="l"/>
@@ -7373,7 +7257,7 @@
                       </a:r>
                     </a:p>
                   </a:txBody>
-                  <a:tcPr marL="91440" marR="73152" marT="18288" marB="18288">
+                  <a:tcPr marR="73152" marT="18288" marB="18288">
                     <a:solidFill>
                       <a:srgbClr val="FDF3E2"/>
                     </a:solidFill>
@@ -7381,7 +7265,7 @@
                 </a:tc>
                 <a:tc>
                   <a:txBody>
-                    <a:bodyPr wrap="square"/>
+                    <a:bodyPr/>
                     <a:lstStyle/>
                     <a:p>
                       <a:pPr algn="r"/>
@@ -7396,7 +7280,7 @@
                       </a:r>
                     </a:p>
                   </a:txBody>
-                  <a:tcPr marL="91440" marR="73152" marT="18288" marB="18288">
+                  <a:tcPr marR="73152" marT="18288" marB="18288">
                     <a:solidFill>
                       <a:srgbClr val="FDF3E2"/>
                     </a:solidFill>
@@ -7404,7 +7288,7 @@
                 </a:tc>
                 <a:tc>
                   <a:txBody>
-                    <a:bodyPr wrap="square"/>
+                    <a:bodyPr/>
                     <a:lstStyle/>
                     <a:p>
                       <a:pPr algn="r"/>
@@ -7419,7 +7303,7 @@
                       </a:r>
                     </a:p>
                   </a:txBody>
-                  <a:tcPr marL="91440" marR="73152" marT="18288" marB="18288">
+                  <a:tcPr marR="73152" marT="18288" marB="18288">
                     <a:solidFill>
                       <a:srgbClr val="FDF3E2"/>
                     </a:solidFill>
@@ -7427,7 +7311,7 @@
                 </a:tc>
                 <a:tc>
                   <a:txBody>
-                    <a:bodyPr wrap="square"/>
+                    <a:bodyPr/>
                     <a:lstStyle/>
                     <a:p>
                       <a:pPr algn="r"/>
@@ -7442,7 +7326,7 @@
                       </a:r>
                     </a:p>
                   </a:txBody>
-                  <a:tcPr marL="91440" marR="73152" marT="18288" marB="18288">
+                  <a:tcPr marR="73152" marT="18288" marB="18288">
                     <a:solidFill>
                       <a:srgbClr val="FDF3E2"/>
                     </a:solidFill>
@@ -7450,7 +7334,7 @@
                 </a:tc>
                 <a:tc>
                   <a:txBody>
-                    <a:bodyPr wrap="square"/>
+                    <a:bodyPr/>
                     <a:lstStyle/>
                     <a:p>
                       <a:pPr algn="r"/>
@@ -7465,17 +7349,22 @@
                       </a:r>
                     </a:p>
                   </a:txBody>
-                  <a:tcPr marL="91440" marR="73152" marT="18288" marB="18288">
+                  <a:tcPr marR="73152" marT="18288" marB="18288">
                     <a:solidFill>
                       <a:srgbClr val="FDF3E2"/>
                     </a:solidFill>
                   </a:tcPr>
                 </a:tc>
+                <a:extLst>
+                  <a:ext uri="{0D108BD9-81ED-4DB2-BD59-A6C34878D82A}">
+                    <a16:rowId xmlns:a16="http://schemas.microsoft.com/office/drawing/2014/main" val="10002"/>
+                  </a:ext>
+                </a:extLst>
               </a:tr>
               <a:tr h="329184">
                 <a:tc>
                   <a:txBody>
-                    <a:bodyPr wrap="square"/>
+                    <a:bodyPr/>
                     <a:lstStyle/>
                     <a:p>
                       <a:pPr algn="l"/>
@@ -7490,7 +7379,7 @@
                       </a:r>
                     </a:p>
                   </a:txBody>
-                  <a:tcPr marL="91440" marR="73152" marT="18288" marB="18288">
+                  <a:tcPr marR="73152" marT="18288" marB="18288">
                     <a:solidFill>
                       <a:srgbClr val="FFFFFF"/>
                     </a:solidFill>
@@ -7498,7 +7387,7 @@
                 </a:tc>
                 <a:tc>
                   <a:txBody>
-                    <a:bodyPr wrap="square"/>
+                    <a:bodyPr/>
                     <a:lstStyle/>
                     <a:p>
                       <a:pPr algn="r"/>
@@ -7513,7 +7402,7 @@
                       </a:r>
                     </a:p>
                   </a:txBody>
-                  <a:tcPr marL="91440" marR="73152" marT="18288" marB="18288">
+                  <a:tcPr marR="73152" marT="18288" marB="18288">
                     <a:solidFill>
                       <a:srgbClr val="FFFFFF"/>
                     </a:solidFill>
@@ -7521,7 +7410,7 @@
                 </a:tc>
                 <a:tc>
                   <a:txBody>
-                    <a:bodyPr wrap="square"/>
+                    <a:bodyPr/>
                     <a:lstStyle/>
                     <a:p>
                       <a:pPr algn="r"/>
@@ -7536,7 +7425,7 @@
                       </a:r>
                     </a:p>
                   </a:txBody>
-                  <a:tcPr marL="91440" marR="73152" marT="18288" marB="18288">
+                  <a:tcPr marR="73152" marT="18288" marB="18288">
                     <a:solidFill>
                       <a:srgbClr val="FFFFFF"/>
                     </a:solidFill>
@@ -7544,7 +7433,7 @@
                 </a:tc>
                 <a:tc>
                   <a:txBody>
-                    <a:bodyPr wrap="square"/>
+                    <a:bodyPr/>
                     <a:lstStyle/>
                     <a:p>
                       <a:pPr algn="r"/>
@@ -7559,7 +7448,7 @@
                       </a:r>
                     </a:p>
                   </a:txBody>
-                  <a:tcPr marL="91440" marR="73152" marT="18288" marB="18288">
+                  <a:tcPr marR="73152" marT="18288" marB="18288">
                     <a:solidFill>
                       <a:srgbClr val="FFFFFF"/>
                     </a:solidFill>
@@ -7567,7 +7456,7 @@
                 </a:tc>
                 <a:tc>
                   <a:txBody>
-                    <a:bodyPr wrap="square"/>
+                    <a:bodyPr/>
                     <a:lstStyle/>
                     <a:p>
                       <a:pPr algn="r"/>
@@ -7582,17 +7471,22 @@
                       </a:r>
                     </a:p>
                   </a:txBody>
-                  <a:tcPr marL="91440" marR="73152" marT="18288" marB="18288">
+                  <a:tcPr marR="73152" marT="18288" marB="18288">
                     <a:solidFill>
                       <a:srgbClr val="FFFFFF"/>
                     </a:solidFill>
                   </a:tcPr>
                 </a:tc>
+                <a:extLst>
+                  <a:ext uri="{0D108BD9-81ED-4DB2-BD59-A6C34878D82A}">
+                    <a16:rowId xmlns:a16="http://schemas.microsoft.com/office/drawing/2014/main" val="10003"/>
+                  </a:ext>
+                </a:extLst>
               </a:tr>
               <a:tr h="329184">
                 <a:tc>
                   <a:txBody>
-                    <a:bodyPr wrap="square"/>
+                    <a:bodyPr/>
                     <a:lstStyle/>
                     <a:p>
                       <a:pPr algn="l"/>
@@ -7607,7 +7501,7 @@
                       </a:r>
                     </a:p>
                   </a:txBody>
-                  <a:tcPr marL="91440" marR="73152" marT="18288" marB="18288">
+                  <a:tcPr marR="73152" marT="18288" marB="18288">
                     <a:solidFill>
                       <a:srgbClr val="F4F6FA"/>
                     </a:solidFill>
@@ -7615,7 +7509,7 @@
                 </a:tc>
                 <a:tc>
                   <a:txBody>
-                    <a:bodyPr wrap="square"/>
+                    <a:bodyPr/>
                     <a:lstStyle/>
                     <a:p>
                       <a:pPr algn="r"/>
@@ -7630,7 +7524,7 @@
                       </a:r>
                     </a:p>
                   </a:txBody>
-                  <a:tcPr marL="91440" marR="73152" marT="18288" marB="18288">
+                  <a:tcPr marR="73152" marT="18288" marB="18288">
                     <a:solidFill>
                       <a:srgbClr val="F4F6FA"/>
                     </a:solidFill>
@@ -7638,7 +7532,7 @@
                 </a:tc>
                 <a:tc>
                   <a:txBody>
-                    <a:bodyPr wrap="square"/>
+                    <a:bodyPr/>
                     <a:lstStyle/>
                     <a:p>
                       <a:pPr algn="r"/>
@@ -7653,7 +7547,7 @@
                       </a:r>
                     </a:p>
                   </a:txBody>
-                  <a:tcPr marL="91440" marR="73152" marT="18288" marB="18288">
+                  <a:tcPr marR="73152" marT="18288" marB="18288">
                     <a:solidFill>
                       <a:srgbClr val="F4F6FA"/>
                     </a:solidFill>
@@ -7661,7 +7555,7 @@
                 </a:tc>
                 <a:tc>
                   <a:txBody>
-                    <a:bodyPr wrap="square"/>
+                    <a:bodyPr/>
                     <a:lstStyle/>
                     <a:p>
                       <a:pPr algn="r"/>
@@ -7676,7 +7570,7 @@
                       </a:r>
                     </a:p>
                   </a:txBody>
-                  <a:tcPr marL="91440" marR="73152" marT="18288" marB="18288">
+                  <a:tcPr marR="73152" marT="18288" marB="18288">
                     <a:solidFill>
                       <a:srgbClr val="F4F6FA"/>
                     </a:solidFill>
@@ -7684,7 +7578,7 @@
                 </a:tc>
                 <a:tc>
                   <a:txBody>
-                    <a:bodyPr wrap="square"/>
+                    <a:bodyPr/>
                     <a:lstStyle/>
                     <a:p>
                       <a:pPr algn="r"/>
@@ -7699,17 +7593,22 @@
                       </a:r>
                     </a:p>
                   </a:txBody>
-                  <a:tcPr marL="91440" marR="73152" marT="18288" marB="18288">
+                  <a:tcPr marR="73152" marT="18288" marB="18288">
                     <a:solidFill>
                       <a:srgbClr val="F4F6FA"/>
                     </a:solidFill>
                   </a:tcPr>
                 </a:tc>
+                <a:extLst>
+                  <a:ext uri="{0D108BD9-81ED-4DB2-BD59-A6C34878D82A}">
+                    <a16:rowId xmlns:a16="http://schemas.microsoft.com/office/drawing/2014/main" val="10004"/>
+                  </a:ext>
+                </a:extLst>
               </a:tr>
               <a:tr h="329184">
                 <a:tc>
                   <a:txBody>
-                    <a:bodyPr wrap="square"/>
+                    <a:bodyPr/>
                     <a:lstStyle/>
                     <a:p>
                       <a:pPr algn="l"/>
@@ -7724,7 +7623,7 @@
                       </a:r>
                     </a:p>
                   </a:txBody>
-                  <a:tcPr marL="91440" marR="73152" marT="18288" marB="18288">
+                  <a:tcPr marR="73152" marT="18288" marB="18288">
                     <a:solidFill>
                       <a:srgbClr val="FFFFFF"/>
                     </a:solidFill>
@@ -7732,7 +7631,7 @@
                 </a:tc>
                 <a:tc>
                   <a:txBody>
-                    <a:bodyPr wrap="square"/>
+                    <a:bodyPr/>
                     <a:lstStyle/>
                     <a:p>
                       <a:pPr algn="r"/>
@@ -7747,7 +7646,7 @@
                       </a:r>
                     </a:p>
                   </a:txBody>
-                  <a:tcPr marL="91440" marR="73152" marT="18288" marB="18288">
+                  <a:tcPr marR="73152" marT="18288" marB="18288">
                     <a:solidFill>
                       <a:srgbClr val="FFFFFF"/>
                     </a:solidFill>
@@ -7755,7 +7654,7 @@
                 </a:tc>
                 <a:tc>
                   <a:txBody>
-                    <a:bodyPr wrap="square"/>
+                    <a:bodyPr/>
                     <a:lstStyle/>
                     <a:p>
                       <a:pPr algn="r"/>
@@ -7770,7 +7669,7 @@
                       </a:r>
                     </a:p>
                   </a:txBody>
-                  <a:tcPr marL="91440" marR="73152" marT="18288" marB="18288">
+                  <a:tcPr marR="73152" marT="18288" marB="18288">
                     <a:solidFill>
                       <a:srgbClr val="FFFFFF"/>
                     </a:solidFill>
@@ -7778,7 +7677,7 @@
                 </a:tc>
                 <a:tc>
                   <a:txBody>
-                    <a:bodyPr wrap="square"/>
+                    <a:bodyPr/>
                     <a:lstStyle/>
                     <a:p>
                       <a:pPr algn="r"/>
@@ -7793,7 +7692,7 @@
                       </a:r>
                     </a:p>
                   </a:txBody>
-                  <a:tcPr marL="91440" marR="73152" marT="18288" marB="18288">
+                  <a:tcPr marR="73152" marT="18288" marB="18288">
                     <a:solidFill>
                       <a:srgbClr val="FFFFFF"/>
                     </a:solidFill>
@@ -7801,7 +7700,7 @@
                 </a:tc>
                 <a:tc>
                   <a:txBody>
-                    <a:bodyPr wrap="square"/>
+                    <a:bodyPr/>
                     <a:lstStyle/>
                     <a:p>
                       <a:pPr algn="r"/>
@@ -7816,17 +7715,22 @@
                       </a:r>
                     </a:p>
                   </a:txBody>
-                  <a:tcPr marL="91440" marR="73152" marT="18288" marB="18288">
+                  <a:tcPr marR="73152" marT="18288" marB="18288">
                     <a:solidFill>
                       <a:srgbClr val="FFFFFF"/>
                     </a:solidFill>
                   </a:tcPr>
                 </a:tc>
+                <a:extLst>
+                  <a:ext uri="{0D108BD9-81ED-4DB2-BD59-A6C34878D82A}">
+                    <a16:rowId xmlns:a16="http://schemas.microsoft.com/office/drawing/2014/main" val="10005"/>
+                  </a:ext>
+                </a:extLst>
               </a:tr>
               <a:tr h="329184">
                 <a:tc>
                   <a:txBody>
-                    <a:bodyPr wrap="square"/>
+                    <a:bodyPr/>
                     <a:lstStyle/>
                     <a:p>
                       <a:pPr algn="l"/>
@@ -7841,7 +7745,7 @@
                       </a:r>
                     </a:p>
                   </a:txBody>
-                  <a:tcPr marL="91440" marR="73152" marT="18288" marB="18288">
+                  <a:tcPr marR="73152" marT="18288" marB="18288">
                     <a:solidFill>
                       <a:srgbClr val="F4F6FA"/>
                     </a:solidFill>
@@ -7849,7 +7753,7 @@
                 </a:tc>
                 <a:tc>
                   <a:txBody>
-                    <a:bodyPr wrap="square"/>
+                    <a:bodyPr/>
                     <a:lstStyle/>
                     <a:p>
                       <a:pPr algn="r"/>
@@ -7864,7 +7768,7 @@
                       </a:r>
                     </a:p>
                   </a:txBody>
-                  <a:tcPr marL="91440" marR="73152" marT="18288" marB="18288">
+                  <a:tcPr marR="73152" marT="18288" marB="18288">
                     <a:solidFill>
                       <a:srgbClr val="F4F6FA"/>
                     </a:solidFill>
@@ -7872,7 +7776,7 @@
                 </a:tc>
                 <a:tc>
                   <a:txBody>
-                    <a:bodyPr wrap="square"/>
+                    <a:bodyPr/>
                     <a:lstStyle/>
                     <a:p>
                       <a:pPr algn="r"/>
@@ -7887,7 +7791,7 @@
                       </a:r>
                     </a:p>
                   </a:txBody>
-                  <a:tcPr marL="91440" marR="73152" marT="18288" marB="18288">
+                  <a:tcPr marR="73152" marT="18288" marB="18288">
                     <a:solidFill>
                       <a:srgbClr val="F4F6FA"/>
                     </a:solidFill>
@@ -7895,7 +7799,7 @@
                 </a:tc>
                 <a:tc>
                   <a:txBody>
-                    <a:bodyPr wrap="square"/>
+                    <a:bodyPr/>
                     <a:lstStyle/>
                     <a:p>
                       <a:pPr algn="r"/>
@@ -7910,7 +7814,7 @@
                       </a:r>
                     </a:p>
                   </a:txBody>
-                  <a:tcPr marL="91440" marR="73152" marT="18288" marB="18288">
+                  <a:tcPr marR="73152" marT="18288" marB="18288">
                     <a:solidFill>
                       <a:srgbClr val="F4F6FA"/>
                     </a:solidFill>
@@ -7918,7 +7822,7 @@
                 </a:tc>
                 <a:tc>
                   <a:txBody>
-                    <a:bodyPr wrap="square"/>
+                    <a:bodyPr/>
                     <a:lstStyle/>
                     <a:p>
                       <a:pPr algn="r"/>
@@ -7933,12 +7837,17 @@
                       </a:r>
                     </a:p>
                   </a:txBody>
-                  <a:tcPr marL="91440" marR="73152" marT="18288" marB="18288">
+                  <a:tcPr marR="73152" marT="18288" marB="18288">
                     <a:solidFill>
                       <a:srgbClr val="F4F6FA"/>
                     </a:solidFill>
                   </a:tcPr>
                 </a:tc>
+                <a:extLst>
+                  <a:ext uri="{0D108BD9-81ED-4DB2-BD59-A6C34878D82A}">
+                    <a16:rowId xmlns:a16="http://schemas.microsoft.com/office/drawing/2014/main" val="10006"/>
+                  </a:ext>
+                </a:extLst>
               </a:tr>
             </a:tbl>
           </a:graphicData>
@@ -8026,7 +7935,9 @@
         <p:txBody>
           <a:bodyPr rtlCol="0" anchor="ctr"/>
           <a:lstStyle/>
-          <a:p/>
+          <a:p>
+            <a:endParaRPr/>
+          </a:p>
         </p:txBody>
       </p:sp>
       <p:sp>
@@ -8077,7 +7988,7 @@
 </file>
 
 <file path=ppt/slides/slide16.xml><?xml version="1.0" encoding="utf-8"?>
-<p:sld xmlns:a="http://schemas.openxmlformats.org/drawingml/2006/main" xmlns:p="http://schemas.openxmlformats.org/presentationml/2006/main" xmlns:r="http://schemas.openxmlformats.org/officeDocument/2006/relationships">
+<p:sld xmlns:a="http://schemas.openxmlformats.org/drawingml/2006/main" xmlns:r="http://schemas.openxmlformats.org/officeDocument/2006/relationships" xmlns:p="http://schemas.openxmlformats.org/presentationml/2006/main">
   <p:cSld>
     <p:spTree>
       <p:nvGrpSpPr>
@@ -8085,7 +7996,14 @@
         <p:cNvGrpSpPr/>
         <p:nvPr/>
       </p:nvGrpSpPr>
-      <p:grpSpPr/>
+      <p:grpSpPr>
+        <a:xfrm>
+          <a:off x="0" y="0"/>
+          <a:ext cx="0" cy="0"/>
+          <a:chOff x="0" y="0"/>
+          <a:chExt cx="0" cy="0"/>
+        </a:xfrm>
+      </p:grpSpPr>
       <p:sp>
         <p:nvSpPr>
           <p:cNvPr id="2" name="TextBox 1"/>
@@ -8207,7 +8125,9 @@
         <p:txBody>
           <a:bodyPr rtlCol="0" anchor="ctr"/>
           <a:lstStyle/>
-          <a:p/>
+          <a:p>
+            <a:endParaRPr/>
+          </a:p>
         </p:txBody>
       </p:sp>
       <p:sp>
@@ -8331,7 +8251,9 @@
         <p:txBody>
           <a:bodyPr rtlCol="0" anchor="ctr"/>
           <a:lstStyle/>
-          <a:p/>
+          <a:p>
+            <a:endParaRPr/>
+          </a:p>
         </p:txBody>
       </p:sp>
       <p:sp>
@@ -8455,7 +8377,9 @@
         <p:txBody>
           <a:bodyPr rtlCol="0" anchor="ctr"/>
           <a:lstStyle/>
-          <a:p/>
+          <a:p>
+            <a:endParaRPr/>
+          </a:p>
         </p:txBody>
       </p:sp>
       <p:sp>
@@ -8657,7 +8581,9 @@
         <p:txBody>
           <a:bodyPr rtlCol="0" anchor="ctr"/>
           <a:lstStyle/>
-          <a:p/>
+          <a:p>
+            <a:endParaRPr/>
+          </a:p>
         </p:txBody>
       </p:sp>
       <p:sp>
@@ -8708,7 +8634,7 @@
 </file>
 
 <file path=ppt/slides/slide17.xml><?xml version="1.0" encoding="utf-8"?>
-<p:sld xmlns:a="http://schemas.openxmlformats.org/drawingml/2006/main" xmlns:p="http://schemas.openxmlformats.org/presentationml/2006/main" xmlns:r="http://schemas.openxmlformats.org/officeDocument/2006/relationships">
+<p:sld xmlns:a="http://schemas.openxmlformats.org/drawingml/2006/main" xmlns:r="http://schemas.openxmlformats.org/officeDocument/2006/relationships" xmlns:p="http://schemas.openxmlformats.org/presentationml/2006/main">
   <p:cSld>
     <p:spTree>
       <p:nvGrpSpPr>
@@ -8716,7 +8642,14 @@
         <p:cNvGrpSpPr/>
         <p:nvPr/>
       </p:nvGrpSpPr>
-      <p:grpSpPr/>
+      <p:grpSpPr>
+        <a:xfrm>
+          <a:off x="0" y="0"/>
+          <a:ext cx="0" cy="0"/>
+          <a:chOff x="0" y="0"/>
+          <a:chExt cx="0" cy="0"/>
+        </a:xfrm>
+      </p:grpSpPr>
       <p:sp>
         <p:nvSpPr>
           <p:cNvPr id="2" name="TextBox 1"/>
@@ -8862,7 +8795,9 @@
         <p:txBody>
           <a:bodyPr rtlCol="0" anchor="ctr"/>
           <a:lstStyle/>
-          <a:p/>
+          <a:p>
+            <a:endParaRPr/>
+          </a:p>
         </p:txBody>
       </p:sp>
       <p:sp>
@@ -8947,15 +8882,12 @@
                 <a:spcPct val="105000"/>
               </a:lnSpc>
             </a:pPr>
-            <a:r>
-              <a:rPr sz="1300" b="0">
-                <a:solidFill>
-                  <a:srgbClr val="1B1B1F"/>
-                </a:solidFill>
-                <a:latin typeface="Calibri"/>
-              </a:rPr>
-              <a:t/>
-            </a:r>
+            <a:endParaRPr sz="1300" b="0">
+              <a:solidFill>
+                <a:srgbClr val="1B1B1F"/>
+              </a:solidFill>
+              <a:latin typeface="Calibri"/>
+            </a:endParaRPr>
           </a:p>
           <a:p>
             <a:pPr algn="l">
@@ -8979,15 +8911,12 @@
                 <a:spcPct val="105000"/>
               </a:lnSpc>
             </a:pPr>
-            <a:r>
-              <a:rPr sz="1300" b="0">
-                <a:solidFill>
-                  <a:srgbClr val="1B1B1F"/>
-                </a:solidFill>
-                <a:latin typeface="Calibri"/>
-              </a:rPr>
-              <a:t/>
-            </a:r>
+            <a:endParaRPr sz="1300" b="0">
+              <a:solidFill>
+                <a:srgbClr val="1B1B1F"/>
+              </a:solidFill>
+              <a:latin typeface="Calibri"/>
+            </a:endParaRPr>
           </a:p>
           <a:p>
             <a:pPr algn="l">
@@ -9011,15 +8940,12 @@
                 <a:spcPct val="105000"/>
               </a:lnSpc>
             </a:pPr>
-            <a:r>
-              <a:rPr sz="1300" b="0">
-                <a:solidFill>
-                  <a:srgbClr val="1B1B1F"/>
-                </a:solidFill>
-                <a:latin typeface="Calibri"/>
-              </a:rPr>
-              <a:t/>
-            </a:r>
+            <a:endParaRPr sz="1300" b="0">
+              <a:solidFill>
+                <a:srgbClr val="1B1B1F"/>
+              </a:solidFill>
+              <a:latin typeface="Calibri"/>
+            </a:endParaRPr>
           </a:p>
           <a:p>
             <a:pPr algn="l">
@@ -9082,7 +9008,9 @@
         <p:txBody>
           <a:bodyPr rtlCol="0" anchor="ctr"/>
           <a:lstStyle/>
-          <a:p/>
+          <a:p>
+            <a:endParaRPr/>
+          </a:p>
         </p:txBody>
       </p:sp>
       <p:sp>
@@ -9133,7 +9061,7 @@
 </file>
 
 <file path=ppt/slides/slide18.xml><?xml version="1.0" encoding="utf-8"?>
-<p:sld xmlns:a="http://schemas.openxmlformats.org/drawingml/2006/main" xmlns:p="http://schemas.openxmlformats.org/presentationml/2006/main" xmlns:r="http://schemas.openxmlformats.org/officeDocument/2006/relationships">
+<p:sld xmlns:a="http://schemas.openxmlformats.org/drawingml/2006/main" xmlns:r="http://schemas.openxmlformats.org/officeDocument/2006/relationships" xmlns:p="http://schemas.openxmlformats.org/presentationml/2006/main">
   <p:cSld>
     <p:spTree>
       <p:nvGrpSpPr>
@@ -9141,7 +9069,14 @@
         <p:cNvGrpSpPr/>
         <p:nvPr/>
       </p:nvGrpSpPr>
-      <p:grpSpPr/>
+      <p:grpSpPr>
+        <a:xfrm>
+          <a:off x="0" y="0"/>
+          <a:ext cx="0" cy="0"/>
+          <a:chOff x="0" y="0"/>
+          <a:chExt cx="0" cy="0"/>
+        </a:xfrm>
+      </p:grpSpPr>
       <p:sp>
         <p:nvSpPr>
           <p:cNvPr id="2" name="TextBox 1"/>
@@ -9239,15 +9174,39 @@
                 <a:tableStyleId>{5C22544A-7EE6-4342-B048-85BDC9FD1C3A}</a:tableStyleId>
               </a:tblPr>
               <a:tblGrid>
-                <a:gridCol w="3840480"/>
-                <a:gridCol w="2651760"/>
-                <a:gridCol w="2011680"/>
-                <a:gridCol w="2377440"/>
+                <a:gridCol w="3840480">
+                  <a:extLst>
+                    <a:ext uri="{9D8B030D-6E8A-4147-A177-3AD203B41FA5}">
+                      <a16:colId xmlns:a16="http://schemas.microsoft.com/office/drawing/2014/main" val="20000"/>
+                    </a:ext>
+                  </a:extLst>
+                </a:gridCol>
+                <a:gridCol w="2651760">
+                  <a:extLst>
+                    <a:ext uri="{9D8B030D-6E8A-4147-A177-3AD203B41FA5}">
+                      <a16:colId xmlns:a16="http://schemas.microsoft.com/office/drawing/2014/main" val="20001"/>
+                    </a:ext>
+                  </a:extLst>
+                </a:gridCol>
+                <a:gridCol w="2011680">
+                  <a:extLst>
+                    <a:ext uri="{9D8B030D-6E8A-4147-A177-3AD203B41FA5}">
+                      <a16:colId xmlns:a16="http://schemas.microsoft.com/office/drawing/2014/main" val="20002"/>
+                    </a:ext>
+                  </a:extLst>
+                </a:gridCol>
+                <a:gridCol w="2377440">
+                  <a:extLst>
+                    <a:ext uri="{9D8B030D-6E8A-4147-A177-3AD203B41FA5}">
+                      <a16:colId xmlns:a16="http://schemas.microsoft.com/office/drawing/2014/main" val="20003"/>
+                    </a:ext>
+                  </a:extLst>
+                </a:gridCol>
               </a:tblGrid>
               <a:tr h="384048">
                 <a:tc>
                   <a:txBody>
-                    <a:bodyPr wrap="square"/>
+                    <a:bodyPr/>
                     <a:lstStyle/>
                     <a:p>
                       <a:pPr algn="l"/>
@@ -9262,7 +9221,7 @@
                       </a:r>
                     </a:p>
                   </a:txBody>
-                  <a:tcPr marL="91440" marR="73152" marT="18288" marB="18288">
+                  <a:tcPr marR="73152" marT="18288" marB="18288">
                     <a:solidFill>
                       <a:srgbClr val="1E2761"/>
                     </a:solidFill>
@@ -9270,7 +9229,7 @@
                 </a:tc>
                 <a:tc>
                   <a:txBody>
-                    <a:bodyPr wrap="square"/>
+                    <a:bodyPr/>
                     <a:lstStyle/>
                     <a:p>
                       <a:pPr algn="r"/>
@@ -9285,7 +9244,7 @@
                       </a:r>
                     </a:p>
                   </a:txBody>
-                  <a:tcPr marL="91440" marR="73152" marT="18288" marB="18288">
+                  <a:tcPr marR="73152" marT="18288" marB="18288">
                     <a:solidFill>
                       <a:srgbClr val="1E2761"/>
                     </a:solidFill>
@@ -9293,7 +9252,7 @@
                 </a:tc>
                 <a:tc>
                   <a:txBody>
-                    <a:bodyPr wrap="square"/>
+                    <a:bodyPr/>
                     <a:lstStyle/>
                     <a:p>
                       <a:pPr algn="r"/>
@@ -9308,7 +9267,7 @@
                       </a:r>
                     </a:p>
                   </a:txBody>
-                  <a:tcPr marL="91440" marR="73152" marT="18288" marB="18288">
+                  <a:tcPr marR="73152" marT="18288" marB="18288">
                     <a:solidFill>
                       <a:srgbClr val="1E2761"/>
                     </a:solidFill>
@@ -9316,7 +9275,7 @@
                 </a:tc>
                 <a:tc>
                   <a:txBody>
-                    <a:bodyPr wrap="square"/>
+                    <a:bodyPr/>
                     <a:lstStyle/>
                     <a:p>
                       <a:pPr algn="r"/>
@@ -9331,17 +9290,22 @@
                       </a:r>
                     </a:p>
                   </a:txBody>
-                  <a:tcPr marL="91440" marR="73152" marT="18288" marB="18288">
+                  <a:tcPr marR="73152" marT="18288" marB="18288">
                     <a:solidFill>
                       <a:srgbClr val="1E2761"/>
                     </a:solidFill>
                   </a:tcPr>
                 </a:tc>
+                <a:extLst>
+                  <a:ext uri="{0D108BD9-81ED-4DB2-BD59-A6C34878D82A}">
+                    <a16:rowId xmlns:a16="http://schemas.microsoft.com/office/drawing/2014/main" val="10000"/>
+                  </a:ext>
+                </a:extLst>
               </a:tr>
               <a:tr h="292608">
                 <a:tc>
                   <a:txBody>
-                    <a:bodyPr wrap="square"/>
+                    <a:bodyPr/>
                     <a:lstStyle/>
                     <a:p>
                       <a:pPr algn="l"/>
@@ -9356,7 +9320,7 @@
                       </a:r>
                     </a:p>
                   </a:txBody>
-                  <a:tcPr marL="91440" marR="73152" marT="18288" marB="18288">
+                  <a:tcPr marR="73152" marT="18288" marB="18288">
                     <a:solidFill>
                       <a:srgbClr val="FFFFFF"/>
                     </a:solidFill>
@@ -9364,7 +9328,7 @@
                 </a:tc>
                 <a:tc>
                   <a:txBody>
-                    <a:bodyPr wrap="square"/>
+                    <a:bodyPr/>
                     <a:lstStyle/>
                     <a:p>
                       <a:pPr algn="r"/>
@@ -9379,7 +9343,7 @@
                       </a:r>
                     </a:p>
                   </a:txBody>
-                  <a:tcPr marL="91440" marR="73152" marT="18288" marB="18288">
+                  <a:tcPr marR="73152" marT="18288" marB="18288">
                     <a:solidFill>
                       <a:srgbClr val="FFFFFF"/>
                     </a:solidFill>
@@ -9387,7 +9351,7 @@
                 </a:tc>
                 <a:tc>
                   <a:txBody>
-                    <a:bodyPr wrap="square"/>
+                    <a:bodyPr/>
                     <a:lstStyle/>
                     <a:p>
                       <a:pPr algn="r"/>
@@ -9402,7 +9366,7 @@
                       </a:r>
                     </a:p>
                   </a:txBody>
-                  <a:tcPr marL="91440" marR="73152" marT="18288" marB="18288">
+                  <a:tcPr marR="73152" marT="18288" marB="18288">
                     <a:solidFill>
                       <a:srgbClr val="FFFFFF"/>
                     </a:solidFill>
@@ -9410,7 +9374,7 @@
                 </a:tc>
                 <a:tc>
                   <a:txBody>
-                    <a:bodyPr wrap="square"/>
+                    <a:bodyPr/>
                     <a:lstStyle/>
                     <a:p>
                       <a:pPr algn="r"/>
@@ -9425,17 +9389,22 @@
                       </a:r>
                     </a:p>
                   </a:txBody>
-                  <a:tcPr marL="91440" marR="73152" marT="18288" marB="18288">
+                  <a:tcPr marR="73152" marT="18288" marB="18288">
                     <a:solidFill>
                       <a:srgbClr val="FFFFFF"/>
                     </a:solidFill>
                   </a:tcPr>
                 </a:tc>
+                <a:extLst>
+                  <a:ext uri="{0D108BD9-81ED-4DB2-BD59-A6C34878D82A}">
+                    <a16:rowId xmlns:a16="http://schemas.microsoft.com/office/drawing/2014/main" val="10001"/>
+                  </a:ext>
+                </a:extLst>
               </a:tr>
               <a:tr h="292608">
                 <a:tc>
                   <a:txBody>
-                    <a:bodyPr wrap="square"/>
+                    <a:bodyPr/>
                     <a:lstStyle/>
                     <a:p>
                       <a:pPr algn="l"/>
@@ -9450,7 +9419,7 @@
                       </a:r>
                     </a:p>
                   </a:txBody>
-                  <a:tcPr marL="91440" marR="73152" marT="18288" marB="18288">
+                  <a:tcPr marR="73152" marT="18288" marB="18288">
                     <a:solidFill>
                       <a:srgbClr val="FDF3E2"/>
                     </a:solidFill>
@@ -9458,7 +9427,7 @@
                 </a:tc>
                 <a:tc>
                   <a:txBody>
-                    <a:bodyPr wrap="square"/>
+                    <a:bodyPr/>
                     <a:lstStyle/>
                     <a:p>
                       <a:pPr algn="r"/>
@@ -9473,7 +9442,7 @@
                       </a:r>
                     </a:p>
                   </a:txBody>
-                  <a:tcPr marL="91440" marR="73152" marT="18288" marB="18288">
+                  <a:tcPr marR="73152" marT="18288" marB="18288">
                     <a:solidFill>
                       <a:srgbClr val="FDF3E2"/>
                     </a:solidFill>
@@ -9481,7 +9450,7 @@
                 </a:tc>
                 <a:tc>
                   <a:txBody>
-                    <a:bodyPr wrap="square"/>
+                    <a:bodyPr/>
                     <a:lstStyle/>
                     <a:p>
                       <a:pPr algn="r"/>
@@ -9496,7 +9465,7 @@
                       </a:r>
                     </a:p>
                   </a:txBody>
-                  <a:tcPr marL="91440" marR="73152" marT="18288" marB="18288">
+                  <a:tcPr marR="73152" marT="18288" marB="18288">
                     <a:solidFill>
                       <a:srgbClr val="FDF3E2"/>
                     </a:solidFill>
@@ -9504,7 +9473,7 @@
                 </a:tc>
                 <a:tc>
                   <a:txBody>
-                    <a:bodyPr wrap="square"/>
+                    <a:bodyPr/>
                     <a:lstStyle/>
                     <a:p>
                       <a:pPr algn="r"/>
@@ -9519,17 +9488,22 @@
                       </a:r>
                     </a:p>
                   </a:txBody>
-                  <a:tcPr marL="91440" marR="73152" marT="18288" marB="18288">
+                  <a:tcPr marR="73152" marT="18288" marB="18288">
                     <a:solidFill>
                       <a:srgbClr val="FDF3E2"/>
                     </a:solidFill>
                   </a:tcPr>
                 </a:tc>
+                <a:extLst>
+                  <a:ext uri="{0D108BD9-81ED-4DB2-BD59-A6C34878D82A}">
+                    <a16:rowId xmlns:a16="http://schemas.microsoft.com/office/drawing/2014/main" val="10002"/>
+                  </a:ext>
+                </a:extLst>
               </a:tr>
               <a:tr h="292608">
                 <a:tc>
                   <a:txBody>
-                    <a:bodyPr wrap="square"/>
+                    <a:bodyPr/>
                     <a:lstStyle/>
                     <a:p>
                       <a:pPr algn="l"/>
@@ -9544,7 +9518,7 @@
                       </a:r>
                     </a:p>
                   </a:txBody>
-                  <a:tcPr marL="91440" marR="73152" marT="18288" marB="18288">
+                  <a:tcPr marR="73152" marT="18288" marB="18288">
                     <a:solidFill>
                       <a:srgbClr val="FFFFFF"/>
                     </a:solidFill>
@@ -9552,7 +9526,7 @@
                 </a:tc>
                 <a:tc>
                   <a:txBody>
-                    <a:bodyPr wrap="square"/>
+                    <a:bodyPr/>
                     <a:lstStyle/>
                     <a:p>
                       <a:pPr algn="r"/>
@@ -9567,7 +9541,7 @@
                       </a:r>
                     </a:p>
                   </a:txBody>
-                  <a:tcPr marL="91440" marR="73152" marT="18288" marB="18288">
+                  <a:tcPr marR="73152" marT="18288" marB="18288">
                     <a:solidFill>
                       <a:srgbClr val="FFFFFF"/>
                     </a:solidFill>
@@ -9575,7 +9549,7 @@
                 </a:tc>
                 <a:tc>
                   <a:txBody>
-                    <a:bodyPr wrap="square"/>
+                    <a:bodyPr/>
                     <a:lstStyle/>
                     <a:p>
                       <a:pPr algn="r"/>
@@ -9590,7 +9564,7 @@
                       </a:r>
                     </a:p>
                   </a:txBody>
-                  <a:tcPr marL="91440" marR="73152" marT="18288" marB="18288">
+                  <a:tcPr marR="73152" marT="18288" marB="18288">
                     <a:solidFill>
                       <a:srgbClr val="FFFFFF"/>
                     </a:solidFill>
@@ -9598,7 +9572,7 @@
                 </a:tc>
                 <a:tc>
                   <a:txBody>
-                    <a:bodyPr wrap="square"/>
+                    <a:bodyPr/>
                     <a:lstStyle/>
                     <a:p>
                       <a:pPr algn="r"/>
@@ -9613,17 +9587,22 @@
                       </a:r>
                     </a:p>
                   </a:txBody>
-                  <a:tcPr marL="91440" marR="73152" marT="18288" marB="18288">
+                  <a:tcPr marR="73152" marT="18288" marB="18288">
                     <a:solidFill>
                       <a:srgbClr val="FFFFFF"/>
                     </a:solidFill>
                   </a:tcPr>
                 </a:tc>
+                <a:extLst>
+                  <a:ext uri="{0D108BD9-81ED-4DB2-BD59-A6C34878D82A}">
+                    <a16:rowId xmlns:a16="http://schemas.microsoft.com/office/drawing/2014/main" val="10003"/>
+                  </a:ext>
+                </a:extLst>
               </a:tr>
               <a:tr h="292608">
                 <a:tc>
                   <a:txBody>
-                    <a:bodyPr wrap="square"/>
+                    <a:bodyPr/>
                     <a:lstStyle/>
                     <a:p>
                       <a:pPr algn="l"/>
@@ -9638,7 +9617,7 @@
                       </a:r>
                     </a:p>
                   </a:txBody>
-                  <a:tcPr marL="91440" marR="73152" marT="18288" marB="18288">
+                  <a:tcPr marR="73152" marT="18288" marB="18288">
                     <a:solidFill>
                       <a:srgbClr val="F4F6FA"/>
                     </a:solidFill>
@@ -9646,7 +9625,7 @@
                 </a:tc>
                 <a:tc>
                   <a:txBody>
-                    <a:bodyPr wrap="square"/>
+                    <a:bodyPr/>
                     <a:lstStyle/>
                     <a:p>
                       <a:pPr algn="r"/>
@@ -9661,7 +9640,7 @@
                       </a:r>
                     </a:p>
                   </a:txBody>
-                  <a:tcPr marL="91440" marR="73152" marT="18288" marB="18288">
+                  <a:tcPr marR="73152" marT="18288" marB="18288">
                     <a:solidFill>
                       <a:srgbClr val="F4F6FA"/>
                     </a:solidFill>
@@ -9669,7 +9648,7 @@
                 </a:tc>
                 <a:tc>
                   <a:txBody>
-                    <a:bodyPr wrap="square"/>
+                    <a:bodyPr/>
                     <a:lstStyle/>
                     <a:p>
                       <a:pPr algn="r"/>
@@ -9684,7 +9663,7 @@
                       </a:r>
                     </a:p>
                   </a:txBody>
-                  <a:tcPr marL="91440" marR="73152" marT="18288" marB="18288">
+                  <a:tcPr marR="73152" marT="18288" marB="18288">
                     <a:solidFill>
                       <a:srgbClr val="F4F6FA"/>
                     </a:solidFill>
@@ -9692,7 +9671,7 @@
                 </a:tc>
                 <a:tc>
                   <a:txBody>
-                    <a:bodyPr wrap="square"/>
+                    <a:bodyPr/>
                     <a:lstStyle/>
                     <a:p>
                       <a:pPr algn="r"/>
@@ -9707,17 +9686,22 @@
                       </a:r>
                     </a:p>
                   </a:txBody>
-                  <a:tcPr marL="91440" marR="73152" marT="18288" marB="18288">
+                  <a:tcPr marR="73152" marT="18288" marB="18288">
                     <a:solidFill>
                       <a:srgbClr val="F4F6FA"/>
                     </a:solidFill>
                   </a:tcPr>
                 </a:tc>
+                <a:extLst>
+                  <a:ext uri="{0D108BD9-81ED-4DB2-BD59-A6C34878D82A}">
+                    <a16:rowId xmlns:a16="http://schemas.microsoft.com/office/drawing/2014/main" val="10004"/>
+                  </a:ext>
+                </a:extLst>
               </a:tr>
               <a:tr h="292608">
                 <a:tc>
                   <a:txBody>
-                    <a:bodyPr wrap="square"/>
+                    <a:bodyPr/>
                     <a:lstStyle/>
                     <a:p>
                       <a:pPr algn="l"/>
@@ -9732,7 +9716,7 @@
                       </a:r>
                     </a:p>
                   </a:txBody>
-                  <a:tcPr marL="91440" marR="73152" marT="18288" marB="18288">
+                  <a:tcPr marR="73152" marT="18288" marB="18288">
                     <a:solidFill>
                       <a:srgbClr val="FFFFFF"/>
                     </a:solidFill>
@@ -9740,7 +9724,7 @@
                 </a:tc>
                 <a:tc>
                   <a:txBody>
-                    <a:bodyPr wrap="square"/>
+                    <a:bodyPr/>
                     <a:lstStyle/>
                     <a:p>
                       <a:pPr algn="r"/>
@@ -9755,7 +9739,7 @@
                       </a:r>
                     </a:p>
                   </a:txBody>
-                  <a:tcPr marL="91440" marR="73152" marT="18288" marB="18288">
+                  <a:tcPr marR="73152" marT="18288" marB="18288">
                     <a:solidFill>
                       <a:srgbClr val="FFFFFF"/>
                     </a:solidFill>
@@ -9763,7 +9747,7 @@
                 </a:tc>
                 <a:tc>
                   <a:txBody>
-                    <a:bodyPr wrap="square"/>
+                    <a:bodyPr/>
                     <a:lstStyle/>
                     <a:p>
                       <a:pPr algn="r"/>
@@ -9778,7 +9762,7 @@
                       </a:r>
                     </a:p>
                   </a:txBody>
-                  <a:tcPr marL="91440" marR="73152" marT="18288" marB="18288">
+                  <a:tcPr marR="73152" marT="18288" marB="18288">
                     <a:solidFill>
                       <a:srgbClr val="FFFFFF"/>
                     </a:solidFill>
@@ -9786,7 +9770,7 @@
                 </a:tc>
                 <a:tc>
                   <a:txBody>
-                    <a:bodyPr wrap="square"/>
+                    <a:bodyPr/>
                     <a:lstStyle/>
                     <a:p>
                       <a:pPr algn="r"/>
@@ -9801,17 +9785,22 @@
                       </a:r>
                     </a:p>
                   </a:txBody>
-                  <a:tcPr marL="91440" marR="73152" marT="18288" marB="18288">
+                  <a:tcPr marR="73152" marT="18288" marB="18288">
                     <a:solidFill>
                       <a:srgbClr val="FFFFFF"/>
                     </a:solidFill>
                   </a:tcPr>
                 </a:tc>
+                <a:extLst>
+                  <a:ext uri="{0D108BD9-81ED-4DB2-BD59-A6C34878D82A}">
+                    <a16:rowId xmlns:a16="http://schemas.microsoft.com/office/drawing/2014/main" val="10005"/>
+                  </a:ext>
+                </a:extLst>
               </a:tr>
               <a:tr h="292608">
                 <a:tc>
                   <a:txBody>
-                    <a:bodyPr wrap="square"/>
+                    <a:bodyPr/>
                     <a:lstStyle/>
                     <a:p>
                       <a:pPr algn="l"/>
@@ -9826,7 +9815,7 @@
                       </a:r>
                     </a:p>
                   </a:txBody>
-                  <a:tcPr marL="91440" marR="73152" marT="18288" marB="18288">
+                  <a:tcPr marR="73152" marT="18288" marB="18288">
                     <a:solidFill>
                       <a:srgbClr val="F4F6FA"/>
                     </a:solidFill>
@@ -9834,7 +9823,7 @@
                 </a:tc>
                 <a:tc>
                   <a:txBody>
-                    <a:bodyPr wrap="square"/>
+                    <a:bodyPr/>
                     <a:lstStyle/>
                     <a:p>
                       <a:pPr algn="r"/>
@@ -9849,7 +9838,7 @@
                       </a:r>
                     </a:p>
                   </a:txBody>
-                  <a:tcPr marL="91440" marR="73152" marT="18288" marB="18288">
+                  <a:tcPr marR="73152" marT="18288" marB="18288">
                     <a:solidFill>
                       <a:srgbClr val="F4F6FA"/>
                     </a:solidFill>
@@ -9857,7 +9846,7 @@
                 </a:tc>
                 <a:tc>
                   <a:txBody>
-                    <a:bodyPr wrap="square"/>
+                    <a:bodyPr/>
                     <a:lstStyle/>
                     <a:p>
                       <a:pPr algn="r"/>
@@ -9872,7 +9861,7 @@
                       </a:r>
                     </a:p>
                   </a:txBody>
-                  <a:tcPr marL="91440" marR="73152" marT="18288" marB="18288">
+                  <a:tcPr marR="73152" marT="18288" marB="18288">
                     <a:solidFill>
                       <a:srgbClr val="F4F6FA"/>
                     </a:solidFill>
@@ -9880,7 +9869,7 @@
                 </a:tc>
                 <a:tc>
                   <a:txBody>
-                    <a:bodyPr wrap="square"/>
+                    <a:bodyPr/>
                     <a:lstStyle/>
                     <a:p>
                       <a:pPr algn="r"/>
@@ -9895,12 +9884,17 @@
                       </a:r>
                     </a:p>
                   </a:txBody>
-                  <a:tcPr marL="91440" marR="73152" marT="18288" marB="18288">
+                  <a:tcPr marR="73152" marT="18288" marB="18288">
                     <a:solidFill>
                       <a:srgbClr val="F4F6FA"/>
                     </a:solidFill>
                   </a:tcPr>
                 </a:tc>
+                <a:extLst>
+                  <a:ext uri="{0D108BD9-81ED-4DB2-BD59-A6C34878D82A}">
+                    <a16:rowId xmlns:a16="http://schemas.microsoft.com/office/drawing/2014/main" val="10006"/>
+                  </a:ext>
+                </a:extLst>
               </a:tr>
             </a:tbl>
           </a:graphicData>
@@ -10043,7 +10037,9 @@
         <p:txBody>
           <a:bodyPr rtlCol="0" anchor="ctr"/>
           <a:lstStyle/>
-          <a:p/>
+          <a:p>
+            <a:endParaRPr/>
+          </a:p>
         </p:txBody>
       </p:sp>
       <p:sp>
@@ -10128,7 +10124,9 @@
         <p:txBody>
           <a:bodyPr rtlCol="0" anchor="ctr"/>
           <a:lstStyle/>
-          <a:p/>
+          <a:p>
+            <a:endParaRPr/>
+          </a:p>
         </p:txBody>
       </p:sp>
       <p:sp>
@@ -10179,7 +10177,7 @@
 </file>
 
 <file path=ppt/slides/slide19.xml><?xml version="1.0" encoding="utf-8"?>
-<p:sld xmlns:a="http://schemas.openxmlformats.org/drawingml/2006/main" xmlns:p="http://schemas.openxmlformats.org/presentationml/2006/main" xmlns:r="http://schemas.openxmlformats.org/officeDocument/2006/relationships">
+<p:sld xmlns:a="http://schemas.openxmlformats.org/drawingml/2006/main" xmlns:r="http://schemas.openxmlformats.org/officeDocument/2006/relationships" xmlns:p="http://schemas.openxmlformats.org/presentationml/2006/main">
   <p:cSld>
     <p:spTree>
       <p:nvGrpSpPr>
@@ -10187,7 +10185,14 @@
         <p:cNvGrpSpPr/>
         <p:nvPr/>
       </p:nvGrpSpPr>
-      <p:grpSpPr/>
+      <p:grpSpPr>
+        <a:xfrm>
+          <a:off x="0" y="0"/>
+          <a:ext cx="0" cy="0"/>
+          <a:chOff x="0" y="0"/>
+          <a:chExt cx="0" cy="0"/>
+        </a:xfrm>
+      </p:grpSpPr>
       <p:sp>
         <p:nvSpPr>
           <p:cNvPr id="2" name="TextBox 1"/>
@@ -10285,16 +10290,46 @@
                 <a:tableStyleId>{5C22544A-7EE6-4342-B048-85BDC9FD1C3A}</a:tableStyleId>
               </a:tblPr>
               <a:tblGrid>
-                <a:gridCol w="3159104"/>
-                <a:gridCol w="1579552"/>
-                <a:gridCol w="1579552"/>
-                <a:gridCol w="2018316"/>
-                <a:gridCol w="2544834"/>
+                <a:gridCol w="3159104">
+                  <a:extLst>
+                    <a:ext uri="{9D8B030D-6E8A-4147-A177-3AD203B41FA5}">
+                      <a16:colId xmlns:a16="http://schemas.microsoft.com/office/drawing/2014/main" val="20000"/>
+                    </a:ext>
+                  </a:extLst>
+                </a:gridCol>
+                <a:gridCol w="1579552">
+                  <a:extLst>
+                    <a:ext uri="{9D8B030D-6E8A-4147-A177-3AD203B41FA5}">
+                      <a16:colId xmlns:a16="http://schemas.microsoft.com/office/drawing/2014/main" val="20001"/>
+                    </a:ext>
+                  </a:extLst>
+                </a:gridCol>
+                <a:gridCol w="1579552">
+                  <a:extLst>
+                    <a:ext uri="{9D8B030D-6E8A-4147-A177-3AD203B41FA5}">
+                      <a16:colId xmlns:a16="http://schemas.microsoft.com/office/drawing/2014/main" val="20002"/>
+                    </a:ext>
+                  </a:extLst>
+                </a:gridCol>
+                <a:gridCol w="2018316">
+                  <a:extLst>
+                    <a:ext uri="{9D8B030D-6E8A-4147-A177-3AD203B41FA5}">
+                      <a16:colId xmlns:a16="http://schemas.microsoft.com/office/drawing/2014/main" val="20003"/>
+                    </a:ext>
+                  </a:extLst>
+                </a:gridCol>
+                <a:gridCol w="2544834">
+                  <a:extLst>
+                    <a:ext uri="{9D8B030D-6E8A-4147-A177-3AD203B41FA5}">
+                      <a16:colId xmlns:a16="http://schemas.microsoft.com/office/drawing/2014/main" val="20004"/>
+                    </a:ext>
+                  </a:extLst>
+                </a:gridCol>
               </a:tblGrid>
               <a:tr h="384048">
                 <a:tc>
                   <a:txBody>
-                    <a:bodyPr wrap="square"/>
+                    <a:bodyPr/>
                     <a:lstStyle/>
                     <a:p>
                       <a:pPr algn="l"/>
@@ -10309,7 +10344,7 @@
                       </a:r>
                     </a:p>
                   </a:txBody>
-                  <a:tcPr marL="91440" marR="73152" marT="18288" marB="18288">
+                  <a:tcPr marR="73152" marT="18288" marB="18288">
                     <a:solidFill>
                       <a:srgbClr val="1E2761"/>
                     </a:solidFill>
@@ -10317,7 +10352,7 @@
                 </a:tc>
                 <a:tc>
                   <a:txBody>
-                    <a:bodyPr wrap="square"/>
+                    <a:bodyPr/>
                     <a:lstStyle/>
                     <a:p>
                       <a:pPr algn="r"/>
@@ -10332,7 +10367,7 @@
                       </a:r>
                     </a:p>
                   </a:txBody>
-                  <a:tcPr marL="91440" marR="73152" marT="18288" marB="18288">
+                  <a:tcPr marR="73152" marT="18288" marB="18288">
                     <a:solidFill>
                       <a:srgbClr val="1E2761"/>
                     </a:solidFill>
@@ -10340,7 +10375,7 @@
                 </a:tc>
                 <a:tc>
                   <a:txBody>
-                    <a:bodyPr wrap="square"/>
+                    <a:bodyPr/>
                     <a:lstStyle/>
                     <a:p>
                       <a:pPr algn="r"/>
@@ -10355,7 +10390,7 @@
                       </a:r>
                     </a:p>
                   </a:txBody>
-                  <a:tcPr marL="91440" marR="73152" marT="18288" marB="18288">
+                  <a:tcPr marR="73152" marT="18288" marB="18288">
                     <a:solidFill>
                       <a:srgbClr val="1E2761"/>
                     </a:solidFill>
@@ -10363,7 +10398,7 @@
                 </a:tc>
                 <a:tc>
                   <a:txBody>
-                    <a:bodyPr wrap="square"/>
+                    <a:bodyPr/>
                     <a:lstStyle/>
                     <a:p>
                       <a:pPr algn="r"/>
@@ -10378,7 +10413,7 @@
                       </a:r>
                     </a:p>
                   </a:txBody>
-                  <a:tcPr marL="91440" marR="73152" marT="18288" marB="18288">
+                  <a:tcPr marR="73152" marT="18288" marB="18288">
                     <a:solidFill>
                       <a:srgbClr val="1E2761"/>
                     </a:solidFill>
@@ -10386,7 +10421,7 @@
                 </a:tc>
                 <a:tc>
                   <a:txBody>
-                    <a:bodyPr wrap="square"/>
+                    <a:bodyPr/>
                     <a:lstStyle/>
                     <a:p>
                       <a:pPr algn="r"/>
@@ -10401,17 +10436,22 @@
                       </a:r>
                     </a:p>
                   </a:txBody>
-                  <a:tcPr marL="91440" marR="73152" marT="18288" marB="18288">
+                  <a:tcPr marR="73152" marT="18288" marB="18288">
                     <a:solidFill>
                       <a:srgbClr val="1E2761"/>
                     </a:solidFill>
                   </a:tcPr>
                 </a:tc>
+                <a:extLst>
+                  <a:ext uri="{0D108BD9-81ED-4DB2-BD59-A6C34878D82A}">
+                    <a16:rowId xmlns:a16="http://schemas.microsoft.com/office/drawing/2014/main" val="10000"/>
+                  </a:ext>
+                </a:extLst>
               </a:tr>
               <a:tr h="329184">
                 <a:tc>
                   <a:txBody>
-                    <a:bodyPr wrap="square"/>
+                    <a:bodyPr/>
                     <a:lstStyle/>
                     <a:p>
                       <a:pPr algn="l"/>
@@ -10426,7 +10466,7 @@
                       </a:r>
                     </a:p>
                   </a:txBody>
-                  <a:tcPr marL="91440" marR="73152" marT="18288" marB="18288">
+                  <a:tcPr marR="73152" marT="18288" marB="18288">
                     <a:solidFill>
                       <a:srgbClr val="FFFFFF"/>
                     </a:solidFill>
@@ -10434,7 +10474,7 @@
                 </a:tc>
                 <a:tc>
                   <a:txBody>
-                    <a:bodyPr wrap="square"/>
+                    <a:bodyPr/>
                     <a:lstStyle/>
                     <a:p>
                       <a:pPr algn="r"/>
@@ -10449,7 +10489,7 @@
                       </a:r>
                     </a:p>
                   </a:txBody>
-                  <a:tcPr marL="91440" marR="73152" marT="18288" marB="18288">
+                  <a:tcPr marR="73152" marT="18288" marB="18288">
                     <a:solidFill>
                       <a:srgbClr val="FFFFFF"/>
                     </a:solidFill>
@@ -10457,7 +10497,7 @@
                 </a:tc>
                 <a:tc>
                   <a:txBody>
-                    <a:bodyPr wrap="square"/>
+                    <a:bodyPr/>
                     <a:lstStyle/>
                     <a:p>
                       <a:pPr algn="r"/>
@@ -10472,7 +10512,7 @@
                       </a:r>
                     </a:p>
                   </a:txBody>
-                  <a:tcPr marL="91440" marR="73152" marT="18288" marB="18288">
+                  <a:tcPr marR="73152" marT="18288" marB="18288">
                     <a:solidFill>
                       <a:srgbClr val="FFFFFF"/>
                     </a:solidFill>
@@ -10480,7 +10520,7 @@
                 </a:tc>
                 <a:tc>
                   <a:txBody>
-                    <a:bodyPr wrap="square"/>
+                    <a:bodyPr/>
                     <a:lstStyle/>
                     <a:p>
                       <a:pPr algn="r"/>
@@ -10495,7 +10535,7 @@
                       </a:r>
                     </a:p>
                   </a:txBody>
-                  <a:tcPr marL="91440" marR="73152" marT="18288" marB="18288">
+                  <a:tcPr marR="73152" marT="18288" marB="18288">
                     <a:solidFill>
                       <a:srgbClr val="FFFFFF"/>
                     </a:solidFill>
@@ -10503,7 +10543,7 @@
                 </a:tc>
                 <a:tc>
                   <a:txBody>
-                    <a:bodyPr wrap="square"/>
+                    <a:bodyPr/>
                     <a:lstStyle/>
                     <a:p>
                       <a:pPr algn="r"/>
@@ -10518,17 +10558,22 @@
                       </a:r>
                     </a:p>
                   </a:txBody>
-                  <a:tcPr marL="91440" marR="73152" marT="18288" marB="18288">
+                  <a:tcPr marR="73152" marT="18288" marB="18288">
                     <a:solidFill>
                       <a:srgbClr val="FFFFFF"/>
                     </a:solidFill>
                   </a:tcPr>
                 </a:tc>
+                <a:extLst>
+                  <a:ext uri="{0D108BD9-81ED-4DB2-BD59-A6C34878D82A}">
+                    <a16:rowId xmlns:a16="http://schemas.microsoft.com/office/drawing/2014/main" val="10001"/>
+                  </a:ext>
+                </a:extLst>
               </a:tr>
               <a:tr h="329184">
                 <a:tc>
                   <a:txBody>
-                    <a:bodyPr wrap="square"/>
+                    <a:bodyPr/>
                     <a:lstStyle/>
                     <a:p>
                       <a:pPr algn="l"/>
@@ -10543,7 +10588,7 @@
                       </a:r>
                     </a:p>
                   </a:txBody>
-                  <a:tcPr marL="91440" marR="73152" marT="18288" marB="18288">
+                  <a:tcPr marR="73152" marT="18288" marB="18288">
                     <a:solidFill>
                       <a:srgbClr val="FDF3E2"/>
                     </a:solidFill>
@@ -10551,7 +10596,7 @@
                 </a:tc>
                 <a:tc>
                   <a:txBody>
-                    <a:bodyPr wrap="square"/>
+                    <a:bodyPr/>
                     <a:lstStyle/>
                     <a:p>
                       <a:pPr algn="r"/>
@@ -10566,7 +10611,7 @@
                       </a:r>
                     </a:p>
                   </a:txBody>
-                  <a:tcPr marL="91440" marR="73152" marT="18288" marB="18288">
+                  <a:tcPr marR="73152" marT="18288" marB="18288">
                     <a:solidFill>
                       <a:srgbClr val="FDF3E2"/>
                     </a:solidFill>
@@ -10574,7 +10619,7 @@
                 </a:tc>
                 <a:tc>
                   <a:txBody>
-                    <a:bodyPr wrap="square"/>
+                    <a:bodyPr/>
                     <a:lstStyle/>
                     <a:p>
                       <a:pPr algn="r"/>
@@ -10589,7 +10634,7 @@
                       </a:r>
                     </a:p>
                   </a:txBody>
-                  <a:tcPr marL="91440" marR="73152" marT="18288" marB="18288">
+                  <a:tcPr marR="73152" marT="18288" marB="18288">
                     <a:solidFill>
                       <a:srgbClr val="FDF3E2"/>
                     </a:solidFill>
@@ -10597,7 +10642,7 @@
                 </a:tc>
                 <a:tc>
                   <a:txBody>
-                    <a:bodyPr wrap="square"/>
+                    <a:bodyPr/>
                     <a:lstStyle/>
                     <a:p>
                       <a:pPr algn="r"/>
@@ -10612,7 +10657,7 @@
                       </a:r>
                     </a:p>
                   </a:txBody>
-                  <a:tcPr marL="91440" marR="73152" marT="18288" marB="18288">
+                  <a:tcPr marR="73152" marT="18288" marB="18288">
                     <a:solidFill>
                       <a:srgbClr val="FDF3E2"/>
                     </a:solidFill>
@@ -10620,7 +10665,7 @@
                 </a:tc>
                 <a:tc>
                   <a:txBody>
-                    <a:bodyPr wrap="square"/>
+                    <a:bodyPr/>
                     <a:lstStyle/>
                     <a:p>
                       <a:pPr algn="r"/>
@@ -10635,17 +10680,22 @@
                       </a:r>
                     </a:p>
                   </a:txBody>
-                  <a:tcPr marL="91440" marR="73152" marT="18288" marB="18288">
+                  <a:tcPr marR="73152" marT="18288" marB="18288">
                     <a:solidFill>
                       <a:srgbClr val="FDF3E2"/>
                     </a:solidFill>
                   </a:tcPr>
                 </a:tc>
+                <a:extLst>
+                  <a:ext uri="{0D108BD9-81ED-4DB2-BD59-A6C34878D82A}">
+                    <a16:rowId xmlns:a16="http://schemas.microsoft.com/office/drawing/2014/main" val="10002"/>
+                  </a:ext>
+                </a:extLst>
               </a:tr>
               <a:tr h="329184">
                 <a:tc>
                   <a:txBody>
-                    <a:bodyPr wrap="square"/>
+                    <a:bodyPr/>
                     <a:lstStyle/>
                     <a:p>
                       <a:pPr algn="l"/>
@@ -10660,7 +10710,7 @@
                       </a:r>
                     </a:p>
                   </a:txBody>
-                  <a:tcPr marL="91440" marR="73152" marT="18288" marB="18288">
+                  <a:tcPr marR="73152" marT="18288" marB="18288">
                     <a:solidFill>
                       <a:srgbClr val="FFFFFF"/>
                     </a:solidFill>
@@ -10668,7 +10718,7 @@
                 </a:tc>
                 <a:tc>
                   <a:txBody>
-                    <a:bodyPr wrap="square"/>
+                    <a:bodyPr/>
                     <a:lstStyle/>
                     <a:p>
                       <a:pPr algn="r"/>
@@ -10683,7 +10733,7 @@
                       </a:r>
                     </a:p>
                   </a:txBody>
-                  <a:tcPr marL="91440" marR="73152" marT="18288" marB="18288">
+                  <a:tcPr marR="73152" marT="18288" marB="18288">
                     <a:solidFill>
                       <a:srgbClr val="FFFFFF"/>
                     </a:solidFill>
@@ -10691,7 +10741,7 @@
                 </a:tc>
                 <a:tc>
                   <a:txBody>
-                    <a:bodyPr wrap="square"/>
+                    <a:bodyPr/>
                     <a:lstStyle/>
                     <a:p>
                       <a:pPr algn="r"/>
@@ -10706,7 +10756,7 @@
                       </a:r>
                     </a:p>
                   </a:txBody>
-                  <a:tcPr marL="91440" marR="73152" marT="18288" marB="18288">
+                  <a:tcPr marR="73152" marT="18288" marB="18288">
                     <a:solidFill>
                       <a:srgbClr val="FFFFFF"/>
                     </a:solidFill>
@@ -10714,7 +10764,7 @@
                 </a:tc>
                 <a:tc>
                   <a:txBody>
-                    <a:bodyPr wrap="square"/>
+                    <a:bodyPr/>
                     <a:lstStyle/>
                     <a:p>
                       <a:pPr algn="r"/>
@@ -10729,7 +10779,7 @@
                       </a:r>
                     </a:p>
                   </a:txBody>
-                  <a:tcPr marL="91440" marR="73152" marT="18288" marB="18288">
+                  <a:tcPr marR="73152" marT="18288" marB="18288">
                     <a:solidFill>
                       <a:srgbClr val="FFFFFF"/>
                     </a:solidFill>
@@ -10737,7 +10787,7 @@
                 </a:tc>
                 <a:tc>
                   <a:txBody>
-                    <a:bodyPr wrap="square"/>
+                    <a:bodyPr/>
                     <a:lstStyle/>
                     <a:p>
                       <a:pPr algn="r"/>
@@ -10752,12 +10802,17 @@
                       </a:r>
                     </a:p>
                   </a:txBody>
-                  <a:tcPr marL="91440" marR="73152" marT="18288" marB="18288">
+                  <a:tcPr marR="73152" marT="18288" marB="18288">
                     <a:solidFill>
                       <a:srgbClr val="FFFFFF"/>
                     </a:solidFill>
                   </a:tcPr>
                 </a:tc>
+                <a:extLst>
+                  <a:ext uri="{0D108BD9-81ED-4DB2-BD59-A6C34878D82A}">
+                    <a16:rowId xmlns:a16="http://schemas.microsoft.com/office/drawing/2014/main" val="10003"/>
+                  </a:ext>
+                </a:extLst>
               </a:tr>
             </a:tbl>
           </a:graphicData>
@@ -11088,7 +11143,9 @@
         <p:txBody>
           <a:bodyPr rtlCol="0" anchor="ctr"/>
           <a:lstStyle/>
-          <a:p/>
+          <a:p>
+            <a:endParaRPr/>
+          </a:p>
         </p:txBody>
       </p:sp>
       <p:sp>
@@ -11134,15 +11191,12 @@
                 <a:spcPct val="105000"/>
               </a:lnSpc>
             </a:pPr>
-            <a:r>
-              <a:rPr sz="1300" b="0">
-                <a:solidFill>
-                  <a:srgbClr val="1B1B1F"/>
-                </a:solidFill>
-                <a:latin typeface="Calibri"/>
-              </a:rPr>
-              <a:t/>
-            </a:r>
+            <a:endParaRPr sz="1300" b="0">
+              <a:solidFill>
+                <a:srgbClr val="1B1B1F"/>
+              </a:solidFill>
+              <a:latin typeface="Calibri"/>
+            </a:endParaRPr>
           </a:p>
           <a:p>
             <a:pPr algn="l">
@@ -11205,7 +11259,9 @@
         <p:txBody>
           <a:bodyPr rtlCol="0" anchor="ctr"/>
           <a:lstStyle/>
-          <a:p/>
+          <a:p>
+            <a:endParaRPr/>
+          </a:p>
         </p:txBody>
       </p:sp>
       <p:sp>
@@ -11251,15 +11307,12 @@
                 <a:spcPct val="105000"/>
               </a:lnSpc>
             </a:pPr>
-            <a:r>
-              <a:rPr sz="1300" b="0">
-                <a:solidFill>
-                  <a:srgbClr val="1B1B1F"/>
-                </a:solidFill>
-                <a:latin typeface="Calibri"/>
-              </a:rPr>
-              <a:t/>
-            </a:r>
+            <a:endParaRPr sz="1300" b="0">
+              <a:solidFill>
+                <a:srgbClr val="1B1B1F"/>
+              </a:solidFill>
+              <a:latin typeface="Calibri"/>
+            </a:endParaRPr>
           </a:p>
           <a:p>
             <a:pPr algn="l">
@@ -11894,7 +11947,7 @@
 </file>
 
 <file path=ppt/slides/slide20.xml><?xml version="1.0" encoding="utf-8"?>
-<p:sld xmlns:a="http://schemas.openxmlformats.org/drawingml/2006/main" xmlns:p="http://schemas.openxmlformats.org/presentationml/2006/main" xmlns:r="http://schemas.openxmlformats.org/officeDocument/2006/relationships">
+<p:sld xmlns:a="http://schemas.openxmlformats.org/drawingml/2006/main" xmlns:r="http://schemas.openxmlformats.org/officeDocument/2006/relationships" xmlns:p="http://schemas.openxmlformats.org/presentationml/2006/main">
   <p:cSld>
     <p:spTree>
       <p:nvGrpSpPr>
@@ -11902,7 +11955,14 @@
         <p:cNvGrpSpPr/>
         <p:nvPr/>
       </p:nvGrpSpPr>
-      <p:grpSpPr/>
+      <p:grpSpPr>
+        <a:xfrm>
+          <a:off x="0" y="0"/>
+          <a:ext cx="0" cy="0"/>
+          <a:chOff x="0" y="0"/>
+          <a:chExt cx="0" cy="0"/>
+        </a:xfrm>
+      </p:grpSpPr>
       <p:sp>
         <p:nvSpPr>
           <p:cNvPr id="2" name="TextBox 1"/>
@@ -11991,7 +12051,7 @@
         </p:nvGraphicFramePr>
         <p:xfrm>
           <a:off x="640080" y="1691640"/>
-          <a:ext cx="10881356" cy="2029968"/>
+          <a:ext cx="10881356" cy="2087880"/>
         </p:xfrm>
         <a:graphic>
           <a:graphicData uri="http://schemas.openxmlformats.org/drawingml/2006/table">
@@ -12000,17 +12060,53 @@
                 <a:tableStyleId>{5C22544A-7EE6-4342-B048-85BDC9FD1C3A}</a:tableStyleId>
               </a:tblPr>
               <a:tblGrid>
-                <a:gridCol w="3520440"/>
-                <a:gridCol w="1760220"/>
-                <a:gridCol w="1520189"/>
-                <a:gridCol w="1280159"/>
-                <a:gridCol w="1520189"/>
-                <a:gridCol w="1280159"/>
+                <a:gridCol w="3520440">
+                  <a:extLst>
+                    <a:ext uri="{9D8B030D-6E8A-4147-A177-3AD203B41FA5}">
+                      <a16:colId xmlns:a16="http://schemas.microsoft.com/office/drawing/2014/main" val="20000"/>
+                    </a:ext>
+                  </a:extLst>
+                </a:gridCol>
+                <a:gridCol w="1760220">
+                  <a:extLst>
+                    <a:ext uri="{9D8B030D-6E8A-4147-A177-3AD203B41FA5}">
+                      <a16:colId xmlns:a16="http://schemas.microsoft.com/office/drawing/2014/main" val="20001"/>
+                    </a:ext>
+                  </a:extLst>
+                </a:gridCol>
+                <a:gridCol w="1520189">
+                  <a:extLst>
+                    <a:ext uri="{9D8B030D-6E8A-4147-A177-3AD203B41FA5}">
+                      <a16:colId xmlns:a16="http://schemas.microsoft.com/office/drawing/2014/main" val="20002"/>
+                    </a:ext>
+                  </a:extLst>
+                </a:gridCol>
+                <a:gridCol w="1280159">
+                  <a:extLst>
+                    <a:ext uri="{9D8B030D-6E8A-4147-A177-3AD203B41FA5}">
+                      <a16:colId xmlns:a16="http://schemas.microsoft.com/office/drawing/2014/main" val="20003"/>
+                    </a:ext>
+                  </a:extLst>
+                </a:gridCol>
+                <a:gridCol w="1520189">
+                  <a:extLst>
+                    <a:ext uri="{9D8B030D-6E8A-4147-A177-3AD203B41FA5}">
+                      <a16:colId xmlns:a16="http://schemas.microsoft.com/office/drawing/2014/main" val="20004"/>
+                    </a:ext>
+                  </a:extLst>
+                </a:gridCol>
+                <a:gridCol w="1280159">
+                  <a:extLst>
+                    <a:ext uri="{9D8B030D-6E8A-4147-A177-3AD203B41FA5}">
+                      <a16:colId xmlns:a16="http://schemas.microsoft.com/office/drawing/2014/main" val="20005"/>
+                    </a:ext>
+                  </a:extLst>
+                </a:gridCol>
               </a:tblGrid>
               <a:tr h="384048">
                 <a:tc>
                   <a:txBody>
-                    <a:bodyPr wrap="square"/>
+                    <a:bodyPr/>
                     <a:lstStyle/>
                     <a:p>
                       <a:pPr algn="l"/>
@@ -12025,7 +12121,7 @@
                       </a:r>
                     </a:p>
                   </a:txBody>
-                  <a:tcPr marL="91440" marR="73152" marT="18288" marB="18288">
+                  <a:tcPr marR="73152" marT="18288" marB="18288">
                     <a:solidFill>
                       <a:srgbClr val="1E2761"/>
                     </a:solidFill>
@@ -12033,7 +12129,7 @@
                 </a:tc>
                 <a:tc>
                   <a:txBody>
-                    <a:bodyPr wrap="square"/>
+                    <a:bodyPr/>
                     <a:lstStyle/>
                     <a:p>
                       <a:pPr algn="r"/>
@@ -12048,7 +12144,7 @@
                       </a:r>
                     </a:p>
                   </a:txBody>
-                  <a:tcPr marL="91440" marR="73152" marT="18288" marB="18288">
+                  <a:tcPr marR="73152" marT="18288" marB="18288">
                     <a:solidFill>
                       <a:srgbClr val="1E2761"/>
                     </a:solidFill>
@@ -12056,7 +12152,7 @@
                 </a:tc>
                 <a:tc>
                   <a:txBody>
-                    <a:bodyPr wrap="square"/>
+                    <a:bodyPr/>
                     <a:lstStyle/>
                     <a:p>
                       <a:pPr algn="r"/>
@@ -12071,7 +12167,7 @@
                       </a:r>
                     </a:p>
                   </a:txBody>
-                  <a:tcPr marL="91440" marR="73152" marT="18288" marB="18288">
+                  <a:tcPr marR="73152" marT="18288" marB="18288">
                     <a:solidFill>
                       <a:srgbClr val="1E2761"/>
                     </a:solidFill>
@@ -12079,7 +12175,7 @@
                 </a:tc>
                 <a:tc>
                   <a:txBody>
-                    <a:bodyPr wrap="square"/>
+                    <a:bodyPr/>
                     <a:lstStyle/>
                     <a:p>
                       <a:pPr algn="r"/>
@@ -12094,7 +12190,7 @@
                       </a:r>
                     </a:p>
                   </a:txBody>
-                  <a:tcPr marL="91440" marR="73152" marT="18288" marB="18288">
+                  <a:tcPr marR="73152" marT="18288" marB="18288">
                     <a:solidFill>
                       <a:srgbClr val="1E2761"/>
                     </a:solidFill>
@@ -12102,7 +12198,7 @@
                 </a:tc>
                 <a:tc>
                   <a:txBody>
-                    <a:bodyPr wrap="square"/>
+                    <a:bodyPr/>
                     <a:lstStyle/>
                     <a:p>
                       <a:pPr algn="r"/>
@@ -12117,7 +12213,7 @@
                       </a:r>
                     </a:p>
                   </a:txBody>
-                  <a:tcPr marL="91440" marR="73152" marT="18288" marB="18288">
+                  <a:tcPr marR="73152" marT="18288" marB="18288">
                     <a:solidFill>
                       <a:srgbClr val="1E2761"/>
                     </a:solidFill>
@@ -12125,7 +12221,7 @@
                 </a:tc>
                 <a:tc>
                   <a:txBody>
-                    <a:bodyPr wrap="square"/>
+                    <a:bodyPr/>
                     <a:lstStyle/>
                     <a:p>
                       <a:pPr algn="r"/>
@@ -12140,17 +12236,22 @@
                       </a:r>
                     </a:p>
                   </a:txBody>
-                  <a:tcPr marL="91440" marR="73152" marT="18288" marB="18288">
+                  <a:tcPr marR="73152" marT="18288" marB="18288">
                     <a:solidFill>
                       <a:srgbClr val="1E2761"/>
                     </a:solidFill>
                   </a:tcPr>
                 </a:tc>
+                <a:extLst>
+                  <a:ext uri="{0D108BD9-81ED-4DB2-BD59-A6C34878D82A}">
+                    <a16:rowId xmlns:a16="http://schemas.microsoft.com/office/drawing/2014/main" val="10000"/>
+                  </a:ext>
+                </a:extLst>
               </a:tr>
               <a:tr h="329184">
                 <a:tc>
                   <a:txBody>
-                    <a:bodyPr wrap="square"/>
+                    <a:bodyPr/>
                     <a:lstStyle/>
                     <a:p>
                       <a:pPr algn="l"/>
@@ -12165,7 +12266,7 @@
                       </a:r>
                     </a:p>
                   </a:txBody>
-                  <a:tcPr marL="91440" marR="73152" marT="18288" marB="18288">
+                  <a:tcPr marR="73152" marT="18288" marB="18288">
                     <a:solidFill>
                       <a:srgbClr val="FFFFFF"/>
                     </a:solidFill>
@@ -12173,7 +12274,7 @@
                 </a:tc>
                 <a:tc>
                   <a:txBody>
-                    <a:bodyPr wrap="square"/>
+                    <a:bodyPr/>
                     <a:lstStyle/>
                     <a:p>
                       <a:pPr algn="r"/>
@@ -12188,7 +12289,7 @@
                       </a:r>
                     </a:p>
                   </a:txBody>
-                  <a:tcPr marL="91440" marR="73152" marT="18288" marB="18288">
+                  <a:tcPr marR="73152" marT="18288" marB="18288">
                     <a:solidFill>
                       <a:srgbClr val="FFFFFF"/>
                     </a:solidFill>
@@ -12196,7 +12297,7 @@
                 </a:tc>
                 <a:tc>
                   <a:txBody>
-                    <a:bodyPr wrap="square"/>
+                    <a:bodyPr/>
                     <a:lstStyle/>
                     <a:p>
                       <a:pPr algn="r"/>
@@ -12211,7 +12312,7 @@
                       </a:r>
                     </a:p>
                   </a:txBody>
-                  <a:tcPr marL="91440" marR="73152" marT="18288" marB="18288">
+                  <a:tcPr marR="73152" marT="18288" marB="18288">
                     <a:solidFill>
                       <a:srgbClr val="FFFFFF"/>
                     </a:solidFill>
@@ -12219,7 +12320,7 @@
                 </a:tc>
                 <a:tc>
                   <a:txBody>
-                    <a:bodyPr wrap="square"/>
+                    <a:bodyPr/>
                     <a:lstStyle/>
                     <a:p>
                       <a:pPr algn="r"/>
@@ -12234,7 +12335,7 @@
                       </a:r>
                     </a:p>
                   </a:txBody>
-                  <a:tcPr marL="91440" marR="73152" marT="18288" marB="18288">
+                  <a:tcPr marR="73152" marT="18288" marB="18288">
                     <a:solidFill>
                       <a:srgbClr val="FFFFFF"/>
                     </a:solidFill>
@@ -12242,7 +12343,7 @@
                 </a:tc>
                 <a:tc>
                   <a:txBody>
-                    <a:bodyPr wrap="square"/>
+                    <a:bodyPr/>
                     <a:lstStyle/>
                     <a:p>
                       <a:pPr algn="r"/>
@@ -12257,7 +12358,7 @@
                       </a:r>
                     </a:p>
                   </a:txBody>
-                  <a:tcPr marL="91440" marR="73152" marT="18288" marB="18288">
+                  <a:tcPr marR="73152" marT="18288" marB="18288">
                     <a:solidFill>
                       <a:srgbClr val="FFFFFF"/>
                     </a:solidFill>
@@ -12265,7 +12366,7 @@
                 </a:tc>
                 <a:tc>
                   <a:txBody>
-                    <a:bodyPr wrap="square"/>
+                    <a:bodyPr/>
                     <a:lstStyle/>
                     <a:p>
                       <a:pPr algn="r"/>
@@ -12280,17 +12381,22 @@
                       </a:r>
                     </a:p>
                   </a:txBody>
-                  <a:tcPr marL="91440" marR="73152" marT="18288" marB="18288">
+                  <a:tcPr marR="73152" marT="18288" marB="18288">
                     <a:solidFill>
                       <a:srgbClr val="FFFFFF"/>
                     </a:solidFill>
                   </a:tcPr>
                 </a:tc>
+                <a:extLst>
+                  <a:ext uri="{0D108BD9-81ED-4DB2-BD59-A6C34878D82A}">
+                    <a16:rowId xmlns:a16="http://schemas.microsoft.com/office/drawing/2014/main" val="10001"/>
+                  </a:ext>
+                </a:extLst>
               </a:tr>
               <a:tr h="329184">
                 <a:tc>
                   <a:txBody>
-                    <a:bodyPr wrap="square"/>
+                    <a:bodyPr/>
                     <a:lstStyle/>
                     <a:p>
                       <a:pPr algn="l"/>
@@ -12305,7 +12411,7 @@
                       </a:r>
                     </a:p>
                   </a:txBody>
-                  <a:tcPr marL="91440" marR="73152" marT="18288" marB="18288">
+                  <a:tcPr marR="73152" marT="18288" marB="18288">
                     <a:solidFill>
                       <a:srgbClr val="FDF3E2"/>
                     </a:solidFill>
@@ -12313,7 +12419,7 @@
                 </a:tc>
                 <a:tc>
                   <a:txBody>
-                    <a:bodyPr wrap="square"/>
+                    <a:bodyPr/>
                     <a:lstStyle/>
                     <a:p>
                       <a:pPr algn="r"/>
@@ -12328,7 +12434,7 @@
                       </a:r>
                     </a:p>
                   </a:txBody>
-                  <a:tcPr marL="91440" marR="73152" marT="18288" marB="18288">
+                  <a:tcPr marR="73152" marT="18288" marB="18288">
                     <a:solidFill>
                       <a:srgbClr val="FDF3E2"/>
                     </a:solidFill>
@@ -12336,7 +12442,7 @@
                 </a:tc>
                 <a:tc>
                   <a:txBody>
-                    <a:bodyPr wrap="square"/>
+                    <a:bodyPr/>
                     <a:lstStyle/>
                     <a:p>
                       <a:pPr algn="r"/>
@@ -12351,7 +12457,7 @@
                       </a:r>
                     </a:p>
                   </a:txBody>
-                  <a:tcPr marL="91440" marR="73152" marT="18288" marB="18288">
+                  <a:tcPr marR="73152" marT="18288" marB="18288">
                     <a:solidFill>
                       <a:srgbClr val="FDF3E2"/>
                     </a:solidFill>
@@ -12359,7 +12465,7 @@
                 </a:tc>
                 <a:tc>
                   <a:txBody>
-                    <a:bodyPr wrap="square"/>
+                    <a:bodyPr/>
                     <a:lstStyle/>
                     <a:p>
                       <a:pPr algn="r"/>
@@ -12374,7 +12480,7 @@
                       </a:r>
                     </a:p>
                   </a:txBody>
-                  <a:tcPr marL="91440" marR="73152" marT="18288" marB="18288">
+                  <a:tcPr marR="73152" marT="18288" marB="18288">
                     <a:solidFill>
                       <a:srgbClr val="FDF3E2"/>
                     </a:solidFill>
@@ -12382,7 +12488,7 @@
                 </a:tc>
                 <a:tc>
                   <a:txBody>
-                    <a:bodyPr wrap="square"/>
+                    <a:bodyPr/>
                     <a:lstStyle/>
                     <a:p>
                       <a:pPr algn="r"/>
@@ -12397,7 +12503,7 @@
                       </a:r>
                     </a:p>
                   </a:txBody>
-                  <a:tcPr marL="91440" marR="73152" marT="18288" marB="18288">
+                  <a:tcPr marR="73152" marT="18288" marB="18288">
                     <a:solidFill>
                       <a:srgbClr val="FDF3E2"/>
                     </a:solidFill>
@@ -12405,7 +12511,7 @@
                 </a:tc>
                 <a:tc>
                   <a:txBody>
-                    <a:bodyPr wrap="square"/>
+                    <a:bodyPr/>
                     <a:lstStyle/>
                     <a:p>
                       <a:pPr algn="r"/>
@@ -12420,17 +12526,22 @@
                       </a:r>
                     </a:p>
                   </a:txBody>
-                  <a:tcPr marL="91440" marR="73152" marT="18288" marB="18288">
+                  <a:tcPr marR="73152" marT="18288" marB="18288">
                     <a:solidFill>
                       <a:srgbClr val="FDF3E2"/>
                     </a:solidFill>
                   </a:tcPr>
                 </a:tc>
+                <a:extLst>
+                  <a:ext uri="{0D108BD9-81ED-4DB2-BD59-A6C34878D82A}">
+                    <a16:rowId xmlns:a16="http://schemas.microsoft.com/office/drawing/2014/main" val="10002"/>
+                  </a:ext>
+                </a:extLst>
               </a:tr>
               <a:tr h="329184">
                 <a:tc>
                   <a:txBody>
-                    <a:bodyPr wrap="square"/>
+                    <a:bodyPr/>
                     <a:lstStyle/>
                     <a:p>
                       <a:pPr algn="l"/>
@@ -12445,7 +12556,7 @@
                       </a:r>
                     </a:p>
                   </a:txBody>
-                  <a:tcPr marL="91440" marR="73152" marT="18288" marB="18288">
+                  <a:tcPr marR="73152" marT="18288" marB="18288">
                     <a:solidFill>
                       <a:srgbClr val="FFFFFF"/>
                     </a:solidFill>
@@ -12453,7 +12564,7 @@
                 </a:tc>
                 <a:tc>
                   <a:txBody>
-                    <a:bodyPr wrap="square"/>
+                    <a:bodyPr/>
                     <a:lstStyle/>
                     <a:p>
                       <a:pPr algn="r"/>
@@ -12468,7 +12579,7 @@
                       </a:r>
                     </a:p>
                   </a:txBody>
-                  <a:tcPr marL="91440" marR="73152" marT="18288" marB="18288">
+                  <a:tcPr marR="73152" marT="18288" marB="18288">
                     <a:solidFill>
                       <a:srgbClr val="FFFFFF"/>
                     </a:solidFill>
@@ -12476,7 +12587,7 @@
                 </a:tc>
                 <a:tc>
                   <a:txBody>
-                    <a:bodyPr wrap="square"/>
+                    <a:bodyPr/>
                     <a:lstStyle/>
                     <a:p>
                       <a:pPr algn="r"/>
@@ -12491,7 +12602,7 @@
                       </a:r>
                     </a:p>
                   </a:txBody>
-                  <a:tcPr marL="91440" marR="73152" marT="18288" marB="18288">
+                  <a:tcPr marR="73152" marT="18288" marB="18288">
                     <a:solidFill>
                       <a:srgbClr val="FFFFFF"/>
                     </a:solidFill>
@@ -12499,7 +12610,7 @@
                 </a:tc>
                 <a:tc>
                   <a:txBody>
-                    <a:bodyPr wrap="square"/>
+                    <a:bodyPr/>
                     <a:lstStyle/>
                     <a:p>
                       <a:pPr algn="r"/>
@@ -12514,7 +12625,7 @@
                       </a:r>
                     </a:p>
                   </a:txBody>
-                  <a:tcPr marL="91440" marR="73152" marT="18288" marB="18288">
+                  <a:tcPr marR="73152" marT="18288" marB="18288">
                     <a:solidFill>
                       <a:srgbClr val="FFFFFF"/>
                     </a:solidFill>
@@ -12522,7 +12633,7 @@
                 </a:tc>
                 <a:tc>
                   <a:txBody>
-                    <a:bodyPr wrap="square"/>
+                    <a:bodyPr/>
                     <a:lstStyle/>
                     <a:p>
                       <a:pPr algn="r"/>
@@ -12537,7 +12648,7 @@
                       </a:r>
                     </a:p>
                   </a:txBody>
-                  <a:tcPr marL="91440" marR="73152" marT="18288" marB="18288">
+                  <a:tcPr marR="73152" marT="18288" marB="18288">
                     <a:solidFill>
                       <a:srgbClr val="FFFFFF"/>
                     </a:solidFill>
@@ -12545,7 +12656,7 @@
                 </a:tc>
                 <a:tc>
                   <a:txBody>
-                    <a:bodyPr wrap="square"/>
+                    <a:bodyPr/>
                     <a:lstStyle/>
                     <a:p>
                       <a:pPr algn="r"/>
@@ -12560,17 +12671,22 @@
                       </a:r>
                     </a:p>
                   </a:txBody>
-                  <a:tcPr marL="91440" marR="73152" marT="18288" marB="18288">
+                  <a:tcPr marR="73152" marT="18288" marB="18288">
                     <a:solidFill>
                       <a:srgbClr val="FFFFFF"/>
                     </a:solidFill>
                   </a:tcPr>
                 </a:tc>
+                <a:extLst>
+                  <a:ext uri="{0D108BD9-81ED-4DB2-BD59-A6C34878D82A}">
+                    <a16:rowId xmlns:a16="http://schemas.microsoft.com/office/drawing/2014/main" val="10003"/>
+                  </a:ext>
+                </a:extLst>
               </a:tr>
               <a:tr h="329184">
                 <a:tc>
                   <a:txBody>
-                    <a:bodyPr wrap="square"/>
+                    <a:bodyPr/>
                     <a:lstStyle/>
                     <a:p>
                       <a:pPr algn="l"/>
@@ -12585,7 +12701,7 @@
                       </a:r>
                     </a:p>
                   </a:txBody>
-                  <a:tcPr marL="91440" marR="73152" marT="18288" marB="18288">
+                  <a:tcPr marR="73152" marT="18288" marB="18288">
                     <a:solidFill>
                       <a:srgbClr val="F4F6FA"/>
                     </a:solidFill>
@@ -12593,7 +12709,7 @@
                 </a:tc>
                 <a:tc>
                   <a:txBody>
-                    <a:bodyPr wrap="square"/>
+                    <a:bodyPr/>
                     <a:lstStyle/>
                     <a:p>
                       <a:pPr algn="r"/>
@@ -12608,7 +12724,7 @@
                       </a:r>
                     </a:p>
                   </a:txBody>
-                  <a:tcPr marL="91440" marR="73152" marT="18288" marB="18288">
+                  <a:tcPr marR="73152" marT="18288" marB="18288">
                     <a:solidFill>
                       <a:srgbClr val="F4F6FA"/>
                     </a:solidFill>
@@ -12616,7 +12732,7 @@
                 </a:tc>
                 <a:tc>
                   <a:txBody>
-                    <a:bodyPr wrap="square"/>
+                    <a:bodyPr/>
                     <a:lstStyle/>
                     <a:p>
                       <a:pPr algn="r"/>
@@ -12631,7 +12747,7 @@
                       </a:r>
                     </a:p>
                   </a:txBody>
-                  <a:tcPr marL="91440" marR="73152" marT="18288" marB="18288">
+                  <a:tcPr marR="73152" marT="18288" marB="18288">
                     <a:solidFill>
                       <a:srgbClr val="F4F6FA"/>
                     </a:solidFill>
@@ -12639,7 +12755,7 @@
                 </a:tc>
                 <a:tc>
                   <a:txBody>
-                    <a:bodyPr wrap="square"/>
+                    <a:bodyPr/>
                     <a:lstStyle/>
                     <a:p>
                       <a:pPr algn="r"/>
@@ -12654,7 +12770,7 @@
                       </a:r>
                     </a:p>
                   </a:txBody>
-                  <a:tcPr marL="91440" marR="73152" marT="18288" marB="18288">
+                  <a:tcPr marR="73152" marT="18288" marB="18288">
                     <a:solidFill>
                       <a:srgbClr val="F4F6FA"/>
                     </a:solidFill>
@@ -12662,7 +12778,7 @@
                 </a:tc>
                 <a:tc>
                   <a:txBody>
-                    <a:bodyPr wrap="square"/>
+                    <a:bodyPr/>
                     <a:lstStyle/>
                     <a:p>
                       <a:pPr algn="r"/>
@@ -12677,7 +12793,7 @@
                       </a:r>
                     </a:p>
                   </a:txBody>
-                  <a:tcPr marL="91440" marR="73152" marT="18288" marB="18288">
+                  <a:tcPr marR="73152" marT="18288" marB="18288">
                     <a:solidFill>
                       <a:srgbClr val="F4F6FA"/>
                     </a:solidFill>
@@ -12685,7 +12801,7 @@
                 </a:tc>
                 <a:tc>
                   <a:txBody>
-                    <a:bodyPr wrap="square"/>
+                    <a:bodyPr/>
                     <a:lstStyle/>
                     <a:p>
                       <a:pPr algn="r"/>
@@ -12700,17 +12816,22 @@
                       </a:r>
                     </a:p>
                   </a:txBody>
-                  <a:tcPr marL="91440" marR="73152" marT="18288" marB="18288">
+                  <a:tcPr marR="73152" marT="18288" marB="18288">
                     <a:solidFill>
                       <a:srgbClr val="F4F6FA"/>
                     </a:solidFill>
                   </a:tcPr>
                 </a:tc>
+                <a:extLst>
+                  <a:ext uri="{0D108BD9-81ED-4DB2-BD59-A6C34878D82A}">
+                    <a16:rowId xmlns:a16="http://schemas.microsoft.com/office/drawing/2014/main" val="10004"/>
+                  </a:ext>
+                </a:extLst>
               </a:tr>
               <a:tr h="329184">
                 <a:tc>
                   <a:txBody>
-                    <a:bodyPr wrap="square"/>
+                    <a:bodyPr/>
                     <a:lstStyle/>
                     <a:p>
                       <a:pPr algn="l"/>
@@ -12725,7 +12846,7 @@
                       </a:r>
                     </a:p>
                   </a:txBody>
-                  <a:tcPr marL="91440" marR="73152" marT="18288" marB="18288">
+                  <a:tcPr marR="73152" marT="18288" marB="18288">
                     <a:solidFill>
                       <a:srgbClr val="FFFFFF"/>
                     </a:solidFill>
@@ -12733,7 +12854,7 @@
                 </a:tc>
                 <a:tc>
                   <a:txBody>
-                    <a:bodyPr wrap="square"/>
+                    <a:bodyPr/>
                     <a:lstStyle/>
                     <a:p>
                       <a:pPr algn="r"/>
@@ -12748,7 +12869,7 @@
                       </a:r>
                     </a:p>
                   </a:txBody>
-                  <a:tcPr marL="91440" marR="73152" marT="18288" marB="18288">
+                  <a:tcPr marR="73152" marT="18288" marB="18288">
                     <a:solidFill>
                       <a:srgbClr val="FFFFFF"/>
                     </a:solidFill>
@@ -12756,7 +12877,7 @@
                 </a:tc>
                 <a:tc>
                   <a:txBody>
-                    <a:bodyPr wrap="square"/>
+                    <a:bodyPr/>
                     <a:lstStyle/>
                     <a:p>
                       <a:pPr algn="r"/>
@@ -12771,7 +12892,7 @@
                       </a:r>
                     </a:p>
                   </a:txBody>
-                  <a:tcPr marL="91440" marR="73152" marT="18288" marB="18288">
+                  <a:tcPr marR="73152" marT="18288" marB="18288">
                     <a:solidFill>
                       <a:srgbClr val="FFFFFF"/>
                     </a:solidFill>
@@ -12779,7 +12900,7 @@
                 </a:tc>
                 <a:tc>
                   <a:txBody>
-                    <a:bodyPr wrap="square"/>
+                    <a:bodyPr/>
                     <a:lstStyle/>
                     <a:p>
                       <a:pPr algn="r"/>
@@ -12794,7 +12915,7 @@
                       </a:r>
                     </a:p>
                   </a:txBody>
-                  <a:tcPr marL="91440" marR="73152" marT="18288" marB="18288">
+                  <a:tcPr marR="73152" marT="18288" marB="18288">
                     <a:solidFill>
                       <a:srgbClr val="FFFFFF"/>
                     </a:solidFill>
@@ -12802,7 +12923,7 @@
                 </a:tc>
                 <a:tc>
                   <a:txBody>
-                    <a:bodyPr wrap="square"/>
+                    <a:bodyPr/>
                     <a:lstStyle/>
                     <a:p>
                       <a:pPr algn="r"/>
@@ -12817,7 +12938,7 @@
                       </a:r>
                     </a:p>
                   </a:txBody>
-                  <a:tcPr marL="91440" marR="73152" marT="18288" marB="18288">
+                  <a:tcPr marR="73152" marT="18288" marB="18288">
                     <a:solidFill>
                       <a:srgbClr val="FFFFFF"/>
                     </a:solidFill>
@@ -12825,7 +12946,7 @@
                 </a:tc>
                 <a:tc>
                   <a:txBody>
-                    <a:bodyPr wrap="square"/>
+                    <a:bodyPr/>
                     <a:lstStyle/>
                     <a:p>
                       <a:pPr algn="r"/>
@@ -12840,12 +12961,17 @@
                       </a:r>
                     </a:p>
                   </a:txBody>
-                  <a:tcPr marL="91440" marR="73152" marT="18288" marB="18288">
+                  <a:tcPr marR="73152" marT="18288" marB="18288">
                     <a:solidFill>
                       <a:srgbClr val="FFFFFF"/>
                     </a:solidFill>
                   </a:tcPr>
                 </a:tc>
+                <a:extLst>
+                  <a:ext uri="{0D108BD9-81ED-4DB2-BD59-A6C34878D82A}">
+                    <a16:rowId xmlns:a16="http://schemas.microsoft.com/office/drawing/2014/main" val="10005"/>
+                  </a:ext>
+                </a:extLst>
               </a:tr>
             </a:tbl>
           </a:graphicData>
@@ -12972,7 +13098,9 @@
         <p:txBody>
           <a:bodyPr rtlCol="0" anchor="ctr"/>
           <a:lstStyle/>
-          <a:p/>
+          <a:p>
+            <a:endParaRPr/>
+          </a:p>
         </p:txBody>
       </p:sp>
       <p:sp>
@@ -13023,7 +13151,7 @@
 </file>
 
 <file path=ppt/slides/slide21.xml><?xml version="1.0" encoding="utf-8"?>
-<p:sld xmlns:a="http://schemas.openxmlformats.org/drawingml/2006/main" xmlns:p="http://schemas.openxmlformats.org/presentationml/2006/main" xmlns:r="http://schemas.openxmlformats.org/officeDocument/2006/relationships">
+<p:sld xmlns:a="http://schemas.openxmlformats.org/drawingml/2006/main" xmlns:r="http://schemas.openxmlformats.org/officeDocument/2006/relationships" xmlns:p="http://schemas.openxmlformats.org/presentationml/2006/main">
   <p:cSld>
     <p:spTree>
       <p:nvGrpSpPr>
@@ -13031,7 +13159,14 @@
         <p:cNvGrpSpPr/>
         <p:nvPr/>
       </p:nvGrpSpPr>
-      <p:grpSpPr/>
+      <p:grpSpPr>
+        <a:xfrm>
+          <a:off x="0" y="0"/>
+          <a:ext cx="0" cy="0"/>
+          <a:chOff x="0" y="0"/>
+          <a:chExt cx="0" cy="0"/>
+        </a:xfrm>
+      </p:grpSpPr>
       <p:sp>
         <p:nvSpPr>
           <p:cNvPr id="2" name="TextBox 1"/>
@@ -13060,7 +13195,7 @@
               </a:lnSpc>
             </a:pPr>
             <a:r>
-              <a:rPr sz="2600" b="1">
+              <a:rPr sz="2600" b="1" dirty="0">
                 <a:solidFill>
                   <a:srgbClr val="1E2761"/>
                 </a:solidFill>
@@ -13079,7 +13214,7 @@
         </p:nvSpPr>
         <p:spPr>
           <a:xfrm>
-            <a:off x="640080" y="1033271"/>
+            <a:off x="655320" y="1179576"/>
             <a:ext cx="10881360" cy="384048"/>
           </a:xfrm>
           <a:prstGeom prst="rect">
@@ -13099,7 +13234,7 @@
               </a:lnSpc>
             </a:pPr>
             <a:r>
-              <a:rPr sz="1350" b="0">
+              <a:rPr sz="1350" b="0" dirty="0">
                 <a:solidFill>
                   <a:srgbClr val="5A6270"/>
                 </a:solidFill>
@@ -13129,17 +13264,53 @@
                 <a:tableStyleId>{5C22544A-7EE6-4342-B048-85BDC9FD1C3A}</a:tableStyleId>
               </a:tblPr>
               <a:tblGrid>
-                <a:gridCol w="1687032"/>
-                <a:gridCol w="1518329"/>
-                <a:gridCol w="1433977"/>
-                <a:gridCol w="2699252"/>
-                <a:gridCol w="1518329"/>
-                <a:gridCol w="2024439"/>
+                <a:gridCol w="1687032">
+                  <a:extLst>
+                    <a:ext uri="{9D8B030D-6E8A-4147-A177-3AD203B41FA5}">
+                      <a16:colId xmlns:a16="http://schemas.microsoft.com/office/drawing/2014/main" val="20000"/>
+                    </a:ext>
+                  </a:extLst>
+                </a:gridCol>
+                <a:gridCol w="1518329">
+                  <a:extLst>
+                    <a:ext uri="{9D8B030D-6E8A-4147-A177-3AD203B41FA5}">
+                      <a16:colId xmlns:a16="http://schemas.microsoft.com/office/drawing/2014/main" val="20001"/>
+                    </a:ext>
+                  </a:extLst>
+                </a:gridCol>
+                <a:gridCol w="1433977">
+                  <a:extLst>
+                    <a:ext uri="{9D8B030D-6E8A-4147-A177-3AD203B41FA5}">
+                      <a16:colId xmlns:a16="http://schemas.microsoft.com/office/drawing/2014/main" val="20002"/>
+                    </a:ext>
+                  </a:extLst>
+                </a:gridCol>
+                <a:gridCol w="2699252">
+                  <a:extLst>
+                    <a:ext uri="{9D8B030D-6E8A-4147-A177-3AD203B41FA5}">
+                      <a16:colId xmlns:a16="http://schemas.microsoft.com/office/drawing/2014/main" val="20003"/>
+                    </a:ext>
+                  </a:extLst>
+                </a:gridCol>
+                <a:gridCol w="1518329">
+                  <a:extLst>
+                    <a:ext uri="{9D8B030D-6E8A-4147-A177-3AD203B41FA5}">
+                      <a16:colId xmlns:a16="http://schemas.microsoft.com/office/drawing/2014/main" val="20004"/>
+                    </a:ext>
+                  </a:extLst>
+                </a:gridCol>
+                <a:gridCol w="2024439">
+                  <a:extLst>
+                    <a:ext uri="{9D8B030D-6E8A-4147-A177-3AD203B41FA5}">
+                      <a16:colId xmlns:a16="http://schemas.microsoft.com/office/drawing/2014/main" val="20005"/>
+                    </a:ext>
+                  </a:extLst>
+                </a:gridCol>
               </a:tblGrid>
               <a:tr h="384048">
                 <a:tc>
                   <a:txBody>
-                    <a:bodyPr wrap="square"/>
+                    <a:bodyPr/>
                     <a:lstStyle/>
                     <a:p>
                       <a:pPr algn="l"/>
@@ -13154,7 +13325,7 @@
                       </a:r>
                     </a:p>
                   </a:txBody>
-                  <a:tcPr marL="91440" marR="73152" marT="18288" marB="18288">
+                  <a:tcPr marR="73152" marT="18288" marB="18288">
                     <a:solidFill>
                       <a:srgbClr val="1E2761"/>
                     </a:solidFill>
@@ -13162,7 +13333,7 @@
                 </a:tc>
                 <a:tc>
                   <a:txBody>
-                    <a:bodyPr wrap="square"/>
+                    <a:bodyPr/>
                     <a:lstStyle/>
                     <a:p>
                       <a:pPr algn="r"/>
@@ -13177,7 +13348,7 @@
                       </a:r>
                     </a:p>
                   </a:txBody>
-                  <a:tcPr marL="91440" marR="73152" marT="18288" marB="18288">
+                  <a:tcPr marR="73152" marT="18288" marB="18288">
                     <a:solidFill>
                       <a:srgbClr val="1E2761"/>
                     </a:solidFill>
@@ -13185,7 +13356,7 @@
                 </a:tc>
                 <a:tc>
                   <a:txBody>
-                    <a:bodyPr wrap="square"/>
+                    <a:bodyPr/>
                     <a:lstStyle/>
                     <a:p>
                       <a:pPr algn="r"/>
@@ -13200,7 +13371,7 @@
                       </a:r>
                     </a:p>
                   </a:txBody>
-                  <a:tcPr marL="91440" marR="73152" marT="18288" marB="18288">
+                  <a:tcPr marR="73152" marT="18288" marB="18288">
                     <a:solidFill>
                       <a:srgbClr val="1E2761"/>
                     </a:solidFill>
@@ -13208,7 +13379,7 @@
                 </a:tc>
                 <a:tc>
                   <a:txBody>
-                    <a:bodyPr wrap="square"/>
+                    <a:bodyPr/>
                     <a:lstStyle/>
                     <a:p>
                       <a:pPr algn="r"/>
@@ -13223,7 +13394,7 @@
                       </a:r>
                     </a:p>
                   </a:txBody>
-                  <a:tcPr marL="91440" marR="73152" marT="18288" marB="18288">
+                  <a:tcPr marR="73152" marT="18288" marB="18288">
                     <a:solidFill>
                       <a:srgbClr val="1E2761"/>
                     </a:solidFill>
@@ -13231,7 +13402,7 @@
                 </a:tc>
                 <a:tc>
                   <a:txBody>
-                    <a:bodyPr wrap="square"/>
+                    <a:bodyPr/>
                     <a:lstStyle/>
                     <a:p>
                       <a:pPr algn="r"/>
@@ -13246,7 +13417,7 @@
                       </a:r>
                     </a:p>
                   </a:txBody>
-                  <a:tcPr marL="91440" marR="73152" marT="18288" marB="18288">
+                  <a:tcPr marR="73152" marT="18288" marB="18288">
                     <a:solidFill>
                       <a:srgbClr val="1E2761"/>
                     </a:solidFill>
@@ -13254,7 +13425,7 @@
                 </a:tc>
                 <a:tc>
                   <a:txBody>
-                    <a:bodyPr wrap="square"/>
+                    <a:bodyPr/>
                     <a:lstStyle/>
                     <a:p>
                       <a:pPr algn="r"/>
@@ -13269,17 +13440,22 @@
                       </a:r>
                     </a:p>
                   </a:txBody>
-                  <a:tcPr marL="91440" marR="73152" marT="18288" marB="18288">
+                  <a:tcPr marR="73152" marT="18288" marB="18288">
                     <a:solidFill>
                       <a:srgbClr val="1E2761"/>
                     </a:solidFill>
                   </a:tcPr>
                 </a:tc>
+                <a:extLst>
+                  <a:ext uri="{0D108BD9-81ED-4DB2-BD59-A6C34878D82A}">
+                    <a16:rowId xmlns:a16="http://schemas.microsoft.com/office/drawing/2014/main" val="10000"/>
+                  </a:ext>
+                </a:extLst>
               </a:tr>
               <a:tr h="301752">
                 <a:tc>
                   <a:txBody>
-                    <a:bodyPr wrap="square"/>
+                    <a:bodyPr/>
                     <a:lstStyle/>
                     <a:p>
                       <a:pPr algn="l"/>
@@ -13294,7 +13470,7 @@
                       </a:r>
                     </a:p>
                   </a:txBody>
-                  <a:tcPr marL="91440" marR="73152" marT="18288" marB="18288">
+                  <a:tcPr marR="73152" marT="18288" marB="18288">
                     <a:solidFill>
                       <a:srgbClr val="FFFFFF"/>
                     </a:solidFill>
@@ -13302,7 +13478,7 @@
                 </a:tc>
                 <a:tc>
                   <a:txBody>
-                    <a:bodyPr wrap="square"/>
+                    <a:bodyPr/>
                     <a:lstStyle/>
                     <a:p>
                       <a:pPr algn="r"/>
@@ -13317,7 +13493,7 @@
                       </a:r>
                     </a:p>
                   </a:txBody>
-                  <a:tcPr marL="91440" marR="73152" marT="18288" marB="18288">
+                  <a:tcPr marR="73152" marT="18288" marB="18288">
                     <a:solidFill>
                       <a:srgbClr val="FFFFFF"/>
                     </a:solidFill>
@@ -13325,7 +13501,7 @@
                 </a:tc>
                 <a:tc>
                   <a:txBody>
-                    <a:bodyPr wrap="square"/>
+                    <a:bodyPr/>
                     <a:lstStyle/>
                     <a:p>
                       <a:pPr algn="r"/>
@@ -13340,7 +13516,7 @@
                       </a:r>
                     </a:p>
                   </a:txBody>
-                  <a:tcPr marL="91440" marR="73152" marT="18288" marB="18288">
+                  <a:tcPr marR="73152" marT="18288" marB="18288">
                     <a:solidFill>
                       <a:srgbClr val="FFFFFF"/>
                     </a:solidFill>
@@ -13348,7 +13524,7 @@
                 </a:tc>
                 <a:tc>
                   <a:txBody>
-                    <a:bodyPr wrap="square"/>
+                    <a:bodyPr/>
                     <a:lstStyle/>
                     <a:p>
                       <a:pPr algn="r"/>
@@ -13363,7 +13539,7 @@
                       </a:r>
                     </a:p>
                   </a:txBody>
-                  <a:tcPr marL="91440" marR="73152" marT="18288" marB="18288">
+                  <a:tcPr marR="73152" marT="18288" marB="18288">
                     <a:solidFill>
                       <a:srgbClr val="FFFFFF"/>
                     </a:solidFill>
@@ -13371,7 +13547,7 @@
                 </a:tc>
                 <a:tc>
                   <a:txBody>
-                    <a:bodyPr wrap="square"/>
+                    <a:bodyPr/>
                     <a:lstStyle/>
                     <a:p>
                       <a:pPr algn="r"/>
@@ -13386,7 +13562,7 @@
                       </a:r>
                     </a:p>
                   </a:txBody>
-                  <a:tcPr marL="91440" marR="73152" marT="18288" marB="18288">
+                  <a:tcPr marR="73152" marT="18288" marB="18288">
                     <a:solidFill>
                       <a:srgbClr val="FFFFFF"/>
                     </a:solidFill>
@@ -13394,7 +13570,7 @@
                 </a:tc>
                 <a:tc>
                   <a:txBody>
-                    <a:bodyPr wrap="square"/>
+                    <a:bodyPr/>
                     <a:lstStyle/>
                     <a:p>
                       <a:pPr algn="r"/>
@@ -13409,17 +13585,22 @@
                       </a:r>
                     </a:p>
                   </a:txBody>
-                  <a:tcPr marL="91440" marR="73152" marT="18288" marB="18288">
+                  <a:tcPr marR="73152" marT="18288" marB="18288">
                     <a:solidFill>
                       <a:srgbClr val="FFFFFF"/>
                     </a:solidFill>
                   </a:tcPr>
                 </a:tc>
+                <a:extLst>
+                  <a:ext uri="{0D108BD9-81ED-4DB2-BD59-A6C34878D82A}">
+                    <a16:rowId xmlns:a16="http://schemas.microsoft.com/office/drawing/2014/main" val="10001"/>
+                  </a:ext>
+                </a:extLst>
               </a:tr>
               <a:tr h="301752">
                 <a:tc>
                   <a:txBody>
-                    <a:bodyPr wrap="square"/>
+                    <a:bodyPr/>
                     <a:lstStyle/>
                     <a:p>
                       <a:pPr algn="l"/>
@@ -13434,7 +13615,7 @@
                       </a:r>
                     </a:p>
                   </a:txBody>
-                  <a:tcPr marL="91440" marR="73152" marT="18288" marB="18288">
+                  <a:tcPr marR="73152" marT="18288" marB="18288">
                     <a:solidFill>
                       <a:srgbClr val="FDF3E2"/>
                     </a:solidFill>
@@ -13442,7 +13623,7 @@
                 </a:tc>
                 <a:tc>
                   <a:txBody>
-                    <a:bodyPr wrap="square"/>
+                    <a:bodyPr/>
                     <a:lstStyle/>
                     <a:p>
                       <a:pPr algn="r"/>
@@ -13457,7 +13638,7 @@
                       </a:r>
                     </a:p>
                   </a:txBody>
-                  <a:tcPr marL="91440" marR="73152" marT="18288" marB="18288">
+                  <a:tcPr marR="73152" marT="18288" marB="18288">
                     <a:solidFill>
                       <a:srgbClr val="FDF3E2"/>
                     </a:solidFill>
@@ -13465,7 +13646,7 @@
                 </a:tc>
                 <a:tc>
                   <a:txBody>
-                    <a:bodyPr wrap="square"/>
+                    <a:bodyPr/>
                     <a:lstStyle/>
                     <a:p>
                       <a:pPr algn="r"/>
@@ -13480,7 +13661,7 @@
                       </a:r>
                     </a:p>
                   </a:txBody>
-                  <a:tcPr marL="91440" marR="73152" marT="18288" marB="18288">
+                  <a:tcPr marR="73152" marT="18288" marB="18288">
                     <a:solidFill>
                       <a:srgbClr val="FDF3E2"/>
                     </a:solidFill>
@@ -13488,7 +13669,7 @@
                 </a:tc>
                 <a:tc>
                   <a:txBody>
-                    <a:bodyPr wrap="square"/>
+                    <a:bodyPr/>
                     <a:lstStyle/>
                     <a:p>
                       <a:pPr algn="r"/>
@@ -13503,7 +13684,7 @@
                       </a:r>
                     </a:p>
                   </a:txBody>
-                  <a:tcPr marL="91440" marR="73152" marT="18288" marB="18288">
+                  <a:tcPr marR="73152" marT="18288" marB="18288">
                     <a:solidFill>
                       <a:srgbClr val="FDF3E2"/>
                     </a:solidFill>
@@ -13511,7 +13692,7 @@
                 </a:tc>
                 <a:tc>
                   <a:txBody>
-                    <a:bodyPr wrap="square"/>
+                    <a:bodyPr/>
                     <a:lstStyle/>
                     <a:p>
                       <a:pPr algn="r"/>
@@ -13526,7 +13707,7 @@
                       </a:r>
                     </a:p>
                   </a:txBody>
-                  <a:tcPr marL="91440" marR="73152" marT="18288" marB="18288">
+                  <a:tcPr marR="73152" marT="18288" marB="18288">
                     <a:solidFill>
                       <a:srgbClr val="FDF3E2"/>
                     </a:solidFill>
@@ -13534,7 +13715,7 @@
                 </a:tc>
                 <a:tc>
                   <a:txBody>
-                    <a:bodyPr wrap="square"/>
+                    <a:bodyPr/>
                     <a:lstStyle/>
                     <a:p>
                       <a:pPr algn="r"/>
@@ -13549,17 +13730,22 @@
                       </a:r>
                     </a:p>
                   </a:txBody>
-                  <a:tcPr marL="91440" marR="73152" marT="18288" marB="18288">
+                  <a:tcPr marR="73152" marT="18288" marB="18288">
                     <a:solidFill>
                       <a:srgbClr val="FDF3E2"/>
                     </a:solidFill>
                   </a:tcPr>
                 </a:tc>
+                <a:extLst>
+                  <a:ext uri="{0D108BD9-81ED-4DB2-BD59-A6C34878D82A}">
+                    <a16:rowId xmlns:a16="http://schemas.microsoft.com/office/drawing/2014/main" val="10002"/>
+                  </a:ext>
+                </a:extLst>
               </a:tr>
               <a:tr h="301752">
                 <a:tc>
                   <a:txBody>
-                    <a:bodyPr wrap="square"/>
+                    <a:bodyPr/>
                     <a:lstStyle/>
                     <a:p>
                       <a:pPr algn="l"/>
@@ -13574,7 +13760,7 @@
                       </a:r>
                     </a:p>
                   </a:txBody>
-                  <a:tcPr marL="91440" marR="73152" marT="18288" marB="18288">
+                  <a:tcPr marR="73152" marT="18288" marB="18288">
                     <a:solidFill>
                       <a:srgbClr val="FFFFFF"/>
                     </a:solidFill>
@@ -13582,7 +13768,7 @@
                 </a:tc>
                 <a:tc>
                   <a:txBody>
-                    <a:bodyPr wrap="square"/>
+                    <a:bodyPr/>
                     <a:lstStyle/>
                     <a:p>
                       <a:pPr algn="r"/>
@@ -13597,7 +13783,7 @@
                       </a:r>
                     </a:p>
                   </a:txBody>
-                  <a:tcPr marL="91440" marR="73152" marT="18288" marB="18288">
+                  <a:tcPr marR="73152" marT="18288" marB="18288">
                     <a:solidFill>
                       <a:srgbClr val="FFFFFF"/>
                     </a:solidFill>
@@ -13605,7 +13791,7 @@
                 </a:tc>
                 <a:tc>
                   <a:txBody>
-                    <a:bodyPr wrap="square"/>
+                    <a:bodyPr/>
                     <a:lstStyle/>
                     <a:p>
                       <a:pPr algn="r"/>
@@ -13620,7 +13806,7 @@
                       </a:r>
                     </a:p>
                   </a:txBody>
-                  <a:tcPr marL="91440" marR="73152" marT="18288" marB="18288">
+                  <a:tcPr marR="73152" marT="18288" marB="18288">
                     <a:solidFill>
                       <a:srgbClr val="FFFFFF"/>
                     </a:solidFill>
@@ -13628,7 +13814,7 @@
                 </a:tc>
                 <a:tc>
                   <a:txBody>
-                    <a:bodyPr wrap="square"/>
+                    <a:bodyPr/>
                     <a:lstStyle/>
                     <a:p>
                       <a:pPr algn="r"/>
@@ -13643,7 +13829,7 @@
                       </a:r>
                     </a:p>
                   </a:txBody>
-                  <a:tcPr marL="91440" marR="73152" marT="18288" marB="18288">
+                  <a:tcPr marR="73152" marT="18288" marB="18288">
                     <a:solidFill>
                       <a:srgbClr val="FFFFFF"/>
                     </a:solidFill>
@@ -13651,7 +13837,7 @@
                 </a:tc>
                 <a:tc>
                   <a:txBody>
-                    <a:bodyPr wrap="square"/>
+                    <a:bodyPr/>
                     <a:lstStyle/>
                     <a:p>
                       <a:pPr algn="r"/>
@@ -13666,7 +13852,7 @@
                       </a:r>
                     </a:p>
                   </a:txBody>
-                  <a:tcPr marL="91440" marR="73152" marT="18288" marB="18288">
+                  <a:tcPr marR="73152" marT="18288" marB="18288">
                     <a:solidFill>
                       <a:srgbClr val="FFFFFF"/>
                     </a:solidFill>
@@ -13674,7 +13860,7 @@
                 </a:tc>
                 <a:tc>
                   <a:txBody>
-                    <a:bodyPr wrap="square"/>
+                    <a:bodyPr/>
                     <a:lstStyle/>
                     <a:p>
                       <a:pPr algn="r"/>
@@ -13689,17 +13875,22 @@
                       </a:r>
                     </a:p>
                   </a:txBody>
-                  <a:tcPr marL="91440" marR="73152" marT="18288" marB="18288">
+                  <a:tcPr marR="73152" marT="18288" marB="18288">
                     <a:solidFill>
                       <a:srgbClr val="FFFFFF"/>
                     </a:solidFill>
                   </a:tcPr>
                 </a:tc>
+                <a:extLst>
+                  <a:ext uri="{0D108BD9-81ED-4DB2-BD59-A6C34878D82A}">
+                    <a16:rowId xmlns:a16="http://schemas.microsoft.com/office/drawing/2014/main" val="10003"/>
+                  </a:ext>
+                </a:extLst>
               </a:tr>
               <a:tr h="301752">
                 <a:tc>
                   <a:txBody>
-                    <a:bodyPr wrap="square"/>
+                    <a:bodyPr/>
                     <a:lstStyle/>
                     <a:p>
                       <a:pPr algn="l"/>
@@ -13714,7 +13905,7 @@
                       </a:r>
                     </a:p>
                   </a:txBody>
-                  <a:tcPr marL="91440" marR="73152" marT="18288" marB="18288">
+                  <a:tcPr marR="73152" marT="18288" marB="18288">
                     <a:solidFill>
                       <a:srgbClr val="F4F6FA"/>
                     </a:solidFill>
@@ -13722,7 +13913,7 @@
                 </a:tc>
                 <a:tc>
                   <a:txBody>
-                    <a:bodyPr wrap="square"/>
+                    <a:bodyPr/>
                     <a:lstStyle/>
                     <a:p>
                       <a:pPr algn="r"/>
@@ -13737,7 +13928,7 @@
                       </a:r>
                     </a:p>
                   </a:txBody>
-                  <a:tcPr marL="91440" marR="73152" marT="18288" marB="18288">
+                  <a:tcPr marR="73152" marT="18288" marB="18288">
                     <a:solidFill>
                       <a:srgbClr val="F4F6FA"/>
                     </a:solidFill>
@@ -13745,7 +13936,7 @@
                 </a:tc>
                 <a:tc>
                   <a:txBody>
-                    <a:bodyPr wrap="square"/>
+                    <a:bodyPr/>
                     <a:lstStyle/>
                     <a:p>
                       <a:pPr algn="r"/>
@@ -13760,7 +13951,7 @@
                       </a:r>
                     </a:p>
                   </a:txBody>
-                  <a:tcPr marL="91440" marR="73152" marT="18288" marB="18288">
+                  <a:tcPr marR="73152" marT="18288" marB="18288">
                     <a:solidFill>
                       <a:srgbClr val="F4F6FA"/>
                     </a:solidFill>
@@ -13768,7 +13959,7 @@
                 </a:tc>
                 <a:tc>
                   <a:txBody>
-                    <a:bodyPr wrap="square"/>
+                    <a:bodyPr/>
                     <a:lstStyle/>
                     <a:p>
                       <a:pPr algn="r"/>
@@ -13783,7 +13974,7 @@
                       </a:r>
                     </a:p>
                   </a:txBody>
-                  <a:tcPr marL="91440" marR="73152" marT="18288" marB="18288">
+                  <a:tcPr marR="73152" marT="18288" marB="18288">
                     <a:solidFill>
                       <a:srgbClr val="F4F6FA"/>
                     </a:solidFill>
@@ -13791,7 +13982,7 @@
                 </a:tc>
                 <a:tc>
                   <a:txBody>
-                    <a:bodyPr wrap="square"/>
+                    <a:bodyPr/>
                     <a:lstStyle/>
                     <a:p>
                       <a:pPr algn="r"/>
@@ -13806,7 +13997,7 @@
                       </a:r>
                     </a:p>
                   </a:txBody>
-                  <a:tcPr marL="91440" marR="73152" marT="18288" marB="18288">
+                  <a:tcPr marR="73152" marT="18288" marB="18288">
                     <a:solidFill>
                       <a:srgbClr val="F4F6FA"/>
                     </a:solidFill>
@@ -13814,7 +14005,7 @@
                 </a:tc>
                 <a:tc>
                   <a:txBody>
-                    <a:bodyPr wrap="square"/>
+                    <a:bodyPr/>
                     <a:lstStyle/>
                     <a:p>
                       <a:pPr algn="r"/>
@@ -13829,17 +14020,22 @@
                       </a:r>
                     </a:p>
                   </a:txBody>
-                  <a:tcPr marL="91440" marR="73152" marT="18288" marB="18288">
+                  <a:tcPr marR="73152" marT="18288" marB="18288">
                     <a:solidFill>
                       <a:srgbClr val="F4F6FA"/>
                     </a:solidFill>
                   </a:tcPr>
                 </a:tc>
+                <a:extLst>
+                  <a:ext uri="{0D108BD9-81ED-4DB2-BD59-A6C34878D82A}">
+                    <a16:rowId xmlns:a16="http://schemas.microsoft.com/office/drawing/2014/main" val="10004"/>
+                  </a:ext>
+                </a:extLst>
               </a:tr>
               <a:tr h="301752">
                 <a:tc>
                   <a:txBody>
-                    <a:bodyPr wrap="square"/>
+                    <a:bodyPr/>
                     <a:lstStyle/>
                     <a:p>
                       <a:pPr algn="l"/>
@@ -13854,7 +14050,7 @@
                       </a:r>
                     </a:p>
                   </a:txBody>
-                  <a:tcPr marL="91440" marR="73152" marT="18288" marB="18288">
+                  <a:tcPr marR="73152" marT="18288" marB="18288">
                     <a:solidFill>
                       <a:srgbClr val="FFFFFF"/>
                     </a:solidFill>
@@ -13862,7 +14058,7 @@
                 </a:tc>
                 <a:tc>
                   <a:txBody>
-                    <a:bodyPr wrap="square"/>
+                    <a:bodyPr/>
                     <a:lstStyle/>
                     <a:p>
                       <a:pPr algn="r"/>
@@ -13877,7 +14073,7 @@
                       </a:r>
                     </a:p>
                   </a:txBody>
-                  <a:tcPr marL="91440" marR="73152" marT="18288" marB="18288">
+                  <a:tcPr marR="73152" marT="18288" marB="18288">
                     <a:solidFill>
                       <a:srgbClr val="FFFFFF"/>
                     </a:solidFill>
@@ -13885,7 +14081,7 @@
                 </a:tc>
                 <a:tc>
                   <a:txBody>
-                    <a:bodyPr wrap="square"/>
+                    <a:bodyPr/>
                     <a:lstStyle/>
                     <a:p>
                       <a:pPr algn="r"/>
@@ -13900,7 +14096,7 @@
                       </a:r>
                     </a:p>
                   </a:txBody>
-                  <a:tcPr marL="91440" marR="73152" marT="18288" marB="18288">
+                  <a:tcPr marR="73152" marT="18288" marB="18288">
                     <a:solidFill>
                       <a:srgbClr val="FFFFFF"/>
                     </a:solidFill>
@@ -13908,7 +14104,7 @@
                 </a:tc>
                 <a:tc>
                   <a:txBody>
-                    <a:bodyPr wrap="square"/>
+                    <a:bodyPr/>
                     <a:lstStyle/>
                     <a:p>
                       <a:pPr algn="r"/>
@@ -13923,7 +14119,7 @@
                       </a:r>
                     </a:p>
                   </a:txBody>
-                  <a:tcPr marL="91440" marR="73152" marT="18288" marB="18288">
+                  <a:tcPr marR="73152" marT="18288" marB="18288">
                     <a:solidFill>
                       <a:srgbClr val="FFFFFF"/>
                     </a:solidFill>
@@ -13931,7 +14127,7 @@
                 </a:tc>
                 <a:tc>
                   <a:txBody>
-                    <a:bodyPr wrap="square"/>
+                    <a:bodyPr/>
                     <a:lstStyle/>
                     <a:p>
                       <a:pPr algn="r"/>
@@ -13946,7 +14142,7 @@
                       </a:r>
                     </a:p>
                   </a:txBody>
-                  <a:tcPr marL="91440" marR="73152" marT="18288" marB="18288">
+                  <a:tcPr marR="73152" marT="18288" marB="18288">
                     <a:solidFill>
                       <a:srgbClr val="FFFFFF"/>
                     </a:solidFill>
@@ -13954,7 +14150,7 @@
                 </a:tc>
                 <a:tc>
                   <a:txBody>
-                    <a:bodyPr wrap="square"/>
+                    <a:bodyPr/>
                     <a:lstStyle/>
                     <a:p>
                       <a:pPr algn="r"/>
@@ -13969,17 +14165,22 @@
                       </a:r>
                     </a:p>
                   </a:txBody>
-                  <a:tcPr marL="91440" marR="73152" marT="18288" marB="18288">
+                  <a:tcPr marR="73152" marT="18288" marB="18288">
                     <a:solidFill>
                       <a:srgbClr val="FFFFFF"/>
                     </a:solidFill>
                   </a:tcPr>
                 </a:tc>
+                <a:extLst>
+                  <a:ext uri="{0D108BD9-81ED-4DB2-BD59-A6C34878D82A}">
+                    <a16:rowId xmlns:a16="http://schemas.microsoft.com/office/drawing/2014/main" val="10005"/>
+                  </a:ext>
+                </a:extLst>
               </a:tr>
               <a:tr h="301752">
                 <a:tc>
                   <a:txBody>
-                    <a:bodyPr wrap="square"/>
+                    <a:bodyPr/>
                     <a:lstStyle/>
                     <a:p>
                       <a:pPr algn="l"/>
@@ -13994,7 +14195,7 @@
                       </a:r>
                     </a:p>
                   </a:txBody>
-                  <a:tcPr marL="91440" marR="73152" marT="18288" marB="18288">
+                  <a:tcPr marR="73152" marT="18288" marB="18288">
                     <a:solidFill>
                       <a:srgbClr val="F4F6FA"/>
                     </a:solidFill>
@@ -14002,7 +14203,7 @@
                 </a:tc>
                 <a:tc>
                   <a:txBody>
-                    <a:bodyPr wrap="square"/>
+                    <a:bodyPr/>
                     <a:lstStyle/>
                     <a:p>
                       <a:pPr algn="r"/>
@@ -14017,7 +14218,7 @@
                       </a:r>
                     </a:p>
                   </a:txBody>
-                  <a:tcPr marL="91440" marR="73152" marT="18288" marB="18288">
+                  <a:tcPr marR="73152" marT="18288" marB="18288">
                     <a:solidFill>
                       <a:srgbClr val="F4F6FA"/>
                     </a:solidFill>
@@ -14025,7 +14226,7 @@
                 </a:tc>
                 <a:tc>
                   <a:txBody>
-                    <a:bodyPr wrap="square"/>
+                    <a:bodyPr/>
                     <a:lstStyle/>
                     <a:p>
                       <a:pPr algn="r"/>
@@ -14040,7 +14241,7 @@
                       </a:r>
                     </a:p>
                   </a:txBody>
-                  <a:tcPr marL="91440" marR="73152" marT="18288" marB="18288">
+                  <a:tcPr marR="73152" marT="18288" marB="18288">
                     <a:solidFill>
                       <a:srgbClr val="F4F6FA"/>
                     </a:solidFill>
@@ -14048,7 +14249,7 @@
                 </a:tc>
                 <a:tc>
                   <a:txBody>
-                    <a:bodyPr wrap="square"/>
+                    <a:bodyPr/>
                     <a:lstStyle/>
                     <a:p>
                       <a:pPr algn="r"/>
@@ -14063,7 +14264,7 @@
                       </a:r>
                     </a:p>
                   </a:txBody>
-                  <a:tcPr marL="91440" marR="73152" marT="18288" marB="18288">
+                  <a:tcPr marR="73152" marT="18288" marB="18288">
                     <a:solidFill>
                       <a:srgbClr val="F4F6FA"/>
                     </a:solidFill>
@@ -14071,7 +14272,7 @@
                 </a:tc>
                 <a:tc>
                   <a:txBody>
-                    <a:bodyPr wrap="square"/>
+                    <a:bodyPr/>
                     <a:lstStyle/>
                     <a:p>
                       <a:pPr algn="r"/>
@@ -14086,7 +14287,7 @@
                       </a:r>
                     </a:p>
                   </a:txBody>
-                  <a:tcPr marL="91440" marR="73152" marT="18288" marB="18288">
+                  <a:tcPr marR="73152" marT="18288" marB="18288">
                     <a:solidFill>
                       <a:srgbClr val="F4F6FA"/>
                     </a:solidFill>
@@ -14094,7 +14295,7 @@
                 </a:tc>
                 <a:tc>
                   <a:txBody>
-                    <a:bodyPr wrap="square"/>
+                    <a:bodyPr/>
                     <a:lstStyle/>
                     <a:p>
                       <a:pPr algn="r"/>
@@ -14109,17 +14310,22 @@
                       </a:r>
                     </a:p>
                   </a:txBody>
-                  <a:tcPr marL="91440" marR="73152" marT="18288" marB="18288">
+                  <a:tcPr marR="73152" marT="18288" marB="18288">
                     <a:solidFill>
                       <a:srgbClr val="F4F6FA"/>
                     </a:solidFill>
                   </a:tcPr>
                 </a:tc>
+                <a:extLst>
+                  <a:ext uri="{0D108BD9-81ED-4DB2-BD59-A6C34878D82A}">
+                    <a16:rowId xmlns:a16="http://schemas.microsoft.com/office/drawing/2014/main" val="10006"/>
+                  </a:ext>
+                </a:extLst>
               </a:tr>
               <a:tr h="301752">
                 <a:tc>
                   <a:txBody>
-                    <a:bodyPr wrap="square"/>
+                    <a:bodyPr/>
                     <a:lstStyle/>
                     <a:p>
                       <a:pPr algn="l"/>
@@ -14134,7 +14340,7 @@
                       </a:r>
                     </a:p>
                   </a:txBody>
-                  <a:tcPr marL="91440" marR="73152" marT="18288" marB="18288">
+                  <a:tcPr marR="73152" marT="18288" marB="18288">
                     <a:solidFill>
                       <a:srgbClr val="FFFFFF"/>
                     </a:solidFill>
@@ -14142,7 +14348,7 @@
                 </a:tc>
                 <a:tc>
                   <a:txBody>
-                    <a:bodyPr wrap="square"/>
+                    <a:bodyPr/>
                     <a:lstStyle/>
                     <a:p>
                       <a:pPr algn="r"/>
@@ -14157,7 +14363,7 @@
                       </a:r>
                     </a:p>
                   </a:txBody>
-                  <a:tcPr marL="91440" marR="73152" marT="18288" marB="18288">
+                  <a:tcPr marR="73152" marT="18288" marB="18288">
                     <a:solidFill>
                       <a:srgbClr val="FFFFFF"/>
                     </a:solidFill>
@@ -14165,7 +14371,7 @@
                 </a:tc>
                 <a:tc>
                   <a:txBody>
-                    <a:bodyPr wrap="square"/>
+                    <a:bodyPr/>
                     <a:lstStyle/>
                     <a:p>
                       <a:pPr algn="r"/>
@@ -14180,7 +14386,7 @@
                       </a:r>
                     </a:p>
                   </a:txBody>
-                  <a:tcPr marL="91440" marR="73152" marT="18288" marB="18288">
+                  <a:tcPr marR="73152" marT="18288" marB="18288">
                     <a:solidFill>
                       <a:srgbClr val="FFFFFF"/>
                     </a:solidFill>
@@ -14188,7 +14394,7 @@
                 </a:tc>
                 <a:tc>
                   <a:txBody>
-                    <a:bodyPr wrap="square"/>
+                    <a:bodyPr/>
                     <a:lstStyle/>
                     <a:p>
                       <a:pPr algn="r"/>
@@ -14203,7 +14409,7 @@
                       </a:r>
                     </a:p>
                   </a:txBody>
-                  <a:tcPr marL="91440" marR="73152" marT="18288" marB="18288">
+                  <a:tcPr marR="73152" marT="18288" marB="18288">
                     <a:solidFill>
                       <a:srgbClr val="FFFFFF"/>
                     </a:solidFill>
@@ -14211,7 +14417,7 @@
                 </a:tc>
                 <a:tc>
                   <a:txBody>
-                    <a:bodyPr wrap="square"/>
+                    <a:bodyPr/>
                     <a:lstStyle/>
                     <a:p>
                       <a:pPr algn="r"/>
@@ -14226,7 +14432,7 @@
                       </a:r>
                     </a:p>
                   </a:txBody>
-                  <a:tcPr marL="91440" marR="73152" marT="18288" marB="18288">
+                  <a:tcPr marR="73152" marT="18288" marB="18288">
                     <a:solidFill>
                       <a:srgbClr val="FFFFFF"/>
                     </a:solidFill>
@@ -14234,7 +14440,7 @@
                 </a:tc>
                 <a:tc>
                   <a:txBody>
-                    <a:bodyPr wrap="square"/>
+                    <a:bodyPr/>
                     <a:lstStyle/>
                     <a:p>
                       <a:pPr algn="r"/>
@@ -14249,12 +14455,17 @@
                       </a:r>
                     </a:p>
                   </a:txBody>
-                  <a:tcPr marL="91440" marR="73152" marT="18288" marB="18288">
+                  <a:tcPr marR="73152" marT="18288" marB="18288">
                     <a:solidFill>
                       <a:srgbClr val="FFFFFF"/>
                     </a:solidFill>
                   </a:tcPr>
                 </a:tc>
+                <a:extLst>
+                  <a:ext uri="{0D108BD9-81ED-4DB2-BD59-A6C34878D82A}">
+                    <a16:rowId xmlns:a16="http://schemas.microsoft.com/office/drawing/2014/main" val="10007"/>
+                  </a:ext>
+                </a:extLst>
               </a:tr>
             </a:tbl>
           </a:graphicData>
@@ -14381,7 +14592,9 @@
         <p:txBody>
           <a:bodyPr rtlCol="0" anchor="ctr"/>
           <a:lstStyle/>
-          <a:p/>
+          <a:p>
+            <a:endParaRPr/>
+          </a:p>
         </p:txBody>
       </p:sp>
       <p:sp>
@@ -14432,7 +14645,7 @@
 </file>
 
 <file path=ppt/slides/slide22.xml><?xml version="1.0" encoding="utf-8"?>
-<p:sld xmlns:a="http://schemas.openxmlformats.org/drawingml/2006/main" xmlns:p="http://schemas.openxmlformats.org/presentationml/2006/main" xmlns:r="http://schemas.openxmlformats.org/officeDocument/2006/relationships">
+<p:sld xmlns:a="http://schemas.openxmlformats.org/drawingml/2006/main" xmlns:r="http://schemas.openxmlformats.org/officeDocument/2006/relationships" xmlns:p="http://schemas.openxmlformats.org/presentationml/2006/main">
   <p:cSld>
     <p:spTree>
       <p:nvGrpSpPr>
@@ -14440,7 +14653,14 @@
         <p:cNvGrpSpPr/>
         <p:nvPr/>
       </p:nvGrpSpPr>
-      <p:grpSpPr/>
+      <p:grpSpPr>
+        <a:xfrm>
+          <a:off x="0" y="0"/>
+          <a:ext cx="0" cy="0"/>
+          <a:chOff x="0" y="0"/>
+          <a:chExt cx="0" cy="0"/>
+        </a:xfrm>
+      </p:grpSpPr>
       <p:sp>
         <p:nvSpPr>
           <p:cNvPr id="2" name="TextBox 1"/>
@@ -14562,7 +14782,9 @@
         <p:txBody>
           <a:bodyPr rtlCol="0" anchor="ctr"/>
           <a:lstStyle/>
-          <a:p/>
+          <a:p>
+            <a:endParaRPr/>
+          </a:p>
         </p:txBody>
       </p:sp>
       <p:sp>
@@ -14647,15 +14869,12 @@
                 <a:spcPct val="108000"/>
               </a:lnSpc>
             </a:pPr>
-            <a:r>
-              <a:rPr sz="1250" b="0">
-                <a:solidFill>
-                  <a:srgbClr val="1B1B1F"/>
-                </a:solidFill>
-                <a:latin typeface="Calibri"/>
-              </a:rPr>
-              <a:t/>
-            </a:r>
+            <a:endParaRPr sz="1250" b="0">
+              <a:solidFill>
+                <a:srgbClr val="1B1B1F"/>
+              </a:solidFill>
+              <a:latin typeface="Calibri"/>
+            </a:endParaRPr>
           </a:p>
           <a:p>
             <a:pPr algn="l">
@@ -14727,15 +14946,12 @@
                 <a:spcPct val="108000"/>
               </a:lnSpc>
             </a:pPr>
-            <a:r>
-              <a:rPr sz="1250" b="0">
-                <a:solidFill>
-                  <a:srgbClr val="1B1B1F"/>
-                </a:solidFill>
-                <a:latin typeface="Calibri"/>
-              </a:rPr>
-              <a:t/>
-            </a:r>
+            <a:endParaRPr sz="1250" b="0">
+              <a:solidFill>
+                <a:srgbClr val="1B1B1F"/>
+              </a:solidFill>
+              <a:latin typeface="Calibri"/>
+            </a:endParaRPr>
           </a:p>
           <a:p>
             <a:pPr algn="l">
@@ -14798,7 +15014,9 @@
         <p:txBody>
           <a:bodyPr rtlCol="0" anchor="ctr"/>
           <a:lstStyle/>
-          <a:p/>
+          <a:p>
+            <a:endParaRPr/>
+          </a:p>
         </p:txBody>
       </p:sp>
       <p:sp>
@@ -14883,15 +15101,12 @@
                 <a:spcPct val="105000"/>
               </a:lnSpc>
             </a:pPr>
-            <a:r>
-              <a:rPr sz="1150" b="0">
-                <a:solidFill>
-                  <a:srgbClr val="1B1B1F"/>
-                </a:solidFill>
-                <a:latin typeface="Calibri"/>
-              </a:rPr>
-              <a:t/>
-            </a:r>
+            <a:endParaRPr sz="1150" b="0">
+              <a:solidFill>
+                <a:srgbClr val="1B1B1F"/>
+              </a:solidFill>
+              <a:latin typeface="Calibri"/>
+            </a:endParaRPr>
           </a:p>
           <a:p>
             <a:pPr algn="l">
@@ -14995,15 +15210,12 @@
                 <a:spcPct val="105000"/>
               </a:lnSpc>
             </a:pPr>
-            <a:r>
-              <a:rPr sz="1150" b="0">
-                <a:solidFill>
-                  <a:srgbClr val="1B1B1F"/>
-                </a:solidFill>
-                <a:latin typeface="Calibri"/>
-              </a:rPr>
-              <a:t/>
-            </a:r>
+            <a:endParaRPr sz="1150" b="0">
+              <a:solidFill>
+                <a:srgbClr val="1B1B1F"/>
+              </a:solidFill>
+              <a:latin typeface="Calibri"/>
+            </a:endParaRPr>
           </a:p>
           <a:p>
             <a:pPr algn="l">
@@ -15066,7 +15278,9 @@
         <p:txBody>
           <a:bodyPr rtlCol="0" anchor="ctr"/>
           <a:lstStyle/>
-          <a:p/>
+          <a:p>
+            <a:endParaRPr/>
+          </a:p>
         </p:txBody>
       </p:sp>
       <p:sp>
@@ -15151,15 +15365,12 @@
                 <a:spcPct val="108000"/>
               </a:lnSpc>
             </a:pPr>
-            <a:r>
-              <a:rPr sz="1250" b="0">
-                <a:solidFill>
-                  <a:srgbClr val="1B1B1F"/>
-                </a:solidFill>
-                <a:latin typeface="Calibri"/>
-              </a:rPr>
-              <a:t/>
-            </a:r>
+            <a:endParaRPr sz="1250" b="0">
+              <a:solidFill>
+                <a:srgbClr val="1B1B1F"/>
+              </a:solidFill>
+              <a:latin typeface="Calibri"/>
+            </a:endParaRPr>
           </a:p>
           <a:p>
             <a:pPr algn="l">
@@ -15183,15 +15394,12 @@
                 <a:spcPct val="108000"/>
               </a:lnSpc>
             </a:pPr>
-            <a:r>
-              <a:rPr sz="1250" b="0">
-                <a:solidFill>
-                  <a:srgbClr val="1B1B1F"/>
-                </a:solidFill>
-                <a:latin typeface="Calibri"/>
-              </a:rPr>
-              <a:t/>
-            </a:r>
+            <a:endParaRPr sz="1250" b="0">
+              <a:solidFill>
+                <a:srgbClr val="1B1B1F"/>
+              </a:solidFill>
+              <a:latin typeface="Calibri"/>
+            </a:endParaRPr>
           </a:p>
           <a:p>
             <a:pPr algn="l">
@@ -15231,15 +15439,12 @@
                 <a:spcPct val="108000"/>
               </a:lnSpc>
             </a:pPr>
-            <a:r>
-              <a:rPr sz="1250" b="0">
-                <a:solidFill>
-                  <a:srgbClr val="1B1B1F"/>
-                </a:solidFill>
-                <a:latin typeface="Calibri"/>
-              </a:rPr>
-              <a:t/>
-            </a:r>
+            <a:endParaRPr sz="1250" b="0">
+              <a:solidFill>
+                <a:srgbClr val="1B1B1F"/>
+              </a:solidFill>
+              <a:latin typeface="Calibri"/>
+            </a:endParaRPr>
           </a:p>
           <a:p>
             <a:pPr algn="l">
@@ -15302,7 +15507,9 @@
         <p:txBody>
           <a:bodyPr rtlCol="0" anchor="ctr"/>
           <a:lstStyle/>
-          <a:p/>
+          <a:p>
+            <a:endParaRPr/>
+          </a:p>
         </p:txBody>
       </p:sp>
       <p:sp>

--- a/bias_mitigation_plan.pptx
+++ b/bias_mitigation_plan.pptx
@@ -5,7 +5,7 @@
     <p:sldMasterId id="2147483648" r:id="rId1"/>
   </p:sldMasterIdLst>
   <p:notesMasterIdLst>
-    <p:notesMasterId r:id="rId24"/>
+    <p:notesMasterId r:id="rId14"/>
   </p:notesMasterIdLst>
   <p:sldIdLst>
     <p:sldId id="256" r:id="rId2"/>
@@ -20,16 +20,16 @@
     <p:sldId id="265" r:id="rId11"/>
     <p:sldId id="266" r:id="rId12"/>
     <p:sldId id="267" r:id="rId13"/>
-    <p:sldId id="268" r:id="rId14"/>
-    <p:sldId id="269" r:id="rId15"/>
-    <p:sldId id="270" r:id="rId16"/>
-    <p:sldId id="271" r:id="rId17"/>
-    <p:sldId id="272" r:id="rId18"/>
-    <p:sldId id="273" r:id="rId19"/>
-    <p:sldId id="274" r:id="rId20"/>
-    <p:sldId id="275" r:id="rId21"/>
-    <p:sldId id="276" r:id="rId22"/>
-    <p:sldId id="277" r:id="rId23"/>
+    <p:sldId id="268" r:id="rId19"/>
+    <p:sldId id="269" r:id="rId20"/>
+    <p:sldId id="270" r:id="rId21"/>
+    <p:sldId id="271" r:id="rId22"/>
+    <p:sldId id="272" r:id="rId23"/>
+    <p:sldId id="273" r:id="rId24"/>
+    <p:sldId id="274" r:id="rId25"/>
+    <p:sldId id="275" r:id="rId26"/>
+    <p:sldId id="276" r:id="rId27"/>
+    <p:sldId id="277" r:id="rId28"/>
   </p:sldIdLst>
   <p:sldSz cx="12192000" cy="6858000"/>
   <p:notesSz cx="6858000" cy="12192000"/>
@@ -229,7 +229,7 @@
                   <c:v>0.3125</c:v>
                 </c:pt>
                 <c:pt idx="1">
-                  <c:v>0.11360000000000001</c:v>
+                  <c:v>0.1136</c:v>
                 </c:pt>
               </c:numCache>
             </c:numRef>
@@ -319,10 +319,10 @@
                 <c:formatCode>General</c:formatCode>
                 <c:ptCount val="2"/>
                 <c:pt idx="0">
-                  <c:v>0.26679999999999998</c:v>
+                  <c:v>0.2668</c:v>
                 </c:pt>
                 <c:pt idx="1">
-                  <c:v>8.0100000000000005E-2</c:v>
+                  <c:v>0.0801</c:v>
                 </c:pt>
               </c:numCache>
             </c:numRef>
@@ -446,9 +446,285 @@
       </c:spPr>
     </c:plotArea>
     <c:legend>
-      <c:legendPos val="r"/>
       <c:overlay val="0"/>
     </c:legend>
+    <c:plotVisOnly val="1"/>
+    <c:dispBlanksAs val="span"/>
+    <c:showDLblsOverMax val="1"/>
+  </c:chart>
+  <c:spPr>
+    <a:noFill/>
+    <a:ln>
+      <a:noFill/>
+    </a:ln>
+    <a:effectLst/>
+  </c:spPr>
+  <c:externalData r:id="rId1">
+    <c:autoUpdate val="0"/>
+  </c:externalData>
+</c:chartSpace>
+</file>
+
+<file path=ppt/charts/chart2.xml><?xml version="1.0" encoding="utf-8"?>
+<c:chartSpace xmlns:c="http://schemas.openxmlformats.org/drawingml/2006/chart" xmlns:a="http://schemas.openxmlformats.org/drawingml/2006/main" xmlns:r="http://schemas.openxmlformats.org/officeDocument/2006/relationships" xmlns:c16r2="http://schemas.microsoft.com/office/drawing/2015/06/chart">
+  <c:date1904 val="0"/>
+  <c:lang val="en-US"/>
+  <c:roundedCorners val="1"/>
+  <c:style val="2"/>
+  <c:chart>
+    <c:autoTitleDeleted val="1"/>
+    <c:plotArea>
+      <c:layout/>
+      <c:lineChart>
+        <c:grouping val="standard"/>
+        <c:varyColors val="0"/>
+        <c:ser>
+          <c:idx val="0"/>
+          <c:order val="0"/>
+          <c:tx>
+            <c:strRef>
+              <c:f>Sheet1!$B$1</c:f>
+              <c:strCache>
+                <c:ptCount val="1"/>
+                <c:pt idx="0">
+                  <c:v>Achievable frontier</c:v>
+                </c:pt>
+              </c:strCache>
+            </c:strRef>
+          </c:tx>
+          <c:spPr>
+            <a:ln w="38100" cap="flat">
+              <a:solidFill>
+                <a:srgbClr val="E8A33D"/>
+              </a:solidFill>
+              <a:prstDash val="solid"/>
+              <a:round/>
+            </a:ln>
+            <a:effectLst/>
+          </c:spPr>
+          <c:marker>
+            <c:symbol val="circle"/>
+            <c:size val="7"/>
+            <c:spPr>
+              <a:solidFill>
+                <a:srgbClr val="E8A33D"/>
+              </a:solidFill>
+              <a:ln w="9525" cap="flat">
+                <a:solidFill>
+                  <a:srgbClr val="E8A33D"/>
+                </a:solidFill>
+                <a:prstDash val="solid"/>
+                <a:round/>
+              </a:ln>
+              <a:effectLst/>
+            </c:spPr>
+          </c:marker>
+          <c:dLbls>
+            <c:numFmt formatCode="0%" sourceLinked="0"/>
+            <c:spPr>
+              <a:noFill/>
+              <a:ln>
+                <a:noFill/>
+              </a:ln>
+              <a:effectLst/>
+            </c:spPr>
+            <c:txPr>
+              <a:bodyPr/>
+              <a:lstStyle/>
+              <a:p>
+                <a:pPr>
+                  <a:defRPr sz="1000" b="0" i="0" u="none" strike="noStrike">
+                    <a:solidFill>
+                      <a:srgbClr val="1E2761"/>
+                    </a:solidFill>
+                    <a:latin typeface="Arial"/>
+                  </a:defRPr>
+                </a:pPr>
+                <a:endParaRPr lang="en-US"/>
+              </a:p>
+            </c:txPr>
+            <c:dLblPos val="t"/>
+            <c:showLegendKey val="0"/>
+            <c:showVal val="1"/>
+            <c:showCatName val="0"/>
+            <c:showSerName val="0"/>
+            <c:showPercent val="0"/>
+            <c:showBubbleSize val="0"/>
+            <c:showLeaderLines val="0"/>
+            <c:extLst>
+              <c:ext xmlns:c15="http://schemas.microsoft.com/office/drawing/2012/chart" uri="{CE6537A1-D6FC-4f65-9D91-7224C49458BB}">
+                <c15:showLeaderLines val="0"/>
+              </c:ext>
+            </c:extLst>
+          </c:dLbls>
+          <c:cat>
+            <c:strRef>
+              <c:f>Sheet1!$A$2:$A$6</c:f>
+              <c:strCache>
+                <c:ptCount val="5"/>
+                <c:pt idx="0">
+                  <c:v>ε=0.02</c:v>
+                </c:pt>
+                <c:pt idx="1">
+                  <c:v>ε=0.05</c:v>
+                </c:pt>
+                <c:pt idx="2">
+                  <c:v>ε=0.10</c:v>
+                </c:pt>
+                <c:pt idx="3">
+                  <c:v>ε=0.20</c:v>
+                </c:pt>
+                <c:pt idx="4">
+                  <c:v>Unconstrained</c:v>
+                </c:pt>
+              </c:strCache>
+            </c:strRef>
+          </c:cat>
+          <c:val>
+            <c:numRef>
+              <c:f>Sheet1!$B$2:$B$6</c:f>
+              <c:numCache>
+                <c:formatCode>General</c:formatCode>
+                <c:ptCount val="5"/>
+                <c:pt idx="0">
+                  <c:v>0.79</c:v>
+                </c:pt>
+                <c:pt idx="1">
+                  <c:v>0.81499999999999995</c:v>
+                </c:pt>
+                <c:pt idx="2">
+                  <c:v>0.83499999999999996</c:v>
+                </c:pt>
+                <c:pt idx="3">
+                  <c:v>0.84699999999999998</c:v>
+                </c:pt>
+                <c:pt idx="4">
+                  <c:v>0.85499999999999998</c:v>
+                </c:pt>
+              </c:numCache>
+            </c:numRef>
+          </c:val>
+          <c:smooth val="0"/>
+          <c:extLst>
+            <c:ext xmlns:c16="http://schemas.microsoft.com/office/drawing/2014/chart" uri="{C3380CC4-5D6E-409C-BE32-E72D297353CC}">
+              <c16:uniqueId val="{00000000-BE20-4B7E-ACDD-B182465962EC}"/>
+            </c:ext>
+          </c:extLst>
+        </c:ser>
+        <c:dLbls>
+          <c:dLblPos val="t"/>
+          <c:showLegendKey val="0"/>
+          <c:showVal val="1"/>
+          <c:showCatName val="0"/>
+          <c:showSerName val="0"/>
+          <c:showPercent val="0"/>
+          <c:showBubbleSize val="0"/>
+        </c:dLbls>
+        <c:marker val="1"/>
+        <c:smooth val="0"/>
+        <c:axId val="2094734554"/>
+        <c:axId val="2094734552"/>
+      </c:lineChart>
+      <c:catAx>
+        <c:axId val="2094734554"/>
+        <c:scaling>
+          <c:orientation val="minMax"/>
+        </c:scaling>
+        <c:delete val="0"/>
+        <c:axPos val="b"/>
+        <c:numFmt formatCode="General" sourceLinked="1"/>
+        <c:majorTickMark val="out"/>
+        <c:minorTickMark val="none"/>
+        <c:tickLblPos val="low"/>
+        <c:spPr>
+          <a:ln w="12700" cap="flat">
+            <a:solidFill>
+              <a:srgbClr val="888888"/>
+            </a:solidFill>
+            <a:prstDash val="solid"/>
+            <a:round/>
+          </a:ln>
+        </c:spPr>
+        <c:txPr>
+          <a:bodyPr/>
+          <a:lstStyle/>
+          <a:p>
+            <a:pPr>
+              <a:defRPr sz="1200" b="0" i="0" u="none" strike="noStrike">
+                <a:solidFill>
+                  <a:srgbClr val="5A6270"/>
+                </a:solidFill>
+                <a:latin typeface="Arial"/>
+              </a:defRPr>
+            </a:pPr>
+            <a:endParaRPr lang="en-US"/>
+          </a:p>
+        </c:txPr>
+        <c:crossAx val="2094734552"/>
+        <c:crosses val="autoZero"/>
+        <c:auto val="1"/>
+        <c:lblAlgn val="ctr"/>
+        <c:lblOffset val="100"/>
+        <c:noMultiLvlLbl val="1"/>
+      </c:catAx>
+      <c:valAx>
+        <c:axId val="2094734552"/>
+        <c:scaling>
+          <c:orientation val="minMax"/>
+        </c:scaling>
+        <c:delete val="0"/>
+        <c:axPos val="l"/>
+        <c:majorGridlines>
+          <c:spPr>
+            <a:ln w="12700" cap="flat">
+              <a:solidFill>
+                <a:srgbClr val="E3E6EC"/>
+              </a:solidFill>
+              <a:prstDash val="solid"/>
+              <a:round/>
+            </a:ln>
+          </c:spPr>
+        </c:majorGridlines>
+        <c:numFmt formatCode="0%" sourceLinked="0"/>
+        <c:majorTickMark val="out"/>
+        <c:minorTickMark val="none"/>
+        <c:tickLblPos val="nextTo"/>
+        <c:spPr>
+          <a:ln w="12700" cap="flat">
+            <a:solidFill>
+              <a:srgbClr val="888888"/>
+            </a:solidFill>
+            <a:prstDash val="solid"/>
+            <a:round/>
+          </a:ln>
+        </c:spPr>
+        <c:txPr>
+          <a:bodyPr/>
+          <a:lstStyle/>
+          <a:p>
+            <a:pPr>
+              <a:defRPr sz="1200" b="0" i="0" u="none" strike="noStrike">
+                <a:solidFill>
+                  <a:srgbClr val="5A6270"/>
+                </a:solidFill>
+                <a:latin typeface="Arial"/>
+              </a:defRPr>
+            </a:pPr>
+            <a:endParaRPr lang="en-US"/>
+          </a:p>
+        </c:txPr>
+        <c:crossAx val="2094734554"/>
+        <c:crosses val="autoZero"/>
+        <c:crossBetween val="between"/>
+      </c:valAx>
+      <c:spPr>
+        <a:noFill/>
+        <a:ln>
+          <a:noFill/>
+        </a:ln>
+        <a:effectLst/>
+      </c:spPr>
+    </c:plotArea>
     <c:plotVisOnly val="1"/>
     <c:dispBlanksAs val="span"/>
     <c:showDLblsOverMax val="1"/>
@@ -4535,7 +4811,7 @@
           <p:nvPr/>
         </p:nvPicPr>
         <p:blipFill>
-          <a:blip r:embed="rId3"/>
+          <a:blip r:embed="rId4"/>
           <a:stretch>
             <a:fillRect/>
           </a:stretch>
@@ -4906,7 +5182,7 @@
           <p:nvPr/>
         </p:nvPicPr>
         <p:blipFill>
-          <a:blip r:embed="rId4"/>
+          <a:blip r:embed="rId5"/>
           <a:stretch>
             <a:fillRect/>
           </a:stretch>
@@ -4930,7 +5206,7 @@
 </file>
 
 <file path=ppt/slides/slide13.xml><?xml version="1.0" encoding="utf-8"?>
-<p:sld xmlns:a="http://schemas.openxmlformats.org/drawingml/2006/main" xmlns:r="http://schemas.openxmlformats.org/officeDocument/2006/relationships" xmlns:p="http://schemas.openxmlformats.org/presentationml/2006/main">
+<p:sld xmlns:a="http://schemas.openxmlformats.org/drawingml/2006/main" xmlns:p="http://schemas.openxmlformats.org/presentationml/2006/main" xmlns:r="http://schemas.openxmlformats.org/officeDocument/2006/relationships">
   <p:cSld>
     <p:spTree>
       <p:nvGrpSpPr>
@@ -4938,14 +5214,7 @@
         <p:cNvGrpSpPr/>
         <p:nvPr/>
       </p:nvGrpSpPr>
-      <p:grpSpPr>
-        <a:xfrm>
-          <a:off x="0" y="0"/>
-          <a:ext cx="0" cy="0"/>
-          <a:chOff x="0" y="0"/>
-          <a:chExt cx="0" cy="0"/>
-        </a:xfrm>
-      </p:grpSpPr>
+      <p:grpSpPr/>
       <p:sp>
         <p:nvSpPr>
           <p:cNvPr id="2" name="TextBox 1"/>
@@ -5043,46 +5312,16 @@
                 <a:tableStyleId>{5C22544A-7EE6-4342-B048-85BDC9FD1C3A}</a:tableStyleId>
               </a:tblPr>
               <a:tblGrid>
-                <a:gridCol w="2720340">
-                  <a:extLst>
-                    <a:ext uri="{9D8B030D-6E8A-4147-A177-3AD203B41FA5}">
-                      <a16:colId xmlns:a16="http://schemas.microsoft.com/office/drawing/2014/main" val="20000"/>
-                    </a:ext>
-                  </a:extLst>
-                </a:gridCol>
-                <a:gridCol w="1994916">
-                  <a:extLst>
-                    <a:ext uri="{9D8B030D-6E8A-4147-A177-3AD203B41FA5}">
-                      <a16:colId xmlns:a16="http://schemas.microsoft.com/office/drawing/2014/main" val="20001"/>
-                    </a:ext>
-                  </a:extLst>
-                </a:gridCol>
-                <a:gridCol w="1994916">
-                  <a:extLst>
-                    <a:ext uri="{9D8B030D-6E8A-4147-A177-3AD203B41FA5}">
-                      <a16:colId xmlns:a16="http://schemas.microsoft.com/office/drawing/2014/main" val="20002"/>
-                    </a:ext>
-                  </a:extLst>
-                </a:gridCol>
-                <a:gridCol w="1994916">
-                  <a:extLst>
-                    <a:ext uri="{9D8B030D-6E8A-4147-A177-3AD203B41FA5}">
-                      <a16:colId xmlns:a16="http://schemas.microsoft.com/office/drawing/2014/main" val="20003"/>
-                    </a:ext>
-                  </a:extLst>
-                </a:gridCol>
-                <a:gridCol w="2176272">
-                  <a:extLst>
-                    <a:ext uri="{9D8B030D-6E8A-4147-A177-3AD203B41FA5}">
-                      <a16:colId xmlns:a16="http://schemas.microsoft.com/office/drawing/2014/main" val="20004"/>
-                    </a:ext>
-                  </a:extLst>
-                </a:gridCol>
+                <a:gridCol w="2720340"/>
+                <a:gridCol w="1994916"/>
+                <a:gridCol w="1994916"/>
+                <a:gridCol w="1994916"/>
+                <a:gridCol w="2176272"/>
               </a:tblGrid>
               <a:tr h="384048">
                 <a:tc>
                   <a:txBody>
-                    <a:bodyPr/>
+                    <a:bodyPr wrap="square"/>
                     <a:lstStyle/>
                     <a:p>
                       <a:pPr algn="l"/>
@@ -5097,7 +5336,7 @@
                       </a:r>
                     </a:p>
                   </a:txBody>
-                  <a:tcPr marR="73152" marT="18288" marB="18288">
+                  <a:tcPr marL="91440" marR="73152" marT="18288" marB="18288">
                     <a:solidFill>
                       <a:srgbClr val="1E2761"/>
                     </a:solidFill>
@@ -5105,7 +5344,7 @@
                 </a:tc>
                 <a:tc>
                   <a:txBody>
-                    <a:bodyPr/>
+                    <a:bodyPr wrap="square"/>
                     <a:lstStyle/>
                     <a:p>
                       <a:pPr algn="r"/>
@@ -5120,7 +5359,7 @@
                       </a:r>
                     </a:p>
                   </a:txBody>
-                  <a:tcPr marR="73152" marT="18288" marB="18288">
+                  <a:tcPr marL="91440" marR="73152" marT="18288" marB="18288">
                     <a:solidFill>
                       <a:srgbClr val="1E2761"/>
                     </a:solidFill>
@@ -5128,7 +5367,7 @@
                 </a:tc>
                 <a:tc>
                   <a:txBody>
-                    <a:bodyPr/>
+                    <a:bodyPr wrap="square"/>
                     <a:lstStyle/>
                     <a:p>
                       <a:pPr algn="r"/>
@@ -5143,7 +5382,7 @@
                       </a:r>
                     </a:p>
                   </a:txBody>
-                  <a:tcPr marR="73152" marT="18288" marB="18288">
+                  <a:tcPr marL="91440" marR="73152" marT="18288" marB="18288">
                     <a:solidFill>
                       <a:srgbClr val="1E2761"/>
                     </a:solidFill>
@@ -5151,7 +5390,7 @@
                 </a:tc>
                 <a:tc>
                   <a:txBody>
-                    <a:bodyPr/>
+                    <a:bodyPr wrap="square"/>
                     <a:lstStyle/>
                     <a:p>
                       <a:pPr algn="r"/>
@@ -5166,7 +5405,7 @@
                       </a:r>
                     </a:p>
                   </a:txBody>
-                  <a:tcPr marR="73152" marT="18288" marB="18288">
+                  <a:tcPr marL="91440" marR="73152" marT="18288" marB="18288">
                     <a:solidFill>
                       <a:srgbClr val="1E2761"/>
                     </a:solidFill>
@@ -5174,7 +5413,7 @@
                 </a:tc>
                 <a:tc>
                   <a:txBody>
-                    <a:bodyPr/>
+                    <a:bodyPr wrap="square"/>
                     <a:lstStyle/>
                     <a:p>
                       <a:pPr algn="r"/>
@@ -5189,22 +5428,17 @@
                       </a:r>
                     </a:p>
                   </a:txBody>
-                  <a:tcPr marR="73152" marT="18288" marB="18288">
+                  <a:tcPr marL="91440" marR="73152" marT="18288" marB="18288">
                     <a:solidFill>
                       <a:srgbClr val="1E2761"/>
                     </a:solidFill>
                   </a:tcPr>
                 </a:tc>
-                <a:extLst>
-                  <a:ext uri="{0D108BD9-81ED-4DB2-BD59-A6C34878D82A}">
-                    <a16:rowId xmlns:a16="http://schemas.microsoft.com/office/drawing/2014/main" val="10000"/>
-                  </a:ext>
-                </a:extLst>
               </a:tr>
               <a:tr h="329184">
                 <a:tc>
                   <a:txBody>
-                    <a:bodyPr/>
+                    <a:bodyPr wrap="square"/>
                     <a:lstStyle/>
                     <a:p>
                       <a:pPr algn="l"/>
@@ -5219,7 +5453,7 @@
                       </a:r>
                     </a:p>
                   </a:txBody>
-                  <a:tcPr marR="73152" marT="18288" marB="18288">
+                  <a:tcPr marL="91440" marR="73152" marT="18288" marB="18288">
                     <a:solidFill>
                       <a:srgbClr val="FFFFFF"/>
                     </a:solidFill>
@@ -5227,7 +5461,7 @@
                 </a:tc>
                 <a:tc>
                   <a:txBody>
-                    <a:bodyPr/>
+                    <a:bodyPr wrap="square"/>
                     <a:lstStyle/>
                     <a:p>
                       <a:pPr algn="r"/>
@@ -5238,11 +5472,11 @@
                           </a:solidFill>
                           <a:latin typeface="Calibri"/>
                         </a:rPr>
-                        <a:t>0.8518</a:t>
-                      </a:r>
-                    </a:p>
-                  </a:txBody>
-                  <a:tcPr marR="73152" marT="18288" marB="18288">
+                        <a:t>0.8517</a:t>
+                      </a:r>
+                    </a:p>
+                  </a:txBody>
+                  <a:tcPr marL="91440" marR="73152" marT="18288" marB="18288">
                     <a:solidFill>
                       <a:srgbClr val="FFFFFF"/>
                     </a:solidFill>
@@ -5250,7 +5484,7 @@
                 </a:tc>
                 <a:tc>
                   <a:txBody>
-                    <a:bodyPr/>
+                    <a:bodyPr wrap="square"/>
                     <a:lstStyle/>
                     <a:p>
                       <a:pPr algn="r"/>
@@ -5261,11 +5495,11 @@
                           </a:solidFill>
                           <a:latin typeface="Calibri"/>
                         </a:rPr>
-                        <a:t>0.1556</a:t>
-                      </a:r>
-                    </a:p>
-                  </a:txBody>
-                  <a:tcPr marR="73152" marT="18288" marB="18288">
+                        <a:t>0.1613</a:t>
+                      </a:r>
+                    </a:p>
+                  </a:txBody>
+                  <a:tcPr marL="91440" marR="73152" marT="18288" marB="18288">
                     <a:solidFill>
                       <a:srgbClr val="FFFFFF"/>
                     </a:solidFill>
@@ -5273,7 +5507,7 @@
                 </a:tc>
                 <a:tc>
                   <a:txBody>
-                    <a:bodyPr/>
+                    <a:bodyPr wrap="square"/>
                     <a:lstStyle/>
                     <a:p>
                       <a:pPr algn="r"/>
@@ -5284,11 +5518,11 @@
                           </a:solidFill>
                           <a:latin typeface="Calibri"/>
                         </a:rPr>
-                        <a:t>0.0799</a:t>
-                      </a:r>
-                    </a:p>
-                  </a:txBody>
-                  <a:tcPr marR="73152" marT="18288" marB="18288">
+                        <a:t>0.0831</a:t>
+                      </a:r>
+                    </a:p>
+                  </a:txBody>
+                  <a:tcPr marL="91440" marR="73152" marT="18288" marB="18288">
                     <a:solidFill>
                       <a:srgbClr val="FFFFFF"/>
                     </a:solidFill>
@@ -5296,7 +5530,7 @@
                 </a:tc>
                 <a:tc>
                   <a:txBody>
-                    <a:bodyPr/>
+                    <a:bodyPr wrap="square"/>
                     <a:lstStyle/>
                     <a:p>
                       <a:pPr algn="r"/>
@@ -5307,26 +5541,21 @@
                           </a:solidFill>
                           <a:latin typeface="Calibri"/>
                         </a:rPr>
-                        <a:t>0.3061</a:t>
-                      </a:r>
-                    </a:p>
-                  </a:txBody>
-                  <a:tcPr marR="73152" marT="18288" marB="18288">
+                        <a:t>0.3086</a:t>
+                      </a:r>
+                    </a:p>
+                  </a:txBody>
+                  <a:tcPr marL="91440" marR="73152" marT="18288" marB="18288">
                     <a:solidFill>
                       <a:srgbClr val="FFFFFF"/>
                     </a:solidFill>
                   </a:tcPr>
                 </a:tc>
-                <a:extLst>
-                  <a:ext uri="{0D108BD9-81ED-4DB2-BD59-A6C34878D82A}">
-                    <a16:rowId xmlns:a16="http://schemas.microsoft.com/office/drawing/2014/main" val="10001"/>
-                  </a:ext>
-                </a:extLst>
               </a:tr>
               <a:tr h="329184">
                 <a:tc>
                   <a:txBody>
-                    <a:bodyPr/>
+                    <a:bodyPr wrap="square"/>
                     <a:lstStyle/>
                     <a:p>
                       <a:pPr algn="l"/>
@@ -5341,7 +5570,7 @@
                       </a:r>
                     </a:p>
                   </a:txBody>
-                  <a:tcPr marR="73152" marT="18288" marB="18288">
+                  <a:tcPr marL="91440" marR="73152" marT="18288" marB="18288">
                     <a:solidFill>
                       <a:srgbClr val="F4F6FA"/>
                     </a:solidFill>
@@ -5349,7 +5578,7 @@
                 </a:tc>
                 <a:tc>
                   <a:txBody>
-                    <a:bodyPr/>
+                    <a:bodyPr wrap="square"/>
                     <a:lstStyle/>
                     <a:p>
                       <a:pPr algn="r"/>
@@ -5360,11 +5589,11 @@
                           </a:solidFill>
                           <a:latin typeface="Calibri"/>
                         </a:rPr>
-                        <a:t>0.8465</a:t>
-                      </a:r>
-                    </a:p>
-                  </a:txBody>
-                  <a:tcPr marR="73152" marT="18288" marB="18288">
+                        <a:t>0.8469</a:t>
+                      </a:r>
+                    </a:p>
+                  </a:txBody>
+                  <a:tcPr marL="91440" marR="73152" marT="18288" marB="18288">
                     <a:solidFill>
                       <a:srgbClr val="F4F6FA"/>
                     </a:solidFill>
@@ -5372,7 +5601,7 @@
                 </a:tc>
                 <a:tc>
                   <a:txBody>
-                    <a:bodyPr/>
+                    <a:bodyPr wrap="square"/>
                     <a:lstStyle/>
                     <a:p>
                       <a:pPr algn="r"/>
@@ -5383,11 +5612,11 @@
                           </a:solidFill>
                           <a:latin typeface="Calibri"/>
                         </a:rPr>
-                        <a:t>0.1897</a:t>
-                      </a:r>
-                    </a:p>
-                  </a:txBody>
-                  <a:tcPr marR="73152" marT="18288" marB="18288">
+                        <a:t>0.1861</a:t>
+                      </a:r>
+                    </a:p>
+                  </a:txBody>
+                  <a:tcPr marL="91440" marR="73152" marT="18288" marB="18288">
                     <a:solidFill>
                       <a:srgbClr val="F4F6FA"/>
                     </a:solidFill>
@@ -5395,7 +5624,7 @@
                 </a:tc>
                 <a:tc>
                   <a:txBody>
-                    <a:bodyPr/>
+                    <a:bodyPr wrap="square"/>
                     <a:lstStyle/>
                     <a:p>
                       <a:pPr algn="r"/>
@@ -5406,11 +5635,11 @@
                           </a:solidFill>
                           <a:latin typeface="Calibri"/>
                         </a:rPr>
-                        <a:t>0.1057</a:t>
-                      </a:r>
-                    </a:p>
-                  </a:txBody>
-                  <a:tcPr marR="73152" marT="18288" marB="18288">
+                        <a:t>0.0949</a:t>
+                      </a:r>
+                    </a:p>
+                  </a:txBody>
+                  <a:tcPr marL="91440" marR="73152" marT="18288" marB="18288">
                     <a:solidFill>
                       <a:srgbClr val="F4F6FA"/>
                     </a:solidFill>
@@ -5418,7 +5647,7 @@
                 </a:tc>
                 <a:tc>
                   <a:txBody>
-                    <a:bodyPr/>
+                    <a:bodyPr wrap="square"/>
                     <a:lstStyle/>
                     <a:p>
                       <a:pPr algn="r"/>
@@ -5429,21 +5658,16 @@
                           </a:solidFill>
                           <a:latin typeface="Calibri"/>
                         </a:rPr>
-                        <a:t>0.2896</a:t>
-                      </a:r>
-                    </a:p>
-                  </a:txBody>
-                  <a:tcPr marR="73152" marT="18288" marB="18288">
+                        <a:t>0.2996</a:t>
+                      </a:r>
+                    </a:p>
+                  </a:txBody>
+                  <a:tcPr marL="91440" marR="73152" marT="18288" marB="18288">
                     <a:solidFill>
                       <a:srgbClr val="F4F6FA"/>
                     </a:solidFill>
                   </a:tcPr>
                 </a:tc>
-                <a:extLst>
-                  <a:ext uri="{0D108BD9-81ED-4DB2-BD59-A6C34878D82A}">
-                    <a16:rowId xmlns:a16="http://schemas.microsoft.com/office/drawing/2014/main" val="10002"/>
-                  </a:ext>
-                </a:extLst>
               </a:tr>
             </a:tbl>
           </a:graphicData>
@@ -5492,9 +5716,7 @@
         <p:txBody>
           <a:bodyPr rtlCol="0" anchor="ctr"/>
           <a:lstStyle/>
-          <a:p>
-            <a:endParaRPr/>
-          </a:p>
+          <a:p/>
         </p:txBody>
       </p:sp>
       <p:sp>
@@ -5827,7 +6049,7 @@
 </file>
 
 <file path=ppt/slides/slide14.xml><?xml version="1.0" encoding="utf-8"?>
-<p:sld xmlns:a="http://schemas.openxmlformats.org/drawingml/2006/main" xmlns:r="http://schemas.openxmlformats.org/officeDocument/2006/relationships" xmlns:p="http://schemas.openxmlformats.org/presentationml/2006/main">
+<p:sld xmlns:a="http://schemas.openxmlformats.org/drawingml/2006/main" xmlns:p="http://schemas.openxmlformats.org/presentationml/2006/main" xmlns:r="http://schemas.openxmlformats.org/officeDocument/2006/relationships">
   <p:cSld>
     <p:spTree>
       <p:nvGrpSpPr>
@@ -5835,14 +6057,7 @@
         <p:cNvGrpSpPr/>
         <p:nvPr/>
       </p:nvGrpSpPr>
-      <p:grpSpPr>
-        <a:xfrm>
-          <a:off x="0" y="0"/>
-          <a:ext cx="0" cy="0"/>
-          <a:chOff x="0" y="0"/>
-          <a:chExt cx="0" cy="0"/>
-        </a:xfrm>
-      </p:grpSpPr>
+      <p:grpSpPr/>
       <p:sp>
         <p:nvSpPr>
           <p:cNvPr id="2" name="TextBox 1"/>
@@ -5940,46 +6155,16 @@
                 <a:tableStyleId>{5C22544A-7EE6-4342-B048-85BDC9FD1C3A}</a:tableStyleId>
               </a:tblPr>
               <a:tblGrid>
-                <a:gridCol w="3291840">
-                  <a:extLst>
-                    <a:ext uri="{9D8B030D-6E8A-4147-A177-3AD203B41FA5}">
-                      <a16:colId xmlns:a16="http://schemas.microsoft.com/office/drawing/2014/main" val="20000"/>
-                    </a:ext>
-                  </a:extLst>
-                </a:gridCol>
-                <a:gridCol w="1828800">
-                  <a:extLst>
-                    <a:ext uri="{9D8B030D-6E8A-4147-A177-3AD203B41FA5}">
-                      <a16:colId xmlns:a16="http://schemas.microsoft.com/office/drawing/2014/main" val="20001"/>
-                    </a:ext>
-                  </a:extLst>
-                </a:gridCol>
-                <a:gridCol w="1828800">
-                  <a:extLst>
-                    <a:ext uri="{9D8B030D-6E8A-4147-A177-3AD203B41FA5}">
-                      <a16:colId xmlns:a16="http://schemas.microsoft.com/office/drawing/2014/main" val="20002"/>
-                    </a:ext>
-                  </a:extLst>
-                </a:gridCol>
-                <a:gridCol w="1828800">
-                  <a:extLst>
-                    <a:ext uri="{9D8B030D-6E8A-4147-A177-3AD203B41FA5}">
-                      <a16:colId xmlns:a16="http://schemas.microsoft.com/office/drawing/2014/main" val="20003"/>
-                    </a:ext>
-                  </a:extLst>
-                </a:gridCol>
-                <a:gridCol w="2103119">
-                  <a:extLst>
-                    <a:ext uri="{9D8B030D-6E8A-4147-A177-3AD203B41FA5}">
-                      <a16:colId xmlns:a16="http://schemas.microsoft.com/office/drawing/2014/main" val="20004"/>
-                    </a:ext>
-                  </a:extLst>
-                </a:gridCol>
+                <a:gridCol w="3291840"/>
+                <a:gridCol w="1828800"/>
+                <a:gridCol w="1828800"/>
+                <a:gridCol w="1828800"/>
+                <a:gridCol w="2103119"/>
               </a:tblGrid>
               <a:tr h="384048">
                 <a:tc>
                   <a:txBody>
-                    <a:bodyPr/>
+                    <a:bodyPr wrap="square"/>
                     <a:lstStyle/>
                     <a:p>
                       <a:pPr algn="l"/>
@@ -5994,7 +6179,7 @@
                       </a:r>
                     </a:p>
                   </a:txBody>
-                  <a:tcPr marR="73152" marT="18288" marB="18288">
+                  <a:tcPr marL="91440" marR="73152" marT="18288" marB="18288">
                     <a:solidFill>
                       <a:srgbClr val="1E2761"/>
                     </a:solidFill>
@@ -6002,7 +6187,7 @@
                 </a:tc>
                 <a:tc>
                   <a:txBody>
-                    <a:bodyPr/>
+                    <a:bodyPr wrap="square"/>
                     <a:lstStyle/>
                     <a:p>
                       <a:pPr algn="r"/>
@@ -6017,7 +6202,7 @@
                       </a:r>
                     </a:p>
                   </a:txBody>
-                  <a:tcPr marR="73152" marT="18288" marB="18288">
+                  <a:tcPr marL="91440" marR="73152" marT="18288" marB="18288">
                     <a:solidFill>
                       <a:srgbClr val="1E2761"/>
                     </a:solidFill>
@@ -6025,7 +6210,7 @@
                 </a:tc>
                 <a:tc>
                   <a:txBody>
-                    <a:bodyPr/>
+                    <a:bodyPr wrap="square"/>
                     <a:lstStyle/>
                     <a:p>
                       <a:pPr algn="r"/>
@@ -6040,7 +6225,7 @@
                       </a:r>
                     </a:p>
                   </a:txBody>
-                  <a:tcPr marR="73152" marT="18288" marB="18288">
+                  <a:tcPr marL="91440" marR="73152" marT="18288" marB="18288">
                     <a:solidFill>
                       <a:srgbClr val="1E2761"/>
                     </a:solidFill>
@@ -6048,7 +6233,7 @@
                 </a:tc>
                 <a:tc>
                   <a:txBody>
-                    <a:bodyPr/>
+                    <a:bodyPr wrap="square"/>
                     <a:lstStyle/>
                     <a:p>
                       <a:pPr algn="r"/>
@@ -6063,7 +6248,7 @@
                       </a:r>
                     </a:p>
                   </a:txBody>
-                  <a:tcPr marR="73152" marT="18288" marB="18288">
+                  <a:tcPr marL="91440" marR="73152" marT="18288" marB="18288">
                     <a:solidFill>
                       <a:srgbClr val="1E2761"/>
                     </a:solidFill>
@@ -6071,7 +6256,7 @@
                 </a:tc>
                 <a:tc>
                   <a:txBody>
-                    <a:bodyPr/>
+                    <a:bodyPr wrap="square"/>
                     <a:lstStyle/>
                     <a:p>
                       <a:pPr algn="r"/>
@@ -6086,22 +6271,17 @@
                       </a:r>
                     </a:p>
                   </a:txBody>
-                  <a:tcPr marR="73152" marT="18288" marB="18288">
+                  <a:tcPr marL="91440" marR="73152" marT="18288" marB="18288">
                     <a:solidFill>
                       <a:srgbClr val="1E2761"/>
                     </a:solidFill>
                   </a:tcPr>
                 </a:tc>
-                <a:extLst>
-                  <a:ext uri="{0D108BD9-81ED-4DB2-BD59-A6C34878D82A}">
-                    <a16:rowId xmlns:a16="http://schemas.microsoft.com/office/drawing/2014/main" val="10000"/>
-                  </a:ext>
-                </a:extLst>
               </a:tr>
               <a:tr h="329184">
                 <a:tc>
                   <a:txBody>
-                    <a:bodyPr/>
+                    <a:bodyPr wrap="square"/>
                     <a:lstStyle/>
                     <a:p>
                       <a:pPr algn="l"/>
@@ -6116,7 +6296,7 @@
                       </a:r>
                     </a:p>
                   </a:txBody>
-                  <a:tcPr marR="73152" marT="18288" marB="18288">
+                  <a:tcPr marL="91440" marR="73152" marT="18288" marB="18288">
                     <a:solidFill>
                       <a:srgbClr val="FFFFFF"/>
                     </a:solidFill>
@@ -6124,7 +6304,7 @@
                 </a:tc>
                 <a:tc>
                   <a:txBody>
-                    <a:bodyPr/>
+                    <a:bodyPr wrap="square"/>
                     <a:lstStyle/>
                     <a:p>
                       <a:pPr algn="r"/>
@@ -6139,7 +6319,7 @@
                       </a:r>
                     </a:p>
                   </a:txBody>
-                  <a:tcPr marR="73152" marT="18288" marB="18288">
+                  <a:tcPr marL="91440" marR="73152" marT="18288" marB="18288">
                     <a:solidFill>
                       <a:srgbClr val="FFFFFF"/>
                     </a:solidFill>
@@ -6147,7 +6327,7 @@
                 </a:tc>
                 <a:tc>
                   <a:txBody>
-                    <a:bodyPr/>
+                    <a:bodyPr wrap="square"/>
                     <a:lstStyle/>
                     <a:p>
                       <a:pPr algn="r"/>
@@ -6162,7 +6342,7 @@
                       </a:r>
                     </a:p>
                   </a:txBody>
-                  <a:tcPr marR="73152" marT="18288" marB="18288">
+                  <a:tcPr marL="91440" marR="73152" marT="18288" marB="18288">
                     <a:solidFill>
                       <a:srgbClr val="FFFFFF"/>
                     </a:solidFill>
@@ -6170,7 +6350,7 @@
                 </a:tc>
                 <a:tc>
                   <a:txBody>
-                    <a:bodyPr/>
+                    <a:bodyPr wrap="square"/>
                     <a:lstStyle/>
                     <a:p>
                       <a:pPr algn="r"/>
@@ -6185,7 +6365,7 @@
                       </a:r>
                     </a:p>
                   </a:txBody>
-                  <a:tcPr marR="73152" marT="18288" marB="18288">
+                  <a:tcPr marL="91440" marR="73152" marT="18288" marB="18288">
                     <a:solidFill>
                       <a:srgbClr val="FFFFFF"/>
                     </a:solidFill>
@@ -6193,7 +6373,7 @@
                 </a:tc>
                 <a:tc>
                   <a:txBody>
-                    <a:bodyPr/>
+                    <a:bodyPr wrap="square"/>
                     <a:lstStyle/>
                     <a:p>
                       <a:pPr algn="r"/>
@@ -6208,22 +6388,17 @@
                       </a:r>
                     </a:p>
                   </a:txBody>
-                  <a:tcPr marR="73152" marT="18288" marB="18288">
+                  <a:tcPr marL="91440" marR="73152" marT="18288" marB="18288">
                     <a:solidFill>
                       <a:srgbClr val="FFFFFF"/>
                     </a:solidFill>
                   </a:tcPr>
                 </a:tc>
-                <a:extLst>
-                  <a:ext uri="{0D108BD9-81ED-4DB2-BD59-A6C34878D82A}">
-                    <a16:rowId xmlns:a16="http://schemas.microsoft.com/office/drawing/2014/main" val="10001"/>
-                  </a:ext>
-                </a:extLst>
               </a:tr>
               <a:tr h="329184">
                 <a:tc>
                   <a:txBody>
-                    <a:bodyPr/>
+                    <a:bodyPr wrap="square"/>
                     <a:lstStyle/>
                     <a:p>
                       <a:pPr algn="l"/>
@@ -6238,7 +6413,7 @@
                       </a:r>
                     </a:p>
                   </a:txBody>
-                  <a:tcPr marR="73152" marT="18288" marB="18288">
+                  <a:tcPr marL="91440" marR="73152" marT="18288" marB="18288">
                     <a:solidFill>
                       <a:srgbClr val="FDF3E2"/>
                     </a:solidFill>
@@ -6246,7 +6421,7 @@
                 </a:tc>
                 <a:tc>
                   <a:txBody>
-                    <a:bodyPr/>
+                    <a:bodyPr wrap="square"/>
                     <a:lstStyle/>
                     <a:p>
                       <a:pPr algn="r"/>
@@ -6261,7 +6436,7 @@
                       </a:r>
                     </a:p>
                   </a:txBody>
-                  <a:tcPr marR="73152" marT="18288" marB="18288">
+                  <a:tcPr marL="91440" marR="73152" marT="18288" marB="18288">
                     <a:solidFill>
                       <a:srgbClr val="FDF3E2"/>
                     </a:solidFill>
@@ -6269,7 +6444,7 @@
                 </a:tc>
                 <a:tc>
                   <a:txBody>
-                    <a:bodyPr/>
+                    <a:bodyPr wrap="square"/>
                     <a:lstStyle/>
                     <a:p>
                       <a:pPr algn="r"/>
@@ -6284,7 +6459,7 @@
                       </a:r>
                     </a:p>
                   </a:txBody>
-                  <a:tcPr marR="73152" marT="18288" marB="18288">
+                  <a:tcPr marL="91440" marR="73152" marT="18288" marB="18288">
                     <a:solidFill>
                       <a:srgbClr val="FDF3E2"/>
                     </a:solidFill>
@@ -6292,7 +6467,7 @@
                 </a:tc>
                 <a:tc>
                   <a:txBody>
-                    <a:bodyPr/>
+                    <a:bodyPr wrap="square"/>
                     <a:lstStyle/>
                     <a:p>
                       <a:pPr algn="r"/>
@@ -6307,7 +6482,7 @@
                       </a:r>
                     </a:p>
                   </a:txBody>
-                  <a:tcPr marR="73152" marT="18288" marB="18288">
+                  <a:tcPr marL="91440" marR="73152" marT="18288" marB="18288">
                     <a:solidFill>
                       <a:srgbClr val="FDF3E2"/>
                     </a:solidFill>
@@ -6315,7 +6490,7 @@
                 </a:tc>
                 <a:tc>
                   <a:txBody>
-                    <a:bodyPr/>
+                    <a:bodyPr wrap="square"/>
                     <a:lstStyle/>
                     <a:p>
                       <a:pPr algn="r"/>
@@ -6330,22 +6505,17 @@
                       </a:r>
                     </a:p>
                   </a:txBody>
-                  <a:tcPr marR="73152" marT="18288" marB="18288">
+                  <a:tcPr marL="91440" marR="73152" marT="18288" marB="18288">
                     <a:solidFill>
                       <a:srgbClr val="FDF3E2"/>
                     </a:solidFill>
                   </a:tcPr>
                 </a:tc>
-                <a:extLst>
-                  <a:ext uri="{0D108BD9-81ED-4DB2-BD59-A6C34878D82A}">
-                    <a16:rowId xmlns:a16="http://schemas.microsoft.com/office/drawing/2014/main" val="10002"/>
-                  </a:ext>
-                </a:extLst>
               </a:tr>
               <a:tr h="329184">
                 <a:tc>
                   <a:txBody>
-                    <a:bodyPr/>
+                    <a:bodyPr wrap="square"/>
                     <a:lstStyle/>
                     <a:p>
                       <a:pPr algn="l"/>
@@ -6360,7 +6530,7 @@
                       </a:r>
                     </a:p>
                   </a:txBody>
-                  <a:tcPr marR="73152" marT="18288" marB="18288">
+                  <a:tcPr marL="91440" marR="73152" marT="18288" marB="18288">
                     <a:solidFill>
                       <a:srgbClr val="FFFFFF"/>
                     </a:solidFill>
@@ -6368,7 +6538,7 @@
                 </a:tc>
                 <a:tc>
                   <a:txBody>
-                    <a:bodyPr/>
+                    <a:bodyPr wrap="square"/>
                     <a:lstStyle/>
                     <a:p>
                       <a:pPr algn="r"/>
@@ -6383,7 +6553,7 @@
                       </a:r>
                     </a:p>
                   </a:txBody>
-                  <a:tcPr marR="73152" marT="18288" marB="18288">
+                  <a:tcPr marL="91440" marR="73152" marT="18288" marB="18288">
                     <a:solidFill>
                       <a:srgbClr val="FFFFFF"/>
                     </a:solidFill>
@@ -6391,7 +6561,7 @@
                 </a:tc>
                 <a:tc>
                   <a:txBody>
-                    <a:bodyPr/>
+                    <a:bodyPr wrap="square"/>
                     <a:lstStyle/>
                     <a:p>
                       <a:pPr algn="r"/>
@@ -6406,7 +6576,7 @@
                       </a:r>
                     </a:p>
                   </a:txBody>
-                  <a:tcPr marR="73152" marT="18288" marB="18288">
+                  <a:tcPr marL="91440" marR="73152" marT="18288" marB="18288">
                     <a:solidFill>
                       <a:srgbClr val="FFFFFF"/>
                     </a:solidFill>
@@ -6414,7 +6584,7 @@
                 </a:tc>
                 <a:tc>
                   <a:txBody>
-                    <a:bodyPr/>
+                    <a:bodyPr wrap="square"/>
                     <a:lstStyle/>
                     <a:p>
                       <a:pPr algn="r"/>
@@ -6429,7 +6599,7 @@
                       </a:r>
                     </a:p>
                   </a:txBody>
-                  <a:tcPr marR="73152" marT="18288" marB="18288">
+                  <a:tcPr marL="91440" marR="73152" marT="18288" marB="18288">
                     <a:solidFill>
                       <a:srgbClr val="FFFFFF"/>
                     </a:solidFill>
@@ -6437,7 +6607,7 @@
                 </a:tc>
                 <a:tc>
                   <a:txBody>
-                    <a:bodyPr/>
+                    <a:bodyPr wrap="square"/>
                     <a:lstStyle/>
                     <a:p>
                       <a:pPr algn="r"/>
@@ -6452,17 +6622,12 @@
                       </a:r>
                     </a:p>
                   </a:txBody>
-                  <a:tcPr marR="73152" marT="18288" marB="18288">
+                  <a:tcPr marL="91440" marR="73152" marT="18288" marB="18288">
                     <a:solidFill>
                       <a:srgbClr val="FFFFFF"/>
                     </a:solidFill>
                   </a:tcPr>
                 </a:tc>
-                <a:extLst>
-                  <a:ext uri="{0D108BD9-81ED-4DB2-BD59-A6C34878D82A}">
-                    <a16:rowId xmlns:a16="http://schemas.microsoft.com/office/drawing/2014/main" val="10003"/>
-                  </a:ext>
-                </a:extLst>
               </a:tr>
             </a:tbl>
           </a:graphicData>
@@ -6793,9 +6958,7 @@
         <p:txBody>
           <a:bodyPr rtlCol="0" anchor="ctr"/>
           <a:lstStyle/>
-          <a:p>
-            <a:endParaRPr/>
-          </a:p>
+          <a:p/>
         </p:txBody>
       </p:sp>
       <p:sp>
@@ -6846,7 +7009,7 @@
 </file>
 
 <file path=ppt/slides/slide15.xml><?xml version="1.0" encoding="utf-8"?>
-<p:sld xmlns:a="http://schemas.openxmlformats.org/drawingml/2006/main" xmlns:r="http://schemas.openxmlformats.org/officeDocument/2006/relationships" xmlns:p="http://schemas.openxmlformats.org/presentationml/2006/main">
+<p:sld xmlns:a="http://schemas.openxmlformats.org/drawingml/2006/main" xmlns:p="http://schemas.openxmlformats.org/presentationml/2006/main" xmlns:r="http://schemas.openxmlformats.org/officeDocument/2006/relationships">
   <p:cSld>
     <p:spTree>
       <p:nvGrpSpPr>
@@ -6854,14 +7017,7 @@
         <p:cNvGrpSpPr/>
         <p:nvPr/>
       </p:nvGrpSpPr>
-      <p:grpSpPr>
-        <a:xfrm>
-          <a:off x="0" y="0"/>
-          <a:ext cx="0" cy="0"/>
-          <a:chOff x="0" y="0"/>
-          <a:chExt cx="0" cy="0"/>
-        </a:xfrm>
-      </p:grpSpPr>
+      <p:grpSpPr/>
       <p:sp>
         <p:nvSpPr>
           <p:cNvPr id="2" name="TextBox 1"/>
@@ -6959,46 +7115,16 @@
                 <a:tableStyleId>{5C22544A-7EE6-4342-B048-85BDC9FD1C3A}</a:tableStyleId>
               </a:tblPr>
               <a:tblGrid>
-                <a:gridCol w="3474720">
-                  <a:extLst>
-                    <a:ext uri="{9D8B030D-6E8A-4147-A177-3AD203B41FA5}">
-                      <a16:colId xmlns:a16="http://schemas.microsoft.com/office/drawing/2014/main" val="20000"/>
-                    </a:ext>
-                  </a:extLst>
-                </a:gridCol>
-                <a:gridCol w="1828800">
-                  <a:extLst>
-                    <a:ext uri="{9D8B030D-6E8A-4147-A177-3AD203B41FA5}">
-                      <a16:colId xmlns:a16="http://schemas.microsoft.com/office/drawing/2014/main" val="20001"/>
-                    </a:ext>
-                  </a:extLst>
-                </a:gridCol>
-                <a:gridCol w="1828800">
-                  <a:extLst>
-                    <a:ext uri="{9D8B030D-6E8A-4147-A177-3AD203B41FA5}">
-                      <a16:colId xmlns:a16="http://schemas.microsoft.com/office/drawing/2014/main" val="20002"/>
-                    </a:ext>
-                  </a:extLst>
-                </a:gridCol>
-                <a:gridCol w="1828800">
-                  <a:extLst>
-                    <a:ext uri="{9D8B030D-6E8A-4147-A177-3AD203B41FA5}">
-                      <a16:colId xmlns:a16="http://schemas.microsoft.com/office/drawing/2014/main" val="20003"/>
-                    </a:ext>
-                  </a:extLst>
-                </a:gridCol>
-                <a:gridCol w="1920240">
-                  <a:extLst>
-                    <a:ext uri="{9D8B030D-6E8A-4147-A177-3AD203B41FA5}">
-                      <a16:colId xmlns:a16="http://schemas.microsoft.com/office/drawing/2014/main" val="20004"/>
-                    </a:ext>
-                  </a:extLst>
-                </a:gridCol>
+                <a:gridCol w="3474720"/>
+                <a:gridCol w="1828800"/>
+                <a:gridCol w="1828800"/>
+                <a:gridCol w="1828800"/>
+                <a:gridCol w="1920240"/>
               </a:tblGrid>
               <a:tr h="384048">
                 <a:tc>
                   <a:txBody>
-                    <a:bodyPr/>
+                    <a:bodyPr wrap="square"/>
                     <a:lstStyle/>
                     <a:p>
                       <a:pPr algn="l"/>
@@ -7013,7 +7139,7 @@
                       </a:r>
                     </a:p>
                   </a:txBody>
-                  <a:tcPr marR="73152" marT="18288" marB="18288">
+                  <a:tcPr marL="91440" marR="73152" marT="18288" marB="18288">
                     <a:solidFill>
                       <a:srgbClr val="1E2761"/>
                     </a:solidFill>
@@ -7021,7 +7147,7 @@
                 </a:tc>
                 <a:tc>
                   <a:txBody>
-                    <a:bodyPr/>
+                    <a:bodyPr wrap="square"/>
                     <a:lstStyle/>
                     <a:p>
                       <a:pPr algn="r"/>
@@ -7036,7 +7162,7 @@
                       </a:r>
                     </a:p>
                   </a:txBody>
-                  <a:tcPr marR="73152" marT="18288" marB="18288">
+                  <a:tcPr marL="91440" marR="73152" marT="18288" marB="18288">
                     <a:solidFill>
                       <a:srgbClr val="1E2761"/>
                     </a:solidFill>
@@ -7044,7 +7170,7 @@
                 </a:tc>
                 <a:tc>
                   <a:txBody>
-                    <a:bodyPr/>
+                    <a:bodyPr wrap="square"/>
                     <a:lstStyle/>
                     <a:p>
                       <a:pPr algn="r"/>
@@ -7059,7 +7185,7 @@
                       </a:r>
                     </a:p>
                   </a:txBody>
-                  <a:tcPr marR="73152" marT="18288" marB="18288">
+                  <a:tcPr marL="91440" marR="73152" marT="18288" marB="18288">
                     <a:solidFill>
                       <a:srgbClr val="1E2761"/>
                     </a:solidFill>
@@ -7067,7 +7193,7 @@
                 </a:tc>
                 <a:tc>
                   <a:txBody>
-                    <a:bodyPr/>
+                    <a:bodyPr wrap="square"/>
                     <a:lstStyle/>
                     <a:p>
                       <a:pPr algn="r"/>
@@ -7082,7 +7208,7 @@
                       </a:r>
                     </a:p>
                   </a:txBody>
-                  <a:tcPr marR="73152" marT="18288" marB="18288">
+                  <a:tcPr marL="91440" marR="73152" marT="18288" marB="18288">
                     <a:solidFill>
                       <a:srgbClr val="1E2761"/>
                     </a:solidFill>
@@ -7090,7 +7216,7 @@
                 </a:tc>
                 <a:tc>
                   <a:txBody>
-                    <a:bodyPr/>
+                    <a:bodyPr wrap="square"/>
                     <a:lstStyle/>
                     <a:p>
                       <a:pPr algn="r"/>
@@ -7105,22 +7231,17 @@
                       </a:r>
                     </a:p>
                   </a:txBody>
-                  <a:tcPr marR="73152" marT="18288" marB="18288">
+                  <a:tcPr marL="91440" marR="73152" marT="18288" marB="18288">
                     <a:solidFill>
                       <a:srgbClr val="1E2761"/>
                     </a:solidFill>
                   </a:tcPr>
                 </a:tc>
-                <a:extLst>
-                  <a:ext uri="{0D108BD9-81ED-4DB2-BD59-A6C34878D82A}">
-                    <a16:rowId xmlns:a16="http://schemas.microsoft.com/office/drawing/2014/main" val="10000"/>
-                  </a:ext>
-                </a:extLst>
               </a:tr>
               <a:tr h="329184">
                 <a:tc>
                   <a:txBody>
-                    <a:bodyPr/>
+                    <a:bodyPr wrap="square"/>
                     <a:lstStyle/>
                     <a:p>
                       <a:pPr algn="l"/>
@@ -7135,7 +7256,7 @@
                       </a:r>
                     </a:p>
                   </a:txBody>
-                  <a:tcPr marR="73152" marT="18288" marB="18288">
+                  <a:tcPr marL="91440" marR="73152" marT="18288" marB="18288">
                     <a:solidFill>
                       <a:srgbClr val="FFFFFF"/>
                     </a:solidFill>
@@ -7143,7 +7264,7 @@
                 </a:tc>
                 <a:tc>
                   <a:txBody>
-                    <a:bodyPr/>
+                    <a:bodyPr wrap="square"/>
                     <a:lstStyle/>
                     <a:p>
                       <a:pPr algn="r"/>
@@ -7158,7 +7279,7 @@
                       </a:r>
                     </a:p>
                   </a:txBody>
-                  <a:tcPr marR="73152" marT="18288" marB="18288">
+                  <a:tcPr marL="91440" marR="73152" marT="18288" marB="18288">
                     <a:solidFill>
                       <a:srgbClr val="FFFFFF"/>
                     </a:solidFill>
@@ -7166,7 +7287,7 @@
                 </a:tc>
                 <a:tc>
                   <a:txBody>
-                    <a:bodyPr/>
+                    <a:bodyPr wrap="square"/>
                     <a:lstStyle/>
                     <a:p>
                       <a:pPr algn="r"/>
@@ -7181,7 +7302,7 @@
                       </a:r>
                     </a:p>
                   </a:txBody>
-                  <a:tcPr marR="73152" marT="18288" marB="18288">
+                  <a:tcPr marL="91440" marR="73152" marT="18288" marB="18288">
                     <a:solidFill>
                       <a:srgbClr val="FFFFFF"/>
                     </a:solidFill>
@@ -7189,7 +7310,7 @@
                 </a:tc>
                 <a:tc>
                   <a:txBody>
-                    <a:bodyPr/>
+                    <a:bodyPr wrap="square"/>
                     <a:lstStyle/>
                     <a:p>
                       <a:pPr algn="r"/>
@@ -7204,7 +7325,7 @@
                       </a:r>
                     </a:p>
                   </a:txBody>
-                  <a:tcPr marR="73152" marT="18288" marB="18288">
+                  <a:tcPr marL="91440" marR="73152" marT="18288" marB="18288">
                     <a:solidFill>
                       <a:srgbClr val="FFFFFF"/>
                     </a:solidFill>
@@ -7212,7 +7333,7 @@
                 </a:tc>
                 <a:tc>
                   <a:txBody>
-                    <a:bodyPr/>
+                    <a:bodyPr wrap="square"/>
                     <a:lstStyle/>
                     <a:p>
                       <a:pPr algn="r"/>
@@ -7227,22 +7348,17 @@
                       </a:r>
                     </a:p>
                   </a:txBody>
-                  <a:tcPr marR="73152" marT="18288" marB="18288">
+                  <a:tcPr marL="91440" marR="73152" marT="18288" marB="18288">
                     <a:solidFill>
                       <a:srgbClr val="FFFFFF"/>
                     </a:solidFill>
                   </a:tcPr>
                 </a:tc>
-                <a:extLst>
-                  <a:ext uri="{0D108BD9-81ED-4DB2-BD59-A6C34878D82A}">
-                    <a16:rowId xmlns:a16="http://schemas.microsoft.com/office/drawing/2014/main" val="10001"/>
-                  </a:ext>
-                </a:extLst>
               </a:tr>
               <a:tr h="329184">
                 <a:tc>
                   <a:txBody>
-                    <a:bodyPr/>
+                    <a:bodyPr wrap="square"/>
                     <a:lstStyle/>
                     <a:p>
                       <a:pPr algn="l"/>
@@ -7257,7 +7373,7 @@
                       </a:r>
                     </a:p>
                   </a:txBody>
-                  <a:tcPr marR="73152" marT="18288" marB="18288">
+                  <a:tcPr marL="91440" marR="73152" marT="18288" marB="18288">
                     <a:solidFill>
                       <a:srgbClr val="FDF3E2"/>
                     </a:solidFill>
@@ -7265,7 +7381,7 @@
                 </a:tc>
                 <a:tc>
                   <a:txBody>
-                    <a:bodyPr/>
+                    <a:bodyPr wrap="square"/>
                     <a:lstStyle/>
                     <a:p>
                       <a:pPr algn="r"/>
@@ -7280,7 +7396,7 @@
                       </a:r>
                     </a:p>
                   </a:txBody>
-                  <a:tcPr marR="73152" marT="18288" marB="18288">
+                  <a:tcPr marL="91440" marR="73152" marT="18288" marB="18288">
                     <a:solidFill>
                       <a:srgbClr val="FDF3E2"/>
                     </a:solidFill>
@@ -7288,7 +7404,7 @@
                 </a:tc>
                 <a:tc>
                   <a:txBody>
-                    <a:bodyPr/>
+                    <a:bodyPr wrap="square"/>
                     <a:lstStyle/>
                     <a:p>
                       <a:pPr algn="r"/>
@@ -7303,7 +7419,7 @@
                       </a:r>
                     </a:p>
                   </a:txBody>
-                  <a:tcPr marR="73152" marT="18288" marB="18288">
+                  <a:tcPr marL="91440" marR="73152" marT="18288" marB="18288">
                     <a:solidFill>
                       <a:srgbClr val="FDF3E2"/>
                     </a:solidFill>
@@ -7311,7 +7427,7 @@
                 </a:tc>
                 <a:tc>
                   <a:txBody>
-                    <a:bodyPr/>
+                    <a:bodyPr wrap="square"/>
                     <a:lstStyle/>
                     <a:p>
                       <a:pPr algn="r"/>
@@ -7326,7 +7442,7 @@
                       </a:r>
                     </a:p>
                   </a:txBody>
-                  <a:tcPr marR="73152" marT="18288" marB="18288">
+                  <a:tcPr marL="91440" marR="73152" marT="18288" marB="18288">
                     <a:solidFill>
                       <a:srgbClr val="FDF3E2"/>
                     </a:solidFill>
@@ -7334,7 +7450,7 @@
                 </a:tc>
                 <a:tc>
                   <a:txBody>
-                    <a:bodyPr/>
+                    <a:bodyPr wrap="square"/>
                     <a:lstStyle/>
                     <a:p>
                       <a:pPr algn="r"/>
@@ -7349,22 +7465,17 @@
                       </a:r>
                     </a:p>
                   </a:txBody>
-                  <a:tcPr marR="73152" marT="18288" marB="18288">
+                  <a:tcPr marL="91440" marR="73152" marT="18288" marB="18288">
                     <a:solidFill>
                       <a:srgbClr val="FDF3E2"/>
                     </a:solidFill>
                   </a:tcPr>
                 </a:tc>
-                <a:extLst>
-                  <a:ext uri="{0D108BD9-81ED-4DB2-BD59-A6C34878D82A}">
-                    <a16:rowId xmlns:a16="http://schemas.microsoft.com/office/drawing/2014/main" val="10002"/>
-                  </a:ext>
-                </a:extLst>
               </a:tr>
               <a:tr h="329184">
                 <a:tc>
                   <a:txBody>
-                    <a:bodyPr/>
+                    <a:bodyPr wrap="square"/>
                     <a:lstStyle/>
                     <a:p>
                       <a:pPr algn="l"/>
@@ -7379,7 +7490,7 @@
                       </a:r>
                     </a:p>
                   </a:txBody>
-                  <a:tcPr marR="73152" marT="18288" marB="18288">
+                  <a:tcPr marL="91440" marR="73152" marT="18288" marB="18288">
                     <a:solidFill>
                       <a:srgbClr val="FFFFFF"/>
                     </a:solidFill>
@@ -7387,7 +7498,7 @@
                 </a:tc>
                 <a:tc>
                   <a:txBody>
-                    <a:bodyPr/>
+                    <a:bodyPr wrap="square"/>
                     <a:lstStyle/>
                     <a:p>
                       <a:pPr algn="r"/>
@@ -7402,7 +7513,7 @@
                       </a:r>
                     </a:p>
                   </a:txBody>
-                  <a:tcPr marR="73152" marT="18288" marB="18288">
+                  <a:tcPr marL="91440" marR="73152" marT="18288" marB="18288">
                     <a:solidFill>
                       <a:srgbClr val="FFFFFF"/>
                     </a:solidFill>
@@ -7410,7 +7521,7 @@
                 </a:tc>
                 <a:tc>
                   <a:txBody>
-                    <a:bodyPr/>
+                    <a:bodyPr wrap="square"/>
                     <a:lstStyle/>
                     <a:p>
                       <a:pPr algn="r"/>
@@ -7425,7 +7536,7 @@
                       </a:r>
                     </a:p>
                   </a:txBody>
-                  <a:tcPr marR="73152" marT="18288" marB="18288">
+                  <a:tcPr marL="91440" marR="73152" marT="18288" marB="18288">
                     <a:solidFill>
                       <a:srgbClr val="FFFFFF"/>
                     </a:solidFill>
@@ -7433,7 +7544,7 @@
                 </a:tc>
                 <a:tc>
                   <a:txBody>
-                    <a:bodyPr/>
+                    <a:bodyPr wrap="square"/>
                     <a:lstStyle/>
                     <a:p>
                       <a:pPr algn="r"/>
@@ -7448,7 +7559,7 @@
                       </a:r>
                     </a:p>
                   </a:txBody>
-                  <a:tcPr marR="73152" marT="18288" marB="18288">
+                  <a:tcPr marL="91440" marR="73152" marT="18288" marB="18288">
                     <a:solidFill>
                       <a:srgbClr val="FFFFFF"/>
                     </a:solidFill>
@@ -7456,7 +7567,7 @@
                 </a:tc>
                 <a:tc>
                   <a:txBody>
-                    <a:bodyPr/>
+                    <a:bodyPr wrap="square"/>
                     <a:lstStyle/>
                     <a:p>
                       <a:pPr algn="r"/>
@@ -7471,22 +7582,17 @@
                       </a:r>
                     </a:p>
                   </a:txBody>
-                  <a:tcPr marR="73152" marT="18288" marB="18288">
+                  <a:tcPr marL="91440" marR="73152" marT="18288" marB="18288">
                     <a:solidFill>
                       <a:srgbClr val="FFFFFF"/>
                     </a:solidFill>
                   </a:tcPr>
                 </a:tc>
-                <a:extLst>
-                  <a:ext uri="{0D108BD9-81ED-4DB2-BD59-A6C34878D82A}">
-                    <a16:rowId xmlns:a16="http://schemas.microsoft.com/office/drawing/2014/main" val="10003"/>
-                  </a:ext>
-                </a:extLst>
               </a:tr>
               <a:tr h="329184">
                 <a:tc>
                   <a:txBody>
-                    <a:bodyPr/>
+                    <a:bodyPr wrap="square"/>
                     <a:lstStyle/>
                     <a:p>
                       <a:pPr algn="l"/>
@@ -7501,7 +7607,7 @@
                       </a:r>
                     </a:p>
                   </a:txBody>
-                  <a:tcPr marR="73152" marT="18288" marB="18288">
+                  <a:tcPr marL="91440" marR="73152" marT="18288" marB="18288">
                     <a:solidFill>
                       <a:srgbClr val="F4F6FA"/>
                     </a:solidFill>
@@ -7509,7 +7615,7 @@
                 </a:tc>
                 <a:tc>
                   <a:txBody>
-                    <a:bodyPr/>
+                    <a:bodyPr wrap="square"/>
                     <a:lstStyle/>
                     <a:p>
                       <a:pPr algn="r"/>
@@ -7524,7 +7630,7 @@
                       </a:r>
                     </a:p>
                   </a:txBody>
-                  <a:tcPr marR="73152" marT="18288" marB="18288">
+                  <a:tcPr marL="91440" marR="73152" marT="18288" marB="18288">
                     <a:solidFill>
                       <a:srgbClr val="F4F6FA"/>
                     </a:solidFill>
@@ -7532,7 +7638,7 @@
                 </a:tc>
                 <a:tc>
                   <a:txBody>
-                    <a:bodyPr/>
+                    <a:bodyPr wrap="square"/>
                     <a:lstStyle/>
                     <a:p>
                       <a:pPr algn="r"/>
@@ -7547,7 +7653,7 @@
                       </a:r>
                     </a:p>
                   </a:txBody>
-                  <a:tcPr marR="73152" marT="18288" marB="18288">
+                  <a:tcPr marL="91440" marR="73152" marT="18288" marB="18288">
                     <a:solidFill>
                       <a:srgbClr val="F4F6FA"/>
                     </a:solidFill>
@@ -7555,7 +7661,7 @@
                 </a:tc>
                 <a:tc>
                   <a:txBody>
-                    <a:bodyPr/>
+                    <a:bodyPr wrap="square"/>
                     <a:lstStyle/>
                     <a:p>
                       <a:pPr algn="r"/>
@@ -7570,7 +7676,7 @@
                       </a:r>
                     </a:p>
                   </a:txBody>
-                  <a:tcPr marR="73152" marT="18288" marB="18288">
+                  <a:tcPr marL="91440" marR="73152" marT="18288" marB="18288">
                     <a:solidFill>
                       <a:srgbClr val="F4F6FA"/>
                     </a:solidFill>
@@ -7578,7 +7684,7 @@
                 </a:tc>
                 <a:tc>
                   <a:txBody>
-                    <a:bodyPr/>
+                    <a:bodyPr wrap="square"/>
                     <a:lstStyle/>
                     <a:p>
                       <a:pPr algn="r"/>
@@ -7593,22 +7699,17 @@
                       </a:r>
                     </a:p>
                   </a:txBody>
-                  <a:tcPr marR="73152" marT="18288" marB="18288">
+                  <a:tcPr marL="91440" marR="73152" marT="18288" marB="18288">
                     <a:solidFill>
                       <a:srgbClr val="F4F6FA"/>
                     </a:solidFill>
                   </a:tcPr>
                 </a:tc>
-                <a:extLst>
-                  <a:ext uri="{0D108BD9-81ED-4DB2-BD59-A6C34878D82A}">
-                    <a16:rowId xmlns:a16="http://schemas.microsoft.com/office/drawing/2014/main" val="10004"/>
-                  </a:ext>
-                </a:extLst>
               </a:tr>
               <a:tr h="329184">
                 <a:tc>
                   <a:txBody>
-                    <a:bodyPr/>
+                    <a:bodyPr wrap="square"/>
                     <a:lstStyle/>
                     <a:p>
                       <a:pPr algn="l"/>
@@ -7623,7 +7724,7 @@
                       </a:r>
                     </a:p>
                   </a:txBody>
-                  <a:tcPr marR="73152" marT="18288" marB="18288">
+                  <a:tcPr marL="91440" marR="73152" marT="18288" marB="18288">
                     <a:solidFill>
                       <a:srgbClr val="FFFFFF"/>
                     </a:solidFill>
@@ -7631,7 +7732,7 @@
                 </a:tc>
                 <a:tc>
                   <a:txBody>
-                    <a:bodyPr/>
+                    <a:bodyPr wrap="square"/>
                     <a:lstStyle/>
                     <a:p>
                       <a:pPr algn="r"/>
@@ -7646,7 +7747,7 @@
                       </a:r>
                     </a:p>
                   </a:txBody>
-                  <a:tcPr marR="73152" marT="18288" marB="18288">
+                  <a:tcPr marL="91440" marR="73152" marT="18288" marB="18288">
                     <a:solidFill>
                       <a:srgbClr val="FFFFFF"/>
                     </a:solidFill>
@@ -7654,7 +7755,7 @@
                 </a:tc>
                 <a:tc>
                   <a:txBody>
-                    <a:bodyPr/>
+                    <a:bodyPr wrap="square"/>
                     <a:lstStyle/>
                     <a:p>
                       <a:pPr algn="r"/>
@@ -7669,7 +7770,7 @@
                       </a:r>
                     </a:p>
                   </a:txBody>
-                  <a:tcPr marR="73152" marT="18288" marB="18288">
+                  <a:tcPr marL="91440" marR="73152" marT="18288" marB="18288">
                     <a:solidFill>
                       <a:srgbClr val="FFFFFF"/>
                     </a:solidFill>
@@ -7677,7 +7778,7 @@
                 </a:tc>
                 <a:tc>
                   <a:txBody>
-                    <a:bodyPr/>
+                    <a:bodyPr wrap="square"/>
                     <a:lstStyle/>
                     <a:p>
                       <a:pPr algn="r"/>
@@ -7692,7 +7793,7 @@
                       </a:r>
                     </a:p>
                   </a:txBody>
-                  <a:tcPr marR="73152" marT="18288" marB="18288">
+                  <a:tcPr marL="91440" marR="73152" marT="18288" marB="18288">
                     <a:solidFill>
                       <a:srgbClr val="FFFFFF"/>
                     </a:solidFill>
@@ -7700,7 +7801,7 @@
                 </a:tc>
                 <a:tc>
                   <a:txBody>
-                    <a:bodyPr/>
+                    <a:bodyPr wrap="square"/>
                     <a:lstStyle/>
                     <a:p>
                       <a:pPr algn="r"/>
@@ -7715,22 +7816,17 @@
                       </a:r>
                     </a:p>
                   </a:txBody>
-                  <a:tcPr marR="73152" marT="18288" marB="18288">
+                  <a:tcPr marL="91440" marR="73152" marT="18288" marB="18288">
                     <a:solidFill>
                       <a:srgbClr val="FFFFFF"/>
                     </a:solidFill>
                   </a:tcPr>
                 </a:tc>
-                <a:extLst>
-                  <a:ext uri="{0D108BD9-81ED-4DB2-BD59-A6C34878D82A}">
-                    <a16:rowId xmlns:a16="http://schemas.microsoft.com/office/drawing/2014/main" val="10005"/>
-                  </a:ext>
-                </a:extLst>
               </a:tr>
               <a:tr h="329184">
                 <a:tc>
                   <a:txBody>
-                    <a:bodyPr/>
+                    <a:bodyPr wrap="square"/>
                     <a:lstStyle/>
                     <a:p>
                       <a:pPr algn="l"/>
@@ -7745,7 +7841,7 @@
                       </a:r>
                     </a:p>
                   </a:txBody>
-                  <a:tcPr marR="73152" marT="18288" marB="18288">
+                  <a:tcPr marL="91440" marR="73152" marT="18288" marB="18288">
                     <a:solidFill>
                       <a:srgbClr val="F4F6FA"/>
                     </a:solidFill>
@@ -7753,7 +7849,7 @@
                 </a:tc>
                 <a:tc>
                   <a:txBody>
-                    <a:bodyPr/>
+                    <a:bodyPr wrap="square"/>
                     <a:lstStyle/>
                     <a:p>
                       <a:pPr algn="r"/>
@@ -7768,7 +7864,7 @@
                       </a:r>
                     </a:p>
                   </a:txBody>
-                  <a:tcPr marR="73152" marT="18288" marB="18288">
+                  <a:tcPr marL="91440" marR="73152" marT="18288" marB="18288">
                     <a:solidFill>
                       <a:srgbClr val="F4F6FA"/>
                     </a:solidFill>
@@ -7776,7 +7872,7 @@
                 </a:tc>
                 <a:tc>
                   <a:txBody>
-                    <a:bodyPr/>
+                    <a:bodyPr wrap="square"/>
                     <a:lstStyle/>
                     <a:p>
                       <a:pPr algn="r"/>
@@ -7791,7 +7887,7 @@
                       </a:r>
                     </a:p>
                   </a:txBody>
-                  <a:tcPr marR="73152" marT="18288" marB="18288">
+                  <a:tcPr marL="91440" marR="73152" marT="18288" marB="18288">
                     <a:solidFill>
                       <a:srgbClr val="F4F6FA"/>
                     </a:solidFill>
@@ -7799,7 +7895,7 @@
                 </a:tc>
                 <a:tc>
                   <a:txBody>
-                    <a:bodyPr/>
+                    <a:bodyPr wrap="square"/>
                     <a:lstStyle/>
                     <a:p>
                       <a:pPr algn="r"/>
@@ -7814,7 +7910,7 @@
                       </a:r>
                     </a:p>
                   </a:txBody>
-                  <a:tcPr marR="73152" marT="18288" marB="18288">
+                  <a:tcPr marL="91440" marR="73152" marT="18288" marB="18288">
                     <a:solidFill>
                       <a:srgbClr val="F4F6FA"/>
                     </a:solidFill>
@@ -7822,7 +7918,7 @@
                 </a:tc>
                 <a:tc>
                   <a:txBody>
-                    <a:bodyPr/>
+                    <a:bodyPr wrap="square"/>
                     <a:lstStyle/>
                     <a:p>
                       <a:pPr algn="r"/>
@@ -7837,17 +7933,12 @@
                       </a:r>
                     </a:p>
                   </a:txBody>
-                  <a:tcPr marR="73152" marT="18288" marB="18288">
+                  <a:tcPr marL="91440" marR="73152" marT="18288" marB="18288">
                     <a:solidFill>
                       <a:srgbClr val="F4F6FA"/>
                     </a:solidFill>
                   </a:tcPr>
                 </a:tc>
-                <a:extLst>
-                  <a:ext uri="{0D108BD9-81ED-4DB2-BD59-A6C34878D82A}">
-                    <a16:rowId xmlns:a16="http://schemas.microsoft.com/office/drawing/2014/main" val="10006"/>
-                  </a:ext>
-                </a:extLst>
               </a:tr>
             </a:tbl>
           </a:graphicData>
@@ -7935,9 +8026,7 @@
         <p:txBody>
           <a:bodyPr rtlCol="0" anchor="ctr"/>
           <a:lstStyle/>
-          <a:p>
-            <a:endParaRPr/>
-          </a:p>
+          <a:p/>
         </p:txBody>
       </p:sp>
       <p:sp>
@@ -7988,7 +8077,7 @@
 </file>
 
 <file path=ppt/slides/slide16.xml><?xml version="1.0" encoding="utf-8"?>
-<p:sld xmlns:a="http://schemas.openxmlformats.org/drawingml/2006/main" xmlns:r="http://schemas.openxmlformats.org/officeDocument/2006/relationships" xmlns:p="http://schemas.openxmlformats.org/presentationml/2006/main">
+<p:sld xmlns:a="http://schemas.openxmlformats.org/drawingml/2006/main" xmlns:p="http://schemas.openxmlformats.org/presentationml/2006/main" xmlns:r="http://schemas.openxmlformats.org/officeDocument/2006/relationships">
   <p:cSld>
     <p:spTree>
       <p:nvGrpSpPr>
@@ -7996,14 +8085,7 @@
         <p:cNvGrpSpPr/>
         <p:nvPr/>
       </p:nvGrpSpPr>
-      <p:grpSpPr>
-        <a:xfrm>
-          <a:off x="0" y="0"/>
-          <a:ext cx="0" cy="0"/>
-          <a:chOff x="0" y="0"/>
-          <a:chExt cx="0" cy="0"/>
-        </a:xfrm>
-      </p:grpSpPr>
+      <p:grpSpPr/>
       <p:sp>
         <p:nvSpPr>
           <p:cNvPr id="2" name="TextBox 1"/>
@@ -8125,9 +8207,7 @@
         <p:txBody>
           <a:bodyPr rtlCol="0" anchor="ctr"/>
           <a:lstStyle/>
-          <a:p>
-            <a:endParaRPr/>
-          </a:p>
+          <a:p/>
         </p:txBody>
       </p:sp>
       <p:sp>
@@ -8251,9 +8331,7 @@
         <p:txBody>
           <a:bodyPr rtlCol="0" anchor="ctr"/>
           <a:lstStyle/>
-          <a:p>
-            <a:endParaRPr/>
-          </a:p>
+          <a:p/>
         </p:txBody>
       </p:sp>
       <p:sp>
@@ -8377,9 +8455,7 @@
         <p:txBody>
           <a:bodyPr rtlCol="0" anchor="ctr"/>
           <a:lstStyle/>
-          <a:p>
-            <a:endParaRPr/>
-          </a:p>
+          <a:p/>
         </p:txBody>
       </p:sp>
       <p:sp>
@@ -8581,9 +8657,7 @@
         <p:txBody>
           <a:bodyPr rtlCol="0" anchor="ctr"/>
           <a:lstStyle/>
-          <a:p>
-            <a:endParaRPr/>
-          </a:p>
+          <a:p/>
         </p:txBody>
       </p:sp>
       <p:sp>
@@ -8634,7 +8708,7 @@
 </file>
 
 <file path=ppt/slides/slide17.xml><?xml version="1.0" encoding="utf-8"?>
-<p:sld xmlns:a="http://schemas.openxmlformats.org/drawingml/2006/main" xmlns:r="http://schemas.openxmlformats.org/officeDocument/2006/relationships" xmlns:p="http://schemas.openxmlformats.org/presentationml/2006/main">
+<p:sld xmlns:a="http://schemas.openxmlformats.org/drawingml/2006/main" xmlns:p="http://schemas.openxmlformats.org/presentationml/2006/main" xmlns:r="http://schemas.openxmlformats.org/officeDocument/2006/relationships">
   <p:cSld>
     <p:spTree>
       <p:nvGrpSpPr>
@@ -8642,14 +8716,7 @@
         <p:cNvGrpSpPr/>
         <p:nvPr/>
       </p:nvGrpSpPr>
-      <p:grpSpPr>
-        <a:xfrm>
-          <a:off x="0" y="0"/>
-          <a:ext cx="0" cy="0"/>
-          <a:chOff x="0" y="0"/>
-          <a:chExt cx="0" cy="0"/>
-        </a:xfrm>
-      </p:grpSpPr>
+      <p:grpSpPr/>
       <p:sp>
         <p:nvSpPr>
           <p:cNvPr id="2" name="TextBox 1"/>
@@ -8795,9 +8862,7 @@
         <p:txBody>
           <a:bodyPr rtlCol="0" anchor="ctr"/>
           <a:lstStyle/>
-          <a:p>
-            <a:endParaRPr/>
-          </a:p>
+          <a:p/>
         </p:txBody>
       </p:sp>
       <p:sp>
@@ -8882,12 +8947,15 @@
                 <a:spcPct val="105000"/>
               </a:lnSpc>
             </a:pPr>
-            <a:endParaRPr sz="1300" b="0">
-              <a:solidFill>
-                <a:srgbClr val="1B1B1F"/>
-              </a:solidFill>
-              <a:latin typeface="Calibri"/>
-            </a:endParaRPr>
+            <a:r>
+              <a:rPr sz="1300" b="0">
+                <a:solidFill>
+                  <a:srgbClr val="1B1B1F"/>
+                </a:solidFill>
+                <a:latin typeface="Calibri"/>
+              </a:rPr>
+              <a:t/>
+            </a:r>
           </a:p>
           <a:p>
             <a:pPr algn="l">
@@ -8911,12 +8979,15 @@
                 <a:spcPct val="105000"/>
               </a:lnSpc>
             </a:pPr>
-            <a:endParaRPr sz="1300" b="0">
-              <a:solidFill>
-                <a:srgbClr val="1B1B1F"/>
-              </a:solidFill>
-              <a:latin typeface="Calibri"/>
-            </a:endParaRPr>
+            <a:r>
+              <a:rPr sz="1300" b="0">
+                <a:solidFill>
+                  <a:srgbClr val="1B1B1F"/>
+                </a:solidFill>
+                <a:latin typeface="Calibri"/>
+              </a:rPr>
+              <a:t/>
+            </a:r>
           </a:p>
           <a:p>
             <a:pPr algn="l">
@@ -8940,12 +9011,15 @@
                 <a:spcPct val="105000"/>
               </a:lnSpc>
             </a:pPr>
-            <a:endParaRPr sz="1300" b="0">
-              <a:solidFill>
-                <a:srgbClr val="1B1B1F"/>
-              </a:solidFill>
-              <a:latin typeface="Calibri"/>
-            </a:endParaRPr>
+            <a:r>
+              <a:rPr sz="1300" b="0">
+                <a:solidFill>
+                  <a:srgbClr val="1B1B1F"/>
+                </a:solidFill>
+                <a:latin typeface="Calibri"/>
+              </a:rPr>
+              <a:t/>
+            </a:r>
           </a:p>
           <a:p>
             <a:pPr algn="l">
@@ -9008,9 +9082,7 @@
         <p:txBody>
           <a:bodyPr rtlCol="0" anchor="ctr"/>
           <a:lstStyle/>
-          <a:p>
-            <a:endParaRPr/>
-          </a:p>
+          <a:p/>
         </p:txBody>
       </p:sp>
       <p:sp>
@@ -9061,7 +9133,7 @@
 </file>
 
 <file path=ppt/slides/slide18.xml><?xml version="1.0" encoding="utf-8"?>
-<p:sld xmlns:a="http://schemas.openxmlformats.org/drawingml/2006/main" xmlns:r="http://schemas.openxmlformats.org/officeDocument/2006/relationships" xmlns:p="http://schemas.openxmlformats.org/presentationml/2006/main">
+<p:sld xmlns:a="http://schemas.openxmlformats.org/drawingml/2006/main" xmlns:p="http://schemas.openxmlformats.org/presentationml/2006/main" xmlns:r="http://schemas.openxmlformats.org/officeDocument/2006/relationships">
   <p:cSld>
     <p:spTree>
       <p:nvGrpSpPr>
@@ -9069,14 +9141,7 @@
         <p:cNvGrpSpPr/>
         <p:nvPr/>
       </p:nvGrpSpPr>
-      <p:grpSpPr>
-        <a:xfrm>
-          <a:off x="0" y="0"/>
-          <a:ext cx="0" cy="0"/>
-          <a:chOff x="0" y="0"/>
-          <a:chExt cx="0" cy="0"/>
-        </a:xfrm>
-      </p:grpSpPr>
+      <p:grpSpPr/>
       <p:sp>
         <p:nvSpPr>
           <p:cNvPr id="2" name="TextBox 1"/>
@@ -9174,39 +9239,15 @@
                 <a:tableStyleId>{5C22544A-7EE6-4342-B048-85BDC9FD1C3A}</a:tableStyleId>
               </a:tblPr>
               <a:tblGrid>
-                <a:gridCol w="3840480">
-                  <a:extLst>
-                    <a:ext uri="{9D8B030D-6E8A-4147-A177-3AD203B41FA5}">
-                      <a16:colId xmlns:a16="http://schemas.microsoft.com/office/drawing/2014/main" val="20000"/>
-                    </a:ext>
-                  </a:extLst>
-                </a:gridCol>
-                <a:gridCol w="2651760">
-                  <a:extLst>
-                    <a:ext uri="{9D8B030D-6E8A-4147-A177-3AD203B41FA5}">
-                      <a16:colId xmlns:a16="http://schemas.microsoft.com/office/drawing/2014/main" val="20001"/>
-                    </a:ext>
-                  </a:extLst>
-                </a:gridCol>
-                <a:gridCol w="2011680">
-                  <a:extLst>
-                    <a:ext uri="{9D8B030D-6E8A-4147-A177-3AD203B41FA5}">
-                      <a16:colId xmlns:a16="http://schemas.microsoft.com/office/drawing/2014/main" val="20002"/>
-                    </a:ext>
-                  </a:extLst>
-                </a:gridCol>
-                <a:gridCol w="2377440">
-                  <a:extLst>
-                    <a:ext uri="{9D8B030D-6E8A-4147-A177-3AD203B41FA5}">
-                      <a16:colId xmlns:a16="http://schemas.microsoft.com/office/drawing/2014/main" val="20003"/>
-                    </a:ext>
-                  </a:extLst>
-                </a:gridCol>
+                <a:gridCol w="3840480"/>
+                <a:gridCol w="2651760"/>
+                <a:gridCol w="2011680"/>
+                <a:gridCol w="2377440"/>
               </a:tblGrid>
               <a:tr h="384048">
                 <a:tc>
                   <a:txBody>
-                    <a:bodyPr/>
+                    <a:bodyPr wrap="square"/>
                     <a:lstStyle/>
                     <a:p>
                       <a:pPr algn="l"/>
@@ -9221,7 +9262,7 @@
                       </a:r>
                     </a:p>
                   </a:txBody>
-                  <a:tcPr marR="73152" marT="18288" marB="18288">
+                  <a:tcPr marL="91440" marR="73152" marT="18288" marB="18288">
                     <a:solidFill>
                       <a:srgbClr val="1E2761"/>
                     </a:solidFill>
@@ -9229,7 +9270,7 @@
                 </a:tc>
                 <a:tc>
                   <a:txBody>
-                    <a:bodyPr/>
+                    <a:bodyPr wrap="square"/>
                     <a:lstStyle/>
                     <a:p>
                       <a:pPr algn="r"/>
@@ -9244,7 +9285,7 @@
                       </a:r>
                     </a:p>
                   </a:txBody>
-                  <a:tcPr marR="73152" marT="18288" marB="18288">
+                  <a:tcPr marL="91440" marR="73152" marT="18288" marB="18288">
                     <a:solidFill>
                       <a:srgbClr val="1E2761"/>
                     </a:solidFill>
@@ -9252,7 +9293,7 @@
                 </a:tc>
                 <a:tc>
                   <a:txBody>
-                    <a:bodyPr/>
+                    <a:bodyPr wrap="square"/>
                     <a:lstStyle/>
                     <a:p>
                       <a:pPr algn="r"/>
@@ -9267,7 +9308,7 @@
                       </a:r>
                     </a:p>
                   </a:txBody>
-                  <a:tcPr marR="73152" marT="18288" marB="18288">
+                  <a:tcPr marL="91440" marR="73152" marT="18288" marB="18288">
                     <a:solidFill>
                       <a:srgbClr val="1E2761"/>
                     </a:solidFill>
@@ -9275,7 +9316,7 @@
                 </a:tc>
                 <a:tc>
                   <a:txBody>
-                    <a:bodyPr/>
+                    <a:bodyPr wrap="square"/>
                     <a:lstStyle/>
                     <a:p>
                       <a:pPr algn="r"/>
@@ -9290,22 +9331,17 @@
                       </a:r>
                     </a:p>
                   </a:txBody>
-                  <a:tcPr marR="73152" marT="18288" marB="18288">
+                  <a:tcPr marL="91440" marR="73152" marT="18288" marB="18288">
                     <a:solidFill>
                       <a:srgbClr val="1E2761"/>
                     </a:solidFill>
                   </a:tcPr>
                 </a:tc>
-                <a:extLst>
-                  <a:ext uri="{0D108BD9-81ED-4DB2-BD59-A6C34878D82A}">
-                    <a16:rowId xmlns:a16="http://schemas.microsoft.com/office/drawing/2014/main" val="10000"/>
-                  </a:ext>
-                </a:extLst>
               </a:tr>
               <a:tr h="292608">
                 <a:tc>
                   <a:txBody>
-                    <a:bodyPr/>
+                    <a:bodyPr wrap="square"/>
                     <a:lstStyle/>
                     <a:p>
                       <a:pPr algn="l"/>
@@ -9320,7 +9356,7 @@
                       </a:r>
                     </a:p>
                   </a:txBody>
-                  <a:tcPr marR="73152" marT="18288" marB="18288">
+                  <a:tcPr marL="91440" marR="73152" marT="18288" marB="18288">
                     <a:solidFill>
                       <a:srgbClr val="FFFFFF"/>
                     </a:solidFill>
@@ -9328,7 +9364,7 @@
                 </a:tc>
                 <a:tc>
                   <a:txBody>
-                    <a:bodyPr/>
+                    <a:bodyPr wrap="square"/>
                     <a:lstStyle/>
                     <a:p>
                       <a:pPr algn="r"/>
@@ -9343,7 +9379,7 @@
                       </a:r>
                     </a:p>
                   </a:txBody>
-                  <a:tcPr marR="73152" marT="18288" marB="18288">
+                  <a:tcPr marL="91440" marR="73152" marT="18288" marB="18288">
                     <a:solidFill>
                       <a:srgbClr val="FFFFFF"/>
                     </a:solidFill>
@@ -9351,7 +9387,7 @@
                 </a:tc>
                 <a:tc>
                   <a:txBody>
-                    <a:bodyPr/>
+                    <a:bodyPr wrap="square"/>
                     <a:lstStyle/>
                     <a:p>
                       <a:pPr algn="r"/>
@@ -9366,7 +9402,7 @@
                       </a:r>
                     </a:p>
                   </a:txBody>
-                  <a:tcPr marR="73152" marT="18288" marB="18288">
+                  <a:tcPr marL="91440" marR="73152" marT="18288" marB="18288">
                     <a:solidFill>
                       <a:srgbClr val="FFFFFF"/>
                     </a:solidFill>
@@ -9374,7 +9410,7 @@
                 </a:tc>
                 <a:tc>
                   <a:txBody>
-                    <a:bodyPr/>
+                    <a:bodyPr wrap="square"/>
                     <a:lstStyle/>
                     <a:p>
                       <a:pPr algn="r"/>
@@ -9389,22 +9425,17 @@
                       </a:r>
                     </a:p>
                   </a:txBody>
-                  <a:tcPr marR="73152" marT="18288" marB="18288">
+                  <a:tcPr marL="91440" marR="73152" marT="18288" marB="18288">
                     <a:solidFill>
                       <a:srgbClr val="FFFFFF"/>
                     </a:solidFill>
                   </a:tcPr>
                 </a:tc>
-                <a:extLst>
-                  <a:ext uri="{0D108BD9-81ED-4DB2-BD59-A6C34878D82A}">
-                    <a16:rowId xmlns:a16="http://schemas.microsoft.com/office/drawing/2014/main" val="10001"/>
-                  </a:ext>
-                </a:extLst>
               </a:tr>
               <a:tr h="292608">
                 <a:tc>
                   <a:txBody>
-                    <a:bodyPr/>
+                    <a:bodyPr wrap="square"/>
                     <a:lstStyle/>
                     <a:p>
                       <a:pPr algn="l"/>
@@ -9419,7 +9450,7 @@
                       </a:r>
                     </a:p>
                   </a:txBody>
-                  <a:tcPr marR="73152" marT="18288" marB="18288">
+                  <a:tcPr marL="91440" marR="73152" marT="18288" marB="18288">
                     <a:solidFill>
                       <a:srgbClr val="FDF3E2"/>
                     </a:solidFill>
@@ -9427,7 +9458,7 @@
                 </a:tc>
                 <a:tc>
                   <a:txBody>
-                    <a:bodyPr/>
+                    <a:bodyPr wrap="square"/>
                     <a:lstStyle/>
                     <a:p>
                       <a:pPr algn="r"/>
@@ -9442,7 +9473,7 @@
                       </a:r>
                     </a:p>
                   </a:txBody>
-                  <a:tcPr marR="73152" marT="18288" marB="18288">
+                  <a:tcPr marL="91440" marR="73152" marT="18288" marB="18288">
                     <a:solidFill>
                       <a:srgbClr val="FDF3E2"/>
                     </a:solidFill>
@@ -9450,7 +9481,7 @@
                 </a:tc>
                 <a:tc>
                   <a:txBody>
-                    <a:bodyPr/>
+                    <a:bodyPr wrap="square"/>
                     <a:lstStyle/>
                     <a:p>
                       <a:pPr algn="r"/>
@@ -9465,7 +9496,7 @@
                       </a:r>
                     </a:p>
                   </a:txBody>
-                  <a:tcPr marR="73152" marT="18288" marB="18288">
+                  <a:tcPr marL="91440" marR="73152" marT="18288" marB="18288">
                     <a:solidFill>
                       <a:srgbClr val="FDF3E2"/>
                     </a:solidFill>
@@ -9473,7 +9504,7 @@
                 </a:tc>
                 <a:tc>
                   <a:txBody>
-                    <a:bodyPr/>
+                    <a:bodyPr wrap="square"/>
                     <a:lstStyle/>
                     <a:p>
                       <a:pPr algn="r"/>
@@ -9488,22 +9519,17 @@
                       </a:r>
                     </a:p>
                   </a:txBody>
-                  <a:tcPr marR="73152" marT="18288" marB="18288">
+                  <a:tcPr marL="91440" marR="73152" marT="18288" marB="18288">
                     <a:solidFill>
                       <a:srgbClr val="FDF3E2"/>
                     </a:solidFill>
                   </a:tcPr>
                 </a:tc>
-                <a:extLst>
-                  <a:ext uri="{0D108BD9-81ED-4DB2-BD59-A6C34878D82A}">
-                    <a16:rowId xmlns:a16="http://schemas.microsoft.com/office/drawing/2014/main" val="10002"/>
-                  </a:ext>
-                </a:extLst>
               </a:tr>
               <a:tr h="292608">
                 <a:tc>
                   <a:txBody>
-                    <a:bodyPr/>
+                    <a:bodyPr wrap="square"/>
                     <a:lstStyle/>
                     <a:p>
                       <a:pPr algn="l"/>
@@ -9518,7 +9544,7 @@
                       </a:r>
                     </a:p>
                   </a:txBody>
-                  <a:tcPr marR="73152" marT="18288" marB="18288">
+                  <a:tcPr marL="91440" marR="73152" marT="18288" marB="18288">
                     <a:solidFill>
                       <a:srgbClr val="FFFFFF"/>
                     </a:solidFill>
@@ -9526,7 +9552,7 @@
                 </a:tc>
                 <a:tc>
                   <a:txBody>
-                    <a:bodyPr/>
+                    <a:bodyPr wrap="square"/>
                     <a:lstStyle/>
                     <a:p>
                       <a:pPr algn="r"/>
@@ -9541,7 +9567,7 @@
                       </a:r>
                     </a:p>
                   </a:txBody>
-                  <a:tcPr marR="73152" marT="18288" marB="18288">
+                  <a:tcPr marL="91440" marR="73152" marT="18288" marB="18288">
                     <a:solidFill>
                       <a:srgbClr val="FFFFFF"/>
                     </a:solidFill>
@@ -9549,7 +9575,7 @@
                 </a:tc>
                 <a:tc>
                   <a:txBody>
-                    <a:bodyPr/>
+                    <a:bodyPr wrap="square"/>
                     <a:lstStyle/>
                     <a:p>
                       <a:pPr algn="r"/>
@@ -9564,7 +9590,7 @@
                       </a:r>
                     </a:p>
                   </a:txBody>
-                  <a:tcPr marR="73152" marT="18288" marB="18288">
+                  <a:tcPr marL="91440" marR="73152" marT="18288" marB="18288">
                     <a:solidFill>
                       <a:srgbClr val="FFFFFF"/>
                     </a:solidFill>
@@ -9572,7 +9598,7 @@
                 </a:tc>
                 <a:tc>
                   <a:txBody>
-                    <a:bodyPr/>
+                    <a:bodyPr wrap="square"/>
                     <a:lstStyle/>
                     <a:p>
                       <a:pPr algn="r"/>
@@ -9587,22 +9613,17 @@
                       </a:r>
                     </a:p>
                   </a:txBody>
-                  <a:tcPr marR="73152" marT="18288" marB="18288">
+                  <a:tcPr marL="91440" marR="73152" marT="18288" marB="18288">
                     <a:solidFill>
                       <a:srgbClr val="FFFFFF"/>
                     </a:solidFill>
                   </a:tcPr>
                 </a:tc>
-                <a:extLst>
-                  <a:ext uri="{0D108BD9-81ED-4DB2-BD59-A6C34878D82A}">
-                    <a16:rowId xmlns:a16="http://schemas.microsoft.com/office/drawing/2014/main" val="10003"/>
-                  </a:ext>
-                </a:extLst>
               </a:tr>
               <a:tr h="292608">
                 <a:tc>
                   <a:txBody>
-                    <a:bodyPr/>
+                    <a:bodyPr wrap="square"/>
                     <a:lstStyle/>
                     <a:p>
                       <a:pPr algn="l"/>
@@ -9617,7 +9638,7 @@
                       </a:r>
                     </a:p>
                   </a:txBody>
-                  <a:tcPr marR="73152" marT="18288" marB="18288">
+                  <a:tcPr marL="91440" marR="73152" marT="18288" marB="18288">
                     <a:solidFill>
                       <a:srgbClr val="F4F6FA"/>
                     </a:solidFill>
@@ -9625,7 +9646,7 @@
                 </a:tc>
                 <a:tc>
                   <a:txBody>
-                    <a:bodyPr/>
+                    <a:bodyPr wrap="square"/>
                     <a:lstStyle/>
                     <a:p>
                       <a:pPr algn="r"/>
@@ -9640,7 +9661,7 @@
                       </a:r>
                     </a:p>
                   </a:txBody>
-                  <a:tcPr marR="73152" marT="18288" marB="18288">
+                  <a:tcPr marL="91440" marR="73152" marT="18288" marB="18288">
                     <a:solidFill>
                       <a:srgbClr val="F4F6FA"/>
                     </a:solidFill>
@@ -9648,7 +9669,7 @@
                 </a:tc>
                 <a:tc>
                   <a:txBody>
-                    <a:bodyPr/>
+                    <a:bodyPr wrap="square"/>
                     <a:lstStyle/>
                     <a:p>
                       <a:pPr algn="r"/>
@@ -9663,7 +9684,7 @@
                       </a:r>
                     </a:p>
                   </a:txBody>
-                  <a:tcPr marR="73152" marT="18288" marB="18288">
+                  <a:tcPr marL="91440" marR="73152" marT="18288" marB="18288">
                     <a:solidFill>
                       <a:srgbClr val="F4F6FA"/>
                     </a:solidFill>
@@ -9671,7 +9692,7 @@
                 </a:tc>
                 <a:tc>
                   <a:txBody>
-                    <a:bodyPr/>
+                    <a:bodyPr wrap="square"/>
                     <a:lstStyle/>
                     <a:p>
                       <a:pPr algn="r"/>
@@ -9686,22 +9707,17 @@
                       </a:r>
                     </a:p>
                   </a:txBody>
-                  <a:tcPr marR="73152" marT="18288" marB="18288">
+                  <a:tcPr marL="91440" marR="73152" marT="18288" marB="18288">
                     <a:solidFill>
                       <a:srgbClr val="F4F6FA"/>
                     </a:solidFill>
                   </a:tcPr>
                 </a:tc>
-                <a:extLst>
-                  <a:ext uri="{0D108BD9-81ED-4DB2-BD59-A6C34878D82A}">
-                    <a16:rowId xmlns:a16="http://schemas.microsoft.com/office/drawing/2014/main" val="10004"/>
-                  </a:ext>
-                </a:extLst>
               </a:tr>
               <a:tr h="292608">
                 <a:tc>
                   <a:txBody>
-                    <a:bodyPr/>
+                    <a:bodyPr wrap="square"/>
                     <a:lstStyle/>
                     <a:p>
                       <a:pPr algn="l"/>
@@ -9716,7 +9732,7 @@
                       </a:r>
                     </a:p>
                   </a:txBody>
-                  <a:tcPr marR="73152" marT="18288" marB="18288">
+                  <a:tcPr marL="91440" marR="73152" marT="18288" marB="18288">
                     <a:solidFill>
                       <a:srgbClr val="FFFFFF"/>
                     </a:solidFill>
@@ -9724,7 +9740,7 @@
                 </a:tc>
                 <a:tc>
                   <a:txBody>
-                    <a:bodyPr/>
+                    <a:bodyPr wrap="square"/>
                     <a:lstStyle/>
                     <a:p>
                       <a:pPr algn="r"/>
@@ -9739,7 +9755,7 @@
                       </a:r>
                     </a:p>
                   </a:txBody>
-                  <a:tcPr marR="73152" marT="18288" marB="18288">
+                  <a:tcPr marL="91440" marR="73152" marT="18288" marB="18288">
                     <a:solidFill>
                       <a:srgbClr val="FFFFFF"/>
                     </a:solidFill>
@@ -9747,7 +9763,7 @@
                 </a:tc>
                 <a:tc>
                   <a:txBody>
-                    <a:bodyPr/>
+                    <a:bodyPr wrap="square"/>
                     <a:lstStyle/>
                     <a:p>
                       <a:pPr algn="r"/>
@@ -9762,7 +9778,7 @@
                       </a:r>
                     </a:p>
                   </a:txBody>
-                  <a:tcPr marR="73152" marT="18288" marB="18288">
+                  <a:tcPr marL="91440" marR="73152" marT="18288" marB="18288">
                     <a:solidFill>
                       <a:srgbClr val="FFFFFF"/>
                     </a:solidFill>
@@ -9770,7 +9786,7 @@
                 </a:tc>
                 <a:tc>
                   <a:txBody>
-                    <a:bodyPr/>
+                    <a:bodyPr wrap="square"/>
                     <a:lstStyle/>
                     <a:p>
                       <a:pPr algn="r"/>
@@ -9785,22 +9801,17 @@
                       </a:r>
                     </a:p>
                   </a:txBody>
-                  <a:tcPr marR="73152" marT="18288" marB="18288">
+                  <a:tcPr marL="91440" marR="73152" marT="18288" marB="18288">
                     <a:solidFill>
                       <a:srgbClr val="FFFFFF"/>
                     </a:solidFill>
                   </a:tcPr>
                 </a:tc>
-                <a:extLst>
-                  <a:ext uri="{0D108BD9-81ED-4DB2-BD59-A6C34878D82A}">
-                    <a16:rowId xmlns:a16="http://schemas.microsoft.com/office/drawing/2014/main" val="10005"/>
-                  </a:ext>
-                </a:extLst>
               </a:tr>
               <a:tr h="292608">
                 <a:tc>
                   <a:txBody>
-                    <a:bodyPr/>
+                    <a:bodyPr wrap="square"/>
                     <a:lstStyle/>
                     <a:p>
                       <a:pPr algn="l"/>
@@ -9815,7 +9826,7 @@
                       </a:r>
                     </a:p>
                   </a:txBody>
-                  <a:tcPr marR="73152" marT="18288" marB="18288">
+                  <a:tcPr marL="91440" marR="73152" marT="18288" marB="18288">
                     <a:solidFill>
                       <a:srgbClr val="F4F6FA"/>
                     </a:solidFill>
@@ -9823,7 +9834,7 @@
                 </a:tc>
                 <a:tc>
                   <a:txBody>
-                    <a:bodyPr/>
+                    <a:bodyPr wrap="square"/>
                     <a:lstStyle/>
                     <a:p>
                       <a:pPr algn="r"/>
@@ -9838,7 +9849,7 @@
                       </a:r>
                     </a:p>
                   </a:txBody>
-                  <a:tcPr marR="73152" marT="18288" marB="18288">
+                  <a:tcPr marL="91440" marR="73152" marT="18288" marB="18288">
                     <a:solidFill>
                       <a:srgbClr val="F4F6FA"/>
                     </a:solidFill>
@@ -9846,7 +9857,7 @@
                 </a:tc>
                 <a:tc>
                   <a:txBody>
-                    <a:bodyPr/>
+                    <a:bodyPr wrap="square"/>
                     <a:lstStyle/>
                     <a:p>
                       <a:pPr algn="r"/>
@@ -9861,7 +9872,7 @@
                       </a:r>
                     </a:p>
                   </a:txBody>
-                  <a:tcPr marR="73152" marT="18288" marB="18288">
+                  <a:tcPr marL="91440" marR="73152" marT="18288" marB="18288">
                     <a:solidFill>
                       <a:srgbClr val="F4F6FA"/>
                     </a:solidFill>
@@ -9869,7 +9880,7 @@
                 </a:tc>
                 <a:tc>
                   <a:txBody>
-                    <a:bodyPr/>
+                    <a:bodyPr wrap="square"/>
                     <a:lstStyle/>
                     <a:p>
                       <a:pPr algn="r"/>
@@ -9884,17 +9895,12 @@
                       </a:r>
                     </a:p>
                   </a:txBody>
-                  <a:tcPr marR="73152" marT="18288" marB="18288">
+                  <a:tcPr marL="91440" marR="73152" marT="18288" marB="18288">
                     <a:solidFill>
                       <a:srgbClr val="F4F6FA"/>
                     </a:solidFill>
                   </a:tcPr>
                 </a:tc>
-                <a:extLst>
-                  <a:ext uri="{0D108BD9-81ED-4DB2-BD59-A6C34878D82A}">
-                    <a16:rowId xmlns:a16="http://schemas.microsoft.com/office/drawing/2014/main" val="10006"/>
-                  </a:ext>
-                </a:extLst>
               </a:tr>
             </a:tbl>
           </a:graphicData>
@@ -10037,9 +10043,7 @@
         <p:txBody>
           <a:bodyPr rtlCol="0" anchor="ctr"/>
           <a:lstStyle/>
-          <a:p>
-            <a:endParaRPr/>
-          </a:p>
+          <a:p/>
         </p:txBody>
       </p:sp>
       <p:sp>
@@ -10124,9 +10128,7 @@
         <p:txBody>
           <a:bodyPr rtlCol="0" anchor="ctr"/>
           <a:lstStyle/>
-          <a:p>
-            <a:endParaRPr/>
-          </a:p>
+          <a:p/>
         </p:txBody>
       </p:sp>
       <p:sp>
@@ -10177,7 +10179,7 @@
 </file>
 
 <file path=ppt/slides/slide19.xml><?xml version="1.0" encoding="utf-8"?>
-<p:sld xmlns:a="http://schemas.openxmlformats.org/drawingml/2006/main" xmlns:r="http://schemas.openxmlformats.org/officeDocument/2006/relationships" xmlns:p="http://schemas.openxmlformats.org/presentationml/2006/main">
+<p:sld xmlns:a="http://schemas.openxmlformats.org/drawingml/2006/main" xmlns:p="http://schemas.openxmlformats.org/presentationml/2006/main" xmlns:r="http://schemas.openxmlformats.org/officeDocument/2006/relationships">
   <p:cSld>
     <p:spTree>
       <p:nvGrpSpPr>
@@ -10185,14 +10187,7 @@
         <p:cNvGrpSpPr/>
         <p:nvPr/>
       </p:nvGrpSpPr>
-      <p:grpSpPr>
-        <a:xfrm>
-          <a:off x="0" y="0"/>
-          <a:ext cx="0" cy="0"/>
-          <a:chOff x="0" y="0"/>
-          <a:chExt cx="0" cy="0"/>
-        </a:xfrm>
-      </p:grpSpPr>
+      <p:grpSpPr/>
       <p:sp>
         <p:nvSpPr>
           <p:cNvPr id="2" name="TextBox 1"/>
@@ -10290,46 +10285,16 @@
                 <a:tableStyleId>{5C22544A-7EE6-4342-B048-85BDC9FD1C3A}</a:tableStyleId>
               </a:tblPr>
               <a:tblGrid>
-                <a:gridCol w="3159104">
-                  <a:extLst>
-                    <a:ext uri="{9D8B030D-6E8A-4147-A177-3AD203B41FA5}">
-                      <a16:colId xmlns:a16="http://schemas.microsoft.com/office/drawing/2014/main" val="20000"/>
-                    </a:ext>
-                  </a:extLst>
-                </a:gridCol>
-                <a:gridCol w="1579552">
-                  <a:extLst>
-                    <a:ext uri="{9D8B030D-6E8A-4147-A177-3AD203B41FA5}">
-                      <a16:colId xmlns:a16="http://schemas.microsoft.com/office/drawing/2014/main" val="20001"/>
-                    </a:ext>
-                  </a:extLst>
-                </a:gridCol>
-                <a:gridCol w="1579552">
-                  <a:extLst>
-                    <a:ext uri="{9D8B030D-6E8A-4147-A177-3AD203B41FA5}">
-                      <a16:colId xmlns:a16="http://schemas.microsoft.com/office/drawing/2014/main" val="20002"/>
-                    </a:ext>
-                  </a:extLst>
-                </a:gridCol>
-                <a:gridCol w="2018316">
-                  <a:extLst>
-                    <a:ext uri="{9D8B030D-6E8A-4147-A177-3AD203B41FA5}">
-                      <a16:colId xmlns:a16="http://schemas.microsoft.com/office/drawing/2014/main" val="20003"/>
-                    </a:ext>
-                  </a:extLst>
-                </a:gridCol>
-                <a:gridCol w="2544834">
-                  <a:extLst>
-                    <a:ext uri="{9D8B030D-6E8A-4147-A177-3AD203B41FA5}">
-                      <a16:colId xmlns:a16="http://schemas.microsoft.com/office/drawing/2014/main" val="20004"/>
-                    </a:ext>
-                  </a:extLst>
-                </a:gridCol>
+                <a:gridCol w="3159104"/>
+                <a:gridCol w="1579552"/>
+                <a:gridCol w="1579552"/>
+                <a:gridCol w="2018316"/>
+                <a:gridCol w="2544834"/>
               </a:tblGrid>
               <a:tr h="384048">
                 <a:tc>
                   <a:txBody>
-                    <a:bodyPr/>
+                    <a:bodyPr wrap="square"/>
                     <a:lstStyle/>
                     <a:p>
                       <a:pPr algn="l"/>
@@ -10344,7 +10309,7 @@
                       </a:r>
                     </a:p>
                   </a:txBody>
-                  <a:tcPr marR="73152" marT="18288" marB="18288">
+                  <a:tcPr marL="91440" marR="73152" marT="18288" marB="18288">
                     <a:solidFill>
                       <a:srgbClr val="1E2761"/>
                     </a:solidFill>
@@ -10352,7 +10317,7 @@
                 </a:tc>
                 <a:tc>
                   <a:txBody>
-                    <a:bodyPr/>
+                    <a:bodyPr wrap="square"/>
                     <a:lstStyle/>
                     <a:p>
                       <a:pPr algn="r"/>
@@ -10367,7 +10332,7 @@
                       </a:r>
                     </a:p>
                   </a:txBody>
-                  <a:tcPr marR="73152" marT="18288" marB="18288">
+                  <a:tcPr marL="91440" marR="73152" marT="18288" marB="18288">
                     <a:solidFill>
                       <a:srgbClr val="1E2761"/>
                     </a:solidFill>
@@ -10375,7 +10340,7 @@
                 </a:tc>
                 <a:tc>
                   <a:txBody>
-                    <a:bodyPr/>
+                    <a:bodyPr wrap="square"/>
                     <a:lstStyle/>
                     <a:p>
                       <a:pPr algn="r"/>
@@ -10390,7 +10355,7 @@
                       </a:r>
                     </a:p>
                   </a:txBody>
-                  <a:tcPr marR="73152" marT="18288" marB="18288">
+                  <a:tcPr marL="91440" marR="73152" marT="18288" marB="18288">
                     <a:solidFill>
                       <a:srgbClr val="1E2761"/>
                     </a:solidFill>
@@ -10398,7 +10363,7 @@
                 </a:tc>
                 <a:tc>
                   <a:txBody>
-                    <a:bodyPr/>
+                    <a:bodyPr wrap="square"/>
                     <a:lstStyle/>
                     <a:p>
                       <a:pPr algn="r"/>
@@ -10413,7 +10378,7 @@
                       </a:r>
                     </a:p>
                   </a:txBody>
-                  <a:tcPr marR="73152" marT="18288" marB="18288">
+                  <a:tcPr marL="91440" marR="73152" marT="18288" marB="18288">
                     <a:solidFill>
                       <a:srgbClr val="1E2761"/>
                     </a:solidFill>
@@ -10421,7 +10386,7 @@
                 </a:tc>
                 <a:tc>
                   <a:txBody>
-                    <a:bodyPr/>
+                    <a:bodyPr wrap="square"/>
                     <a:lstStyle/>
                     <a:p>
                       <a:pPr algn="r"/>
@@ -10436,22 +10401,17 @@
                       </a:r>
                     </a:p>
                   </a:txBody>
-                  <a:tcPr marR="73152" marT="18288" marB="18288">
+                  <a:tcPr marL="91440" marR="73152" marT="18288" marB="18288">
                     <a:solidFill>
                       <a:srgbClr val="1E2761"/>
                     </a:solidFill>
                   </a:tcPr>
                 </a:tc>
-                <a:extLst>
-                  <a:ext uri="{0D108BD9-81ED-4DB2-BD59-A6C34878D82A}">
-                    <a16:rowId xmlns:a16="http://schemas.microsoft.com/office/drawing/2014/main" val="10000"/>
-                  </a:ext>
-                </a:extLst>
               </a:tr>
               <a:tr h="329184">
                 <a:tc>
                   <a:txBody>
-                    <a:bodyPr/>
+                    <a:bodyPr wrap="square"/>
                     <a:lstStyle/>
                     <a:p>
                       <a:pPr algn="l"/>
@@ -10466,7 +10426,7 @@
                       </a:r>
                     </a:p>
                   </a:txBody>
-                  <a:tcPr marR="73152" marT="18288" marB="18288">
+                  <a:tcPr marL="91440" marR="73152" marT="18288" marB="18288">
                     <a:solidFill>
                       <a:srgbClr val="FFFFFF"/>
                     </a:solidFill>
@@ -10474,7 +10434,7 @@
                 </a:tc>
                 <a:tc>
                   <a:txBody>
-                    <a:bodyPr/>
+                    <a:bodyPr wrap="square"/>
                     <a:lstStyle/>
                     <a:p>
                       <a:pPr algn="r"/>
@@ -10489,7 +10449,7 @@
                       </a:r>
                     </a:p>
                   </a:txBody>
-                  <a:tcPr marR="73152" marT="18288" marB="18288">
+                  <a:tcPr marL="91440" marR="73152" marT="18288" marB="18288">
                     <a:solidFill>
                       <a:srgbClr val="FFFFFF"/>
                     </a:solidFill>
@@ -10497,7 +10457,7 @@
                 </a:tc>
                 <a:tc>
                   <a:txBody>
-                    <a:bodyPr/>
+                    <a:bodyPr wrap="square"/>
                     <a:lstStyle/>
                     <a:p>
                       <a:pPr algn="r"/>
@@ -10512,7 +10472,7 @@
                       </a:r>
                     </a:p>
                   </a:txBody>
-                  <a:tcPr marR="73152" marT="18288" marB="18288">
+                  <a:tcPr marL="91440" marR="73152" marT="18288" marB="18288">
                     <a:solidFill>
                       <a:srgbClr val="FFFFFF"/>
                     </a:solidFill>
@@ -10520,7 +10480,7 @@
                 </a:tc>
                 <a:tc>
                   <a:txBody>
-                    <a:bodyPr/>
+                    <a:bodyPr wrap="square"/>
                     <a:lstStyle/>
                     <a:p>
                       <a:pPr algn="r"/>
@@ -10535,7 +10495,7 @@
                       </a:r>
                     </a:p>
                   </a:txBody>
-                  <a:tcPr marR="73152" marT="18288" marB="18288">
+                  <a:tcPr marL="91440" marR="73152" marT="18288" marB="18288">
                     <a:solidFill>
                       <a:srgbClr val="FFFFFF"/>
                     </a:solidFill>
@@ -10543,7 +10503,7 @@
                 </a:tc>
                 <a:tc>
                   <a:txBody>
-                    <a:bodyPr/>
+                    <a:bodyPr wrap="square"/>
                     <a:lstStyle/>
                     <a:p>
                       <a:pPr algn="r"/>
@@ -10558,22 +10518,17 @@
                       </a:r>
                     </a:p>
                   </a:txBody>
-                  <a:tcPr marR="73152" marT="18288" marB="18288">
+                  <a:tcPr marL="91440" marR="73152" marT="18288" marB="18288">
                     <a:solidFill>
                       <a:srgbClr val="FFFFFF"/>
                     </a:solidFill>
                   </a:tcPr>
                 </a:tc>
-                <a:extLst>
-                  <a:ext uri="{0D108BD9-81ED-4DB2-BD59-A6C34878D82A}">
-                    <a16:rowId xmlns:a16="http://schemas.microsoft.com/office/drawing/2014/main" val="10001"/>
-                  </a:ext>
-                </a:extLst>
               </a:tr>
               <a:tr h="329184">
                 <a:tc>
                   <a:txBody>
-                    <a:bodyPr/>
+                    <a:bodyPr wrap="square"/>
                     <a:lstStyle/>
                     <a:p>
                       <a:pPr algn="l"/>
@@ -10588,7 +10543,7 @@
                       </a:r>
                     </a:p>
                   </a:txBody>
-                  <a:tcPr marR="73152" marT="18288" marB="18288">
+                  <a:tcPr marL="91440" marR="73152" marT="18288" marB="18288">
                     <a:solidFill>
                       <a:srgbClr val="FDF3E2"/>
                     </a:solidFill>
@@ -10596,7 +10551,7 @@
                 </a:tc>
                 <a:tc>
                   <a:txBody>
-                    <a:bodyPr/>
+                    <a:bodyPr wrap="square"/>
                     <a:lstStyle/>
                     <a:p>
                       <a:pPr algn="r"/>
@@ -10611,7 +10566,7 @@
                       </a:r>
                     </a:p>
                   </a:txBody>
-                  <a:tcPr marR="73152" marT="18288" marB="18288">
+                  <a:tcPr marL="91440" marR="73152" marT="18288" marB="18288">
                     <a:solidFill>
                       <a:srgbClr val="FDF3E2"/>
                     </a:solidFill>
@@ -10619,7 +10574,7 @@
                 </a:tc>
                 <a:tc>
                   <a:txBody>
-                    <a:bodyPr/>
+                    <a:bodyPr wrap="square"/>
                     <a:lstStyle/>
                     <a:p>
                       <a:pPr algn="r"/>
@@ -10634,7 +10589,7 @@
                       </a:r>
                     </a:p>
                   </a:txBody>
-                  <a:tcPr marR="73152" marT="18288" marB="18288">
+                  <a:tcPr marL="91440" marR="73152" marT="18288" marB="18288">
                     <a:solidFill>
                       <a:srgbClr val="FDF3E2"/>
                     </a:solidFill>
@@ -10642,7 +10597,7 @@
                 </a:tc>
                 <a:tc>
                   <a:txBody>
-                    <a:bodyPr/>
+                    <a:bodyPr wrap="square"/>
                     <a:lstStyle/>
                     <a:p>
                       <a:pPr algn="r"/>
@@ -10657,7 +10612,7 @@
                       </a:r>
                     </a:p>
                   </a:txBody>
-                  <a:tcPr marR="73152" marT="18288" marB="18288">
+                  <a:tcPr marL="91440" marR="73152" marT="18288" marB="18288">
                     <a:solidFill>
                       <a:srgbClr val="FDF3E2"/>
                     </a:solidFill>
@@ -10665,7 +10620,7 @@
                 </a:tc>
                 <a:tc>
                   <a:txBody>
-                    <a:bodyPr/>
+                    <a:bodyPr wrap="square"/>
                     <a:lstStyle/>
                     <a:p>
                       <a:pPr algn="r"/>
@@ -10680,22 +10635,17 @@
                       </a:r>
                     </a:p>
                   </a:txBody>
-                  <a:tcPr marR="73152" marT="18288" marB="18288">
+                  <a:tcPr marL="91440" marR="73152" marT="18288" marB="18288">
                     <a:solidFill>
                       <a:srgbClr val="FDF3E2"/>
                     </a:solidFill>
                   </a:tcPr>
                 </a:tc>
-                <a:extLst>
-                  <a:ext uri="{0D108BD9-81ED-4DB2-BD59-A6C34878D82A}">
-                    <a16:rowId xmlns:a16="http://schemas.microsoft.com/office/drawing/2014/main" val="10002"/>
-                  </a:ext>
-                </a:extLst>
               </a:tr>
               <a:tr h="329184">
                 <a:tc>
                   <a:txBody>
-                    <a:bodyPr/>
+                    <a:bodyPr wrap="square"/>
                     <a:lstStyle/>
                     <a:p>
                       <a:pPr algn="l"/>
@@ -10710,7 +10660,7 @@
                       </a:r>
                     </a:p>
                   </a:txBody>
-                  <a:tcPr marR="73152" marT="18288" marB="18288">
+                  <a:tcPr marL="91440" marR="73152" marT="18288" marB="18288">
                     <a:solidFill>
                       <a:srgbClr val="FFFFFF"/>
                     </a:solidFill>
@@ -10718,7 +10668,7 @@
                 </a:tc>
                 <a:tc>
                   <a:txBody>
-                    <a:bodyPr/>
+                    <a:bodyPr wrap="square"/>
                     <a:lstStyle/>
                     <a:p>
                       <a:pPr algn="r"/>
@@ -10733,7 +10683,7 @@
                       </a:r>
                     </a:p>
                   </a:txBody>
-                  <a:tcPr marR="73152" marT="18288" marB="18288">
+                  <a:tcPr marL="91440" marR="73152" marT="18288" marB="18288">
                     <a:solidFill>
                       <a:srgbClr val="FFFFFF"/>
                     </a:solidFill>
@@ -10741,7 +10691,7 @@
                 </a:tc>
                 <a:tc>
                   <a:txBody>
-                    <a:bodyPr/>
+                    <a:bodyPr wrap="square"/>
                     <a:lstStyle/>
                     <a:p>
                       <a:pPr algn="r"/>
@@ -10756,7 +10706,7 @@
                       </a:r>
                     </a:p>
                   </a:txBody>
-                  <a:tcPr marR="73152" marT="18288" marB="18288">
+                  <a:tcPr marL="91440" marR="73152" marT="18288" marB="18288">
                     <a:solidFill>
                       <a:srgbClr val="FFFFFF"/>
                     </a:solidFill>
@@ -10764,7 +10714,7 @@
                 </a:tc>
                 <a:tc>
                   <a:txBody>
-                    <a:bodyPr/>
+                    <a:bodyPr wrap="square"/>
                     <a:lstStyle/>
                     <a:p>
                       <a:pPr algn="r"/>
@@ -10779,7 +10729,7 @@
                       </a:r>
                     </a:p>
                   </a:txBody>
-                  <a:tcPr marR="73152" marT="18288" marB="18288">
+                  <a:tcPr marL="91440" marR="73152" marT="18288" marB="18288">
                     <a:solidFill>
                       <a:srgbClr val="FFFFFF"/>
                     </a:solidFill>
@@ -10787,7 +10737,7 @@
                 </a:tc>
                 <a:tc>
                   <a:txBody>
-                    <a:bodyPr/>
+                    <a:bodyPr wrap="square"/>
                     <a:lstStyle/>
                     <a:p>
                       <a:pPr algn="r"/>
@@ -10802,17 +10752,12 @@
                       </a:r>
                     </a:p>
                   </a:txBody>
-                  <a:tcPr marR="73152" marT="18288" marB="18288">
+                  <a:tcPr marL="91440" marR="73152" marT="18288" marB="18288">
                     <a:solidFill>
                       <a:srgbClr val="FFFFFF"/>
                     </a:solidFill>
                   </a:tcPr>
                 </a:tc>
-                <a:extLst>
-                  <a:ext uri="{0D108BD9-81ED-4DB2-BD59-A6C34878D82A}">
-                    <a16:rowId xmlns:a16="http://schemas.microsoft.com/office/drawing/2014/main" val="10003"/>
-                  </a:ext>
-                </a:extLst>
               </a:tr>
             </a:tbl>
           </a:graphicData>
@@ -11143,9 +11088,7 @@
         <p:txBody>
           <a:bodyPr rtlCol="0" anchor="ctr"/>
           <a:lstStyle/>
-          <a:p>
-            <a:endParaRPr/>
-          </a:p>
+          <a:p/>
         </p:txBody>
       </p:sp>
       <p:sp>
@@ -11191,12 +11134,15 @@
                 <a:spcPct val="105000"/>
               </a:lnSpc>
             </a:pPr>
-            <a:endParaRPr sz="1300" b="0">
-              <a:solidFill>
-                <a:srgbClr val="1B1B1F"/>
-              </a:solidFill>
-              <a:latin typeface="Calibri"/>
-            </a:endParaRPr>
+            <a:r>
+              <a:rPr sz="1300" b="0">
+                <a:solidFill>
+                  <a:srgbClr val="1B1B1F"/>
+                </a:solidFill>
+                <a:latin typeface="Calibri"/>
+              </a:rPr>
+              <a:t/>
+            </a:r>
           </a:p>
           <a:p>
             <a:pPr algn="l">
@@ -11259,9 +11205,7 @@
         <p:txBody>
           <a:bodyPr rtlCol="0" anchor="ctr"/>
           <a:lstStyle/>
-          <a:p>
-            <a:endParaRPr/>
-          </a:p>
+          <a:p/>
         </p:txBody>
       </p:sp>
       <p:sp>
@@ -11307,12 +11251,15 @@
                 <a:spcPct val="105000"/>
               </a:lnSpc>
             </a:pPr>
-            <a:endParaRPr sz="1300" b="0">
-              <a:solidFill>
-                <a:srgbClr val="1B1B1F"/>
-              </a:solidFill>
-              <a:latin typeface="Calibri"/>
-            </a:endParaRPr>
+            <a:r>
+              <a:rPr sz="1300" b="0">
+                <a:solidFill>
+                  <a:srgbClr val="1B1B1F"/>
+                </a:solidFill>
+                <a:latin typeface="Calibri"/>
+              </a:rPr>
+              <a:t/>
+            </a:r>
           </a:p>
           <a:p>
             <a:pPr algn="l">
@@ -11947,7 +11894,7 @@
 </file>
 
 <file path=ppt/slides/slide20.xml><?xml version="1.0" encoding="utf-8"?>
-<p:sld xmlns:a="http://schemas.openxmlformats.org/drawingml/2006/main" xmlns:r="http://schemas.openxmlformats.org/officeDocument/2006/relationships" xmlns:p="http://schemas.openxmlformats.org/presentationml/2006/main">
+<p:sld xmlns:a="http://schemas.openxmlformats.org/drawingml/2006/main" xmlns:p="http://schemas.openxmlformats.org/presentationml/2006/main" xmlns:r="http://schemas.openxmlformats.org/officeDocument/2006/relationships">
   <p:cSld>
     <p:spTree>
       <p:nvGrpSpPr>
@@ -11955,14 +11902,7 @@
         <p:cNvGrpSpPr/>
         <p:nvPr/>
       </p:nvGrpSpPr>
-      <p:grpSpPr>
-        <a:xfrm>
-          <a:off x="0" y="0"/>
-          <a:ext cx="0" cy="0"/>
-          <a:chOff x="0" y="0"/>
-          <a:chExt cx="0" cy="0"/>
-        </a:xfrm>
-      </p:grpSpPr>
+      <p:grpSpPr/>
       <p:sp>
         <p:nvSpPr>
           <p:cNvPr id="2" name="TextBox 1"/>
@@ -12051,7 +11991,7 @@
         </p:nvGraphicFramePr>
         <p:xfrm>
           <a:off x="640080" y="1691640"/>
-          <a:ext cx="10881356" cy="2087880"/>
+          <a:ext cx="10881356" cy="2029968"/>
         </p:xfrm>
         <a:graphic>
           <a:graphicData uri="http://schemas.openxmlformats.org/drawingml/2006/table">
@@ -12060,53 +12000,17 @@
                 <a:tableStyleId>{5C22544A-7EE6-4342-B048-85BDC9FD1C3A}</a:tableStyleId>
               </a:tblPr>
               <a:tblGrid>
-                <a:gridCol w="3520440">
-                  <a:extLst>
-                    <a:ext uri="{9D8B030D-6E8A-4147-A177-3AD203B41FA5}">
-                      <a16:colId xmlns:a16="http://schemas.microsoft.com/office/drawing/2014/main" val="20000"/>
-                    </a:ext>
-                  </a:extLst>
-                </a:gridCol>
-                <a:gridCol w="1760220">
-                  <a:extLst>
-                    <a:ext uri="{9D8B030D-6E8A-4147-A177-3AD203B41FA5}">
-                      <a16:colId xmlns:a16="http://schemas.microsoft.com/office/drawing/2014/main" val="20001"/>
-                    </a:ext>
-                  </a:extLst>
-                </a:gridCol>
-                <a:gridCol w="1520189">
-                  <a:extLst>
-                    <a:ext uri="{9D8B030D-6E8A-4147-A177-3AD203B41FA5}">
-                      <a16:colId xmlns:a16="http://schemas.microsoft.com/office/drawing/2014/main" val="20002"/>
-                    </a:ext>
-                  </a:extLst>
-                </a:gridCol>
-                <a:gridCol w="1280159">
-                  <a:extLst>
-                    <a:ext uri="{9D8B030D-6E8A-4147-A177-3AD203B41FA5}">
-                      <a16:colId xmlns:a16="http://schemas.microsoft.com/office/drawing/2014/main" val="20003"/>
-                    </a:ext>
-                  </a:extLst>
-                </a:gridCol>
-                <a:gridCol w="1520189">
-                  <a:extLst>
-                    <a:ext uri="{9D8B030D-6E8A-4147-A177-3AD203B41FA5}">
-                      <a16:colId xmlns:a16="http://schemas.microsoft.com/office/drawing/2014/main" val="20004"/>
-                    </a:ext>
-                  </a:extLst>
-                </a:gridCol>
-                <a:gridCol w="1280159">
-                  <a:extLst>
-                    <a:ext uri="{9D8B030D-6E8A-4147-A177-3AD203B41FA5}">
-                      <a16:colId xmlns:a16="http://schemas.microsoft.com/office/drawing/2014/main" val="20005"/>
-                    </a:ext>
-                  </a:extLst>
-                </a:gridCol>
+                <a:gridCol w="3520440"/>
+                <a:gridCol w="1760220"/>
+                <a:gridCol w="1520189"/>
+                <a:gridCol w="1280159"/>
+                <a:gridCol w="1520189"/>
+                <a:gridCol w="1280159"/>
               </a:tblGrid>
               <a:tr h="384048">
                 <a:tc>
                   <a:txBody>
-                    <a:bodyPr/>
+                    <a:bodyPr wrap="square"/>
                     <a:lstStyle/>
                     <a:p>
                       <a:pPr algn="l"/>
@@ -12121,7 +12025,7 @@
                       </a:r>
                     </a:p>
                   </a:txBody>
-                  <a:tcPr marR="73152" marT="18288" marB="18288">
+                  <a:tcPr marL="91440" marR="73152" marT="18288" marB="18288">
                     <a:solidFill>
                       <a:srgbClr val="1E2761"/>
                     </a:solidFill>
@@ -12129,7 +12033,7 @@
                 </a:tc>
                 <a:tc>
                   <a:txBody>
-                    <a:bodyPr/>
+                    <a:bodyPr wrap="square"/>
                     <a:lstStyle/>
                     <a:p>
                       <a:pPr algn="r"/>
@@ -12144,7 +12048,7 @@
                       </a:r>
                     </a:p>
                   </a:txBody>
-                  <a:tcPr marR="73152" marT="18288" marB="18288">
+                  <a:tcPr marL="91440" marR="73152" marT="18288" marB="18288">
                     <a:solidFill>
                       <a:srgbClr val="1E2761"/>
                     </a:solidFill>
@@ -12152,7 +12056,7 @@
                 </a:tc>
                 <a:tc>
                   <a:txBody>
-                    <a:bodyPr/>
+                    <a:bodyPr wrap="square"/>
                     <a:lstStyle/>
                     <a:p>
                       <a:pPr algn="r"/>
@@ -12167,7 +12071,7 @@
                       </a:r>
                     </a:p>
                   </a:txBody>
-                  <a:tcPr marR="73152" marT="18288" marB="18288">
+                  <a:tcPr marL="91440" marR="73152" marT="18288" marB="18288">
                     <a:solidFill>
                       <a:srgbClr val="1E2761"/>
                     </a:solidFill>
@@ -12175,7 +12079,7 @@
                 </a:tc>
                 <a:tc>
                   <a:txBody>
-                    <a:bodyPr/>
+                    <a:bodyPr wrap="square"/>
                     <a:lstStyle/>
                     <a:p>
                       <a:pPr algn="r"/>
@@ -12190,7 +12094,7 @@
                       </a:r>
                     </a:p>
                   </a:txBody>
-                  <a:tcPr marR="73152" marT="18288" marB="18288">
+                  <a:tcPr marL="91440" marR="73152" marT="18288" marB="18288">
                     <a:solidFill>
                       <a:srgbClr val="1E2761"/>
                     </a:solidFill>
@@ -12198,7 +12102,7 @@
                 </a:tc>
                 <a:tc>
                   <a:txBody>
-                    <a:bodyPr/>
+                    <a:bodyPr wrap="square"/>
                     <a:lstStyle/>
                     <a:p>
                       <a:pPr algn="r"/>
@@ -12213,7 +12117,7 @@
                       </a:r>
                     </a:p>
                   </a:txBody>
-                  <a:tcPr marR="73152" marT="18288" marB="18288">
+                  <a:tcPr marL="91440" marR="73152" marT="18288" marB="18288">
                     <a:solidFill>
                       <a:srgbClr val="1E2761"/>
                     </a:solidFill>
@@ -12221,7 +12125,7 @@
                 </a:tc>
                 <a:tc>
                   <a:txBody>
-                    <a:bodyPr/>
+                    <a:bodyPr wrap="square"/>
                     <a:lstStyle/>
                     <a:p>
                       <a:pPr algn="r"/>
@@ -12236,22 +12140,17 @@
                       </a:r>
                     </a:p>
                   </a:txBody>
-                  <a:tcPr marR="73152" marT="18288" marB="18288">
+                  <a:tcPr marL="91440" marR="73152" marT="18288" marB="18288">
                     <a:solidFill>
                       <a:srgbClr val="1E2761"/>
                     </a:solidFill>
                   </a:tcPr>
                 </a:tc>
-                <a:extLst>
-                  <a:ext uri="{0D108BD9-81ED-4DB2-BD59-A6C34878D82A}">
-                    <a16:rowId xmlns:a16="http://schemas.microsoft.com/office/drawing/2014/main" val="10000"/>
-                  </a:ext>
-                </a:extLst>
               </a:tr>
               <a:tr h="329184">
                 <a:tc>
                   <a:txBody>
-                    <a:bodyPr/>
+                    <a:bodyPr wrap="square"/>
                     <a:lstStyle/>
                     <a:p>
                       <a:pPr algn="l"/>
@@ -12266,7 +12165,7 @@
                       </a:r>
                     </a:p>
                   </a:txBody>
-                  <a:tcPr marR="73152" marT="18288" marB="18288">
+                  <a:tcPr marL="91440" marR="73152" marT="18288" marB="18288">
                     <a:solidFill>
                       <a:srgbClr val="FFFFFF"/>
                     </a:solidFill>
@@ -12274,7 +12173,7 @@
                 </a:tc>
                 <a:tc>
                   <a:txBody>
-                    <a:bodyPr/>
+                    <a:bodyPr wrap="square"/>
                     <a:lstStyle/>
                     <a:p>
                       <a:pPr algn="r"/>
@@ -12289,7 +12188,7 @@
                       </a:r>
                     </a:p>
                   </a:txBody>
-                  <a:tcPr marR="73152" marT="18288" marB="18288">
+                  <a:tcPr marL="91440" marR="73152" marT="18288" marB="18288">
                     <a:solidFill>
                       <a:srgbClr val="FFFFFF"/>
                     </a:solidFill>
@@ -12297,7 +12196,7 @@
                 </a:tc>
                 <a:tc>
                   <a:txBody>
-                    <a:bodyPr/>
+                    <a:bodyPr wrap="square"/>
                     <a:lstStyle/>
                     <a:p>
                       <a:pPr algn="r"/>
@@ -12312,7 +12211,7 @@
                       </a:r>
                     </a:p>
                   </a:txBody>
-                  <a:tcPr marR="73152" marT="18288" marB="18288">
+                  <a:tcPr marL="91440" marR="73152" marT="18288" marB="18288">
                     <a:solidFill>
                       <a:srgbClr val="FFFFFF"/>
                     </a:solidFill>
@@ -12320,7 +12219,7 @@
                 </a:tc>
                 <a:tc>
                   <a:txBody>
-                    <a:bodyPr/>
+                    <a:bodyPr wrap="square"/>
                     <a:lstStyle/>
                     <a:p>
                       <a:pPr algn="r"/>
@@ -12335,7 +12234,7 @@
                       </a:r>
                     </a:p>
                   </a:txBody>
-                  <a:tcPr marR="73152" marT="18288" marB="18288">
+                  <a:tcPr marL="91440" marR="73152" marT="18288" marB="18288">
                     <a:solidFill>
                       <a:srgbClr val="FFFFFF"/>
                     </a:solidFill>
@@ -12343,7 +12242,7 @@
                 </a:tc>
                 <a:tc>
                   <a:txBody>
-                    <a:bodyPr/>
+                    <a:bodyPr wrap="square"/>
                     <a:lstStyle/>
                     <a:p>
                       <a:pPr algn="r"/>
@@ -12358,7 +12257,7 @@
                       </a:r>
                     </a:p>
                   </a:txBody>
-                  <a:tcPr marR="73152" marT="18288" marB="18288">
+                  <a:tcPr marL="91440" marR="73152" marT="18288" marB="18288">
                     <a:solidFill>
                       <a:srgbClr val="FFFFFF"/>
                     </a:solidFill>
@@ -12366,7 +12265,7 @@
                 </a:tc>
                 <a:tc>
                   <a:txBody>
-                    <a:bodyPr/>
+                    <a:bodyPr wrap="square"/>
                     <a:lstStyle/>
                     <a:p>
                       <a:pPr algn="r"/>
@@ -12381,22 +12280,17 @@
                       </a:r>
                     </a:p>
                   </a:txBody>
-                  <a:tcPr marR="73152" marT="18288" marB="18288">
+                  <a:tcPr marL="91440" marR="73152" marT="18288" marB="18288">
                     <a:solidFill>
                       <a:srgbClr val="FFFFFF"/>
                     </a:solidFill>
                   </a:tcPr>
                 </a:tc>
-                <a:extLst>
-                  <a:ext uri="{0D108BD9-81ED-4DB2-BD59-A6C34878D82A}">
-                    <a16:rowId xmlns:a16="http://schemas.microsoft.com/office/drawing/2014/main" val="10001"/>
-                  </a:ext>
-                </a:extLst>
               </a:tr>
               <a:tr h="329184">
                 <a:tc>
                   <a:txBody>
-                    <a:bodyPr/>
+                    <a:bodyPr wrap="square"/>
                     <a:lstStyle/>
                     <a:p>
                       <a:pPr algn="l"/>
@@ -12411,7 +12305,7 @@
                       </a:r>
                     </a:p>
                   </a:txBody>
-                  <a:tcPr marR="73152" marT="18288" marB="18288">
+                  <a:tcPr marL="91440" marR="73152" marT="18288" marB="18288">
                     <a:solidFill>
                       <a:srgbClr val="FDF3E2"/>
                     </a:solidFill>
@@ -12419,7 +12313,7 @@
                 </a:tc>
                 <a:tc>
                   <a:txBody>
-                    <a:bodyPr/>
+                    <a:bodyPr wrap="square"/>
                     <a:lstStyle/>
                     <a:p>
                       <a:pPr algn="r"/>
@@ -12434,7 +12328,7 @@
                       </a:r>
                     </a:p>
                   </a:txBody>
-                  <a:tcPr marR="73152" marT="18288" marB="18288">
+                  <a:tcPr marL="91440" marR="73152" marT="18288" marB="18288">
                     <a:solidFill>
                       <a:srgbClr val="FDF3E2"/>
                     </a:solidFill>
@@ -12442,7 +12336,7 @@
                 </a:tc>
                 <a:tc>
                   <a:txBody>
-                    <a:bodyPr/>
+                    <a:bodyPr wrap="square"/>
                     <a:lstStyle/>
                     <a:p>
                       <a:pPr algn="r"/>
@@ -12457,7 +12351,7 @@
                       </a:r>
                     </a:p>
                   </a:txBody>
-                  <a:tcPr marR="73152" marT="18288" marB="18288">
+                  <a:tcPr marL="91440" marR="73152" marT="18288" marB="18288">
                     <a:solidFill>
                       <a:srgbClr val="FDF3E2"/>
                     </a:solidFill>
@@ -12465,7 +12359,7 @@
                 </a:tc>
                 <a:tc>
                   <a:txBody>
-                    <a:bodyPr/>
+                    <a:bodyPr wrap="square"/>
                     <a:lstStyle/>
                     <a:p>
                       <a:pPr algn="r"/>
@@ -12480,7 +12374,7 @@
                       </a:r>
                     </a:p>
                   </a:txBody>
-                  <a:tcPr marR="73152" marT="18288" marB="18288">
+                  <a:tcPr marL="91440" marR="73152" marT="18288" marB="18288">
                     <a:solidFill>
                       <a:srgbClr val="FDF3E2"/>
                     </a:solidFill>
@@ -12488,7 +12382,7 @@
                 </a:tc>
                 <a:tc>
                   <a:txBody>
-                    <a:bodyPr/>
+                    <a:bodyPr wrap="square"/>
                     <a:lstStyle/>
                     <a:p>
                       <a:pPr algn="r"/>
@@ -12503,7 +12397,7 @@
                       </a:r>
                     </a:p>
                   </a:txBody>
-                  <a:tcPr marR="73152" marT="18288" marB="18288">
+                  <a:tcPr marL="91440" marR="73152" marT="18288" marB="18288">
                     <a:solidFill>
                       <a:srgbClr val="FDF3E2"/>
                     </a:solidFill>
@@ -12511,7 +12405,7 @@
                 </a:tc>
                 <a:tc>
                   <a:txBody>
-                    <a:bodyPr/>
+                    <a:bodyPr wrap="square"/>
                     <a:lstStyle/>
                     <a:p>
                       <a:pPr algn="r"/>
@@ -12526,22 +12420,17 @@
                       </a:r>
                     </a:p>
                   </a:txBody>
-                  <a:tcPr marR="73152" marT="18288" marB="18288">
+                  <a:tcPr marL="91440" marR="73152" marT="18288" marB="18288">
                     <a:solidFill>
                       <a:srgbClr val="FDF3E2"/>
                     </a:solidFill>
                   </a:tcPr>
                 </a:tc>
-                <a:extLst>
-                  <a:ext uri="{0D108BD9-81ED-4DB2-BD59-A6C34878D82A}">
-                    <a16:rowId xmlns:a16="http://schemas.microsoft.com/office/drawing/2014/main" val="10002"/>
-                  </a:ext>
-                </a:extLst>
               </a:tr>
               <a:tr h="329184">
                 <a:tc>
                   <a:txBody>
-                    <a:bodyPr/>
+                    <a:bodyPr wrap="square"/>
                     <a:lstStyle/>
                     <a:p>
                       <a:pPr algn="l"/>
@@ -12556,7 +12445,7 @@
                       </a:r>
                     </a:p>
                   </a:txBody>
-                  <a:tcPr marR="73152" marT="18288" marB="18288">
+                  <a:tcPr marL="91440" marR="73152" marT="18288" marB="18288">
                     <a:solidFill>
                       <a:srgbClr val="FFFFFF"/>
                     </a:solidFill>
@@ -12564,7 +12453,7 @@
                 </a:tc>
                 <a:tc>
                   <a:txBody>
-                    <a:bodyPr/>
+                    <a:bodyPr wrap="square"/>
                     <a:lstStyle/>
                     <a:p>
                       <a:pPr algn="r"/>
@@ -12579,7 +12468,7 @@
                       </a:r>
                     </a:p>
                   </a:txBody>
-                  <a:tcPr marR="73152" marT="18288" marB="18288">
+                  <a:tcPr marL="91440" marR="73152" marT="18288" marB="18288">
                     <a:solidFill>
                       <a:srgbClr val="FFFFFF"/>
                     </a:solidFill>
@@ -12587,7 +12476,7 @@
                 </a:tc>
                 <a:tc>
                   <a:txBody>
-                    <a:bodyPr/>
+                    <a:bodyPr wrap="square"/>
                     <a:lstStyle/>
                     <a:p>
                       <a:pPr algn="r"/>
@@ -12602,7 +12491,7 @@
                       </a:r>
                     </a:p>
                   </a:txBody>
-                  <a:tcPr marR="73152" marT="18288" marB="18288">
+                  <a:tcPr marL="91440" marR="73152" marT="18288" marB="18288">
                     <a:solidFill>
                       <a:srgbClr val="FFFFFF"/>
                     </a:solidFill>
@@ -12610,7 +12499,7 @@
                 </a:tc>
                 <a:tc>
                   <a:txBody>
-                    <a:bodyPr/>
+                    <a:bodyPr wrap="square"/>
                     <a:lstStyle/>
                     <a:p>
                       <a:pPr algn="r"/>
@@ -12625,7 +12514,7 @@
                       </a:r>
                     </a:p>
                   </a:txBody>
-                  <a:tcPr marR="73152" marT="18288" marB="18288">
+                  <a:tcPr marL="91440" marR="73152" marT="18288" marB="18288">
                     <a:solidFill>
                       <a:srgbClr val="FFFFFF"/>
                     </a:solidFill>
@@ -12633,7 +12522,7 @@
                 </a:tc>
                 <a:tc>
                   <a:txBody>
-                    <a:bodyPr/>
+                    <a:bodyPr wrap="square"/>
                     <a:lstStyle/>
                     <a:p>
                       <a:pPr algn="r"/>
@@ -12648,7 +12537,7 @@
                       </a:r>
                     </a:p>
                   </a:txBody>
-                  <a:tcPr marR="73152" marT="18288" marB="18288">
+                  <a:tcPr marL="91440" marR="73152" marT="18288" marB="18288">
                     <a:solidFill>
                       <a:srgbClr val="FFFFFF"/>
                     </a:solidFill>
@@ -12656,7 +12545,7 @@
                 </a:tc>
                 <a:tc>
                   <a:txBody>
-                    <a:bodyPr/>
+                    <a:bodyPr wrap="square"/>
                     <a:lstStyle/>
                     <a:p>
                       <a:pPr algn="r"/>
@@ -12671,22 +12560,17 @@
                       </a:r>
                     </a:p>
                   </a:txBody>
-                  <a:tcPr marR="73152" marT="18288" marB="18288">
+                  <a:tcPr marL="91440" marR="73152" marT="18288" marB="18288">
                     <a:solidFill>
                       <a:srgbClr val="FFFFFF"/>
                     </a:solidFill>
                   </a:tcPr>
                 </a:tc>
-                <a:extLst>
-                  <a:ext uri="{0D108BD9-81ED-4DB2-BD59-A6C34878D82A}">
-                    <a16:rowId xmlns:a16="http://schemas.microsoft.com/office/drawing/2014/main" val="10003"/>
-                  </a:ext>
-                </a:extLst>
               </a:tr>
               <a:tr h="329184">
                 <a:tc>
                   <a:txBody>
-                    <a:bodyPr/>
+                    <a:bodyPr wrap="square"/>
                     <a:lstStyle/>
                     <a:p>
                       <a:pPr algn="l"/>
@@ -12701,7 +12585,7 @@
                       </a:r>
                     </a:p>
                   </a:txBody>
-                  <a:tcPr marR="73152" marT="18288" marB="18288">
+                  <a:tcPr marL="91440" marR="73152" marT="18288" marB="18288">
                     <a:solidFill>
                       <a:srgbClr val="F4F6FA"/>
                     </a:solidFill>
@@ -12709,7 +12593,7 @@
                 </a:tc>
                 <a:tc>
                   <a:txBody>
-                    <a:bodyPr/>
+                    <a:bodyPr wrap="square"/>
                     <a:lstStyle/>
                     <a:p>
                       <a:pPr algn="r"/>
@@ -12724,7 +12608,7 @@
                       </a:r>
                     </a:p>
                   </a:txBody>
-                  <a:tcPr marR="73152" marT="18288" marB="18288">
+                  <a:tcPr marL="91440" marR="73152" marT="18288" marB="18288">
                     <a:solidFill>
                       <a:srgbClr val="F4F6FA"/>
                     </a:solidFill>
@@ -12732,7 +12616,7 @@
                 </a:tc>
                 <a:tc>
                   <a:txBody>
-                    <a:bodyPr/>
+                    <a:bodyPr wrap="square"/>
                     <a:lstStyle/>
                     <a:p>
                       <a:pPr algn="r"/>
@@ -12747,7 +12631,7 @@
                       </a:r>
                     </a:p>
                   </a:txBody>
-                  <a:tcPr marR="73152" marT="18288" marB="18288">
+                  <a:tcPr marL="91440" marR="73152" marT="18288" marB="18288">
                     <a:solidFill>
                       <a:srgbClr val="F4F6FA"/>
                     </a:solidFill>
@@ -12755,7 +12639,7 @@
                 </a:tc>
                 <a:tc>
                   <a:txBody>
-                    <a:bodyPr/>
+                    <a:bodyPr wrap="square"/>
                     <a:lstStyle/>
                     <a:p>
                       <a:pPr algn="r"/>
@@ -12770,7 +12654,7 @@
                       </a:r>
                     </a:p>
                   </a:txBody>
-                  <a:tcPr marR="73152" marT="18288" marB="18288">
+                  <a:tcPr marL="91440" marR="73152" marT="18288" marB="18288">
                     <a:solidFill>
                       <a:srgbClr val="F4F6FA"/>
                     </a:solidFill>
@@ -12778,7 +12662,7 @@
                 </a:tc>
                 <a:tc>
                   <a:txBody>
-                    <a:bodyPr/>
+                    <a:bodyPr wrap="square"/>
                     <a:lstStyle/>
                     <a:p>
                       <a:pPr algn="r"/>
@@ -12793,7 +12677,7 @@
                       </a:r>
                     </a:p>
                   </a:txBody>
-                  <a:tcPr marR="73152" marT="18288" marB="18288">
+                  <a:tcPr marL="91440" marR="73152" marT="18288" marB="18288">
                     <a:solidFill>
                       <a:srgbClr val="F4F6FA"/>
                     </a:solidFill>
@@ -12801,7 +12685,7 @@
                 </a:tc>
                 <a:tc>
                   <a:txBody>
-                    <a:bodyPr/>
+                    <a:bodyPr wrap="square"/>
                     <a:lstStyle/>
                     <a:p>
                       <a:pPr algn="r"/>
@@ -12816,22 +12700,17 @@
                       </a:r>
                     </a:p>
                   </a:txBody>
-                  <a:tcPr marR="73152" marT="18288" marB="18288">
+                  <a:tcPr marL="91440" marR="73152" marT="18288" marB="18288">
                     <a:solidFill>
                       <a:srgbClr val="F4F6FA"/>
                     </a:solidFill>
                   </a:tcPr>
                 </a:tc>
-                <a:extLst>
-                  <a:ext uri="{0D108BD9-81ED-4DB2-BD59-A6C34878D82A}">
-                    <a16:rowId xmlns:a16="http://schemas.microsoft.com/office/drawing/2014/main" val="10004"/>
-                  </a:ext>
-                </a:extLst>
               </a:tr>
               <a:tr h="329184">
                 <a:tc>
                   <a:txBody>
-                    <a:bodyPr/>
+                    <a:bodyPr wrap="square"/>
                     <a:lstStyle/>
                     <a:p>
                       <a:pPr algn="l"/>
@@ -12846,7 +12725,7 @@
                       </a:r>
                     </a:p>
                   </a:txBody>
-                  <a:tcPr marR="73152" marT="18288" marB="18288">
+                  <a:tcPr marL="91440" marR="73152" marT="18288" marB="18288">
                     <a:solidFill>
                       <a:srgbClr val="FFFFFF"/>
                     </a:solidFill>
@@ -12854,7 +12733,7 @@
                 </a:tc>
                 <a:tc>
                   <a:txBody>
-                    <a:bodyPr/>
+                    <a:bodyPr wrap="square"/>
                     <a:lstStyle/>
                     <a:p>
                       <a:pPr algn="r"/>
@@ -12869,7 +12748,7 @@
                       </a:r>
                     </a:p>
                   </a:txBody>
-                  <a:tcPr marR="73152" marT="18288" marB="18288">
+                  <a:tcPr marL="91440" marR="73152" marT="18288" marB="18288">
                     <a:solidFill>
                       <a:srgbClr val="FFFFFF"/>
                     </a:solidFill>
@@ -12877,7 +12756,7 @@
                 </a:tc>
                 <a:tc>
                   <a:txBody>
-                    <a:bodyPr/>
+                    <a:bodyPr wrap="square"/>
                     <a:lstStyle/>
                     <a:p>
                       <a:pPr algn="r"/>
@@ -12892,7 +12771,7 @@
                       </a:r>
                     </a:p>
                   </a:txBody>
-                  <a:tcPr marR="73152" marT="18288" marB="18288">
+                  <a:tcPr marL="91440" marR="73152" marT="18288" marB="18288">
                     <a:solidFill>
                       <a:srgbClr val="FFFFFF"/>
                     </a:solidFill>
@@ -12900,7 +12779,7 @@
                 </a:tc>
                 <a:tc>
                   <a:txBody>
-                    <a:bodyPr/>
+                    <a:bodyPr wrap="square"/>
                     <a:lstStyle/>
                     <a:p>
                       <a:pPr algn="r"/>
@@ -12915,7 +12794,7 @@
                       </a:r>
                     </a:p>
                   </a:txBody>
-                  <a:tcPr marR="73152" marT="18288" marB="18288">
+                  <a:tcPr marL="91440" marR="73152" marT="18288" marB="18288">
                     <a:solidFill>
                       <a:srgbClr val="FFFFFF"/>
                     </a:solidFill>
@@ -12923,7 +12802,7 @@
                 </a:tc>
                 <a:tc>
                   <a:txBody>
-                    <a:bodyPr/>
+                    <a:bodyPr wrap="square"/>
                     <a:lstStyle/>
                     <a:p>
                       <a:pPr algn="r"/>
@@ -12938,7 +12817,7 @@
                       </a:r>
                     </a:p>
                   </a:txBody>
-                  <a:tcPr marR="73152" marT="18288" marB="18288">
+                  <a:tcPr marL="91440" marR="73152" marT="18288" marB="18288">
                     <a:solidFill>
                       <a:srgbClr val="FFFFFF"/>
                     </a:solidFill>
@@ -12946,7 +12825,7 @@
                 </a:tc>
                 <a:tc>
                   <a:txBody>
-                    <a:bodyPr/>
+                    <a:bodyPr wrap="square"/>
                     <a:lstStyle/>
                     <a:p>
                       <a:pPr algn="r"/>
@@ -12961,17 +12840,12 @@
                       </a:r>
                     </a:p>
                   </a:txBody>
-                  <a:tcPr marR="73152" marT="18288" marB="18288">
+                  <a:tcPr marL="91440" marR="73152" marT="18288" marB="18288">
                     <a:solidFill>
                       <a:srgbClr val="FFFFFF"/>
                     </a:solidFill>
                   </a:tcPr>
                 </a:tc>
-                <a:extLst>
-                  <a:ext uri="{0D108BD9-81ED-4DB2-BD59-A6C34878D82A}">
-                    <a16:rowId xmlns:a16="http://schemas.microsoft.com/office/drawing/2014/main" val="10005"/>
-                  </a:ext>
-                </a:extLst>
               </a:tr>
             </a:tbl>
           </a:graphicData>
@@ -13098,9 +12972,7 @@
         <p:txBody>
           <a:bodyPr rtlCol="0" anchor="ctr"/>
           <a:lstStyle/>
-          <a:p>
-            <a:endParaRPr/>
-          </a:p>
+          <a:p/>
         </p:txBody>
       </p:sp>
       <p:sp>
@@ -13151,7 +13023,7 @@
 </file>
 
 <file path=ppt/slides/slide21.xml><?xml version="1.0" encoding="utf-8"?>
-<p:sld xmlns:a="http://schemas.openxmlformats.org/drawingml/2006/main" xmlns:r="http://schemas.openxmlformats.org/officeDocument/2006/relationships" xmlns:p="http://schemas.openxmlformats.org/presentationml/2006/main">
+<p:sld xmlns:a="http://schemas.openxmlformats.org/drawingml/2006/main" xmlns:p="http://schemas.openxmlformats.org/presentationml/2006/main" xmlns:r="http://schemas.openxmlformats.org/officeDocument/2006/relationships">
   <p:cSld>
     <p:spTree>
       <p:nvGrpSpPr>
@@ -13159,14 +13031,7 @@
         <p:cNvGrpSpPr/>
         <p:nvPr/>
       </p:nvGrpSpPr>
-      <p:grpSpPr>
-        <a:xfrm>
-          <a:off x="0" y="0"/>
-          <a:ext cx="0" cy="0"/>
-          <a:chOff x="0" y="0"/>
-          <a:chExt cx="0" cy="0"/>
-        </a:xfrm>
-      </p:grpSpPr>
+      <p:grpSpPr/>
       <p:sp>
         <p:nvSpPr>
           <p:cNvPr id="2" name="TextBox 1"/>
@@ -13195,7 +13060,7 @@
               </a:lnSpc>
             </a:pPr>
             <a:r>
-              <a:rPr sz="2600" b="1" dirty="0">
+              <a:rPr sz="2600" b="1">
                 <a:solidFill>
                   <a:srgbClr val="1E2761"/>
                 </a:solidFill>
@@ -13214,7 +13079,7 @@
         </p:nvSpPr>
         <p:spPr>
           <a:xfrm>
-            <a:off x="655320" y="1179576"/>
+            <a:off x="640080" y="1033271"/>
             <a:ext cx="10881360" cy="384048"/>
           </a:xfrm>
           <a:prstGeom prst="rect">
@@ -13234,7 +13099,7 @@
               </a:lnSpc>
             </a:pPr>
             <a:r>
-              <a:rPr sz="1350" b="0" dirty="0">
+              <a:rPr sz="1350" b="0">
                 <a:solidFill>
                   <a:srgbClr val="5A6270"/>
                 </a:solidFill>
@@ -13264,53 +13129,17 @@
                 <a:tableStyleId>{5C22544A-7EE6-4342-B048-85BDC9FD1C3A}</a:tableStyleId>
               </a:tblPr>
               <a:tblGrid>
-                <a:gridCol w="1687032">
-                  <a:extLst>
-                    <a:ext uri="{9D8B030D-6E8A-4147-A177-3AD203B41FA5}">
-                      <a16:colId xmlns:a16="http://schemas.microsoft.com/office/drawing/2014/main" val="20000"/>
-                    </a:ext>
-                  </a:extLst>
-                </a:gridCol>
-                <a:gridCol w="1518329">
-                  <a:extLst>
-                    <a:ext uri="{9D8B030D-6E8A-4147-A177-3AD203B41FA5}">
-                      <a16:colId xmlns:a16="http://schemas.microsoft.com/office/drawing/2014/main" val="20001"/>
-                    </a:ext>
-                  </a:extLst>
-                </a:gridCol>
-                <a:gridCol w="1433977">
-                  <a:extLst>
-                    <a:ext uri="{9D8B030D-6E8A-4147-A177-3AD203B41FA5}">
-                      <a16:colId xmlns:a16="http://schemas.microsoft.com/office/drawing/2014/main" val="20002"/>
-                    </a:ext>
-                  </a:extLst>
-                </a:gridCol>
-                <a:gridCol w="2699252">
-                  <a:extLst>
-                    <a:ext uri="{9D8B030D-6E8A-4147-A177-3AD203B41FA5}">
-                      <a16:colId xmlns:a16="http://schemas.microsoft.com/office/drawing/2014/main" val="20003"/>
-                    </a:ext>
-                  </a:extLst>
-                </a:gridCol>
-                <a:gridCol w="1518329">
-                  <a:extLst>
-                    <a:ext uri="{9D8B030D-6E8A-4147-A177-3AD203B41FA5}">
-                      <a16:colId xmlns:a16="http://schemas.microsoft.com/office/drawing/2014/main" val="20004"/>
-                    </a:ext>
-                  </a:extLst>
-                </a:gridCol>
-                <a:gridCol w="2024439">
-                  <a:extLst>
-                    <a:ext uri="{9D8B030D-6E8A-4147-A177-3AD203B41FA5}">
-                      <a16:colId xmlns:a16="http://schemas.microsoft.com/office/drawing/2014/main" val="20005"/>
-                    </a:ext>
-                  </a:extLst>
-                </a:gridCol>
+                <a:gridCol w="1687032"/>
+                <a:gridCol w="1518329"/>
+                <a:gridCol w="1433977"/>
+                <a:gridCol w="2699252"/>
+                <a:gridCol w="1518329"/>
+                <a:gridCol w="2024439"/>
               </a:tblGrid>
               <a:tr h="384048">
                 <a:tc>
                   <a:txBody>
-                    <a:bodyPr/>
+                    <a:bodyPr wrap="square"/>
                     <a:lstStyle/>
                     <a:p>
                       <a:pPr algn="l"/>
@@ -13325,7 +13154,7 @@
                       </a:r>
                     </a:p>
                   </a:txBody>
-                  <a:tcPr marR="73152" marT="18288" marB="18288">
+                  <a:tcPr marL="91440" marR="73152" marT="18288" marB="18288">
                     <a:solidFill>
                       <a:srgbClr val="1E2761"/>
                     </a:solidFill>
@@ -13333,7 +13162,7 @@
                 </a:tc>
                 <a:tc>
                   <a:txBody>
-                    <a:bodyPr/>
+                    <a:bodyPr wrap="square"/>
                     <a:lstStyle/>
                     <a:p>
                       <a:pPr algn="r"/>
@@ -13348,7 +13177,7 @@
                       </a:r>
                     </a:p>
                   </a:txBody>
-                  <a:tcPr marR="73152" marT="18288" marB="18288">
+                  <a:tcPr marL="91440" marR="73152" marT="18288" marB="18288">
                     <a:solidFill>
                       <a:srgbClr val="1E2761"/>
                     </a:solidFill>
@@ -13356,7 +13185,7 @@
                 </a:tc>
                 <a:tc>
                   <a:txBody>
-                    <a:bodyPr/>
+                    <a:bodyPr wrap="square"/>
                     <a:lstStyle/>
                     <a:p>
                       <a:pPr algn="r"/>
@@ -13371,7 +13200,7 @@
                       </a:r>
                     </a:p>
                   </a:txBody>
-                  <a:tcPr marR="73152" marT="18288" marB="18288">
+                  <a:tcPr marL="91440" marR="73152" marT="18288" marB="18288">
                     <a:solidFill>
                       <a:srgbClr val="1E2761"/>
                     </a:solidFill>
@@ -13379,7 +13208,7 @@
                 </a:tc>
                 <a:tc>
                   <a:txBody>
-                    <a:bodyPr/>
+                    <a:bodyPr wrap="square"/>
                     <a:lstStyle/>
                     <a:p>
                       <a:pPr algn="r"/>
@@ -13394,7 +13223,7 @@
                       </a:r>
                     </a:p>
                   </a:txBody>
-                  <a:tcPr marR="73152" marT="18288" marB="18288">
+                  <a:tcPr marL="91440" marR="73152" marT="18288" marB="18288">
                     <a:solidFill>
                       <a:srgbClr val="1E2761"/>
                     </a:solidFill>
@@ -13402,7 +13231,7 @@
                 </a:tc>
                 <a:tc>
                   <a:txBody>
-                    <a:bodyPr/>
+                    <a:bodyPr wrap="square"/>
                     <a:lstStyle/>
                     <a:p>
                       <a:pPr algn="r"/>
@@ -13417,7 +13246,7 @@
                       </a:r>
                     </a:p>
                   </a:txBody>
-                  <a:tcPr marR="73152" marT="18288" marB="18288">
+                  <a:tcPr marL="91440" marR="73152" marT="18288" marB="18288">
                     <a:solidFill>
                       <a:srgbClr val="1E2761"/>
                     </a:solidFill>
@@ -13425,7 +13254,7 @@
                 </a:tc>
                 <a:tc>
                   <a:txBody>
-                    <a:bodyPr/>
+                    <a:bodyPr wrap="square"/>
                     <a:lstStyle/>
                     <a:p>
                       <a:pPr algn="r"/>
@@ -13440,22 +13269,17 @@
                       </a:r>
                     </a:p>
                   </a:txBody>
-                  <a:tcPr marR="73152" marT="18288" marB="18288">
+                  <a:tcPr marL="91440" marR="73152" marT="18288" marB="18288">
                     <a:solidFill>
                       <a:srgbClr val="1E2761"/>
                     </a:solidFill>
                   </a:tcPr>
                 </a:tc>
-                <a:extLst>
-                  <a:ext uri="{0D108BD9-81ED-4DB2-BD59-A6C34878D82A}">
-                    <a16:rowId xmlns:a16="http://schemas.microsoft.com/office/drawing/2014/main" val="10000"/>
-                  </a:ext>
-                </a:extLst>
               </a:tr>
               <a:tr h="301752">
                 <a:tc>
                   <a:txBody>
-                    <a:bodyPr/>
+                    <a:bodyPr wrap="square"/>
                     <a:lstStyle/>
                     <a:p>
                       <a:pPr algn="l"/>
@@ -13470,7 +13294,7 @@
                       </a:r>
                     </a:p>
                   </a:txBody>
-                  <a:tcPr marR="73152" marT="18288" marB="18288">
+                  <a:tcPr marL="91440" marR="73152" marT="18288" marB="18288">
                     <a:solidFill>
                       <a:srgbClr val="FFFFFF"/>
                     </a:solidFill>
@@ -13478,7 +13302,7 @@
                 </a:tc>
                 <a:tc>
                   <a:txBody>
-                    <a:bodyPr/>
+                    <a:bodyPr wrap="square"/>
                     <a:lstStyle/>
                     <a:p>
                       <a:pPr algn="r"/>
@@ -13493,7 +13317,7 @@
                       </a:r>
                     </a:p>
                   </a:txBody>
-                  <a:tcPr marR="73152" marT="18288" marB="18288">
+                  <a:tcPr marL="91440" marR="73152" marT="18288" marB="18288">
                     <a:solidFill>
                       <a:srgbClr val="FFFFFF"/>
                     </a:solidFill>
@@ -13501,7 +13325,7 @@
                 </a:tc>
                 <a:tc>
                   <a:txBody>
-                    <a:bodyPr/>
+                    <a:bodyPr wrap="square"/>
                     <a:lstStyle/>
                     <a:p>
                       <a:pPr algn="r"/>
@@ -13516,7 +13340,7 @@
                       </a:r>
                     </a:p>
                   </a:txBody>
-                  <a:tcPr marR="73152" marT="18288" marB="18288">
+                  <a:tcPr marL="91440" marR="73152" marT="18288" marB="18288">
                     <a:solidFill>
                       <a:srgbClr val="FFFFFF"/>
                     </a:solidFill>
@@ -13524,7 +13348,7 @@
                 </a:tc>
                 <a:tc>
                   <a:txBody>
-                    <a:bodyPr/>
+                    <a:bodyPr wrap="square"/>
                     <a:lstStyle/>
                     <a:p>
                       <a:pPr algn="r"/>
@@ -13539,7 +13363,7 @@
                       </a:r>
                     </a:p>
                   </a:txBody>
-                  <a:tcPr marR="73152" marT="18288" marB="18288">
+                  <a:tcPr marL="91440" marR="73152" marT="18288" marB="18288">
                     <a:solidFill>
                       <a:srgbClr val="FFFFFF"/>
                     </a:solidFill>
@@ -13547,7 +13371,7 @@
                 </a:tc>
                 <a:tc>
                   <a:txBody>
-                    <a:bodyPr/>
+                    <a:bodyPr wrap="square"/>
                     <a:lstStyle/>
                     <a:p>
                       <a:pPr algn="r"/>
@@ -13562,7 +13386,7 @@
                       </a:r>
                     </a:p>
                   </a:txBody>
-                  <a:tcPr marR="73152" marT="18288" marB="18288">
+                  <a:tcPr marL="91440" marR="73152" marT="18288" marB="18288">
                     <a:solidFill>
                       <a:srgbClr val="FFFFFF"/>
                     </a:solidFill>
@@ -13570,7 +13394,7 @@
                 </a:tc>
                 <a:tc>
                   <a:txBody>
-                    <a:bodyPr/>
+                    <a:bodyPr wrap="square"/>
                     <a:lstStyle/>
                     <a:p>
                       <a:pPr algn="r"/>
@@ -13585,22 +13409,17 @@
                       </a:r>
                     </a:p>
                   </a:txBody>
-                  <a:tcPr marR="73152" marT="18288" marB="18288">
+                  <a:tcPr marL="91440" marR="73152" marT="18288" marB="18288">
                     <a:solidFill>
                       <a:srgbClr val="FFFFFF"/>
                     </a:solidFill>
                   </a:tcPr>
                 </a:tc>
-                <a:extLst>
-                  <a:ext uri="{0D108BD9-81ED-4DB2-BD59-A6C34878D82A}">
-                    <a16:rowId xmlns:a16="http://schemas.microsoft.com/office/drawing/2014/main" val="10001"/>
-                  </a:ext>
-                </a:extLst>
               </a:tr>
               <a:tr h="301752">
                 <a:tc>
                   <a:txBody>
-                    <a:bodyPr/>
+                    <a:bodyPr wrap="square"/>
                     <a:lstStyle/>
                     <a:p>
                       <a:pPr algn="l"/>
@@ -13615,7 +13434,7 @@
                       </a:r>
                     </a:p>
                   </a:txBody>
-                  <a:tcPr marR="73152" marT="18288" marB="18288">
+                  <a:tcPr marL="91440" marR="73152" marT="18288" marB="18288">
                     <a:solidFill>
                       <a:srgbClr val="FDF3E2"/>
                     </a:solidFill>
@@ -13623,7 +13442,7 @@
                 </a:tc>
                 <a:tc>
                   <a:txBody>
-                    <a:bodyPr/>
+                    <a:bodyPr wrap="square"/>
                     <a:lstStyle/>
                     <a:p>
                       <a:pPr algn="r"/>
@@ -13638,7 +13457,7 @@
                       </a:r>
                     </a:p>
                   </a:txBody>
-                  <a:tcPr marR="73152" marT="18288" marB="18288">
+                  <a:tcPr marL="91440" marR="73152" marT="18288" marB="18288">
                     <a:solidFill>
                       <a:srgbClr val="FDF3E2"/>
                     </a:solidFill>
@@ -13646,7 +13465,7 @@
                 </a:tc>
                 <a:tc>
                   <a:txBody>
-                    <a:bodyPr/>
+                    <a:bodyPr wrap="square"/>
                     <a:lstStyle/>
                     <a:p>
                       <a:pPr algn="r"/>
@@ -13661,7 +13480,7 @@
                       </a:r>
                     </a:p>
                   </a:txBody>
-                  <a:tcPr marR="73152" marT="18288" marB="18288">
+                  <a:tcPr marL="91440" marR="73152" marT="18288" marB="18288">
                     <a:solidFill>
                       <a:srgbClr val="FDF3E2"/>
                     </a:solidFill>
@@ -13669,7 +13488,7 @@
                 </a:tc>
                 <a:tc>
                   <a:txBody>
-                    <a:bodyPr/>
+                    <a:bodyPr wrap="square"/>
                     <a:lstStyle/>
                     <a:p>
                       <a:pPr algn="r"/>
@@ -13684,7 +13503,7 @@
                       </a:r>
                     </a:p>
                   </a:txBody>
-                  <a:tcPr marR="73152" marT="18288" marB="18288">
+                  <a:tcPr marL="91440" marR="73152" marT="18288" marB="18288">
                     <a:solidFill>
                       <a:srgbClr val="FDF3E2"/>
                     </a:solidFill>
@@ -13692,7 +13511,7 @@
                 </a:tc>
                 <a:tc>
                   <a:txBody>
-                    <a:bodyPr/>
+                    <a:bodyPr wrap="square"/>
                     <a:lstStyle/>
                     <a:p>
                       <a:pPr algn="r"/>
@@ -13707,7 +13526,7 @@
                       </a:r>
                     </a:p>
                   </a:txBody>
-                  <a:tcPr marR="73152" marT="18288" marB="18288">
+                  <a:tcPr marL="91440" marR="73152" marT="18288" marB="18288">
                     <a:solidFill>
                       <a:srgbClr val="FDF3E2"/>
                     </a:solidFill>
@@ -13715,7 +13534,7 @@
                 </a:tc>
                 <a:tc>
                   <a:txBody>
-                    <a:bodyPr/>
+                    <a:bodyPr wrap="square"/>
                     <a:lstStyle/>
                     <a:p>
                       <a:pPr algn="r"/>
@@ -13730,22 +13549,17 @@
                       </a:r>
                     </a:p>
                   </a:txBody>
-                  <a:tcPr marR="73152" marT="18288" marB="18288">
+                  <a:tcPr marL="91440" marR="73152" marT="18288" marB="18288">
                     <a:solidFill>
                       <a:srgbClr val="FDF3E2"/>
                     </a:solidFill>
                   </a:tcPr>
                 </a:tc>
-                <a:extLst>
-                  <a:ext uri="{0D108BD9-81ED-4DB2-BD59-A6C34878D82A}">
-                    <a16:rowId xmlns:a16="http://schemas.microsoft.com/office/drawing/2014/main" val="10002"/>
-                  </a:ext>
-                </a:extLst>
               </a:tr>
               <a:tr h="301752">
                 <a:tc>
                   <a:txBody>
-                    <a:bodyPr/>
+                    <a:bodyPr wrap="square"/>
                     <a:lstStyle/>
                     <a:p>
                       <a:pPr algn="l"/>
@@ -13760,7 +13574,7 @@
                       </a:r>
                     </a:p>
                   </a:txBody>
-                  <a:tcPr marR="73152" marT="18288" marB="18288">
+                  <a:tcPr marL="91440" marR="73152" marT="18288" marB="18288">
                     <a:solidFill>
                       <a:srgbClr val="FFFFFF"/>
                     </a:solidFill>
@@ -13768,7 +13582,7 @@
                 </a:tc>
                 <a:tc>
                   <a:txBody>
-                    <a:bodyPr/>
+                    <a:bodyPr wrap="square"/>
                     <a:lstStyle/>
                     <a:p>
                       <a:pPr algn="r"/>
@@ -13783,7 +13597,7 @@
                       </a:r>
                     </a:p>
                   </a:txBody>
-                  <a:tcPr marR="73152" marT="18288" marB="18288">
+                  <a:tcPr marL="91440" marR="73152" marT="18288" marB="18288">
                     <a:solidFill>
                       <a:srgbClr val="FFFFFF"/>
                     </a:solidFill>
@@ -13791,7 +13605,7 @@
                 </a:tc>
                 <a:tc>
                   <a:txBody>
-                    <a:bodyPr/>
+                    <a:bodyPr wrap="square"/>
                     <a:lstStyle/>
                     <a:p>
                       <a:pPr algn="r"/>
@@ -13806,7 +13620,7 @@
                       </a:r>
                     </a:p>
                   </a:txBody>
-                  <a:tcPr marR="73152" marT="18288" marB="18288">
+                  <a:tcPr marL="91440" marR="73152" marT="18288" marB="18288">
                     <a:solidFill>
                       <a:srgbClr val="FFFFFF"/>
                     </a:solidFill>
@@ -13814,7 +13628,7 @@
                 </a:tc>
                 <a:tc>
                   <a:txBody>
-                    <a:bodyPr/>
+                    <a:bodyPr wrap="square"/>
                     <a:lstStyle/>
                     <a:p>
                       <a:pPr algn="r"/>
@@ -13829,7 +13643,7 @@
                       </a:r>
                     </a:p>
                   </a:txBody>
-                  <a:tcPr marR="73152" marT="18288" marB="18288">
+                  <a:tcPr marL="91440" marR="73152" marT="18288" marB="18288">
                     <a:solidFill>
                       <a:srgbClr val="FFFFFF"/>
                     </a:solidFill>
@@ -13837,7 +13651,7 @@
                 </a:tc>
                 <a:tc>
                   <a:txBody>
-                    <a:bodyPr/>
+                    <a:bodyPr wrap="square"/>
                     <a:lstStyle/>
                     <a:p>
                       <a:pPr algn="r"/>
@@ -13852,7 +13666,7 @@
                       </a:r>
                     </a:p>
                   </a:txBody>
-                  <a:tcPr marR="73152" marT="18288" marB="18288">
+                  <a:tcPr marL="91440" marR="73152" marT="18288" marB="18288">
                     <a:solidFill>
                       <a:srgbClr val="FFFFFF"/>
                     </a:solidFill>
@@ -13860,7 +13674,7 @@
                 </a:tc>
                 <a:tc>
                   <a:txBody>
-                    <a:bodyPr/>
+                    <a:bodyPr wrap="square"/>
                     <a:lstStyle/>
                     <a:p>
                       <a:pPr algn="r"/>
@@ -13875,22 +13689,17 @@
                       </a:r>
                     </a:p>
                   </a:txBody>
-                  <a:tcPr marR="73152" marT="18288" marB="18288">
+                  <a:tcPr marL="91440" marR="73152" marT="18288" marB="18288">
                     <a:solidFill>
                       <a:srgbClr val="FFFFFF"/>
                     </a:solidFill>
                   </a:tcPr>
                 </a:tc>
-                <a:extLst>
-                  <a:ext uri="{0D108BD9-81ED-4DB2-BD59-A6C34878D82A}">
-                    <a16:rowId xmlns:a16="http://schemas.microsoft.com/office/drawing/2014/main" val="10003"/>
-                  </a:ext>
-                </a:extLst>
               </a:tr>
               <a:tr h="301752">
                 <a:tc>
                   <a:txBody>
-                    <a:bodyPr/>
+                    <a:bodyPr wrap="square"/>
                     <a:lstStyle/>
                     <a:p>
                       <a:pPr algn="l"/>
@@ -13905,7 +13714,7 @@
                       </a:r>
                     </a:p>
                   </a:txBody>
-                  <a:tcPr marR="73152" marT="18288" marB="18288">
+                  <a:tcPr marL="91440" marR="73152" marT="18288" marB="18288">
                     <a:solidFill>
                       <a:srgbClr val="F4F6FA"/>
                     </a:solidFill>
@@ -13913,7 +13722,7 @@
                 </a:tc>
                 <a:tc>
                   <a:txBody>
-                    <a:bodyPr/>
+                    <a:bodyPr wrap="square"/>
                     <a:lstStyle/>
                     <a:p>
                       <a:pPr algn="r"/>
@@ -13928,7 +13737,7 @@
                       </a:r>
                     </a:p>
                   </a:txBody>
-                  <a:tcPr marR="73152" marT="18288" marB="18288">
+                  <a:tcPr marL="91440" marR="73152" marT="18288" marB="18288">
                     <a:solidFill>
                       <a:srgbClr val="F4F6FA"/>
                     </a:solidFill>
@@ -13936,7 +13745,7 @@
                 </a:tc>
                 <a:tc>
                   <a:txBody>
-                    <a:bodyPr/>
+                    <a:bodyPr wrap="square"/>
                     <a:lstStyle/>
                     <a:p>
                       <a:pPr algn="r"/>
@@ -13951,7 +13760,7 @@
                       </a:r>
                     </a:p>
                   </a:txBody>
-                  <a:tcPr marR="73152" marT="18288" marB="18288">
+                  <a:tcPr marL="91440" marR="73152" marT="18288" marB="18288">
                     <a:solidFill>
                       <a:srgbClr val="F4F6FA"/>
                     </a:solidFill>
@@ -13959,7 +13768,7 @@
                 </a:tc>
                 <a:tc>
                   <a:txBody>
-                    <a:bodyPr/>
+                    <a:bodyPr wrap="square"/>
                     <a:lstStyle/>
                     <a:p>
                       <a:pPr algn="r"/>
@@ -13974,7 +13783,7 @@
                       </a:r>
                     </a:p>
                   </a:txBody>
-                  <a:tcPr marR="73152" marT="18288" marB="18288">
+                  <a:tcPr marL="91440" marR="73152" marT="18288" marB="18288">
                     <a:solidFill>
                       <a:srgbClr val="F4F6FA"/>
                     </a:solidFill>
@@ -13982,7 +13791,7 @@
                 </a:tc>
                 <a:tc>
                   <a:txBody>
-                    <a:bodyPr/>
+                    <a:bodyPr wrap="square"/>
                     <a:lstStyle/>
                     <a:p>
                       <a:pPr algn="r"/>
@@ -13997,7 +13806,7 @@
                       </a:r>
                     </a:p>
                   </a:txBody>
-                  <a:tcPr marR="73152" marT="18288" marB="18288">
+                  <a:tcPr marL="91440" marR="73152" marT="18288" marB="18288">
                     <a:solidFill>
                       <a:srgbClr val="F4F6FA"/>
                     </a:solidFill>
@@ -14005,7 +13814,7 @@
                 </a:tc>
                 <a:tc>
                   <a:txBody>
-                    <a:bodyPr/>
+                    <a:bodyPr wrap="square"/>
                     <a:lstStyle/>
                     <a:p>
                       <a:pPr algn="r"/>
@@ -14020,22 +13829,17 @@
                       </a:r>
                     </a:p>
                   </a:txBody>
-                  <a:tcPr marR="73152" marT="18288" marB="18288">
+                  <a:tcPr marL="91440" marR="73152" marT="18288" marB="18288">
                     <a:solidFill>
                       <a:srgbClr val="F4F6FA"/>
                     </a:solidFill>
                   </a:tcPr>
                 </a:tc>
-                <a:extLst>
-                  <a:ext uri="{0D108BD9-81ED-4DB2-BD59-A6C34878D82A}">
-                    <a16:rowId xmlns:a16="http://schemas.microsoft.com/office/drawing/2014/main" val="10004"/>
-                  </a:ext>
-                </a:extLst>
               </a:tr>
               <a:tr h="301752">
                 <a:tc>
                   <a:txBody>
-                    <a:bodyPr/>
+                    <a:bodyPr wrap="square"/>
                     <a:lstStyle/>
                     <a:p>
                       <a:pPr algn="l"/>
@@ -14050,7 +13854,7 @@
                       </a:r>
                     </a:p>
                   </a:txBody>
-                  <a:tcPr marR="73152" marT="18288" marB="18288">
+                  <a:tcPr marL="91440" marR="73152" marT="18288" marB="18288">
                     <a:solidFill>
                       <a:srgbClr val="FFFFFF"/>
                     </a:solidFill>
@@ -14058,7 +13862,7 @@
                 </a:tc>
                 <a:tc>
                   <a:txBody>
-                    <a:bodyPr/>
+                    <a:bodyPr wrap="square"/>
                     <a:lstStyle/>
                     <a:p>
                       <a:pPr algn="r"/>
@@ -14073,7 +13877,7 @@
                       </a:r>
                     </a:p>
                   </a:txBody>
-                  <a:tcPr marR="73152" marT="18288" marB="18288">
+                  <a:tcPr marL="91440" marR="73152" marT="18288" marB="18288">
                     <a:solidFill>
                       <a:srgbClr val="FFFFFF"/>
                     </a:solidFill>
@@ -14081,7 +13885,7 @@
                 </a:tc>
                 <a:tc>
                   <a:txBody>
-                    <a:bodyPr/>
+                    <a:bodyPr wrap="square"/>
                     <a:lstStyle/>
                     <a:p>
                       <a:pPr algn="r"/>
@@ -14096,7 +13900,7 @@
                       </a:r>
                     </a:p>
                   </a:txBody>
-                  <a:tcPr marR="73152" marT="18288" marB="18288">
+                  <a:tcPr marL="91440" marR="73152" marT="18288" marB="18288">
                     <a:solidFill>
                       <a:srgbClr val="FFFFFF"/>
                     </a:solidFill>
@@ -14104,7 +13908,7 @@
                 </a:tc>
                 <a:tc>
                   <a:txBody>
-                    <a:bodyPr/>
+                    <a:bodyPr wrap="square"/>
                     <a:lstStyle/>
                     <a:p>
                       <a:pPr algn="r"/>
@@ -14119,7 +13923,7 @@
                       </a:r>
                     </a:p>
                   </a:txBody>
-                  <a:tcPr marR="73152" marT="18288" marB="18288">
+                  <a:tcPr marL="91440" marR="73152" marT="18288" marB="18288">
                     <a:solidFill>
                       <a:srgbClr val="FFFFFF"/>
                     </a:solidFill>
@@ -14127,7 +13931,7 @@
                 </a:tc>
                 <a:tc>
                   <a:txBody>
-                    <a:bodyPr/>
+                    <a:bodyPr wrap="square"/>
                     <a:lstStyle/>
                     <a:p>
                       <a:pPr algn="r"/>
@@ -14142,7 +13946,7 @@
                       </a:r>
                     </a:p>
                   </a:txBody>
-                  <a:tcPr marR="73152" marT="18288" marB="18288">
+                  <a:tcPr marL="91440" marR="73152" marT="18288" marB="18288">
                     <a:solidFill>
                       <a:srgbClr val="FFFFFF"/>
                     </a:solidFill>
@@ -14150,7 +13954,7 @@
                 </a:tc>
                 <a:tc>
                   <a:txBody>
-                    <a:bodyPr/>
+                    <a:bodyPr wrap="square"/>
                     <a:lstStyle/>
                     <a:p>
                       <a:pPr algn="r"/>
@@ -14165,22 +13969,17 @@
                       </a:r>
                     </a:p>
                   </a:txBody>
-                  <a:tcPr marR="73152" marT="18288" marB="18288">
+                  <a:tcPr marL="91440" marR="73152" marT="18288" marB="18288">
                     <a:solidFill>
                       <a:srgbClr val="FFFFFF"/>
                     </a:solidFill>
                   </a:tcPr>
                 </a:tc>
-                <a:extLst>
-                  <a:ext uri="{0D108BD9-81ED-4DB2-BD59-A6C34878D82A}">
-                    <a16:rowId xmlns:a16="http://schemas.microsoft.com/office/drawing/2014/main" val="10005"/>
-                  </a:ext>
-                </a:extLst>
               </a:tr>
               <a:tr h="301752">
                 <a:tc>
                   <a:txBody>
-                    <a:bodyPr/>
+                    <a:bodyPr wrap="square"/>
                     <a:lstStyle/>
                     <a:p>
                       <a:pPr algn="l"/>
@@ -14195,7 +13994,7 @@
                       </a:r>
                     </a:p>
                   </a:txBody>
-                  <a:tcPr marR="73152" marT="18288" marB="18288">
+                  <a:tcPr marL="91440" marR="73152" marT="18288" marB="18288">
                     <a:solidFill>
                       <a:srgbClr val="F4F6FA"/>
                     </a:solidFill>
@@ -14203,7 +14002,7 @@
                 </a:tc>
                 <a:tc>
                   <a:txBody>
-                    <a:bodyPr/>
+                    <a:bodyPr wrap="square"/>
                     <a:lstStyle/>
                     <a:p>
                       <a:pPr algn="r"/>
@@ -14218,7 +14017,7 @@
                       </a:r>
                     </a:p>
                   </a:txBody>
-                  <a:tcPr marR="73152" marT="18288" marB="18288">
+                  <a:tcPr marL="91440" marR="73152" marT="18288" marB="18288">
                     <a:solidFill>
                       <a:srgbClr val="F4F6FA"/>
                     </a:solidFill>
@@ -14226,7 +14025,7 @@
                 </a:tc>
                 <a:tc>
                   <a:txBody>
-                    <a:bodyPr/>
+                    <a:bodyPr wrap="square"/>
                     <a:lstStyle/>
                     <a:p>
                       <a:pPr algn="r"/>
@@ -14241,7 +14040,7 @@
                       </a:r>
                     </a:p>
                   </a:txBody>
-                  <a:tcPr marR="73152" marT="18288" marB="18288">
+                  <a:tcPr marL="91440" marR="73152" marT="18288" marB="18288">
                     <a:solidFill>
                       <a:srgbClr val="F4F6FA"/>
                     </a:solidFill>
@@ -14249,7 +14048,7 @@
                 </a:tc>
                 <a:tc>
                   <a:txBody>
-                    <a:bodyPr/>
+                    <a:bodyPr wrap="square"/>
                     <a:lstStyle/>
                     <a:p>
                       <a:pPr algn="r"/>
@@ -14264,7 +14063,7 @@
                       </a:r>
                     </a:p>
                   </a:txBody>
-                  <a:tcPr marR="73152" marT="18288" marB="18288">
+                  <a:tcPr marL="91440" marR="73152" marT="18288" marB="18288">
                     <a:solidFill>
                       <a:srgbClr val="F4F6FA"/>
                     </a:solidFill>
@@ -14272,7 +14071,7 @@
                 </a:tc>
                 <a:tc>
                   <a:txBody>
-                    <a:bodyPr/>
+                    <a:bodyPr wrap="square"/>
                     <a:lstStyle/>
                     <a:p>
                       <a:pPr algn="r"/>
@@ -14287,7 +14086,7 @@
                       </a:r>
                     </a:p>
                   </a:txBody>
-                  <a:tcPr marR="73152" marT="18288" marB="18288">
+                  <a:tcPr marL="91440" marR="73152" marT="18288" marB="18288">
                     <a:solidFill>
                       <a:srgbClr val="F4F6FA"/>
                     </a:solidFill>
@@ -14295,7 +14094,7 @@
                 </a:tc>
                 <a:tc>
                   <a:txBody>
-                    <a:bodyPr/>
+                    <a:bodyPr wrap="square"/>
                     <a:lstStyle/>
                     <a:p>
                       <a:pPr algn="r"/>
@@ -14310,22 +14109,17 @@
                       </a:r>
                     </a:p>
                   </a:txBody>
-                  <a:tcPr marR="73152" marT="18288" marB="18288">
+                  <a:tcPr marL="91440" marR="73152" marT="18288" marB="18288">
                     <a:solidFill>
                       <a:srgbClr val="F4F6FA"/>
                     </a:solidFill>
                   </a:tcPr>
                 </a:tc>
-                <a:extLst>
-                  <a:ext uri="{0D108BD9-81ED-4DB2-BD59-A6C34878D82A}">
-                    <a16:rowId xmlns:a16="http://schemas.microsoft.com/office/drawing/2014/main" val="10006"/>
-                  </a:ext>
-                </a:extLst>
               </a:tr>
               <a:tr h="301752">
                 <a:tc>
                   <a:txBody>
-                    <a:bodyPr/>
+                    <a:bodyPr wrap="square"/>
                     <a:lstStyle/>
                     <a:p>
                       <a:pPr algn="l"/>
@@ -14340,7 +14134,7 @@
                       </a:r>
                     </a:p>
                   </a:txBody>
-                  <a:tcPr marR="73152" marT="18288" marB="18288">
+                  <a:tcPr marL="91440" marR="73152" marT="18288" marB="18288">
                     <a:solidFill>
                       <a:srgbClr val="FFFFFF"/>
                     </a:solidFill>
@@ -14348,7 +14142,7 @@
                 </a:tc>
                 <a:tc>
                   <a:txBody>
-                    <a:bodyPr/>
+                    <a:bodyPr wrap="square"/>
                     <a:lstStyle/>
                     <a:p>
                       <a:pPr algn="r"/>
@@ -14363,7 +14157,7 @@
                       </a:r>
                     </a:p>
                   </a:txBody>
-                  <a:tcPr marR="73152" marT="18288" marB="18288">
+                  <a:tcPr marL="91440" marR="73152" marT="18288" marB="18288">
                     <a:solidFill>
                       <a:srgbClr val="FFFFFF"/>
                     </a:solidFill>
@@ -14371,7 +14165,7 @@
                 </a:tc>
                 <a:tc>
                   <a:txBody>
-                    <a:bodyPr/>
+                    <a:bodyPr wrap="square"/>
                     <a:lstStyle/>
                     <a:p>
                       <a:pPr algn="r"/>
@@ -14386,7 +14180,7 @@
                       </a:r>
                     </a:p>
                   </a:txBody>
-                  <a:tcPr marR="73152" marT="18288" marB="18288">
+                  <a:tcPr marL="91440" marR="73152" marT="18288" marB="18288">
                     <a:solidFill>
                       <a:srgbClr val="FFFFFF"/>
                     </a:solidFill>
@@ -14394,7 +14188,7 @@
                 </a:tc>
                 <a:tc>
                   <a:txBody>
-                    <a:bodyPr/>
+                    <a:bodyPr wrap="square"/>
                     <a:lstStyle/>
                     <a:p>
                       <a:pPr algn="r"/>
@@ -14409,7 +14203,7 @@
                       </a:r>
                     </a:p>
                   </a:txBody>
-                  <a:tcPr marR="73152" marT="18288" marB="18288">
+                  <a:tcPr marL="91440" marR="73152" marT="18288" marB="18288">
                     <a:solidFill>
                       <a:srgbClr val="FFFFFF"/>
                     </a:solidFill>
@@ -14417,7 +14211,7 @@
                 </a:tc>
                 <a:tc>
                   <a:txBody>
-                    <a:bodyPr/>
+                    <a:bodyPr wrap="square"/>
                     <a:lstStyle/>
                     <a:p>
                       <a:pPr algn="r"/>
@@ -14432,7 +14226,7 @@
                       </a:r>
                     </a:p>
                   </a:txBody>
-                  <a:tcPr marR="73152" marT="18288" marB="18288">
+                  <a:tcPr marL="91440" marR="73152" marT="18288" marB="18288">
                     <a:solidFill>
                       <a:srgbClr val="FFFFFF"/>
                     </a:solidFill>
@@ -14440,7 +14234,7 @@
                 </a:tc>
                 <a:tc>
                   <a:txBody>
-                    <a:bodyPr/>
+                    <a:bodyPr wrap="square"/>
                     <a:lstStyle/>
                     <a:p>
                       <a:pPr algn="r"/>
@@ -14455,17 +14249,12 @@
                       </a:r>
                     </a:p>
                   </a:txBody>
-                  <a:tcPr marR="73152" marT="18288" marB="18288">
+                  <a:tcPr marL="91440" marR="73152" marT="18288" marB="18288">
                     <a:solidFill>
                       <a:srgbClr val="FFFFFF"/>
                     </a:solidFill>
                   </a:tcPr>
                 </a:tc>
-                <a:extLst>
-                  <a:ext uri="{0D108BD9-81ED-4DB2-BD59-A6C34878D82A}">
-                    <a16:rowId xmlns:a16="http://schemas.microsoft.com/office/drawing/2014/main" val="10007"/>
-                  </a:ext>
-                </a:extLst>
               </a:tr>
             </a:tbl>
           </a:graphicData>
@@ -14592,9 +14381,7 @@
         <p:txBody>
           <a:bodyPr rtlCol="0" anchor="ctr"/>
           <a:lstStyle/>
-          <a:p>
-            <a:endParaRPr/>
-          </a:p>
+          <a:p/>
         </p:txBody>
       </p:sp>
       <p:sp>
@@ -14645,7 +14432,7 @@
 </file>
 
 <file path=ppt/slides/slide22.xml><?xml version="1.0" encoding="utf-8"?>
-<p:sld xmlns:a="http://schemas.openxmlformats.org/drawingml/2006/main" xmlns:r="http://schemas.openxmlformats.org/officeDocument/2006/relationships" xmlns:p="http://schemas.openxmlformats.org/presentationml/2006/main">
+<p:sld xmlns:a="http://schemas.openxmlformats.org/drawingml/2006/main" xmlns:p="http://schemas.openxmlformats.org/presentationml/2006/main" xmlns:r="http://schemas.openxmlformats.org/officeDocument/2006/relationships">
   <p:cSld>
     <p:spTree>
       <p:nvGrpSpPr>
@@ -14653,14 +14440,7 @@
         <p:cNvGrpSpPr/>
         <p:nvPr/>
       </p:nvGrpSpPr>
-      <p:grpSpPr>
-        <a:xfrm>
-          <a:off x="0" y="0"/>
-          <a:ext cx="0" cy="0"/>
-          <a:chOff x="0" y="0"/>
-          <a:chExt cx="0" cy="0"/>
-        </a:xfrm>
-      </p:grpSpPr>
+      <p:grpSpPr/>
       <p:sp>
         <p:nvSpPr>
           <p:cNvPr id="2" name="TextBox 1"/>
@@ -14782,9 +14562,7 @@
         <p:txBody>
           <a:bodyPr rtlCol="0" anchor="ctr"/>
           <a:lstStyle/>
-          <a:p>
-            <a:endParaRPr/>
-          </a:p>
+          <a:p/>
         </p:txBody>
       </p:sp>
       <p:sp>
@@ -14869,12 +14647,15 @@
                 <a:spcPct val="108000"/>
               </a:lnSpc>
             </a:pPr>
-            <a:endParaRPr sz="1250" b="0">
-              <a:solidFill>
-                <a:srgbClr val="1B1B1F"/>
-              </a:solidFill>
-              <a:latin typeface="Calibri"/>
-            </a:endParaRPr>
+            <a:r>
+              <a:rPr sz="1250" b="0">
+                <a:solidFill>
+                  <a:srgbClr val="1B1B1F"/>
+                </a:solidFill>
+                <a:latin typeface="Calibri"/>
+              </a:rPr>
+              <a:t/>
+            </a:r>
           </a:p>
           <a:p>
             <a:pPr algn="l">
@@ -14946,12 +14727,15 @@
                 <a:spcPct val="108000"/>
               </a:lnSpc>
             </a:pPr>
-            <a:endParaRPr sz="1250" b="0">
-              <a:solidFill>
-                <a:srgbClr val="1B1B1F"/>
-              </a:solidFill>
-              <a:latin typeface="Calibri"/>
-            </a:endParaRPr>
+            <a:r>
+              <a:rPr sz="1250" b="0">
+                <a:solidFill>
+                  <a:srgbClr val="1B1B1F"/>
+                </a:solidFill>
+                <a:latin typeface="Calibri"/>
+              </a:rPr>
+              <a:t/>
+            </a:r>
           </a:p>
           <a:p>
             <a:pPr algn="l">
@@ -15014,9 +14798,7 @@
         <p:txBody>
           <a:bodyPr rtlCol="0" anchor="ctr"/>
           <a:lstStyle/>
-          <a:p>
-            <a:endParaRPr/>
-          </a:p>
+          <a:p/>
         </p:txBody>
       </p:sp>
       <p:sp>
@@ -15101,12 +14883,15 @@
                 <a:spcPct val="105000"/>
               </a:lnSpc>
             </a:pPr>
-            <a:endParaRPr sz="1150" b="0">
-              <a:solidFill>
-                <a:srgbClr val="1B1B1F"/>
-              </a:solidFill>
-              <a:latin typeface="Calibri"/>
-            </a:endParaRPr>
+            <a:r>
+              <a:rPr sz="1150" b="0">
+                <a:solidFill>
+                  <a:srgbClr val="1B1B1F"/>
+                </a:solidFill>
+                <a:latin typeface="Calibri"/>
+              </a:rPr>
+              <a:t/>
+            </a:r>
           </a:p>
           <a:p>
             <a:pPr algn="l">
@@ -15210,12 +14995,15 @@
                 <a:spcPct val="105000"/>
               </a:lnSpc>
             </a:pPr>
-            <a:endParaRPr sz="1150" b="0">
-              <a:solidFill>
-                <a:srgbClr val="1B1B1F"/>
-              </a:solidFill>
-              <a:latin typeface="Calibri"/>
-            </a:endParaRPr>
+            <a:r>
+              <a:rPr sz="1150" b="0">
+                <a:solidFill>
+                  <a:srgbClr val="1B1B1F"/>
+                </a:solidFill>
+                <a:latin typeface="Calibri"/>
+              </a:rPr>
+              <a:t/>
+            </a:r>
           </a:p>
           <a:p>
             <a:pPr algn="l">
@@ -15278,9 +15066,7 @@
         <p:txBody>
           <a:bodyPr rtlCol="0" anchor="ctr"/>
           <a:lstStyle/>
-          <a:p>
-            <a:endParaRPr/>
-          </a:p>
+          <a:p/>
         </p:txBody>
       </p:sp>
       <p:sp>
@@ -15365,12 +15151,15 @@
                 <a:spcPct val="108000"/>
               </a:lnSpc>
             </a:pPr>
-            <a:endParaRPr sz="1250" b="0">
-              <a:solidFill>
-                <a:srgbClr val="1B1B1F"/>
-              </a:solidFill>
-              <a:latin typeface="Calibri"/>
-            </a:endParaRPr>
+            <a:r>
+              <a:rPr sz="1250" b="0">
+                <a:solidFill>
+                  <a:srgbClr val="1B1B1F"/>
+                </a:solidFill>
+                <a:latin typeface="Calibri"/>
+              </a:rPr>
+              <a:t/>
+            </a:r>
           </a:p>
           <a:p>
             <a:pPr algn="l">
@@ -15394,12 +15183,15 @@
                 <a:spcPct val="108000"/>
               </a:lnSpc>
             </a:pPr>
-            <a:endParaRPr sz="1250" b="0">
-              <a:solidFill>
-                <a:srgbClr val="1B1B1F"/>
-              </a:solidFill>
-              <a:latin typeface="Calibri"/>
-            </a:endParaRPr>
+            <a:r>
+              <a:rPr sz="1250" b="0">
+                <a:solidFill>
+                  <a:srgbClr val="1B1B1F"/>
+                </a:solidFill>
+                <a:latin typeface="Calibri"/>
+              </a:rPr>
+              <a:t/>
+            </a:r>
           </a:p>
           <a:p>
             <a:pPr algn="l">
@@ -15439,12 +15231,15 @@
                 <a:spcPct val="108000"/>
               </a:lnSpc>
             </a:pPr>
-            <a:endParaRPr sz="1250" b="0">
-              <a:solidFill>
-                <a:srgbClr val="1B1B1F"/>
-              </a:solidFill>
-              <a:latin typeface="Calibri"/>
-            </a:endParaRPr>
+            <a:r>
+              <a:rPr sz="1250" b="0">
+                <a:solidFill>
+                  <a:srgbClr val="1B1B1F"/>
+                </a:solidFill>
+                <a:latin typeface="Calibri"/>
+              </a:rPr>
+              <a:t/>
+            </a:r>
           </a:p>
           <a:p>
             <a:pPr algn="l">
@@ -15507,9 +15302,7 @@
         <p:txBody>
           <a:bodyPr rtlCol="0" anchor="ctr"/>
           <a:lstStyle/>
-          <a:p>
-            <a:endParaRPr/>
-          </a:p>
+          <a:p/>
         </p:txBody>
       </p:sp>
       <p:sp>

--- a/bias_mitigation_plan.pptx
+++ b/bias_mitigation_plan.pptx
@@ -8790,7 +8790,7 @@
                 </a:solidFill>
                 <a:latin typeface="Calibri"/>
               </a:rPr>
-              <a:t>Not in the plan. A gap can close by lifting one group or lowering the other. The metric is identical either way.</a:t>
+              <a:t>Not in the plan. A gap can close by lifting one group or lowering the other — the metric is identical either way. That is Ferry et al.'s (2023) starting point; the measurement is ours.</a:t>
             </a:r>
           </a:p>
         </p:txBody>
@@ -10261,7 +10261,7 @@
                 </a:solidFill>
                 <a:latin typeface="Calibri"/>
               </a:rPr>
-              <a:t>Every method so far constrains one binary attribute. That is the field's default, and it has a blind spot.</a:t>
+              <a:t>Every method so far constrains one binary attribute. That is the field's default, and it has a named blind spot (Kearns et al. 2018) that overall performance figures do not show (Maheshwari et al. 2023).</a:t>
             </a:r>
           </a:p>
         </p:txBody>
